--- a/MediBook API Presentation.pptx
+++ b/MediBook API Presentation.pptx
@@ -1199,6 +1199,1489 @@
           </a:bodyPr>
           <a:lstStyle/>
           <a:p>
+            <a:r>
+              <a:rPr lang="en-ID" sz="1100" b="0" i="0" u="none" strike="noStrike" cap="none" dirty="0" err="1">
+                <a:solidFill>
+                  <a:srgbClr val="000000"/>
+                </a:solidFill>
+                <a:effectLst/>
+                <a:latin typeface="Arial"/>
+                <a:ea typeface="Arial"/>
+                <a:cs typeface="Arial"/>
+                <a:sym typeface="Arial"/>
+              </a:rPr>
+              <a:t>Sebelum</a:t>
+            </a:r>
+            <a:r>
+              <a:rPr lang="en-ID" sz="1100" b="0" i="0" u="none" strike="noStrike" cap="none" dirty="0">
+                <a:solidFill>
+                  <a:srgbClr val="000000"/>
+                </a:solidFill>
+                <a:effectLst/>
+                <a:latin typeface="Arial"/>
+                <a:ea typeface="Arial"/>
+                <a:cs typeface="Arial"/>
+                <a:sym typeface="Arial"/>
+              </a:rPr>
+              <a:t> </a:t>
+            </a:r>
+            <a:r>
+              <a:rPr lang="en-ID" sz="1100" b="0" i="0" u="none" strike="noStrike" cap="none" dirty="0" err="1">
+                <a:solidFill>
+                  <a:srgbClr val="000000"/>
+                </a:solidFill>
+                <a:effectLst/>
+                <a:latin typeface="Arial"/>
+                <a:ea typeface="Arial"/>
+                <a:cs typeface="Arial"/>
+                <a:sym typeface="Arial"/>
+              </a:rPr>
+              <a:t>mengerjakan</a:t>
+            </a:r>
+            <a:r>
+              <a:rPr lang="en-ID" sz="1100" b="0" i="0" u="none" strike="noStrike" cap="none" dirty="0">
+                <a:solidFill>
+                  <a:srgbClr val="000000"/>
+                </a:solidFill>
+                <a:effectLst/>
+                <a:latin typeface="Arial"/>
+                <a:ea typeface="Arial"/>
+                <a:cs typeface="Arial"/>
+                <a:sym typeface="Arial"/>
+              </a:rPr>
+              <a:t> </a:t>
+            </a:r>
+            <a:r>
+              <a:rPr lang="en-ID" sz="1100" b="0" i="0" u="none" strike="noStrike" cap="none" dirty="0" err="1">
+                <a:solidFill>
+                  <a:srgbClr val="000000"/>
+                </a:solidFill>
+                <a:effectLst/>
+                <a:latin typeface="Arial"/>
+                <a:ea typeface="Arial"/>
+                <a:cs typeface="Arial"/>
+                <a:sym typeface="Arial"/>
+              </a:rPr>
+              <a:t>proyek</a:t>
+            </a:r>
+            <a:r>
+              <a:rPr lang="en-ID" sz="1100" b="0" i="0" u="none" strike="noStrike" cap="none" dirty="0">
+                <a:solidFill>
+                  <a:srgbClr val="000000"/>
+                </a:solidFill>
+                <a:effectLst/>
+                <a:latin typeface="Arial"/>
+                <a:ea typeface="Arial"/>
+                <a:cs typeface="Arial"/>
+                <a:sym typeface="Arial"/>
+              </a:rPr>
+              <a:t> final </a:t>
+            </a:r>
+            <a:r>
+              <a:rPr lang="en-ID" sz="1100" b="0" i="0" u="none" strike="noStrike" cap="none" dirty="0" err="1">
+                <a:solidFill>
+                  <a:srgbClr val="000000"/>
+                </a:solidFill>
+                <a:effectLst/>
+                <a:latin typeface="Arial"/>
+                <a:ea typeface="Arial"/>
+                <a:cs typeface="Arial"/>
+                <a:sym typeface="Arial"/>
+              </a:rPr>
+              <a:t>ini</a:t>
+            </a:r>
+            <a:r>
+              <a:rPr lang="en-ID" sz="1100" b="0" i="0" u="none" strike="noStrike" cap="none" dirty="0">
+                <a:solidFill>
+                  <a:srgbClr val="000000"/>
+                </a:solidFill>
+                <a:effectLst/>
+                <a:latin typeface="Arial"/>
+                <a:ea typeface="Arial"/>
+                <a:cs typeface="Arial"/>
+                <a:sym typeface="Arial"/>
+              </a:rPr>
+              <a:t>, </a:t>
+            </a:r>
+            <a:r>
+              <a:rPr lang="en-ID" sz="1100" b="0" i="0" u="none" strike="noStrike" cap="none" dirty="0" err="1">
+                <a:solidFill>
+                  <a:srgbClr val="000000"/>
+                </a:solidFill>
+                <a:effectLst/>
+                <a:latin typeface="Arial"/>
+                <a:ea typeface="Arial"/>
+                <a:cs typeface="Arial"/>
+                <a:sym typeface="Arial"/>
+              </a:rPr>
+              <a:t>saya</a:t>
+            </a:r>
+            <a:r>
+              <a:rPr lang="en-ID" sz="1100" b="0" i="0" u="none" strike="noStrike" cap="none" dirty="0">
+                <a:solidFill>
+                  <a:srgbClr val="000000"/>
+                </a:solidFill>
+                <a:effectLst/>
+                <a:latin typeface="Arial"/>
+                <a:ea typeface="Arial"/>
+                <a:cs typeface="Arial"/>
+                <a:sym typeface="Arial"/>
+              </a:rPr>
+              <a:t> </a:t>
+            </a:r>
+            <a:r>
+              <a:rPr lang="en-ID" sz="1100" b="0" i="0" u="none" strike="noStrike" cap="none" dirty="0" err="1">
+                <a:solidFill>
+                  <a:srgbClr val="000000"/>
+                </a:solidFill>
+                <a:effectLst/>
+                <a:latin typeface="Arial"/>
+                <a:ea typeface="Arial"/>
+                <a:cs typeface="Arial"/>
+                <a:sym typeface="Arial"/>
+              </a:rPr>
+              <a:t>telah</a:t>
+            </a:r>
+            <a:r>
+              <a:rPr lang="en-ID" sz="1100" b="0" i="0" u="none" strike="noStrike" cap="none" dirty="0">
+                <a:solidFill>
+                  <a:srgbClr val="000000"/>
+                </a:solidFill>
+                <a:effectLst/>
+                <a:latin typeface="Arial"/>
+                <a:ea typeface="Arial"/>
+                <a:cs typeface="Arial"/>
+                <a:sym typeface="Arial"/>
+              </a:rPr>
+              <a:t> </a:t>
+            </a:r>
+            <a:r>
+              <a:rPr lang="en-ID" sz="1100" b="0" i="0" u="none" strike="noStrike" cap="none" dirty="0" err="1">
+                <a:solidFill>
+                  <a:srgbClr val="000000"/>
+                </a:solidFill>
+                <a:effectLst/>
+                <a:latin typeface="Arial"/>
+                <a:ea typeface="Arial"/>
+                <a:cs typeface="Arial"/>
+                <a:sym typeface="Arial"/>
+              </a:rPr>
+              <a:t>merampungkan</a:t>
+            </a:r>
+            <a:r>
+              <a:rPr lang="en-ID" sz="1100" b="0" i="0" u="none" strike="noStrike" cap="none" dirty="0">
+                <a:solidFill>
+                  <a:srgbClr val="000000"/>
+                </a:solidFill>
+                <a:effectLst/>
+                <a:latin typeface="Arial"/>
+                <a:ea typeface="Arial"/>
+                <a:cs typeface="Arial"/>
+                <a:sym typeface="Arial"/>
+              </a:rPr>
+              <a:t> </a:t>
+            </a:r>
+            <a:r>
+              <a:rPr lang="en-ID" sz="1100" b="0" i="0" u="none" strike="noStrike" cap="none" dirty="0" err="1">
+                <a:solidFill>
+                  <a:srgbClr val="000000"/>
+                </a:solidFill>
+                <a:effectLst/>
+                <a:latin typeface="Arial"/>
+                <a:ea typeface="Arial"/>
+                <a:cs typeface="Arial"/>
+                <a:sym typeface="Arial"/>
+              </a:rPr>
+              <a:t>tiga</a:t>
+            </a:r>
+            <a:r>
+              <a:rPr lang="en-ID" sz="1100" b="0" i="0" u="none" strike="noStrike" cap="none" dirty="0">
+                <a:solidFill>
+                  <a:srgbClr val="000000"/>
+                </a:solidFill>
+                <a:effectLst/>
+                <a:latin typeface="Arial"/>
+                <a:ea typeface="Arial"/>
+                <a:cs typeface="Arial"/>
+                <a:sym typeface="Arial"/>
+              </a:rPr>
+              <a:t> </a:t>
+            </a:r>
+            <a:r>
+              <a:rPr lang="en-ID" sz="1100" b="0" i="0" u="none" strike="noStrike" cap="none" dirty="0" err="1">
+                <a:solidFill>
+                  <a:srgbClr val="000000"/>
+                </a:solidFill>
+                <a:effectLst/>
+                <a:latin typeface="Arial"/>
+                <a:ea typeface="Arial"/>
+                <a:cs typeface="Arial"/>
+                <a:sym typeface="Arial"/>
+              </a:rPr>
+              <a:t>portofolio</a:t>
+            </a:r>
+            <a:r>
+              <a:rPr lang="en-ID" sz="1100" b="0" i="0" u="none" strike="noStrike" cap="none" dirty="0">
+                <a:solidFill>
+                  <a:srgbClr val="000000"/>
+                </a:solidFill>
+                <a:effectLst/>
+                <a:latin typeface="Arial"/>
+                <a:ea typeface="Arial"/>
+                <a:cs typeface="Arial"/>
+                <a:sym typeface="Arial"/>
+              </a:rPr>
+              <a:t> </a:t>
+            </a:r>
+            <a:r>
+              <a:rPr lang="en-ID" sz="1100" b="0" i="0" u="none" strike="noStrike" cap="none" dirty="0" err="1">
+                <a:solidFill>
+                  <a:srgbClr val="000000"/>
+                </a:solidFill>
+                <a:effectLst/>
+                <a:latin typeface="Arial"/>
+                <a:ea typeface="Arial"/>
+                <a:cs typeface="Arial"/>
+                <a:sym typeface="Arial"/>
+              </a:rPr>
+              <a:t>utama</a:t>
+            </a:r>
+            <a:r>
+              <a:rPr lang="en-ID" sz="1100" b="0" i="0" u="none" strike="noStrike" cap="none" dirty="0">
+                <a:solidFill>
+                  <a:srgbClr val="000000"/>
+                </a:solidFill>
+                <a:effectLst/>
+                <a:latin typeface="Arial"/>
+                <a:ea typeface="Arial"/>
+                <a:cs typeface="Arial"/>
+                <a:sym typeface="Arial"/>
+              </a:rPr>
+              <a:t>. </a:t>
+            </a:r>
+            <a:r>
+              <a:rPr lang="en-ID" sz="1100" b="0" i="0" u="none" strike="noStrike" cap="none" dirty="0" err="1">
+                <a:solidFill>
+                  <a:srgbClr val="000000"/>
+                </a:solidFill>
+                <a:effectLst/>
+                <a:latin typeface="Arial"/>
+                <a:ea typeface="Arial"/>
+                <a:cs typeface="Arial"/>
+                <a:sym typeface="Arial"/>
+              </a:rPr>
+              <a:t>Pertama</a:t>
+            </a:r>
+            <a:r>
+              <a:rPr lang="en-ID" sz="1100" b="0" i="0" u="none" strike="noStrike" cap="none" dirty="0">
+                <a:solidFill>
+                  <a:srgbClr val="000000"/>
+                </a:solidFill>
+                <a:effectLst/>
+                <a:latin typeface="Arial"/>
+                <a:ea typeface="Arial"/>
+                <a:cs typeface="Arial"/>
+                <a:sym typeface="Arial"/>
+              </a:rPr>
+              <a:t>, </a:t>
+            </a:r>
+            <a:r>
+              <a:rPr lang="en-ID" sz="1100" b="1" i="0" u="none" strike="noStrike" cap="none" dirty="0">
+                <a:solidFill>
+                  <a:srgbClr val="000000"/>
+                </a:solidFill>
+                <a:effectLst/>
+                <a:latin typeface="Arial"/>
+                <a:ea typeface="Arial"/>
+                <a:cs typeface="Arial"/>
+                <a:sym typeface="Arial"/>
+              </a:rPr>
+              <a:t>Wallet Service API</a:t>
+            </a:r>
+            <a:r>
+              <a:rPr lang="en-ID" sz="1100" b="0" i="0" u="none" strike="noStrike" cap="none" dirty="0">
+                <a:solidFill>
+                  <a:srgbClr val="000000"/>
+                </a:solidFill>
+                <a:effectLst/>
+                <a:latin typeface="Arial"/>
+                <a:ea typeface="Arial"/>
+                <a:cs typeface="Arial"/>
+                <a:sym typeface="Arial"/>
+              </a:rPr>
+              <a:t>, di mana </a:t>
+            </a:r>
+            <a:r>
+              <a:rPr lang="en-ID" sz="1100" b="0" i="0" u="none" strike="noStrike" cap="none" dirty="0" err="1">
+                <a:solidFill>
+                  <a:srgbClr val="000000"/>
+                </a:solidFill>
+                <a:effectLst/>
+                <a:latin typeface="Arial"/>
+                <a:ea typeface="Arial"/>
+                <a:cs typeface="Arial"/>
+                <a:sym typeface="Arial"/>
+              </a:rPr>
+              <a:t>saya</a:t>
+            </a:r>
+            <a:r>
+              <a:rPr lang="en-ID" sz="1100" b="0" i="0" u="none" strike="noStrike" cap="none" dirty="0">
+                <a:solidFill>
+                  <a:srgbClr val="000000"/>
+                </a:solidFill>
+                <a:effectLst/>
+                <a:latin typeface="Arial"/>
+                <a:ea typeface="Arial"/>
+                <a:cs typeface="Arial"/>
+                <a:sym typeface="Arial"/>
+              </a:rPr>
+              <a:t> </a:t>
+            </a:r>
+            <a:r>
+              <a:rPr lang="en-ID" sz="1100" b="0" i="0" u="none" strike="noStrike" cap="none" dirty="0" err="1">
+                <a:solidFill>
+                  <a:srgbClr val="000000"/>
+                </a:solidFill>
+                <a:effectLst/>
+                <a:latin typeface="Arial"/>
+                <a:ea typeface="Arial"/>
+                <a:cs typeface="Arial"/>
+                <a:sym typeface="Arial"/>
+              </a:rPr>
+              <a:t>belajar</a:t>
+            </a:r>
+            <a:r>
+              <a:rPr lang="en-ID" sz="1100" b="0" i="0" u="none" strike="noStrike" cap="none" dirty="0">
+                <a:solidFill>
+                  <a:srgbClr val="000000"/>
+                </a:solidFill>
+                <a:effectLst/>
+                <a:latin typeface="Arial"/>
+                <a:ea typeface="Arial"/>
+                <a:cs typeface="Arial"/>
+                <a:sym typeface="Arial"/>
+              </a:rPr>
+              <a:t> </a:t>
+            </a:r>
+            <a:r>
+              <a:rPr lang="en-ID" sz="1100" b="0" i="0" u="none" strike="noStrike" cap="none" dirty="0" err="1">
+                <a:solidFill>
+                  <a:srgbClr val="000000"/>
+                </a:solidFill>
+                <a:effectLst/>
+                <a:latin typeface="Arial"/>
+                <a:ea typeface="Arial"/>
+                <a:cs typeface="Arial"/>
+                <a:sym typeface="Arial"/>
+              </a:rPr>
+              <a:t>merancang</a:t>
+            </a:r>
+            <a:r>
+              <a:rPr lang="en-ID" sz="1100" b="0" i="0" u="none" strike="noStrike" cap="none" dirty="0">
+                <a:solidFill>
+                  <a:srgbClr val="000000"/>
+                </a:solidFill>
+                <a:effectLst/>
+                <a:latin typeface="Arial"/>
+                <a:ea typeface="Arial"/>
+                <a:cs typeface="Arial"/>
+                <a:sym typeface="Arial"/>
+              </a:rPr>
+              <a:t> </a:t>
+            </a:r>
+            <a:r>
+              <a:rPr lang="en-ID" sz="1100" b="0" i="0" u="none" strike="noStrike" cap="none" dirty="0" err="1">
+                <a:solidFill>
+                  <a:srgbClr val="000000"/>
+                </a:solidFill>
+                <a:effectLst/>
+                <a:latin typeface="Arial"/>
+                <a:ea typeface="Arial"/>
+                <a:cs typeface="Arial"/>
+                <a:sym typeface="Arial"/>
+              </a:rPr>
+              <a:t>arsitektur</a:t>
+            </a:r>
+            <a:r>
+              <a:rPr lang="en-ID" sz="1100" b="0" i="0" u="none" strike="noStrike" cap="none" dirty="0">
+                <a:solidFill>
+                  <a:srgbClr val="000000"/>
+                </a:solidFill>
+                <a:effectLst/>
+                <a:latin typeface="Arial"/>
+                <a:ea typeface="Arial"/>
+                <a:cs typeface="Arial"/>
+                <a:sym typeface="Arial"/>
+              </a:rPr>
+              <a:t> </a:t>
+            </a:r>
+            <a:r>
+              <a:rPr lang="en-ID" sz="1100" b="0" i="0" u="none" strike="noStrike" cap="none" dirty="0" err="1">
+                <a:solidFill>
+                  <a:srgbClr val="000000"/>
+                </a:solidFill>
+                <a:effectLst/>
+                <a:latin typeface="Arial"/>
+                <a:ea typeface="Arial"/>
+                <a:cs typeface="Arial"/>
+                <a:sym typeface="Arial"/>
+              </a:rPr>
+              <a:t>transaksi</a:t>
+            </a:r>
+            <a:r>
+              <a:rPr lang="en-ID" sz="1100" b="0" i="0" u="none" strike="noStrike" cap="none" dirty="0">
+                <a:solidFill>
+                  <a:srgbClr val="000000"/>
+                </a:solidFill>
+                <a:effectLst/>
+                <a:latin typeface="Arial"/>
+                <a:ea typeface="Arial"/>
+                <a:cs typeface="Arial"/>
+                <a:sym typeface="Arial"/>
+              </a:rPr>
+              <a:t> </a:t>
+            </a:r>
+            <a:r>
+              <a:rPr lang="en-ID" sz="1100" b="0" i="0" u="none" strike="noStrike" cap="none" dirty="0" err="1">
+                <a:solidFill>
+                  <a:srgbClr val="000000"/>
+                </a:solidFill>
+                <a:effectLst/>
+                <a:latin typeface="Arial"/>
+                <a:ea typeface="Arial"/>
+                <a:cs typeface="Arial"/>
+                <a:sym typeface="Arial"/>
+              </a:rPr>
+              <a:t>finansial</a:t>
+            </a:r>
+            <a:r>
+              <a:rPr lang="en-ID" sz="1100" b="0" i="0" u="none" strike="noStrike" cap="none" dirty="0">
+                <a:solidFill>
+                  <a:srgbClr val="000000"/>
+                </a:solidFill>
+                <a:effectLst/>
+                <a:latin typeface="Arial"/>
+                <a:ea typeface="Arial"/>
+                <a:cs typeface="Arial"/>
+                <a:sym typeface="Arial"/>
+              </a:rPr>
+              <a:t> digital dan </a:t>
+            </a:r>
+            <a:r>
+              <a:rPr lang="en-ID" sz="1100" b="0" i="0" u="none" strike="noStrike" cap="none" dirty="0" err="1">
+                <a:solidFill>
+                  <a:srgbClr val="000000"/>
+                </a:solidFill>
+                <a:effectLst/>
+                <a:latin typeface="Arial"/>
+                <a:ea typeface="Arial"/>
+                <a:cs typeface="Arial"/>
+                <a:sym typeface="Arial"/>
+              </a:rPr>
+              <a:t>keamanan</a:t>
+            </a:r>
+            <a:r>
+              <a:rPr lang="en-ID" sz="1100" b="0" i="0" u="none" strike="noStrike" cap="none" dirty="0">
+                <a:solidFill>
+                  <a:srgbClr val="000000"/>
+                </a:solidFill>
+                <a:effectLst/>
+                <a:latin typeface="Arial"/>
+                <a:ea typeface="Arial"/>
+                <a:cs typeface="Arial"/>
+                <a:sym typeface="Arial"/>
+              </a:rPr>
+              <a:t> 'idempotency'. </a:t>
+            </a:r>
+            <a:r>
+              <a:rPr lang="en-ID" sz="1100" b="0" i="0" u="none" strike="noStrike" cap="none" dirty="0" err="1">
+                <a:solidFill>
+                  <a:srgbClr val="000000"/>
+                </a:solidFill>
+                <a:effectLst/>
+                <a:latin typeface="Arial"/>
+                <a:ea typeface="Arial"/>
+                <a:cs typeface="Arial"/>
+                <a:sym typeface="Arial"/>
+              </a:rPr>
+              <a:t>Kedua</a:t>
+            </a:r>
+            <a:r>
+              <a:rPr lang="en-ID" sz="1100" b="0" i="0" u="none" strike="noStrike" cap="none" dirty="0">
+                <a:solidFill>
+                  <a:srgbClr val="000000"/>
+                </a:solidFill>
+                <a:effectLst/>
+                <a:latin typeface="Arial"/>
+                <a:ea typeface="Arial"/>
+                <a:cs typeface="Arial"/>
+                <a:sym typeface="Arial"/>
+              </a:rPr>
+              <a:t>, </a:t>
+            </a:r>
+            <a:r>
+              <a:rPr lang="en-ID" sz="1100" b="1" i="0" u="none" strike="noStrike" cap="none" dirty="0">
+                <a:solidFill>
+                  <a:srgbClr val="000000"/>
+                </a:solidFill>
+                <a:effectLst/>
+                <a:latin typeface="Arial"/>
+                <a:ea typeface="Arial"/>
+                <a:cs typeface="Arial"/>
+                <a:sym typeface="Arial"/>
+              </a:rPr>
+              <a:t>File Storage API</a:t>
+            </a:r>
+            <a:r>
+              <a:rPr lang="en-ID" sz="1100" b="0" i="0" u="none" strike="noStrike" cap="none" dirty="0">
+                <a:solidFill>
+                  <a:srgbClr val="000000"/>
+                </a:solidFill>
+                <a:effectLst/>
+                <a:latin typeface="Arial"/>
+                <a:ea typeface="Arial"/>
+                <a:cs typeface="Arial"/>
+                <a:sym typeface="Arial"/>
+              </a:rPr>
+              <a:t>, </a:t>
+            </a:r>
+            <a:r>
+              <a:rPr lang="en-ID" sz="1100" b="0" i="0" u="none" strike="noStrike" cap="none" dirty="0" err="1">
+                <a:solidFill>
+                  <a:srgbClr val="000000"/>
+                </a:solidFill>
+                <a:effectLst/>
+                <a:latin typeface="Arial"/>
+                <a:ea typeface="Arial"/>
+                <a:cs typeface="Arial"/>
+                <a:sym typeface="Arial"/>
+              </a:rPr>
+              <a:t>untuk</a:t>
+            </a:r>
+            <a:r>
+              <a:rPr lang="en-ID" sz="1100" b="0" i="0" u="none" strike="noStrike" cap="none" dirty="0">
+                <a:solidFill>
+                  <a:srgbClr val="000000"/>
+                </a:solidFill>
+                <a:effectLst/>
+                <a:latin typeface="Arial"/>
+                <a:ea typeface="Arial"/>
+                <a:cs typeface="Arial"/>
+                <a:sym typeface="Arial"/>
+              </a:rPr>
+              <a:t> </a:t>
+            </a:r>
+            <a:r>
+              <a:rPr lang="en-ID" sz="1100" b="0" i="0" u="none" strike="noStrike" cap="none" dirty="0" err="1">
+                <a:solidFill>
+                  <a:srgbClr val="000000"/>
+                </a:solidFill>
+                <a:effectLst/>
+                <a:latin typeface="Arial"/>
+                <a:ea typeface="Arial"/>
+                <a:cs typeface="Arial"/>
+                <a:sym typeface="Arial"/>
+              </a:rPr>
+              <a:t>mematangkan</a:t>
+            </a:r>
+            <a:r>
+              <a:rPr lang="en-ID" sz="1100" b="0" i="0" u="none" strike="noStrike" cap="none" dirty="0">
+                <a:solidFill>
+                  <a:srgbClr val="000000"/>
+                </a:solidFill>
+                <a:effectLst/>
+                <a:latin typeface="Arial"/>
+                <a:ea typeface="Arial"/>
+                <a:cs typeface="Arial"/>
+                <a:sym typeface="Arial"/>
+              </a:rPr>
+              <a:t> </a:t>
+            </a:r>
+            <a:r>
+              <a:rPr lang="en-ID" sz="1100" b="0" i="0" u="none" strike="noStrike" cap="none" dirty="0" err="1">
+                <a:solidFill>
+                  <a:srgbClr val="000000"/>
+                </a:solidFill>
+                <a:effectLst/>
+                <a:latin typeface="Arial"/>
+                <a:ea typeface="Arial"/>
+                <a:cs typeface="Arial"/>
+                <a:sym typeface="Arial"/>
+              </a:rPr>
+              <a:t>manajemen</a:t>
+            </a:r>
+            <a:r>
+              <a:rPr lang="en-ID" sz="1100" b="0" i="0" u="none" strike="noStrike" cap="none" dirty="0">
+                <a:solidFill>
+                  <a:srgbClr val="000000"/>
+                </a:solidFill>
+                <a:effectLst/>
+                <a:latin typeface="Arial"/>
+                <a:ea typeface="Arial"/>
+                <a:cs typeface="Arial"/>
+                <a:sym typeface="Arial"/>
+              </a:rPr>
+              <a:t> file dan </a:t>
+            </a:r>
+            <a:r>
+              <a:rPr lang="en-ID" sz="1100" b="0" i="0" u="none" strike="noStrike" cap="none" dirty="0" err="1">
+                <a:solidFill>
+                  <a:srgbClr val="000000"/>
+                </a:solidFill>
+                <a:effectLst/>
+                <a:latin typeface="Arial"/>
+                <a:ea typeface="Arial"/>
+                <a:cs typeface="Arial"/>
+                <a:sym typeface="Arial"/>
+              </a:rPr>
+              <a:t>otomatisasi</a:t>
+            </a:r>
+            <a:r>
+              <a:rPr lang="en-ID" sz="1100" b="0" i="0" u="none" strike="noStrike" cap="none" dirty="0">
+                <a:solidFill>
+                  <a:srgbClr val="000000"/>
+                </a:solidFill>
+                <a:effectLst/>
+                <a:latin typeface="Arial"/>
+                <a:ea typeface="Arial"/>
+                <a:cs typeface="Arial"/>
+                <a:sym typeface="Arial"/>
+              </a:rPr>
+              <a:t> </a:t>
+            </a:r>
+            <a:r>
+              <a:rPr lang="en-ID" sz="1100" b="0" i="1" u="none" strike="noStrike" cap="none" dirty="0">
+                <a:solidFill>
+                  <a:srgbClr val="000000"/>
+                </a:solidFill>
+                <a:effectLst/>
+                <a:latin typeface="Arial"/>
+                <a:ea typeface="Arial"/>
+                <a:cs typeface="Arial"/>
+                <a:sym typeface="Arial"/>
+              </a:rPr>
+              <a:t>deployment</a:t>
+            </a:r>
+            <a:r>
+              <a:rPr lang="en-ID" sz="1100" b="0" i="0" u="none" strike="noStrike" cap="none" dirty="0">
+                <a:solidFill>
+                  <a:srgbClr val="000000"/>
+                </a:solidFill>
+                <a:effectLst/>
+                <a:latin typeface="Arial"/>
+                <a:ea typeface="Arial"/>
+                <a:cs typeface="Arial"/>
+                <a:sym typeface="Arial"/>
+              </a:rPr>
+              <a:t> </a:t>
+            </a:r>
+            <a:r>
+              <a:rPr lang="en-ID" sz="1100" b="0" i="0" u="none" strike="noStrike" cap="none" dirty="0" err="1">
+                <a:solidFill>
+                  <a:srgbClr val="000000"/>
+                </a:solidFill>
+                <a:effectLst/>
+                <a:latin typeface="Arial"/>
+                <a:ea typeface="Arial"/>
+                <a:cs typeface="Arial"/>
+                <a:sym typeface="Arial"/>
+              </a:rPr>
+              <a:t>menggunakan</a:t>
+            </a:r>
+            <a:r>
+              <a:rPr lang="en-ID" sz="1100" b="0" i="0" u="none" strike="noStrike" cap="none" dirty="0">
+                <a:solidFill>
+                  <a:srgbClr val="000000"/>
+                </a:solidFill>
+                <a:effectLst/>
+                <a:latin typeface="Arial"/>
+                <a:ea typeface="Arial"/>
+                <a:cs typeface="Arial"/>
+                <a:sym typeface="Arial"/>
+              </a:rPr>
+              <a:t> Docker dan GitHub Actions.</a:t>
+            </a:r>
+          </a:p>
+          <a:p>
+            <a:r>
+              <a:rPr lang="en-ID" sz="1100" b="0" i="0" u="none" strike="noStrike" cap="none" dirty="0" err="1">
+                <a:solidFill>
+                  <a:srgbClr val="000000"/>
+                </a:solidFill>
+                <a:effectLst/>
+                <a:latin typeface="Arial"/>
+                <a:ea typeface="Arial"/>
+                <a:cs typeface="Arial"/>
+                <a:sym typeface="Arial"/>
+              </a:rPr>
+              <a:t>Puncaknya</a:t>
+            </a:r>
+            <a:r>
+              <a:rPr lang="en-ID" sz="1100" b="0" i="0" u="none" strike="noStrike" cap="none" dirty="0">
+                <a:solidFill>
+                  <a:srgbClr val="000000"/>
+                </a:solidFill>
+                <a:effectLst/>
+                <a:latin typeface="Arial"/>
+                <a:ea typeface="Arial"/>
+                <a:cs typeface="Arial"/>
+                <a:sym typeface="Arial"/>
+              </a:rPr>
+              <a:t>, </a:t>
+            </a:r>
+            <a:r>
+              <a:rPr lang="en-ID" sz="1100" b="0" i="0" u="none" strike="noStrike" cap="none" dirty="0" err="1">
+                <a:solidFill>
+                  <a:srgbClr val="000000"/>
+                </a:solidFill>
+                <a:effectLst/>
+                <a:latin typeface="Arial"/>
+                <a:ea typeface="Arial"/>
+                <a:cs typeface="Arial"/>
+                <a:sym typeface="Arial"/>
+              </a:rPr>
+              <a:t>saya</a:t>
+            </a:r>
+            <a:r>
+              <a:rPr lang="en-ID" sz="1100" b="0" i="0" u="none" strike="noStrike" cap="none" dirty="0">
+                <a:solidFill>
+                  <a:srgbClr val="000000"/>
+                </a:solidFill>
+                <a:effectLst/>
+                <a:latin typeface="Arial"/>
+                <a:ea typeface="Arial"/>
+                <a:cs typeface="Arial"/>
+                <a:sym typeface="Arial"/>
+              </a:rPr>
+              <a:t> </a:t>
+            </a:r>
+            <a:r>
+              <a:rPr lang="en-ID" sz="1100" b="0" i="0" u="none" strike="noStrike" cap="none" dirty="0" err="1">
+                <a:solidFill>
+                  <a:srgbClr val="000000"/>
+                </a:solidFill>
+                <a:effectLst/>
+                <a:latin typeface="Arial"/>
+                <a:ea typeface="Arial"/>
+                <a:cs typeface="Arial"/>
+                <a:sym typeface="Arial"/>
+              </a:rPr>
+              <a:t>mengembangkan</a:t>
+            </a:r>
+            <a:r>
+              <a:rPr lang="en-ID" sz="1100" b="0" i="0" u="none" strike="noStrike" cap="none" dirty="0">
+                <a:solidFill>
+                  <a:srgbClr val="000000"/>
+                </a:solidFill>
+                <a:effectLst/>
+                <a:latin typeface="Arial"/>
+                <a:ea typeface="Arial"/>
+                <a:cs typeface="Arial"/>
+                <a:sym typeface="Arial"/>
+              </a:rPr>
+              <a:t> </a:t>
+            </a:r>
+            <a:r>
+              <a:rPr lang="en-ID" sz="1100" b="1" i="0" u="none" strike="noStrike" cap="none" dirty="0" err="1">
+                <a:solidFill>
+                  <a:srgbClr val="000000"/>
+                </a:solidFill>
+                <a:effectLst/>
+                <a:latin typeface="Arial"/>
+                <a:ea typeface="Arial"/>
+                <a:cs typeface="Arial"/>
+                <a:sym typeface="Arial"/>
+              </a:rPr>
+              <a:t>CareLink</a:t>
+            </a:r>
+            <a:r>
+              <a:rPr lang="en-ID" sz="1100" b="0" i="0" u="none" strike="noStrike" cap="none" dirty="0">
+                <a:solidFill>
+                  <a:srgbClr val="000000"/>
+                </a:solidFill>
+                <a:effectLst/>
+                <a:latin typeface="Arial"/>
+                <a:ea typeface="Arial"/>
+                <a:cs typeface="Arial"/>
+                <a:sym typeface="Arial"/>
+              </a:rPr>
+              <a:t>, </a:t>
+            </a:r>
+            <a:r>
+              <a:rPr lang="en-ID" sz="1100" b="0" i="0" u="none" strike="noStrike" cap="none" dirty="0" err="1">
+                <a:solidFill>
+                  <a:srgbClr val="000000"/>
+                </a:solidFill>
+                <a:effectLst/>
+                <a:latin typeface="Arial"/>
+                <a:ea typeface="Arial"/>
+                <a:cs typeface="Arial"/>
+                <a:sym typeface="Arial"/>
+              </a:rPr>
+              <a:t>sebuah</a:t>
+            </a:r>
+            <a:r>
+              <a:rPr lang="en-ID" sz="1100" b="0" i="0" u="none" strike="noStrike" cap="none" dirty="0">
+                <a:solidFill>
+                  <a:srgbClr val="000000"/>
+                </a:solidFill>
+                <a:effectLst/>
+                <a:latin typeface="Arial"/>
+                <a:ea typeface="Arial"/>
+                <a:cs typeface="Arial"/>
+                <a:sym typeface="Arial"/>
+              </a:rPr>
+              <a:t> </a:t>
+            </a:r>
+            <a:r>
+              <a:rPr lang="en-ID" sz="1100" b="0" i="0" u="none" strike="noStrike" cap="none" dirty="0" err="1">
+                <a:solidFill>
+                  <a:srgbClr val="000000"/>
+                </a:solidFill>
+                <a:effectLst/>
+                <a:latin typeface="Arial"/>
+                <a:ea typeface="Arial"/>
+                <a:cs typeface="Arial"/>
+                <a:sym typeface="Arial"/>
+              </a:rPr>
+              <a:t>sistem</a:t>
+            </a:r>
+            <a:r>
+              <a:rPr lang="en-ID" sz="1100" b="0" i="0" u="none" strike="noStrike" cap="none" dirty="0">
+                <a:solidFill>
+                  <a:srgbClr val="000000"/>
+                </a:solidFill>
+                <a:effectLst/>
+                <a:latin typeface="Arial"/>
+                <a:ea typeface="Arial"/>
+                <a:cs typeface="Arial"/>
+                <a:sym typeface="Arial"/>
+              </a:rPr>
+              <a:t> </a:t>
+            </a:r>
+            <a:r>
+              <a:rPr lang="en-ID" sz="1100" b="0" i="0" u="none" strike="noStrike" cap="none" dirty="0" err="1">
+                <a:solidFill>
+                  <a:srgbClr val="000000"/>
+                </a:solidFill>
+                <a:effectLst/>
+                <a:latin typeface="Arial"/>
+                <a:ea typeface="Arial"/>
+                <a:cs typeface="Arial"/>
+                <a:sym typeface="Arial"/>
+              </a:rPr>
+              <a:t>peringatan</a:t>
+            </a:r>
+            <a:r>
+              <a:rPr lang="en-ID" sz="1100" b="0" i="0" u="none" strike="noStrike" cap="none" dirty="0">
+                <a:solidFill>
+                  <a:srgbClr val="000000"/>
+                </a:solidFill>
+                <a:effectLst/>
+                <a:latin typeface="Arial"/>
+                <a:ea typeface="Arial"/>
+                <a:cs typeface="Arial"/>
+                <a:sym typeface="Arial"/>
+              </a:rPr>
+              <a:t> </a:t>
+            </a:r>
+            <a:r>
+              <a:rPr lang="en-ID" sz="1100" b="0" i="0" u="none" strike="noStrike" cap="none" dirty="0" err="1">
+                <a:solidFill>
+                  <a:srgbClr val="000000"/>
+                </a:solidFill>
+                <a:effectLst/>
+                <a:latin typeface="Arial"/>
+                <a:ea typeface="Arial"/>
+                <a:cs typeface="Arial"/>
+                <a:sym typeface="Arial"/>
+              </a:rPr>
+              <a:t>darurat</a:t>
+            </a:r>
+            <a:r>
+              <a:rPr lang="en-ID" sz="1100" b="0" i="0" u="none" strike="noStrike" cap="none" dirty="0">
+                <a:solidFill>
+                  <a:srgbClr val="000000"/>
+                </a:solidFill>
+                <a:effectLst/>
+                <a:latin typeface="Arial"/>
+                <a:ea typeface="Arial"/>
+                <a:cs typeface="Arial"/>
+                <a:sym typeface="Arial"/>
+              </a:rPr>
+              <a:t> </a:t>
+            </a:r>
+            <a:r>
+              <a:rPr lang="en-ID" sz="1100" b="0" i="0" u="none" strike="noStrike" cap="none" dirty="0" err="1">
+                <a:solidFill>
+                  <a:srgbClr val="000000"/>
+                </a:solidFill>
+                <a:effectLst/>
+                <a:latin typeface="Arial"/>
+                <a:ea typeface="Arial"/>
+                <a:cs typeface="Arial"/>
+                <a:sym typeface="Arial"/>
+              </a:rPr>
+              <a:t>rumah</a:t>
+            </a:r>
+            <a:r>
+              <a:rPr lang="en-ID" sz="1100" b="0" i="0" u="none" strike="noStrike" cap="none" dirty="0">
+                <a:solidFill>
+                  <a:srgbClr val="000000"/>
+                </a:solidFill>
+                <a:effectLst/>
+                <a:latin typeface="Arial"/>
+                <a:ea typeface="Arial"/>
+                <a:cs typeface="Arial"/>
+                <a:sym typeface="Arial"/>
+              </a:rPr>
+              <a:t> </a:t>
+            </a:r>
+            <a:r>
+              <a:rPr lang="en-ID" sz="1100" b="0" i="0" u="none" strike="noStrike" cap="none" dirty="0" err="1">
+                <a:solidFill>
+                  <a:srgbClr val="000000"/>
+                </a:solidFill>
+                <a:effectLst/>
+                <a:latin typeface="Arial"/>
+                <a:ea typeface="Arial"/>
+                <a:cs typeface="Arial"/>
+                <a:sym typeface="Arial"/>
+              </a:rPr>
+              <a:t>sakit</a:t>
+            </a:r>
+            <a:r>
+              <a:rPr lang="en-ID" sz="1100" b="0" i="0" u="none" strike="noStrike" cap="none" dirty="0">
+                <a:solidFill>
+                  <a:srgbClr val="000000"/>
+                </a:solidFill>
+                <a:effectLst/>
+                <a:latin typeface="Arial"/>
+                <a:ea typeface="Arial"/>
+                <a:cs typeface="Arial"/>
+                <a:sym typeface="Arial"/>
+              </a:rPr>
+              <a:t> </a:t>
+            </a:r>
+            <a:r>
+              <a:rPr lang="en-ID" sz="1100" b="0" i="0" u="none" strike="noStrike" cap="none" dirty="0" err="1">
+                <a:solidFill>
+                  <a:srgbClr val="000000"/>
+                </a:solidFill>
+                <a:effectLst/>
+                <a:latin typeface="Arial"/>
+                <a:ea typeface="Arial"/>
+                <a:cs typeface="Arial"/>
+                <a:sym typeface="Arial"/>
+              </a:rPr>
+              <a:t>berskala</a:t>
+            </a:r>
+            <a:r>
+              <a:rPr lang="en-ID" sz="1100" b="0" i="0" u="none" strike="noStrike" cap="none" dirty="0">
+                <a:solidFill>
+                  <a:srgbClr val="000000"/>
+                </a:solidFill>
+                <a:effectLst/>
+                <a:latin typeface="Arial"/>
+                <a:ea typeface="Arial"/>
+                <a:cs typeface="Arial"/>
+                <a:sym typeface="Arial"/>
+              </a:rPr>
+              <a:t> Full-Stack yang </a:t>
+            </a:r>
+            <a:r>
+              <a:rPr lang="en-ID" sz="1100" b="0" i="0" u="none" strike="noStrike" cap="none" dirty="0" err="1">
+                <a:solidFill>
+                  <a:srgbClr val="000000"/>
+                </a:solidFill>
+                <a:effectLst/>
+                <a:latin typeface="Arial"/>
+                <a:ea typeface="Arial"/>
+                <a:cs typeface="Arial"/>
+                <a:sym typeface="Arial"/>
+              </a:rPr>
+              <a:t>mengintegrasikan</a:t>
+            </a:r>
+            <a:r>
+              <a:rPr lang="en-ID" sz="1100" b="0" i="0" u="none" strike="noStrike" cap="none" dirty="0">
+                <a:solidFill>
+                  <a:srgbClr val="000000"/>
+                </a:solidFill>
+                <a:effectLst/>
+                <a:latin typeface="Arial"/>
+                <a:ea typeface="Arial"/>
+                <a:cs typeface="Arial"/>
+                <a:sym typeface="Arial"/>
+              </a:rPr>
+              <a:t> Message Broker (RabbitMQ) dan In-Memory Cache (Redis). </a:t>
+            </a:r>
+            <a:r>
+              <a:rPr lang="en-ID" sz="1100" b="0" i="0" u="none" strike="noStrike" cap="none" dirty="0" err="1">
+                <a:solidFill>
+                  <a:srgbClr val="000000"/>
+                </a:solidFill>
+                <a:effectLst/>
+                <a:latin typeface="Arial"/>
+                <a:ea typeface="Arial"/>
+                <a:cs typeface="Arial"/>
+                <a:sym typeface="Arial"/>
+              </a:rPr>
+              <a:t>Bermodal</a:t>
+            </a:r>
+            <a:r>
+              <a:rPr lang="en-ID" sz="1100" b="0" i="0" u="none" strike="noStrike" cap="none" dirty="0">
+                <a:solidFill>
+                  <a:srgbClr val="000000"/>
+                </a:solidFill>
+                <a:effectLst/>
+                <a:latin typeface="Arial"/>
+                <a:ea typeface="Arial"/>
+                <a:cs typeface="Arial"/>
+                <a:sym typeface="Arial"/>
+              </a:rPr>
+              <a:t> jam terbang </a:t>
+            </a:r>
+            <a:r>
+              <a:rPr lang="en-ID" sz="1100" b="0" i="0" u="none" strike="noStrike" cap="none" dirty="0" err="1">
+                <a:solidFill>
+                  <a:srgbClr val="000000"/>
+                </a:solidFill>
+                <a:effectLst/>
+                <a:latin typeface="Arial"/>
+                <a:ea typeface="Arial"/>
+                <a:cs typeface="Arial"/>
+                <a:sym typeface="Arial"/>
+              </a:rPr>
+              <a:t>arsitektur</a:t>
+            </a:r>
+            <a:r>
+              <a:rPr lang="en-ID" sz="1100" b="0" i="0" u="none" strike="noStrike" cap="none" dirty="0">
+                <a:solidFill>
+                  <a:srgbClr val="000000"/>
+                </a:solidFill>
+                <a:effectLst/>
+                <a:latin typeface="Arial"/>
+                <a:ea typeface="Arial"/>
+                <a:cs typeface="Arial"/>
+                <a:sym typeface="Arial"/>
+              </a:rPr>
+              <a:t> </a:t>
+            </a:r>
+            <a:r>
+              <a:rPr lang="en-ID" sz="1100" b="0" i="0" u="none" strike="noStrike" cap="none" dirty="0" err="1">
+                <a:solidFill>
+                  <a:srgbClr val="000000"/>
+                </a:solidFill>
+                <a:effectLst/>
+                <a:latin typeface="Arial"/>
+                <a:ea typeface="Arial"/>
+                <a:cs typeface="Arial"/>
+                <a:sym typeface="Arial"/>
+              </a:rPr>
+              <a:t>tingkat</a:t>
+            </a:r>
+            <a:r>
+              <a:rPr lang="en-ID" sz="1100" b="0" i="0" u="none" strike="noStrike" cap="none" dirty="0">
+                <a:solidFill>
+                  <a:srgbClr val="000000"/>
+                </a:solidFill>
+                <a:effectLst/>
+                <a:latin typeface="Arial"/>
+                <a:ea typeface="Arial"/>
+                <a:cs typeface="Arial"/>
+                <a:sym typeface="Arial"/>
+              </a:rPr>
+              <a:t> </a:t>
+            </a:r>
+            <a:r>
+              <a:rPr lang="en-ID" sz="1100" b="0" i="0" u="none" strike="noStrike" cap="none" dirty="0" err="1">
+                <a:solidFill>
+                  <a:srgbClr val="000000"/>
+                </a:solidFill>
+                <a:effectLst/>
+                <a:latin typeface="Arial"/>
+                <a:ea typeface="Arial"/>
+                <a:cs typeface="Arial"/>
+                <a:sym typeface="Arial"/>
+              </a:rPr>
+              <a:t>lanjut</a:t>
+            </a:r>
+            <a:r>
+              <a:rPr lang="en-ID" sz="1100" b="0" i="0" u="none" strike="noStrike" cap="none" dirty="0">
+                <a:solidFill>
+                  <a:srgbClr val="000000"/>
+                </a:solidFill>
+                <a:effectLst/>
+                <a:latin typeface="Arial"/>
+                <a:ea typeface="Arial"/>
+                <a:cs typeface="Arial"/>
+                <a:sym typeface="Arial"/>
+              </a:rPr>
+              <a:t> </a:t>
+            </a:r>
+            <a:r>
+              <a:rPr lang="en-ID" sz="1100" b="0" i="0" u="none" strike="noStrike" cap="none" dirty="0" err="1">
+                <a:solidFill>
+                  <a:srgbClr val="000000"/>
+                </a:solidFill>
+                <a:effectLst/>
+                <a:latin typeface="Arial"/>
+                <a:ea typeface="Arial"/>
+                <a:cs typeface="Arial"/>
+                <a:sym typeface="Arial"/>
+              </a:rPr>
+              <a:t>dari</a:t>
+            </a:r>
+            <a:r>
+              <a:rPr lang="en-ID" sz="1100" b="0" i="0" u="none" strike="noStrike" cap="none" dirty="0">
+                <a:solidFill>
+                  <a:srgbClr val="000000"/>
+                </a:solidFill>
+                <a:effectLst/>
+                <a:latin typeface="Arial"/>
+                <a:ea typeface="Arial"/>
+                <a:cs typeface="Arial"/>
+                <a:sym typeface="Arial"/>
+              </a:rPr>
+              <a:t> </a:t>
+            </a:r>
+            <a:r>
+              <a:rPr lang="en-ID" sz="1100" b="0" i="0" u="none" strike="noStrike" cap="none" dirty="0" err="1">
+                <a:solidFill>
+                  <a:srgbClr val="000000"/>
+                </a:solidFill>
+                <a:effectLst/>
+                <a:latin typeface="Arial"/>
+                <a:ea typeface="Arial"/>
+                <a:cs typeface="Arial"/>
+                <a:sym typeface="Arial"/>
+              </a:rPr>
+              <a:t>ketiga</a:t>
+            </a:r>
+            <a:r>
+              <a:rPr lang="en-ID" sz="1100" b="0" i="0" u="none" strike="noStrike" cap="none" dirty="0">
+                <a:solidFill>
+                  <a:srgbClr val="000000"/>
+                </a:solidFill>
+                <a:effectLst/>
+                <a:latin typeface="Arial"/>
+                <a:ea typeface="Arial"/>
+                <a:cs typeface="Arial"/>
+                <a:sym typeface="Arial"/>
+              </a:rPr>
+              <a:t> </a:t>
+            </a:r>
+            <a:r>
+              <a:rPr lang="en-ID" sz="1100" b="0" i="0" u="none" strike="noStrike" cap="none" dirty="0" err="1">
+                <a:solidFill>
+                  <a:srgbClr val="000000"/>
+                </a:solidFill>
+                <a:effectLst/>
+                <a:latin typeface="Arial"/>
+                <a:ea typeface="Arial"/>
+                <a:cs typeface="Arial"/>
+                <a:sym typeface="Arial"/>
+              </a:rPr>
+              <a:t>proyek</a:t>
+            </a:r>
+            <a:r>
+              <a:rPr lang="en-ID" sz="1100" b="0" i="0" u="none" strike="noStrike" cap="none" dirty="0">
+                <a:solidFill>
+                  <a:srgbClr val="000000"/>
+                </a:solidFill>
+                <a:effectLst/>
+                <a:latin typeface="Arial"/>
+                <a:ea typeface="Arial"/>
+                <a:cs typeface="Arial"/>
+                <a:sym typeface="Arial"/>
+              </a:rPr>
+              <a:t> </a:t>
+            </a:r>
+            <a:r>
+              <a:rPr lang="en-ID" sz="1100" b="0" i="0" u="none" strike="noStrike" cap="none" dirty="0" err="1">
+                <a:solidFill>
+                  <a:srgbClr val="000000"/>
+                </a:solidFill>
+                <a:effectLst/>
+                <a:latin typeface="Arial"/>
+                <a:ea typeface="Arial"/>
+                <a:cs typeface="Arial"/>
+                <a:sym typeface="Arial"/>
+              </a:rPr>
+              <a:t>unggulan</a:t>
+            </a:r>
+            <a:r>
+              <a:rPr lang="en-ID" sz="1100" b="0" i="0" u="none" strike="noStrike" cap="none" dirty="0">
+                <a:solidFill>
+                  <a:srgbClr val="000000"/>
+                </a:solidFill>
+                <a:effectLst/>
+                <a:latin typeface="Arial"/>
+                <a:ea typeface="Arial"/>
+                <a:cs typeface="Arial"/>
+                <a:sym typeface="Arial"/>
+              </a:rPr>
+              <a:t> </a:t>
+            </a:r>
+            <a:r>
+              <a:rPr lang="en-ID" sz="1100" b="0" i="0" u="none" strike="noStrike" cap="none" dirty="0" err="1">
+                <a:solidFill>
+                  <a:srgbClr val="000000"/>
+                </a:solidFill>
+                <a:effectLst/>
+                <a:latin typeface="Arial"/>
+                <a:ea typeface="Arial"/>
+                <a:cs typeface="Arial"/>
+                <a:sym typeface="Arial"/>
+              </a:rPr>
+              <a:t>inilah</a:t>
+            </a:r>
+            <a:r>
+              <a:rPr lang="en-ID" sz="1100" b="0" i="0" u="none" strike="noStrike" cap="none" dirty="0">
+                <a:solidFill>
+                  <a:srgbClr val="000000"/>
+                </a:solidFill>
+                <a:effectLst/>
+                <a:latin typeface="Arial"/>
+                <a:ea typeface="Arial"/>
+                <a:cs typeface="Arial"/>
+                <a:sym typeface="Arial"/>
+              </a:rPr>
+              <a:t>, </a:t>
+            </a:r>
+            <a:r>
+              <a:rPr lang="en-ID" sz="1100" b="0" i="0" u="none" strike="noStrike" cap="none" dirty="0" err="1">
+                <a:solidFill>
+                  <a:srgbClr val="000000"/>
+                </a:solidFill>
+                <a:effectLst/>
+                <a:latin typeface="Arial"/>
+                <a:ea typeface="Arial"/>
+                <a:cs typeface="Arial"/>
+                <a:sym typeface="Arial"/>
+              </a:rPr>
+              <a:t>saya</a:t>
+            </a:r>
+            <a:r>
+              <a:rPr lang="en-ID" sz="1100" b="0" i="0" u="none" strike="noStrike" cap="none" dirty="0">
+                <a:solidFill>
+                  <a:srgbClr val="000000"/>
+                </a:solidFill>
+                <a:effectLst/>
+                <a:latin typeface="Arial"/>
+                <a:ea typeface="Arial"/>
+                <a:cs typeface="Arial"/>
+                <a:sym typeface="Arial"/>
+              </a:rPr>
+              <a:t> </a:t>
+            </a:r>
+            <a:r>
+              <a:rPr lang="en-ID" sz="1100" b="0" i="0" u="none" strike="noStrike" cap="none" dirty="0" err="1">
+                <a:solidFill>
+                  <a:srgbClr val="000000"/>
+                </a:solidFill>
+                <a:effectLst/>
+                <a:latin typeface="Arial"/>
+                <a:ea typeface="Arial"/>
+                <a:cs typeface="Arial"/>
+                <a:sym typeface="Arial"/>
+              </a:rPr>
+              <a:t>memiliki</a:t>
+            </a:r>
+            <a:r>
+              <a:rPr lang="en-ID" sz="1100" b="0" i="0" u="none" strike="noStrike" cap="none" dirty="0">
+                <a:solidFill>
+                  <a:srgbClr val="000000"/>
+                </a:solidFill>
+                <a:effectLst/>
+                <a:latin typeface="Arial"/>
+                <a:ea typeface="Arial"/>
+                <a:cs typeface="Arial"/>
+                <a:sym typeface="Arial"/>
+              </a:rPr>
+              <a:t> </a:t>
+            </a:r>
+            <a:r>
+              <a:rPr lang="en-ID" sz="1100" b="0" i="0" u="none" strike="noStrike" cap="none" dirty="0" err="1">
+                <a:solidFill>
+                  <a:srgbClr val="000000"/>
+                </a:solidFill>
+                <a:effectLst/>
+                <a:latin typeface="Arial"/>
+                <a:ea typeface="Arial"/>
+                <a:cs typeface="Arial"/>
+                <a:sym typeface="Arial"/>
+              </a:rPr>
+              <a:t>fondasi</a:t>
+            </a:r>
+            <a:r>
+              <a:rPr lang="en-ID" sz="1100" b="0" i="0" u="none" strike="noStrike" cap="none" dirty="0">
+                <a:solidFill>
+                  <a:srgbClr val="000000"/>
+                </a:solidFill>
+                <a:effectLst/>
+                <a:latin typeface="Arial"/>
+                <a:ea typeface="Arial"/>
+                <a:cs typeface="Arial"/>
+                <a:sym typeface="Arial"/>
+              </a:rPr>
+              <a:t> yang sangat </a:t>
+            </a:r>
+            <a:r>
+              <a:rPr lang="en-ID" sz="1100" b="0" i="0" u="none" strike="noStrike" cap="none" dirty="0" err="1">
+                <a:solidFill>
+                  <a:srgbClr val="000000"/>
+                </a:solidFill>
+                <a:effectLst/>
+                <a:latin typeface="Arial"/>
+                <a:ea typeface="Arial"/>
+                <a:cs typeface="Arial"/>
+                <a:sym typeface="Arial"/>
+              </a:rPr>
+              <a:t>matang</a:t>
+            </a:r>
+            <a:r>
+              <a:rPr lang="en-ID" sz="1100" b="0" i="0" u="none" strike="noStrike" cap="none" dirty="0">
+                <a:solidFill>
+                  <a:srgbClr val="000000"/>
+                </a:solidFill>
+                <a:effectLst/>
+                <a:latin typeface="Arial"/>
+                <a:ea typeface="Arial"/>
+                <a:cs typeface="Arial"/>
+                <a:sym typeface="Arial"/>
+              </a:rPr>
+              <a:t> </a:t>
+            </a:r>
+            <a:r>
+              <a:rPr lang="en-ID" sz="1100" b="0" i="0" u="none" strike="noStrike" cap="none" dirty="0" err="1">
+                <a:solidFill>
+                  <a:srgbClr val="000000"/>
+                </a:solidFill>
+                <a:effectLst/>
+                <a:latin typeface="Arial"/>
+                <a:ea typeface="Arial"/>
+                <a:cs typeface="Arial"/>
+                <a:sym typeface="Arial"/>
+              </a:rPr>
+              <a:t>untuk</a:t>
+            </a:r>
+            <a:r>
+              <a:rPr lang="en-ID" sz="1100" b="0" i="0" u="none" strike="noStrike" cap="none" dirty="0">
+                <a:solidFill>
+                  <a:srgbClr val="000000"/>
+                </a:solidFill>
+                <a:effectLst/>
+                <a:latin typeface="Arial"/>
+                <a:ea typeface="Arial"/>
+                <a:cs typeface="Arial"/>
+                <a:sym typeface="Arial"/>
+              </a:rPr>
+              <a:t> </a:t>
+            </a:r>
+            <a:r>
+              <a:rPr lang="en-ID" sz="1100" b="0" i="0" u="none" strike="noStrike" cap="none" dirty="0" err="1">
+                <a:solidFill>
+                  <a:srgbClr val="000000"/>
+                </a:solidFill>
+                <a:effectLst/>
+                <a:latin typeface="Arial"/>
+                <a:ea typeface="Arial"/>
+                <a:cs typeface="Arial"/>
+                <a:sym typeface="Arial"/>
+              </a:rPr>
+              <a:t>mengeksekusi</a:t>
+            </a:r>
+            <a:r>
+              <a:rPr lang="en-ID" sz="1100" b="0" i="0" u="none" strike="noStrike" cap="none" dirty="0">
+                <a:solidFill>
+                  <a:srgbClr val="000000"/>
+                </a:solidFill>
+                <a:effectLst/>
+                <a:latin typeface="Arial"/>
+                <a:ea typeface="Arial"/>
+                <a:cs typeface="Arial"/>
+                <a:sym typeface="Arial"/>
+              </a:rPr>
+              <a:t> Final Project </a:t>
+            </a:r>
+            <a:r>
+              <a:rPr lang="en-ID" sz="1100" b="0" i="0" u="none" strike="noStrike" cap="none" dirty="0" err="1">
+                <a:solidFill>
+                  <a:srgbClr val="000000"/>
+                </a:solidFill>
+                <a:effectLst/>
+                <a:latin typeface="Arial"/>
+                <a:ea typeface="Arial"/>
+                <a:cs typeface="Arial"/>
+                <a:sym typeface="Arial"/>
+              </a:rPr>
+              <a:t>saya</a:t>
+            </a:r>
+            <a:r>
+              <a:rPr lang="en-ID" sz="1100" b="0" i="0" u="none" strike="noStrike" cap="none" dirty="0">
+                <a:solidFill>
+                  <a:srgbClr val="000000"/>
+                </a:solidFill>
+                <a:effectLst/>
+                <a:latin typeface="Arial"/>
+                <a:ea typeface="Arial"/>
+                <a:cs typeface="Arial"/>
+                <a:sym typeface="Arial"/>
+              </a:rPr>
+              <a:t> </a:t>
+            </a:r>
+            <a:r>
+              <a:rPr lang="en-ID" sz="1100" b="0" i="0" u="none" strike="noStrike" cap="none" dirty="0" err="1">
+                <a:solidFill>
+                  <a:srgbClr val="000000"/>
+                </a:solidFill>
+                <a:effectLst/>
+                <a:latin typeface="Arial"/>
+                <a:ea typeface="Arial"/>
+                <a:cs typeface="Arial"/>
+                <a:sym typeface="Arial"/>
+              </a:rPr>
+              <a:t>hari</a:t>
+            </a:r>
+            <a:r>
+              <a:rPr lang="en-ID" sz="1100" b="0" i="0" u="none" strike="noStrike" cap="none" dirty="0">
+                <a:solidFill>
+                  <a:srgbClr val="000000"/>
+                </a:solidFill>
+                <a:effectLst/>
+                <a:latin typeface="Arial"/>
+                <a:ea typeface="Arial"/>
+                <a:cs typeface="Arial"/>
+                <a:sym typeface="Arial"/>
+              </a:rPr>
+              <a:t> </a:t>
+            </a:r>
+            <a:r>
+              <a:rPr lang="en-ID" sz="1100" b="0" i="0" u="none" strike="noStrike" cap="none" dirty="0" err="1">
+                <a:solidFill>
+                  <a:srgbClr val="000000"/>
+                </a:solidFill>
+                <a:effectLst/>
+                <a:latin typeface="Arial"/>
+                <a:ea typeface="Arial"/>
+                <a:cs typeface="Arial"/>
+                <a:sym typeface="Arial"/>
+              </a:rPr>
+              <a:t>ini</a:t>
+            </a:r>
+            <a:endParaRPr lang="en-ID" sz="1100" b="0" i="0" u="none" strike="noStrike" cap="none" dirty="0">
+              <a:solidFill>
+                <a:srgbClr val="000000"/>
+              </a:solidFill>
+              <a:effectLst/>
+              <a:latin typeface="Arial"/>
+              <a:ea typeface="Arial"/>
+              <a:cs typeface="Arial"/>
+              <a:sym typeface="Arial"/>
+            </a:endParaRPr>
+          </a:p>
+          <a:p>
             <a:pPr marL="0" lvl="0" indent="0" algn="l" rtl="0">
               <a:spcBef>
                 <a:spcPts val="0"/>
@@ -1208,7 +2691,7 @@
               </a:spcAft>
               <a:buNone/>
             </a:pPr>
-            <a:endParaRPr/>
+            <a:endParaRPr dirty="0"/>
           </a:p>
         </p:txBody>
       </p:sp>
@@ -1312,7 +2795,969 @@
               </a:spcAft>
               <a:buNone/>
             </a:pPr>
-            <a:endParaRPr/>
+            <a:r>
+              <a:rPr lang="en-ID" sz="1100" b="0" i="0" u="none" strike="noStrike" cap="none" dirty="0">
+                <a:solidFill>
+                  <a:srgbClr val="000000"/>
+                </a:solidFill>
+                <a:effectLst/>
+                <a:latin typeface="Arial"/>
+                <a:ea typeface="Arial"/>
+                <a:cs typeface="Arial"/>
+                <a:sym typeface="Arial"/>
+              </a:rPr>
+              <a:t>Final Project </a:t>
+            </a:r>
+            <a:r>
+              <a:rPr lang="en-ID" sz="1100" b="0" i="0" u="none" strike="noStrike" cap="none" dirty="0" err="1">
+                <a:solidFill>
+                  <a:srgbClr val="000000"/>
+                </a:solidFill>
+                <a:effectLst/>
+                <a:latin typeface="Arial"/>
+                <a:ea typeface="Arial"/>
+                <a:cs typeface="Arial"/>
+                <a:sym typeface="Arial"/>
+              </a:rPr>
+              <a:t>saya</a:t>
+            </a:r>
+            <a:r>
+              <a:rPr lang="en-ID" sz="1100" b="0" i="0" u="none" strike="noStrike" cap="none" dirty="0">
+                <a:solidFill>
+                  <a:srgbClr val="000000"/>
+                </a:solidFill>
+                <a:effectLst/>
+                <a:latin typeface="Arial"/>
+                <a:ea typeface="Arial"/>
+                <a:cs typeface="Arial"/>
+                <a:sym typeface="Arial"/>
+              </a:rPr>
+              <a:t> </a:t>
+            </a:r>
+            <a:r>
+              <a:rPr lang="en-ID" sz="1100" b="0" i="0" u="none" strike="noStrike" cap="none" dirty="0" err="1">
+                <a:solidFill>
+                  <a:srgbClr val="000000"/>
+                </a:solidFill>
+                <a:effectLst/>
+                <a:latin typeface="Arial"/>
+                <a:ea typeface="Arial"/>
+                <a:cs typeface="Arial"/>
+                <a:sym typeface="Arial"/>
+              </a:rPr>
+              <a:t>adalah</a:t>
+            </a:r>
+            <a:r>
+              <a:rPr lang="en-ID" sz="1100" b="0" i="0" u="none" strike="noStrike" cap="none" dirty="0">
+                <a:solidFill>
+                  <a:srgbClr val="000000"/>
+                </a:solidFill>
+                <a:effectLst/>
+                <a:latin typeface="Arial"/>
+                <a:ea typeface="Arial"/>
+                <a:cs typeface="Arial"/>
+                <a:sym typeface="Arial"/>
+              </a:rPr>
+              <a:t> </a:t>
+            </a:r>
+            <a:r>
+              <a:rPr lang="en-ID" sz="1100" b="1" i="0" u="none" strike="noStrike" cap="none" dirty="0" err="1">
+                <a:solidFill>
+                  <a:srgbClr val="000000"/>
+                </a:solidFill>
+                <a:effectLst/>
+                <a:latin typeface="Arial"/>
+                <a:ea typeface="Arial"/>
+                <a:cs typeface="Arial"/>
+                <a:sym typeface="Arial"/>
+              </a:rPr>
+              <a:t>MediBook</a:t>
+            </a:r>
+            <a:r>
+              <a:rPr lang="en-ID" sz="1100" b="1" i="0" u="none" strike="noStrike" cap="none" dirty="0">
+                <a:solidFill>
+                  <a:srgbClr val="000000"/>
+                </a:solidFill>
+                <a:effectLst/>
+                <a:latin typeface="Arial"/>
+                <a:ea typeface="Arial"/>
+                <a:cs typeface="Arial"/>
+                <a:sym typeface="Arial"/>
+              </a:rPr>
+              <a:t> API</a:t>
+            </a:r>
+            <a:r>
+              <a:rPr lang="en-ID" sz="1100" b="0" i="0" u="none" strike="noStrike" cap="none" dirty="0">
+                <a:solidFill>
+                  <a:srgbClr val="000000"/>
+                </a:solidFill>
+                <a:effectLst/>
+                <a:latin typeface="Arial"/>
+                <a:ea typeface="Arial"/>
+                <a:cs typeface="Arial"/>
+                <a:sym typeface="Arial"/>
+              </a:rPr>
+              <a:t>, </a:t>
+            </a:r>
+            <a:r>
+              <a:rPr lang="en-ID" sz="1100" b="0" i="0" u="none" strike="noStrike" cap="none" dirty="0" err="1">
+                <a:solidFill>
+                  <a:srgbClr val="000000"/>
+                </a:solidFill>
+                <a:effectLst/>
+                <a:latin typeface="Arial"/>
+                <a:ea typeface="Arial"/>
+                <a:cs typeface="Arial"/>
+                <a:sym typeface="Arial"/>
+              </a:rPr>
+              <a:t>sebuah</a:t>
+            </a:r>
+            <a:r>
+              <a:rPr lang="en-ID" sz="1100" b="0" i="0" u="none" strike="noStrike" cap="none" dirty="0">
+                <a:solidFill>
+                  <a:srgbClr val="000000"/>
+                </a:solidFill>
+                <a:effectLst/>
+                <a:latin typeface="Arial"/>
+                <a:ea typeface="Arial"/>
+                <a:cs typeface="Arial"/>
+                <a:sym typeface="Arial"/>
+              </a:rPr>
+              <a:t> </a:t>
+            </a:r>
+            <a:r>
+              <a:rPr lang="en-ID" sz="1100" b="0" i="0" u="none" strike="noStrike" cap="none" dirty="0" err="1">
+                <a:solidFill>
+                  <a:srgbClr val="000000"/>
+                </a:solidFill>
+                <a:effectLst/>
+                <a:latin typeface="Arial"/>
+                <a:ea typeface="Arial"/>
+                <a:cs typeface="Arial"/>
+                <a:sym typeface="Arial"/>
+              </a:rPr>
+              <a:t>Sistem</a:t>
+            </a:r>
+            <a:r>
+              <a:rPr lang="en-ID" sz="1100" b="0" i="0" u="none" strike="noStrike" cap="none" dirty="0">
+                <a:solidFill>
+                  <a:srgbClr val="000000"/>
+                </a:solidFill>
+                <a:effectLst/>
+                <a:latin typeface="Arial"/>
+                <a:ea typeface="Arial"/>
+                <a:cs typeface="Arial"/>
+                <a:sym typeface="Arial"/>
+              </a:rPr>
+              <a:t> </a:t>
+            </a:r>
+            <a:r>
+              <a:rPr lang="en-ID" sz="1100" b="0" i="0" u="none" strike="noStrike" cap="none" dirty="0" err="1">
+                <a:solidFill>
+                  <a:srgbClr val="000000"/>
+                </a:solidFill>
+                <a:effectLst/>
+                <a:latin typeface="Arial"/>
+                <a:ea typeface="Arial"/>
+                <a:cs typeface="Arial"/>
+                <a:sym typeface="Arial"/>
+              </a:rPr>
+              <a:t>Manajemen</a:t>
+            </a:r>
+            <a:r>
+              <a:rPr lang="en-ID" sz="1100" b="0" i="0" u="none" strike="noStrike" cap="none" dirty="0">
+                <a:solidFill>
+                  <a:srgbClr val="000000"/>
+                </a:solidFill>
+                <a:effectLst/>
+                <a:latin typeface="Arial"/>
+                <a:ea typeface="Arial"/>
+                <a:cs typeface="Arial"/>
+                <a:sym typeface="Arial"/>
+              </a:rPr>
+              <a:t> </a:t>
+            </a:r>
+            <a:r>
+              <a:rPr lang="en-ID" sz="1100" b="0" i="0" u="none" strike="noStrike" cap="none" dirty="0" err="1">
+                <a:solidFill>
+                  <a:srgbClr val="000000"/>
+                </a:solidFill>
+                <a:effectLst/>
+                <a:latin typeface="Arial"/>
+                <a:ea typeface="Arial"/>
+                <a:cs typeface="Arial"/>
+                <a:sym typeface="Arial"/>
+              </a:rPr>
+              <a:t>Pendaftaran</a:t>
+            </a:r>
+            <a:r>
+              <a:rPr lang="en-ID" sz="1100" b="0" i="0" u="none" strike="noStrike" cap="none" dirty="0">
+                <a:solidFill>
+                  <a:srgbClr val="000000"/>
+                </a:solidFill>
+                <a:effectLst/>
+                <a:latin typeface="Arial"/>
+                <a:ea typeface="Arial"/>
+                <a:cs typeface="Arial"/>
+                <a:sym typeface="Arial"/>
+              </a:rPr>
+              <a:t> Rumah Sakit </a:t>
+            </a:r>
+            <a:r>
+              <a:rPr lang="en-ID" sz="1100" b="0" i="0" u="none" strike="noStrike" cap="none" dirty="0" err="1">
+                <a:solidFill>
+                  <a:srgbClr val="000000"/>
+                </a:solidFill>
+                <a:effectLst/>
+                <a:latin typeface="Arial"/>
+                <a:ea typeface="Arial"/>
+                <a:cs typeface="Arial"/>
+                <a:sym typeface="Arial"/>
+              </a:rPr>
+              <a:t>berbasis</a:t>
+            </a:r>
+            <a:r>
+              <a:rPr lang="en-ID" sz="1100" b="0" i="0" u="none" strike="noStrike" cap="none" dirty="0">
+                <a:solidFill>
+                  <a:srgbClr val="000000"/>
+                </a:solidFill>
+                <a:effectLst/>
+                <a:latin typeface="Arial"/>
+                <a:ea typeface="Arial"/>
+                <a:cs typeface="Arial"/>
+                <a:sym typeface="Arial"/>
+              </a:rPr>
+              <a:t> RESTful. Saya </a:t>
+            </a:r>
+            <a:r>
+              <a:rPr lang="en-ID" sz="1100" b="0" i="0" u="none" strike="noStrike" cap="none" dirty="0" err="1">
+                <a:solidFill>
+                  <a:srgbClr val="000000"/>
+                </a:solidFill>
+                <a:effectLst/>
+                <a:latin typeface="Arial"/>
+                <a:ea typeface="Arial"/>
+                <a:cs typeface="Arial"/>
+                <a:sym typeface="Arial"/>
+              </a:rPr>
+              <a:t>berangkat</a:t>
+            </a:r>
+            <a:r>
+              <a:rPr lang="en-ID" sz="1100" b="0" i="0" u="none" strike="noStrike" cap="none" dirty="0">
+                <a:solidFill>
+                  <a:srgbClr val="000000"/>
+                </a:solidFill>
+                <a:effectLst/>
+                <a:latin typeface="Arial"/>
+                <a:ea typeface="Arial"/>
+                <a:cs typeface="Arial"/>
+                <a:sym typeface="Arial"/>
+              </a:rPr>
+              <a:t> </a:t>
+            </a:r>
+            <a:r>
+              <a:rPr lang="en-ID" sz="1100" b="0" i="0" u="none" strike="noStrike" cap="none" dirty="0" err="1">
+                <a:solidFill>
+                  <a:srgbClr val="000000"/>
+                </a:solidFill>
+                <a:effectLst/>
+                <a:latin typeface="Arial"/>
+                <a:ea typeface="Arial"/>
+                <a:cs typeface="Arial"/>
+                <a:sym typeface="Arial"/>
+              </a:rPr>
+              <a:t>dari</a:t>
+            </a:r>
+            <a:r>
+              <a:rPr lang="en-ID" sz="1100" b="0" i="0" u="none" strike="noStrike" cap="none" dirty="0">
+                <a:solidFill>
+                  <a:srgbClr val="000000"/>
+                </a:solidFill>
+                <a:effectLst/>
+                <a:latin typeface="Arial"/>
+                <a:ea typeface="Arial"/>
+                <a:cs typeface="Arial"/>
+                <a:sym typeface="Arial"/>
+              </a:rPr>
+              <a:t> </a:t>
+            </a:r>
+            <a:r>
+              <a:rPr lang="en-ID" sz="1100" b="0" i="0" u="none" strike="noStrike" cap="none" dirty="0" err="1">
+                <a:solidFill>
+                  <a:srgbClr val="000000"/>
+                </a:solidFill>
+                <a:effectLst/>
+                <a:latin typeface="Arial"/>
+                <a:ea typeface="Arial"/>
+                <a:cs typeface="Arial"/>
+                <a:sym typeface="Arial"/>
+              </a:rPr>
+              <a:t>masalah</a:t>
+            </a:r>
+            <a:r>
+              <a:rPr lang="en-ID" sz="1100" b="0" i="0" u="none" strike="noStrike" cap="none" dirty="0">
+                <a:solidFill>
+                  <a:srgbClr val="000000"/>
+                </a:solidFill>
+                <a:effectLst/>
+                <a:latin typeface="Arial"/>
+                <a:ea typeface="Arial"/>
+                <a:cs typeface="Arial"/>
+                <a:sym typeface="Arial"/>
+              </a:rPr>
+              <a:t> </a:t>
+            </a:r>
+            <a:r>
+              <a:rPr lang="en-ID" sz="1100" b="0" i="0" u="none" strike="noStrike" cap="none" dirty="0" err="1">
+                <a:solidFill>
+                  <a:srgbClr val="000000"/>
+                </a:solidFill>
+                <a:effectLst/>
+                <a:latin typeface="Arial"/>
+                <a:ea typeface="Arial"/>
+                <a:cs typeface="Arial"/>
+                <a:sym typeface="Arial"/>
+              </a:rPr>
+              <a:t>klasik</a:t>
+            </a:r>
+            <a:r>
+              <a:rPr lang="en-ID" sz="1100" b="0" i="0" u="none" strike="noStrike" cap="none" dirty="0">
+                <a:solidFill>
+                  <a:srgbClr val="000000"/>
+                </a:solidFill>
+                <a:effectLst/>
+                <a:latin typeface="Arial"/>
+                <a:ea typeface="Arial"/>
+                <a:cs typeface="Arial"/>
+                <a:sym typeface="Arial"/>
+              </a:rPr>
+              <a:t> yang </a:t>
+            </a:r>
+            <a:r>
+              <a:rPr lang="en-ID" sz="1100" b="0" i="0" u="none" strike="noStrike" cap="none" dirty="0" err="1">
+                <a:solidFill>
+                  <a:srgbClr val="000000"/>
+                </a:solidFill>
+                <a:effectLst/>
+                <a:latin typeface="Arial"/>
+                <a:ea typeface="Arial"/>
+                <a:cs typeface="Arial"/>
+                <a:sym typeface="Arial"/>
+              </a:rPr>
+              <a:t>selalu</a:t>
+            </a:r>
+            <a:r>
+              <a:rPr lang="en-ID" sz="1100" b="0" i="0" u="none" strike="noStrike" cap="none" dirty="0">
+                <a:solidFill>
+                  <a:srgbClr val="000000"/>
+                </a:solidFill>
+                <a:effectLst/>
+                <a:latin typeface="Arial"/>
+                <a:ea typeface="Arial"/>
+                <a:cs typeface="Arial"/>
+                <a:sym typeface="Arial"/>
+              </a:rPr>
+              <a:t> </a:t>
+            </a:r>
+            <a:r>
+              <a:rPr lang="en-ID" sz="1100" b="0" i="0" u="none" strike="noStrike" cap="none" dirty="0" err="1">
+                <a:solidFill>
+                  <a:srgbClr val="000000"/>
+                </a:solidFill>
+                <a:effectLst/>
+                <a:latin typeface="Arial"/>
+                <a:ea typeface="Arial"/>
+                <a:cs typeface="Arial"/>
+                <a:sym typeface="Arial"/>
+              </a:rPr>
+              <a:t>terjadi</a:t>
+            </a:r>
+            <a:r>
+              <a:rPr lang="en-ID" sz="1100" b="0" i="0" u="none" strike="noStrike" cap="none" dirty="0">
+                <a:solidFill>
+                  <a:srgbClr val="000000"/>
+                </a:solidFill>
+                <a:effectLst/>
+                <a:latin typeface="Arial"/>
+                <a:ea typeface="Arial"/>
+                <a:cs typeface="Arial"/>
+                <a:sym typeface="Arial"/>
+              </a:rPr>
+              <a:t> di </a:t>
+            </a:r>
+            <a:r>
+              <a:rPr lang="en-ID" sz="1100" b="0" i="0" u="none" strike="noStrike" cap="none" dirty="0" err="1">
+                <a:solidFill>
+                  <a:srgbClr val="000000"/>
+                </a:solidFill>
+                <a:effectLst/>
+                <a:latin typeface="Arial"/>
+                <a:ea typeface="Arial"/>
+                <a:cs typeface="Arial"/>
+                <a:sym typeface="Arial"/>
+              </a:rPr>
+              <a:t>rumah</a:t>
+            </a:r>
+            <a:r>
+              <a:rPr lang="en-ID" sz="1100" b="0" i="0" u="none" strike="noStrike" cap="none" dirty="0">
+                <a:solidFill>
+                  <a:srgbClr val="000000"/>
+                </a:solidFill>
+                <a:effectLst/>
+                <a:latin typeface="Arial"/>
+                <a:ea typeface="Arial"/>
+                <a:cs typeface="Arial"/>
+                <a:sym typeface="Arial"/>
+              </a:rPr>
+              <a:t> </a:t>
+            </a:r>
+            <a:r>
+              <a:rPr lang="en-ID" sz="1100" b="0" i="0" u="none" strike="noStrike" cap="none" dirty="0" err="1">
+                <a:solidFill>
+                  <a:srgbClr val="000000"/>
+                </a:solidFill>
+                <a:effectLst/>
+                <a:latin typeface="Arial"/>
+                <a:ea typeface="Arial"/>
+                <a:cs typeface="Arial"/>
+                <a:sym typeface="Arial"/>
+              </a:rPr>
+              <a:t>sakit</a:t>
+            </a:r>
+            <a:r>
+              <a:rPr lang="en-ID" sz="1100" b="0" i="0" u="none" strike="noStrike" cap="none" dirty="0">
+                <a:solidFill>
+                  <a:srgbClr val="000000"/>
+                </a:solidFill>
+                <a:effectLst/>
+                <a:latin typeface="Arial"/>
+                <a:ea typeface="Arial"/>
+                <a:cs typeface="Arial"/>
+                <a:sym typeface="Arial"/>
+              </a:rPr>
+              <a:t>: </a:t>
+            </a:r>
+            <a:r>
+              <a:rPr lang="en-ID" sz="1100" b="0" i="0" u="none" strike="noStrike" cap="none" dirty="0" err="1">
+                <a:solidFill>
+                  <a:srgbClr val="000000"/>
+                </a:solidFill>
+                <a:effectLst/>
+                <a:latin typeface="Arial"/>
+                <a:ea typeface="Arial"/>
+                <a:cs typeface="Arial"/>
+                <a:sym typeface="Arial"/>
+              </a:rPr>
+              <a:t>Pasien</a:t>
+            </a:r>
+            <a:r>
+              <a:rPr lang="en-ID" sz="1100" b="0" i="0" u="none" strike="noStrike" cap="none" dirty="0">
+                <a:solidFill>
+                  <a:srgbClr val="000000"/>
+                </a:solidFill>
+                <a:effectLst/>
+                <a:latin typeface="Arial"/>
+                <a:ea typeface="Arial"/>
+                <a:cs typeface="Arial"/>
+                <a:sym typeface="Arial"/>
+              </a:rPr>
+              <a:t> antre </a:t>
+            </a:r>
+            <a:r>
+              <a:rPr lang="en-ID" sz="1100" b="0" i="0" u="none" strike="noStrike" cap="none" dirty="0" err="1">
+                <a:solidFill>
+                  <a:srgbClr val="000000"/>
+                </a:solidFill>
+                <a:effectLst/>
+                <a:latin typeface="Arial"/>
+                <a:ea typeface="Arial"/>
+                <a:cs typeface="Arial"/>
+                <a:sym typeface="Arial"/>
+              </a:rPr>
+              <a:t>berjam</a:t>
+            </a:r>
+            <a:r>
+              <a:rPr lang="en-ID" sz="1100" b="0" i="0" u="none" strike="noStrike" cap="none" dirty="0">
+                <a:solidFill>
+                  <a:srgbClr val="000000"/>
+                </a:solidFill>
+                <a:effectLst/>
+                <a:latin typeface="Arial"/>
+                <a:ea typeface="Arial"/>
+                <a:cs typeface="Arial"/>
+                <a:sym typeface="Arial"/>
+              </a:rPr>
+              <a:t>-jam </a:t>
+            </a:r>
+            <a:r>
+              <a:rPr lang="en-ID" sz="1100" b="0" i="0" u="none" strike="noStrike" cap="none" dirty="0" err="1">
+                <a:solidFill>
+                  <a:srgbClr val="000000"/>
+                </a:solidFill>
+                <a:effectLst/>
+                <a:latin typeface="Arial"/>
+                <a:ea typeface="Arial"/>
+                <a:cs typeface="Arial"/>
+                <a:sym typeface="Arial"/>
+              </a:rPr>
+              <a:t>sejak</a:t>
+            </a:r>
+            <a:r>
+              <a:rPr lang="en-ID" sz="1100" b="0" i="0" u="none" strike="noStrike" cap="none" dirty="0">
+                <a:solidFill>
+                  <a:srgbClr val="000000"/>
+                </a:solidFill>
+                <a:effectLst/>
+                <a:latin typeface="Arial"/>
+                <a:ea typeface="Arial"/>
+                <a:cs typeface="Arial"/>
+                <a:sym typeface="Arial"/>
+              </a:rPr>
+              <a:t> </a:t>
+            </a:r>
+            <a:r>
+              <a:rPr lang="en-ID" sz="1100" b="0" i="0" u="none" strike="noStrike" cap="none" dirty="0" err="1">
+                <a:solidFill>
+                  <a:srgbClr val="000000"/>
+                </a:solidFill>
+                <a:effectLst/>
+                <a:latin typeface="Arial"/>
+                <a:ea typeface="Arial"/>
+                <a:cs typeface="Arial"/>
+                <a:sym typeface="Arial"/>
+              </a:rPr>
+              <a:t>subuh</a:t>
+            </a:r>
+            <a:r>
+              <a:rPr lang="en-ID" sz="1100" b="0" i="0" u="none" strike="noStrike" cap="none" dirty="0">
+                <a:solidFill>
+                  <a:srgbClr val="000000"/>
+                </a:solidFill>
+                <a:effectLst/>
+                <a:latin typeface="Arial"/>
+                <a:ea typeface="Arial"/>
+                <a:cs typeface="Arial"/>
+                <a:sym typeface="Arial"/>
+              </a:rPr>
+              <a:t>, </a:t>
+            </a:r>
+            <a:r>
+              <a:rPr lang="en-ID" sz="1100" b="0" i="0" u="none" strike="noStrike" cap="none" dirty="0" err="1">
+                <a:solidFill>
+                  <a:srgbClr val="000000"/>
+                </a:solidFill>
+                <a:effectLst/>
+                <a:latin typeface="Arial"/>
+                <a:ea typeface="Arial"/>
+                <a:cs typeface="Arial"/>
+                <a:sym typeface="Arial"/>
+              </a:rPr>
+              <a:t>kuota</a:t>
+            </a:r>
+            <a:r>
+              <a:rPr lang="en-ID" sz="1100" b="0" i="0" u="none" strike="noStrike" cap="none" dirty="0">
+                <a:solidFill>
+                  <a:srgbClr val="000000"/>
+                </a:solidFill>
+                <a:effectLst/>
+                <a:latin typeface="Arial"/>
+                <a:ea typeface="Arial"/>
+                <a:cs typeface="Arial"/>
+                <a:sym typeface="Arial"/>
+              </a:rPr>
+              <a:t> </a:t>
+            </a:r>
+            <a:r>
+              <a:rPr lang="en-ID" sz="1100" b="0" i="0" u="none" strike="noStrike" cap="none" dirty="0" err="1">
+                <a:solidFill>
+                  <a:srgbClr val="000000"/>
+                </a:solidFill>
+                <a:effectLst/>
+                <a:latin typeface="Arial"/>
+                <a:ea typeface="Arial"/>
+                <a:cs typeface="Arial"/>
+                <a:sym typeface="Arial"/>
+              </a:rPr>
+              <a:t>dokter</a:t>
+            </a:r>
+            <a:r>
+              <a:rPr lang="en-ID" sz="1100" b="0" i="0" u="none" strike="noStrike" cap="none" dirty="0">
+                <a:solidFill>
+                  <a:srgbClr val="000000"/>
+                </a:solidFill>
+                <a:effectLst/>
+                <a:latin typeface="Arial"/>
+                <a:ea typeface="Arial"/>
+                <a:cs typeface="Arial"/>
+                <a:sym typeface="Arial"/>
+              </a:rPr>
+              <a:t> yang </a:t>
+            </a:r>
+            <a:r>
+              <a:rPr lang="en-ID" sz="1100" b="0" i="0" u="none" strike="noStrike" cap="none" dirty="0" err="1">
+                <a:solidFill>
+                  <a:srgbClr val="000000"/>
+                </a:solidFill>
+                <a:effectLst/>
+                <a:latin typeface="Arial"/>
+                <a:ea typeface="Arial"/>
+                <a:cs typeface="Arial"/>
+                <a:sym typeface="Arial"/>
+              </a:rPr>
+              <a:t>sering</a:t>
+            </a:r>
+            <a:r>
+              <a:rPr lang="en-ID" sz="1100" b="0" i="0" u="none" strike="noStrike" cap="none" dirty="0">
+                <a:solidFill>
+                  <a:srgbClr val="000000"/>
+                </a:solidFill>
+                <a:effectLst/>
+                <a:latin typeface="Arial"/>
+                <a:ea typeface="Arial"/>
+                <a:cs typeface="Arial"/>
+                <a:sym typeface="Arial"/>
+              </a:rPr>
+              <a:t> </a:t>
+            </a:r>
+            <a:r>
+              <a:rPr lang="en-ID" sz="1100" b="0" i="0" u="none" strike="noStrike" cap="none" dirty="0" err="1">
+                <a:solidFill>
+                  <a:srgbClr val="000000"/>
+                </a:solidFill>
+                <a:effectLst/>
+                <a:latin typeface="Arial"/>
+                <a:ea typeface="Arial"/>
+                <a:cs typeface="Arial"/>
+                <a:sym typeface="Arial"/>
+              </a:rPr>
+              <a:t>kebobolan</a:t>
+            </a:r>
+            <a:r>
+              <a:rPr lang="en-ID" sz="1100" b="0" i="0" u="none" strike="noStrike" cap="none" dirty="0">
+                <a:solidFill>
+                  <a:srgbClr val="000000"/>
+                </a:solidFill>
+                <a:effectLst/>
+                <a:latin typeface="Arial"/>
+                <a:ea typeface="Arial"/>
+                <a:cs typeface="Arial"/>
+                <a:sym typeface="Arial"/>
+              </a:rPr>
+              <a:t> </a:t>
+            </a:r>
+            <a:r>
+              <a:rPr lang="en-ID" sz="1100" b="0" i="0" u="none" strike="noStrike" cap="none" dirty="0" err="1">
+                <a:solidFill>
+                  <a:srgbClr val="000000"/>
+                </a:solidFill>
+                <a:effectLst/>
+                <a:latin typeface="Arial"/>
+                <a:ea typeface="Arial"/>
+                <a:cs typeface="Arial"/>
+                <a:sym typeface="Arial"/>
+              </a:rPr>
+              <a:t>karena</a:t>
+            </a:r>
+            <a:r>
+              <a:rPr lang="en-ID" sz="1100" b="0" i="0" u="none" strike="noStrike" cap="none" dirty="0">
+                <a:solidFill>
+                  <a:srgbClr val="000000"/>
+                </a:solidFill>
+                <a:effectLst/>
+                <a:latin typeface="Arial"/>
+                <a:ea typeface="Arial"/>
+                <a:cs typeface="Arial"/>
+                <a:sym typeface="Arial"/>
+              </a:rPr>
+              <a:t> </a:t>
+            </a:r>
+            <a:r>
+              <a:rPr lang="en-ID" sz="1100" b="0" i="0" u="none" strike="noStrike" cap="none" dirty="0" err="1">
+                <a:solidFill>
+                  <a:srgbClr val="000000"/>
+                </a:solidFill>
+                <a:effectLst/>
+                <a:latin typeface="Arial"/>
+                <a:ea typeface="Arial"/>
+                <a:cs typeface="Arial"/>
+                <a:sym typeface="Arial"/>
+              </a:rPr>
+              <a:t>sistem</a:t>
+            </a:r>
+            <a:r>
+              <a:rPr lang="en-ID" sz="1100" b="0" i="0" u="none" strike="noStrike" cap="none" dirty="0">
+                <a:solidFill>
+                  <a:srgbClr val="000000"/>
+                </a:solidFill>
+                <a:effectLst/>
+                <a:latin typeface="Arial"/>
+                <a:ea typeface="Arial"/>
+                <a:cs typeface="Arial"/>
+                <a:sym typeface="Arial"/>
+              </a:rPr>
+              <a:t> </a:t>
+            </a:r>
+            <a:r>
+              <a:rPr lang="en-ID" sz="1100" b="0" i="0" u="none" strike="noStrike" cap="none" dirty="0" err="1">
+                <a:solidFill>
+                  <a:srgbClr val="000000"/>
+                </a:solidFill>
+                <a:effectLst/>
+                <a:latin typeface="Arial"/>
+                <a:ea typeface="Arial"/>
+                <a:cs typeface="Arial"/>
+                <a:sym typeface="Arial"/>
+              </a:rPr>
+              <a:t>tidak</a:t>
+            </a:r>
+            <a:r>
+              <a:rPr lang="en-ID" sz="1100" b="0" i="0" u="none" strike="noStrike" cap="none" dirty="0">
+                <a:solidFill>
+                  <a:srgbClr val="000000"/>
+                </a:solidFill>
+                <a:effectLst/>
+                <a:latin typeface="Arial"/>
+                <a:ea typeface="Arial"/>
+                <a:cs typeface="Arial"/>
+                <a:sym typeface="Arial"/>
+              </a:rPr>
+              <a:t> </a:t>
+            </a:r>
+            <a:r>
+              <a:rPr lang="en-ID" sz="1100" b="0" i="0" u="none" strike="noStrike" cap="none" dirty="0" err="1">
+                <a:solidFill>
+                  <a:srgbClr val="000000"/>
+                </a:solidFill>
+                <a:effectLst/>
+                <a:latin typeface="Arial"/>
+                <a:ea typeface="Arial"/>
+                <a:cs typeface="Arial"/>
+                <a:sym typeface="Arial"/>
+              </a:rPr>
+              <a:t>siap</a:t>
+            </a:r>
+            <a:r>
+              <a:rPr lang="en-ID" sz="1100" b="0" i="0" u="none" strike="noStrike" cap="none" dirty="0">
+                <a:solidFill>
+                  <a:srgbClr val="000000"/>
+                </a:solidFill>
+                <a:effectLst/>
+                <a:latin typeface="Arial"/>
+                <a:ea typeface="Arial"/>
+                <a:cs typeface="Arial"/>
+                <a:sym typeface="Arial"/>
+              </a:rPr>
+              <a:t> </a:t>
+            </a:r>
+            <a:r>
+              <a:rPr lang="en-ID" sz="1100" b="0" i="0" u="none" strike="noStrike" cap="none" dirty="0" err="1">
+                <a:solidFill>
+                  <a:srgbClr val="000000"/>
+                </a:solidFill>
+                <a:effectLst/>
+                <a:latin typeface="Arial"/>
+                <a:ea typeface="Arial"/>
+                <a:cs typeface="Arial"/>
+                <a:sym typeface="Arial"/>
+              </a:rPr>
+              <a:t>menerima</a:t>
+            </a:r>
+            <a:r>
+              <a:rPr lang="en-ID" sz="1100" b="0" i="0" u="none" strike="noStrike" cap="none" dirty="0">
+                <a:solidFill>
+                  <a:srgbClr val="000000"/>
+                </a:solidFill>
+                <a:effectLst/>
+                <a:latin typeface="Arial"/>
+                <a:ea typeface="Arial"/>
+                <a:cs typeface="Arial"/>
+                <a:sym typeface="Arial"/>
+              </a:rPr>
+              <a:t> 'request' </a:t>
+            </a:r>
+            <a:r>
+              <a:rPr lang="en-ID" sz="1100" b="0" i="0" u="none" strike="noStrike" cap="none" dirty="0" err="1">
+                <a:solidFill>
+                  <a:srgbClr val="000000"/>
+                </a:solidFill>
+                <a:effectLst/>
+                <a:latin typeface="Arial"/>
+                <a:ea typeface="Arial"/>
+                <a:cs typeface="Arial"/>
+                <a:sym typeface="Arial"/>
+              </a:rPr>
+              <a:t>bersamaan</a:t>
+            </a:r>
+            <a:r>
+              <a:rPr lang="en-ID" sz="1100" b="0" i="0" u="none" strike="noStrike" cap="none" dirty="0">
+                <a:solidFill>
+                  <a:srgbClr val="000000"/>
+                </a:solidFill>
+                <a:effectLst/>
+                <a:latin typeface="Arial"/>
+                <a:ea typeface="Arial"/>
+                <a:cs typeface="Arial"/>
+                <a:sym typeface="Arial"/>
+              </a:rPr>
+              <a:t>, dan server yang down </a:t>
+            </a:r>
+            <a:r>
+              <a:rPr lang="en-ID" sz="1100" b="0" i="0" u="none" strike="noStrike" cap="none" dirty="0" err="1">
+                <a:solidFill>
+                  <a:srgbClr val="000000"/>
+                </a:solidFill>
+                <a:effectLst/>
+                <a:latin typeface="Arial"/>
+                <a:ea typeface="Arial"/>
+                <a:cs typeface="Arial"/>
+                <a:sym typeface="Arial"/>
+              </a:rPr>
+              <a:t>karena</a:t>
+            </a:r>
+            <a:r>
+              <a:rPr lang="en-ID" sz="1100" b="0" i="0" u="none" strike="noStrike" cap="none" dirty="0">
+                <a:solidFill>
+                  <a:srgbClr val="000000"/>
+                </a:solidFill>
+                <a:effectLst/>
+                <a:latin typeface="Arial"/>
+                <a:ea typeface="Arial"/>
+                <a:cs typeface="Arial"/>
+                <a:sym typeface="Arial"/>
+              </a:rPr>
+              <a:t> </a:t>
+            </a:r>
+            <a:r>
+              <a:rPr lang="en-ID" sz="1100" b="0" i="0" u="none" strike="noStrike" cap="none" dirty="0" err="1">
+                <a:solidFill>
+                  <a:srgbClr val="000000"/>
+                </a:solidFill>
+                <a:effectLst/>
+                <a:latin typeface="Arial"/>
+                <a:ea typeface="Arial"/>
+                <a:cs typeface="Arial"/>
+                <a:sym typeface="Arial"/>
+              </a:rPr>
+              <a:t>pasien</a:t>
+            </a:r>
+            <a:r>
+              <a:rPr lang="en-ID" sz="1100" b="0" i="0" u="none" strike="noStrike" cap="none" dirty="0">
+                <a:solidFill>
+                  <a:srgbClr val="000000"/>
+                </a:solidFill>
+                <a:effectLst/>
+                <a:latin typeface="Arial"/>
+                <a:ea typeface="Arial"/>
+                <a:cs typeface="Arial"/>
+                <a:sym typeface="Arial"/>
+              </a:rPr>
+              <a:t> </a:t>
+            </a:r>
+            <a:r>
+              <a:rPr lang="en-ID" sz="1100" b="0" i="0" u="none" strike="noStrike" cap="none" dirty="0" err="1">
+                <a:solidFill>
+                  <a:srgbClr val="000000"/>
+                </a:solidFill>
+                <a:effectLst/>
+                <a:latin typeface="Arial"/>
+                <a:ea typeface="Arial"/>
+                <a:cs typeface="Arial"/>
+                <a:sym typeface="Arial"/>
+              </a:rPr>
+              <a:t>nge</a:t>
+            </a:r>
+            <a:r>
+              <a:rPr lang="en-ID" sz="1100" b="0" i="0" u="none" strike="noStrike" cap="none" dirty="0">
+                <a:solidFill>
+                  <a:srgbClr val="000000"/>
+                </a:solidFill>
+                <a:effectLst/>
+                <a:latin typeface="Arial"/>
+                <a:ea typeface="Arial"/>
+                <a:cs typeface="Arial"/>
+                <a:sym typeface="Arial"/>
+              </a:rPr>
+              <a:t>-lag </a:t>
+            </a:r>
+            <a:r>
+              <a:rPr lang="en-ID" sz="1100" b="0" i="0" u="none" strike="noStrike" cap="none" dirty="0" err="1">
+                <a:solidFill>
+                  <a:srgbClr val="000000"/>
+                </a:solidFill>
+                <a:effectLst/>
+                <a:latin typeface="Arial"/>
+                <a:ea typeface="Arial"/>
+                <a:cs typeface="Arial"/>
+                <a:sym typeface="Arial"/>
+              </a:rPr>
+              <a:t>menekan</a:t>
+            </a:r>
+            <a:r>
+              <a:rPr lang="en-ID" sz="1100" b="0" i="0" u="none" strike="noStrike" cap="none" dirty="0">
+                <a:solidFill>
+                  <a:srgbClr val="000000"/>
+                </a:solidFill>
+                <a:effectLst/>
+                <a:latin typeface="Arial"/>
+                <a:ea typeface="Arial"/>
+                <a:cs typeface="Arial"/>
+                <a:sym typeface="Arial"/>
+              </a:rPr>
+              <a:t> </a:t>
+            </a:r>
+            <a:r>
+              <a:rPr lang="en-ID" sz="1100" b="0" i="0" u="none" strike="noStrike" cap="none" dirty="0" err="1">
+                <a:solidFill>
+                  <a:srgbClr val="000000"/>
+                </a:solidFill>
+                <a:effectLst/>
+                <a:latin typeface="Arial"/>
+                <a:ea typeface="Arial"/>
+                <a:cs typeface="Arial"/>
+                <a:sym typeface="Arial"/>
+              </a:rPr>
+              <a:t>tombol</a:t>
+            </a:r>
+            <a:r>
+              <a:rPr lang="en-ID" sz="1100" b="0" i="0" u="none" strike="noStrike" cap="none" dirty="0">
+                <a:solidFill>
+                  <a:srgbClr val="000000"/>
+                </a:solidFill>
+                <a:effectLst/>
+                <a:latin typeface="Arial"/>
+                <a:ea typeface="Arial"/>
+                <a:cs typeface="Arial"/>
+                <a:sym typeface="Arial"/>
+              </a:rPr>
+              <a:t> daftar </a:t>
+            </a:r>
+            <a:r>
+              <a:rPr lang="en-ID" sz="1100" b="0" i="0" u="none" strike="noStrike" cap="none" dirty="0" err="1">
+                <a:solidFill>
+                  <a:srgbClr val="000000"/>
+                </a:solidFill>
+                <a:effectLst/>
+                <a:latin typeface="Arial"/>
+                <a:ea typeface="Arial"/>
+                <a:cs typeface="Arial"/>
+                <a:sym typeface="Arial"/>
+              </a:rPr>
+              <a:t>berkali</a:t>
+            </a:r>
+            <a:r>
+              <a:rPr lang="en-ID" sz="1100" b="0" i="0" u="none" strike="noStrike" cap="none" dirty="0">
+                <a:solidFill>
+                  <a:srgbClr val="000000"/>
+                </a:solidFill>
+                <a:effectLst/>
+                <a:latin typeface="Arial"/>
+                <a:ea typeface="Arial"/>
+                <a:cs typeface="Arial"/>
+                <a:sym typeface="Arial"/>
+              </a:rPr>
+              <a:t>-kali.</a:t>
+            </a:r>
+            <a:endParaRPr dirty="0"/>
           </a:p>
         </p:txBody>
       </p:sp>
@@ -1407,6 +3852,1700 @@
           </a:bodyPr>
           <a:lstStyle/>
           <a:p>
+            <a:r>
+              <a:rPr lang="en-ID" sz="1100" b="0" i="0" u="none" strike="noStrike" cap="none" dirty="0">
+                <a:solidFill>
+                  <a:srgbClr val="000000"/>
+                </a:solidFill>
+                <a:effectLst/>
+                <a:latin typeface="Arial"/>
+                <a:ea typeface="Arial"/>
+                <a:cs typeface="Arial"/>
+                <a:sym typeface="Arial"/>
+              </a:rPr>
+              <a:t>Final Project </a:t>
+            </a:r>
+            <a:r>
+              <a:rPr lang="en-ID" sz="1100" b="0" i="0" u="none" strike="noStrike" cap="none" dirty="0" err="1">
+                <a:solidFill>
+                  <a:srgbClr val="000000"/>
+                </a:solidFill>
+                <a:effectLst/>
+                <a:latin typeface="Arial"/>
+                <a:ea typeface="Arial"/>
+                <a:cs typeface="Arial"/>
+                <a:sym typeface="Arial"/>
+              </a:rPr>
+              <a:t>saya</a:t>
+            </a:r>
+            <a:r>
+              <a:rPr lang="en-ID" sz="1100" b="0" i="0" u="none" strike="noStrike" cap="none" dirty="0">
+                <a:solidFill>
+                  <a:srgbClr val="000000"/>
+                </a:solidFill>
+                <a:effectLst/>
+                <a:latin typeface="Arial"/>
+                <a:ea typeface="Arial"/>
+                <a:cs typeface="Arial"/>
+                <a:sym typeface="Arial"/>
+              </a:rPr>
+              <a:t> </a:t>
+            </a:r>
+            <a:r>
+              <a:rPr lang="en-ID" sz="1100" b="0" i="0" u="none" strike="noStrike" cap="none" dirty="0" err="1">
+                <a:solidFill>
+                  <a:srgbClr val="000000"/>
+                </a:solidFill>
+                <a:effectLst/>
+                <a:latin typeface="Arial"/>
+                <a:ea typeface="Arial"/>
+                <a:cs typeface="Arial"/>
+                <a:sym typeface="Arial"/>
+              </a:rPr>
+              <a:t>adalah</a:t>
+            </a:r>
+            <a:r>
+              <a:rPr lang="en-ID" sz="1100" b="0" i="0" u="none" strike="noStrike" cap="none" dirty="0">
+                <a:solidFill>
+                  <a:srgbClr val="000000"/>
+                </a:solidFill>
+                <a:effectLst/>
+                <a:latin typeface="Arial"/>
+                <a:ea typeface="Arial"/>
+                <a:cs typeface="Arial"/>
+                <a:sym typeface="Arial"/>
+              </a:rPr>
+              <a:t> </a:t>
+            </a:r>
+            <a:r>
+              <a:rPr lang="en-ID" sz="1100" b="1" i="0" u="none" strike="noStrike" cap="none" dirty="0" err="1">
+                <a:solidFill>
+                  <a:srgbClr val="000000"/>
+                </a:solidFill>
+                <a:effectLst/>
+                <a:latin typeface="Arial"/>
+                <a:ea typeface="Arial"/>
+                <a:cs typeface="Arial"/>
+                <a:sym typeface="Arial"/>
+              </a:rPr>
+              <a:t>MediBook</a:t>
+            </a:r>
+            <a:r>
+              <a:rPr lang="en-ID" sz="1100" b="1" i="0" u="none" strike="noStrike" cap="none" dirty="0">
+                <a:solidFill>
+                  <a:srgbClr val="000000"/>
+                </a:solidFill>
+                <a:effectLst/>
+                <a:latin typeface="Arial"/>
+                <a:ea typeface="Arial"/>
+                <a:cs typeface="Arial"/>
+                <a:sym typeface="Arial"/>
+              </a:rPr>
+              <a:t> API</a:t>
+            </a:r>
+            <a:r>
+              <a:rPr lang="en-ID" sz="1100" b="0" i="0" u="none" strike="noStrike" cap="none" dirty="0">
+                <a:solidFill>
+                  <a:srgbClr val="000000"/>
+                </a:solidFill>
+                <a:effectLst/>
+                <a:latin typeface="Arial"/>
+                <a:ea typeface="Arial"/>
+                <a:cs typeface="Arial"/>
+                <a:sym typeface="Arial"/>
+              </a:rPr>
+              <a:t>, </a:t>
+            </a:r>
+            <a:r>
+              <a:rPr lang="en-ID" sz="1100" b="0" i="0" u="none" strike="noStrike" cap="none" dirty="0" err="1">
+                <a:solidFill>
+                  <a:srgbClr val="000000"/>
+                </a:solidFill>
+                <a:effectLst/>
+                <a:latin typeface="Arial"/>
+                <a:ea typeface="Arial"/>
+                <a:cs typeface="Arial"/>
+                <a:sym typeface="Arial"/>
+              </a:rPr>
+              <a:t>sebuah</a:t>
+            </a:r>
+            <a:r>
+              <a:rPr lang="en-ID" sz="1100" b="0" i="0" u="none" strike="noStrike" cap="none" dirty="0">
+                <a:solidFill>
+                  <a:srgbClr val="000000"/>
+                </a:solidFill>
+                <a:effectLst/>
+                <a:latin typeface="Arial"/>
+                <a:ea typeface="Arial"/>
+                <a:cs typeface="Arial"/>
+                <a:sym typeface="Arial"/>
+              </a:rPr>
+              <a:t> </a:t>
+            </a:r>
+            <a:r>
+              <a:rPr lang="en-ID" sz="1100" b="0" i="0" u="none" strike="noStrike" cap="none" dirty="0" err="1">
+                <a:solidFill>
+                  <a:srgbClr val="000000"/>
+                </a:solidFill>
+                <a:effectLst/>
+                <a:latin typeface="Arial"/>
+                <a:ea typeface="Arial"/>
+                <a:cs typeface="Arial"/>
+                <a:sym typeface="Arial"/>
+              </a:rPr>
+              <a:t>Sistem</a:t>
+            </a:r>
+            <a:r>
+              <a:rPr lang="en-ID" sz="1100" b="0" i="0" u="none" strike="noStrike" cap="none" dirty="0">
+                <a:solidFill>
+                  <a:srgbClr val="000000"/>
+                </a:solidFill>
+                <a:effectLst/>
+                <a:latin typeface="Arial"/>
+                <a:ea typeface="Arial"/>
+                <a:cs typeface="Arial"/>
+                <a:sym typeface="Arial"/>
+              </a:rPr>
+              <a:t> </a:t>
+            </a:r>
+            <a:r>
+              <a:rPr lang="en-ID" sz="1100" b="0" i="0" u="none" strike="noStrike" cap="none" dirty="0" err="1">
+                <a:solidFill>
+                  <a:srgbClr val="000000"/>
+                </a:solidFill>
+                <a:effectLst/>
+                <a:latin typeface="Arial"/>
+                <a:ea typeface="Arial"/>
+                <a:cs typeface="Arial"/>
+                <a:sym typeface="Arial"/>
+              </a:rPr>
+              <a:t>Manajemen</a:t>
+            </a:r>
+            <a:r>
+              <a:rPr lang="en-ID" sz="1100" b="0" i="0" u="none" strike="noStrike" cap="none" dirty="0">
+                <a:solidFill>
+                  <a:srgbClr val="000000"/>
+                </a:solidFill>
+                <a:effectLst/>
+                <a:latin typeface="Arial"/>
+                <a:ea typeface="Arial"/>
+                <a:cs typeface="Arial"/>
+                <a:sym typeface="Arial"/>
+              </a:rPr>
+              <a:t> </a:t>
+            </a:r>
+            <a:r>
+              <a:rPr lang="en-ID" sz="1100" b="0" i="0" u="none" strike="noStrike" cap="none" dirty="0" err="1">
+                <a:solidFill>
+                  <a:srgbClr val="000000"/>
+                </a:solidFill>
+                <a:effectLst/>
+                <a:latin typeface="Arial"/>
+                <a:ea typeface="Arial"/>
+                <a:cs typeface="Arial"/>
+                <a:sym typeface="Arial"/>
+              </a:rPr>
+              <a:t>Pendaftaran</a:t>
+            </a:r>
+            <a:r>
+              <a:rPr lang="en-ID" sz="1100" b="0" i="0" u="none" strike="noStrike" cap="none" dirty="0">
+                <a:solidFill>
+                  <a:srgbClr val="000000"/>
+                </a:solidFill>
+                <a:effectLst/>
+                <a:latin typeface="Arial"/>
+                <a:ea typeface="Arial"/>
+                <a:cs typeface="Arial"/>
+                <a:sym typeface="Arial"/>
+              </a:rPr>
+              <a:t> Rumah Sakit </a:t>
+            </a:r>
+            <a:r>
+              <a:rPr lang="en-ID" sz="1100" b="0" i="0" u="none" strike="noStrike" cap="none" dirty="0" err="1">
+                <a:solidFill>
+                  <a:srgbClr val="000000"/>
+                </a:solidFill>
+                <a:effectLst/>
+                <a:latin typeface="Arial"/>
+                <a:ea typeface="Arial"/>
+                <a:cs typeface="Arial"/>
+                <a:sym typeface="Arial"/>
+              </a:rPr>
+              <a:t>berbasis</a:t>
+            </a:r>
+            <a:r>
+              <a:rPr lang="en-ID" sz="1100" b="0" i="0" u="none" strike="noStrike" cap="none" dirty="0">
+                <a:solidFill>
+                  <a:srgbClr val="000000"/>
+                </a:solidFill>
+                <a:effectLst/>
+                <a:latin typeface="Arial"/>
+                <a:ea typeface="Arial"/>
+                <a:cs typeface="Arial"/>
+                <a:sym typeface="Arial"/>
+              </a:rPr>
+              <a:t> RESTful. Saya </a:t>
+            </a:r>
+            <a:r>
+              <a:rPr lang="en-ID" sz="1100" b="0" i="0" u="none" strike="noStrike" cap="none" dirty="0" err="1">
+                <a:solidFill>
+                  <a:srgbClr val="000000"/>
+                </a:solidFill>
+                <a:effectLst/>
+                <a:latin typeface="Arial"/>
+                <a:ea typeface="Arial"/>
+                <a:cs typeface="Arial"/>
+                <a:sym typeface="Arial"/>
+              </a:rPr>
+              <a:t>berangkat</a:t>
+            </a:r>
+            <a:r>
+              <a:rPr lang="en-ID" sz="1100" b="0" i="0" u="none" strike="noStrike" cap="none" dirty="0">
+                <a:solidFill>
+                  <a:srgbClr val="000000"/>
+                </a:solidFill>
+                <a:effectLst/>
+                <a:latin typeface="Arial"/>
+                <a:ea typeface="Arial"/>
+                <a:cs typeface="Arial"/>
+                <a:sym typeface="Arial"/>
+              </a:rPr>
+              <a:t> </a:t>
+            </a:r>
+            <a:r>
+              <a:rPr lang="en-ID" sz="1100" b="0" i="0" u="none" strike="noStrike" cap="none" dirty="0" err="1">
+                <a:solidFill>
+                  <a:srgbClr val="000000"/>
+                </a:solidFill>
+                <a:effectLst/>
+                <a:latin typeface="Arial"/>
+                <a:ea typeface="Arial"/>
+                <a:cs typeface="Arial"/>
+                <a:sym typeface="Arial"/>
+              </a:rPr>
+              <a:t>dari</a:t>
+            </a:r>
+            <a:r>
+              <a:rPr lang="en-ID" sz="1100" b="0" i="0" u="none" strike="noStrike" cap="none" dirty="0">
+                <a:solidFill>
+                  <a:srgbClr val="000000"/>
+                </a:solidFill>
+                <a:effectLst/>
+                <a:latin typeface="Arial"/>
+                <a:ea typeface="Arial"/>
+                <a:cs typeface="Arial"/>
+                <a:sym typeface="Arial"/>
+              </a:rPr>
+              <a:t> </a:t>
+            </a:r>
+            <a:r>
+              <a:rPr lang="en-ID" sz="1100" b="0" i="0" u="none" strike="noStrike" cap="none" dirty="0" err="1">
+                <a:solidFill>
+                  <a:srgbClr val="000000"/>
+                </a:solidFill>
+                <a:effectLst/>
+                <a:latin typeface="Arial"/>
+                <a:ea typeface="Arial"/>
+                <a:cs typeface="Arial"/>
+                <a:sym typeface="Arial"/>
+              </a:rPr>
+              <a:t>masalah</a:t>
+            </a:r>
+            <a:r>
+              <a:rPr lang="en-ID" sz="1100" b="0" i="0" u="none" strike="noStrike" cap="none" dirty="0">
+                <a:solidFill>
+                  <a:srgbClr val="000000"/>
+                </a:solidFill>
+                <a:effectLst/>
+                <a:latin typeface="Arial"/>
+                <a:ea typeface="Arial"/>
+                <a:cs typeface="Arial"/>
+                <a:sym typeface="Arial"/>
+              </a:rPr>
+              <a:t> </a:t>
+            </a:r>
+            <a:r>
+              <a:rPr lang="en-ID" sz="1100" b="0" i="0" u="none" strike="noStrike" cap="none" dirty="0" err="1">
+                <a:solidFill>
+                  <a:srgbClr val="000000"/>
+                </a:solidFill>
+                <a:effectLst/>
+                <a:latin typeface="Arial"/>
+                <a:ea typeface="Arial"/>
+                <a:cs typeface="Arial"/>
+                <a:sym typeface="Arial"/>
+              </a:rPr>
+              <a:t>klasik</a:t>
+            </a:r>
+            <a:r>
+              <a:rPr lang="en-ID" sz="1100" b="0" i="0" u="none" strike="noStrike" cap="none" dirty="0">
+                <a:solidFill>
+                  <a:srgbClr val="000000"/>
+                </a:solidFill>
+                <a:effectLst/>
+                <a:latin typeface="Arial"/>
+                <a:ea typeface="Arial"/>
+                <a:cs typeface="Arial"/>
+                <a:sym typeface="Arial"/>
+              </a:rPr>
+              <a:t> yang </a:t>
+            </a:r>
+            <a:r>
+              <a:rPr lang="en-ID" sz="1100" b="0" i="0" u="none" strike="noStrike" cap="none" dirty="0" err="1">
+                <a:solidFill>
+                  <a:srgbClr val="000000"/>
+                </a:solidFill>
+                <a:effectLst/>
+                <a:latin typeface="Arial"/>
+                <a:ea typeface="Arial"/>
+                <a:cs typeface="Arial"/>
+                <a:sym typeface="Arial"/>
+              </a:rPr>
+              <a:t>selalu</a:t>
+            </a:r>
+            <a:r>
+              <a:rPr lang="en-ID" sz="1100" b="0" i="0" u="none" strike="noStrike" cap="none" dirty="0">
+                <a:solidFill>
+                  <a:srgbClr val="000000"/>
+                </a:solidFill>
+                <a:effectLst/>
+                <a:latin typeface="Arial"/>
+                <a:ea typeface="Arial"/>
+                <a:cs typeface="Arial"/>
+                <a:sym typeface="Arial"/>
+              </a:rPr>
+              <a:t> </a:t>
+            </a:r>
+            <a:r>
+              <a:rPr lang="en-ID" sz="1100" b="0" i="0" u="none" strike="noStrike" cap="none" dirty="0" err="1">
+                <a:solidFill>
+                  <a:srgbClr val="000000"/>
+                </a:solidFill>
+                <a:effectLst/>
+                <a:latin typeface="Arial"/>
+                <a:ea typeface="Arial"/>
+                <a:cs typeface="Arial"/>
+                <a:sym typeface="Arial"/>
+              </a:rPr>
+              <a:t>terjadi</a:t>
+            </a:r>
+            <a:r>
+              <a:rPr lang="en-ID" sz="1100" b="0" i="0" u="none" strike="noStrike" cap="none" dirty="0">
+                <a:solidFill>
+                  <a:srgbClr val="000000"/>
+                </a:solidFill>
+                <a:effectLst/>
+                <a:latin typeface="Arial"/>
+                <a:ea typeface="Arial"/>
+                <a:cs typeface="Arial"/>
+                <a:sym typeface="Arial"/>
+              </a:rPr>
+              <a:t> di </a:t>
+            </a:r>
+            <a:r>
+              <a:rPr lang="en-ID" sz="1100" b="0" i="0" u="none" strike="noStrike" cap="none" dirty="0" err="1">
+                <a:solidFill>
+                  <a:srgbClr val="000000"/>
+                </a:solidFill>
+                <a:effectLst/>
+                <a:latin typeface="Arial"/>
+                <a:ea typeface="Arial"/>
+                <a:cs typeface="Arial"/>
+                <a:sym typeface="Arial"/>
+              </a:rPr>
+              <a:t>rumah</a:t>
+            </a:r>
+            <a:r>
+              <a:rPr lang="en-ID" sz="1100" b="0" i="0" u="none" strike="noStrike" cap="none" dirty="0">
+                <a:solidFill>
+                  <a:srgbClr val="000000"/>
+                </a:solidFill>
+                <a:effectLst/>
+                <a:latin typeface="Arial"/>
+                <a:ea typeface="Arial"/>
+                <a:cs typeface="Arial"/>
+                <a:sym typeface="Arial"/>
+              </a:rPr>
+              <a:t> </a:t>
+            </a:r>
+            <a:r>
+              <a:rPr lang="en-ID" sz="1100" b="0" i="0" u="none" strike="noStrike" cap="none" dirty="0" err="1">
+                <a:solidFill>
+                  <a:srgbClr val="000000"/>
+                </a:solidFill>
+                <a:effectLst/>
+                <a:latin typeface="Arial"/>
+                <a:ea typeface="Arial"/>
+                <a:cs typeface="Arial"/>
+                <a:sym typeface="Arial"/>
+              </a:rPr>
+              <a:t>sakit</a:t>
+            </a:r>
+            <a:r>
+              <a:rPr lang="en-ID" sz="1100" b="0" i="0" u="none" strike="noStrike" cap="none" dirty="0">
+                <a:solidFill>
+                  <a:srgbClr val="000000"/>
+                </a:solidFill>
+                <a:effectLst/>
+                <a:latin typeface="Arial"/>
+                <a:ea typeface="Arial"/>
+                <a:cs typeface="Arial"/>
+                <a:sym typeface="Arial"/>
+              </a:rPr>
+              <a:t>: </a:t>
+            </a:r>
+            <a:r>
+              <a:rPr lang="en-ID" sz="1100" b="0" i="0" u="none" strike="noStrike" cap="none" dirty="0" err="1">
+                <a:solidFill>
+                  <a:srgbClr val="000000"/>
+                </a:solidFill>
+                <a:effectLst/>
+                <a:latin typeface="Arial"/>
+                <a:ea typeface="Arial"/>
+                <a:cs typeface="Arial"/>
+                <a:sym typeface="Arial"/>
+              </a:rPr>
+              <a:t>Pasien</a:t>
+            </a:r>
+            <a:r>
+              <a:rPr lang="en-ID" sz="1100" b="0" i="0" u="none" strike="noStrike" cap="none" dirty="0">
+                <a:solidFill>
+                  <a:srgbClr val="000000"/>
+                </a:solidFill>
+                <a:effectLst/>
+                <a:latin typeface="Arial"/>
+                <a:ea typeface="Arial"/>
+                <a:cs typeface="Arial"/>
+                <a:sym typeface="Arial"/>
+              </a:rPr>
+              <a:t> antre </a:t>
+            </a:r>
+            <a:r>
+              <a:rPr lang="en-ID" sz="1100" b="0" i="0" u="none" strike="noStrike" cap="none" dirty="0" err="1">
+                <a:solidFill>
+                  <a:srgbClr val="000000"/>
+                </a:solidFill>
+                <a:effectLst/>
+                <a:latin typeface="Arial"/>
+                <a:ea typeface="Arial"/>
+                <a:cs typeface="Arial"/>
+                <a:sym typeface="Arial"/>
+              </a:rPr>
+              <a:t>berjam</a:t>
+            </a:r>
+            <a:r>
+              <a:rPr lang="en-ID" sz="1100" b="0" i="0" u="none" strike="noStrike" cap="none" dirty="0">
+                <a:solidFill>
+                  <a:srgbClr val="000000"/>
+                </a:solidFill>
+                <a:effectLst/>
+                <a:latin typeface="Arial"/>
+                <a:ea typeface="Arial"/>
+                <a:cs typeface="Arial"/>
+                <a:sym typeface="Arial"/>
+              </a:rPr>
+              <a:t>-jam </a:t>
+            </a:r>
+            <a:r>
+              <a:rPr lang="en-ID" sz="1100" b="0" i="0" u="none" strike="noStrike" cap="none" dirty="0" err="1">
+                <a:solidFill>
+                  <a:srgbClr val="000000"/>
+                </a:solidFill>
+                <a:effectLst/>
+                <a:latin typeface="Arial"/>
+                <a:ea typeface="Arial"/>
+                <a:cs typeface="Arial"/>
+                <a:sym typeface="Arial"/>
+              </a:rPr>
+              <a:t>sejak</a:t>
+            </a:r>
+            <a:r>
+              <a:rPr lang="en-ID" sz="1100" b="0" i="0" u="none" strike="noStrike" cap="none" dirty="0">
+                <a:solidFill>
+                  <a:srgbClr val="000000"/>
+                </a:solidFill>
+                <a:effectLst/>
+                <a:latin typeface="Arial"/>
+                <a:ea typeface="Arial"/>
+                <a:cs typeface="Arial"/>
+                <a:sym typeface="Arial"/>
+              </a:rPr>
+              <a:t> </a:t>
+            </a:r>
+            <a:r>
+              <a:rPr lang="en-ID" sz="1100" b="0" i="0" u="none" strike="noStrike" cap="none" dirty="0" err="1">
+                <a:solidFill>
+                  <a:srgbClr val="000000"/>
+                </a:solidFill>
+                <a:effectLst/>
+                <a:latin typeface="Arial"/>
+                <a:ea typeface="Arial"/>
+                <a:cs typeface="Arial"/>
+                <a:sym typeface="Arial"/>
+              </a:rPr>
+              <a:t>subuh</a:t>
+            </a:r>
+            <a:r>
+              <a:rPr lang="en-ID" sz="1100" b="0" i="0" u="none" strike="noStrike" cap="none" dirty="0">
+                <a:solidFill>
+                  <a:srgbClr val="000000"/>
+                </a:solidFill>
+                <a:effectLst/>
+                <a:latin typeface="Arial"/>
+                <a:ea typeface="Arial"/>
+                <a:cs typeface="Arial"/>
+                <a:sym typeface="Arial"/>
+              </a:rPr>
+              <a:t>, </a:t>
+            </a:r>
+            <a:r>
+              <a:rPr lang="en-ID" sz="1100" b="0" i="0" u="none" strike="noStrike" cap="none" dirty="0" err="1">
+                <a:solidFill>
+                  <a:srgbClr val="000000"/>
+                </a:solidFill>
+                <a:effectLst/>
+                <a:latin typeface="Arial"/>
+                <a:ea typeface="Arial"/>
+                <a:cs typeface="Arial"/>
+                <a:sym typeface="Arial"/>
+              </a:rPr>
+              <a:t>kuota</a:t>
+            </a:r>
+            <a:r>
+              <a:rPr lang="en-ID" sz="1100" b="0" i="0" u="none" strike="noStrike" cap="none" dirty="0">
+                <a:solidFill>
+                  <a:srgbClr val="000000"/>
+                </a:solidFill>
+                <a:effectLst/>
+                <a:latin typeface="Arial"/>
+                <a:ea typeface="Arial"/>
+                <a:cs typeface="Arial"/>
+                <a:sym typeface="Arial"/>
+              </a:rPr>
+              <a:t> </a:t>
+            </a:r>
+            <a:r>
+              <a:rPr lang="en-ID" sz="1100" b="0" i="0" u="none" strike="noStrike" cap="none" dirty="0" err="1">
+                <a:solidFill>
+                  <a:srgbClr val="000000"/>
+                </a:solidFill>
+                <a:effectLst/>
+                <a:latin typeface="Arial"/>
+                <a:ea typeface="Arial"/>
+                <a:cs typeface="Arial"/>
+                <a:sym typeface="Arial"/>
+              </a:rPr>
+              <a:t>dokter</a:t>
+            </a:r>
+            <a:r>
+              <a:rPr lang="en-ID" sz="1100" b="0" i="0" u="none" strike="noStrike" cap="none" dirty="0">
+                <a:solidFill>
+                  <a:srgbClr val="000000"/>
+                </a:solidFill>
+                <a:effectLst/>
+                <a:latin typeface="Arial"/>
+                <a:ea typeface="Arial"/>
+                <a:cs typeface="Arial"/>
+                <a:sym typeface="Arial"/>
+              </a:rPr>
+              <a:t> yang </a:t>
+            </a:r>
+            <a:r>
+              <a:rPr lang="en-ID" sz="1100" b="0" i="0" u="none" strike="noStrike" cap="none" dirty="0" err="1">
+                <a:solidFill>
+                  <a:srgbClr val="000000"/>
+                </a:solidFill>
+                <a:effectLst/>
+                <a:latin typeface="Arial"/>
+                <a:ea typeface="Arial"/>
+                <a:cs typeface="Arial"/>
+                <a:sym typeface="Arial"/>
+              </a:rPr>
+              <a:t>sering</a:t>
+            </a:r>
+            <a:r>
+              <a:rPr lang="en-ID" sz="1100" b="0" i="0" u="none" strike="noStrike" cap="none" dirty="0">
+                <a:solidFill>
+                  <a:srgbClr val="000000"/>
+                </a:solidFill>
+                <a:effectLst/>
+                <a:latin typeface="Arial"/>
+                <a:ea typeface="Arial"/>
+                <a:cs typeface="Arial"/>
+                <a:sym typeface="Arial"/>
+              </a:rPr>
+              <a:t> </a:t>
+            </a:r>
+            <a:r>
+              <a:rPr lang="en-ID" sz="1100" b="0" i="0" u="none" strike="noStrike" cap="none" dirty="0" err="1">
+                <a:solidFill>
+                  <a:srgbClr val="000000"/>
+                </a:solidFill>
+                <a:effectLst/>
+                <a:latin typeface="Arial"/>
+                <a:ea typeface="Arial"/>
+                <a:cs typeface="Arial"/>
+                <a:sym typeface="Arial"/>
+              </a:rPr>
+              <a:t>kebobolan</a:t>
+            </a:r>
+            <a:r>
+              <a:rPr lang="en-ID" sz="1100" b="0" i="0" u="none" strike="noStrike" cap="none" dirty="0">
+                <a:solidFill>
+                  <a:srgbClr val="000000"/>
+                </a:solidFill>
+                <a:effectLst/>
+                <a:latin typeface="Arial"/>
+                <a:ea typeface="Arial"/>
+                <a:cs typeface="Arial"/>
+                <a:sym typeface="Arial"/>
+              </a:rPr>
+              <a:t> </a:t>
+            </a:r>
+            <a:r>
+              <a:rPr lang="en-ID" sz="1100" b="0" i="0" u="none" strike="noStrike" cap="none" dirty="0" err="1">
+                <a:solidFill>
+                  <a:srgbClr val="000000"/>
+                </a:solidFill>
+                <a:effectLst/>
+                <a:latin typeface="Arial"/>
+                <a:ea typeface="Arial"/>
+                <a:cs typeface="Arial"/>
+                <a:sym typeface="Arial"/>
+              </a:rPr>
+              <a:t>karena</a:t>
+            </a:r>
+            <a:r>
+              <a:rPr lang="en-ID" sz="1100" b="0" i="0" u="none" strike="noStrike" cap="none" dirty="0">
+                <a:solidFill>
+                  <a:srgbClr val="000000"/>
+                </a:solidFill>
+                <a:effectLst/>
+                <a:latin typeface="Arial"/>
+                <a:ea typeface="Arial"/>
+                <a:cs typeface="Arial"/>
+                <a:sym typeface="Arial"/>
+              </a:rPr>
+              <a:t> </a:t>
+            </a:r>
+            <a:r>
+              <a:rPr lang="en-ID" sz="1100" b="0" i="0" u="none" strike="noStrike" cap="none" dirty="0" err="1">
+                <a:solidFill>
+                  <a:srgbClr val="000000"/>
+                </a:solidFill>
+                <a:effectLst/>
+                <a:latin typeface="Arial"/>
+                <a:ea typeface="Arial"/>
+                <a:cs typeface="Arial"/>
+                <a:sym typeface="Arial"/>
+              </a:rPr>
+              <a:t>sistem</a:t>
+            </a:r>
+            <a:r>
+              <a:rPr lang="en-ID" sz="1100" b="0" i="0" u="none" strike="noStrike" cap="none" dirty="0">
+                <a:solidFill>
+                  <a:srgbClr val="000000"/>
+                </a:solidFill>
+                <a:effectLst/>
+                <a:latin typeface="Arial"/>
+                <a:ea typeface="Arial"/>
+                <a:cs typeface="Arial"/>
+                <a:sym typeface="Arial"/>
+              </a:rPr>
+              <a:t> </a:t>
+            </a:r>
+            <a:r>
+              <a:rPr lang="en-ID" sz="1100" b="0" i="0" u="none" strike="noStrike" cap="none" dirty="0" err="1">
+                <a:solidFill>
+                  <a:srgbClr val="000000"/>
+                </a:solidFill>
+                <a:effectLst/>
+                <a:latin typeface="Arial"/>
+                <a:ea typeface="Arial"/>
+                <a:cs typeface="Arial"/>
+                <a:sym typeface="Arial"/>
+              </a:rPr>
+              <a:t>tidak</a:t>
+            </a:r>
+            <a:r>
+              <a:rPr lang="en-ID" sz="1100" b="0" i="0" u="none" strike="noStrike" cap="none" dirty="0">
+                <a:solidFill>
+                  <a:srgbClr val="000000"/>
+                </a:solidFill>
+                <a:effectLst/>
+                <a:latin typeface="Arial"/>
+                <a:ea typeface="Arial"/>
+                <a:cs typeface="Arial"/>
+                <a:sym typeface="Arial"/>
+              </a:rPr>
+              <a:t> </a:t>
+            </a:r>
+            <a:r>
+              <a:rPr lang="en-ID" sz="1100" b="0" i="0" u="none" strike="noStrike" cap="none" dirty="0" err="1">
+                <a:solidFill>
+                  <a:srgbClr val="000000"/>
+                </a:solidFill>
+                <a:effectLst/>
+                <a:latin typeface="Arial"/>
+                <a:ea typeface="Arial"/>
+                <a:cs typeface="Arial"/>
+                <a:sym typeface="Arial"/>
+              </a:rPr>
+              <a:t>siap</a:t>
+            </a:r>
+            <a:r>
+              <a:rPr lang="en-ID" sz="1100" b="0" i="0" u="none" strike="noStrike" cap="none" dirty="0">
+                <a:solidFill>
+                  <a:srgbClr val="000000"/>
+                </a:solidFill>
+                <a:effectLst/>
+                <a:latin typeface="Arial"/>
+                <a:ea typeface="Arial"/>
+                <a:cs typeface="Arial"/>
+                <a:sym typeface="Arial"/>
+              </a:rPr>
+              <a:t> </a:t>
+            </a:r>
+            <a:r>
+              <a:rPr lang="en-ID" sz="1100" b="0" i="0" u="none" strike="noStrike" cap="none" dirty="0" err="1">
+                <a:solidFill>
+                  <a:srgbClr val="000000"/>
+                </a:solidFill>
+                <a:effectLst/>
+                <a:latin typeface="Arial"/>
+                <a:ea typeface="Arial"/>
+                <a:cs typeface="Arial"/>
+                <a:sym typeface="Arial"/>
+              </a:rPr>
+              <a:t>menerima</a:t>
+            </a:r>
+            <a:r>
+              <a:rPr lang="en-ID" sz="1100" b="0" i="0" u="none" strike="noStrike" cap="none" dirty="0">
+                <a:solidFill>
+                  <a:srgbClr val="000000"/>
+                </a:solidFill>
+                <a:effectLst/>
+                <a:latin typeface="Arial"/>
+                <a:ea typeface="Arial"/>
+                <a:cs typeface="Arial"/>
+                <a:sym typeface="Arial"/>
+              </a:rPr>
+              <a:t> 'request' </a:t>
+            </a:r>
+            <a:r>
+              <a:rPr lang="en-ID" sz="1100" b="0" i="0" u="none" strike="noStrike" cap="none" dirty="0" err="1">
+                <a:solidFill>
+                  <a:srgbClr val="000000"/>
+                </a:solidFill>
+                <a:effectLst/>
+                <a:latin typeface="Arial"/>
+                <a:ea typeface="Arial"/>
+                <a:cs typeface="Arial"/>
+                <a:sym typeface="Arial"/>
+              </a:rPr>
+              <a:t>bersamaan</a:t>
+            </a:r>
+            <a:r>
+              <a:rPr lang="en-ID" sz="1100" b="0" i="0" u="none" strike="noStrike" cap="none" dirty="0">
+                <a:solidFill>
+                  <a:srgbClr val="000000"/>
+                </a:solidFill>
+                <a:effectLst/>
+                <a:latin typeface="Arial"/>
+                <a:ea typeface="Arial"/>
+                <a:cs typeface="Arial"/>
+                <a:sym typeface="Arial"/>
+              </a:rPr>
+              <a:t>, dan server yang down </a:t>
+            </a:r>
+            <a:r>
+              <a:rPr lang="en-ID" sz="1100" b="0" i="0" u="none" strike="noStrike" cap="none" dirty="0" err="1">
+                <a:solidFill>
+                  <a:srgbClr val="000000"/>
+                </a:solidFill>
+                <a:effectLst/>
+                <a:latin typeface="Arial"/>
+                <a:ea typeface="Arial"/>
+                <a:cs typeface="Arial"/>
+                <a:sym typeface="Arial"/>
+              </a:rPr>
+              <a:t>karena</a:t>
+            </a:r>
+            <a:r>
+              <a:rPr lang="en-ID" sz="1100" b="0" i="0" u="none" strike="noStrike" cap="none" dirty="0">
+                <a:solidFill>
+                  <a:srgbClr val="000000"/>
+                </a:solidFill>
+                <a:effectLst/>
+                <a:latin typeface="Arial"/>
+                <a:ea typeface="Arial"/>
+                <a:cs typeface="Arial"/>
+                <a:sym typeface="Arial"/>
+              </a:rPr>
+              <a:t> </a:t>
+            </a:r>
+            <a:r>
+              <a:rPr lang="en-ID" sz="1100" b="0" i="0" u="none" strike="noStrike" cap="none" dirty="0" err="1">
+                <a:solidFill>
+                  <a:srgbClr val="000000"/>
+                </a:solidFill>
+                <a:effectLst/>
+                <a:latin typeface="Arial"/>
+                <a:ea typeface="Arial"/>
+                <a:cs typeface="Arial"/>
+                <a:sym typeface="Arial"/>
+              </a:rPr>
+              <a:t>pasien</a:t>
+            </a:r>
+            <a:r>
+              <a:rPr lang="en-ID" sz="1100" b="0" i="0" u="none" strike="noStrike" cap="none" dirty="0">
+                <a:solidFill>
+                  <a:srgbClr val="000000"/>
+                </a:solidFill>
+                <a:effectLst/>
+                <a:latin typeface="Arial"/>
+                <a:ea typeface="Arial"/>
+                <a:cs typeface="Arial"/>
+                <a:sym typeface="Arial"/>
+              </a:rPr>
+              <a:t> </a:t>
+            </a:r>
+            <a:r>
+              <a:rPr lang="en-ID" sz="1100" b="0" i="0" u="none" strike="noStrike" cap="none" dirty="0" err="1">
+                <a:solidFill>
+                  <a:srgbClr val="000000"/>
+                </a:solidFill>
+                <a:effectLst/>
+                <a:latin typeface="Arial"/>
+                <a:ea typeface="Arial"/>
+                <a:cs typeface="Arial"/>
+                <a:sym typeface="Arial"/>
+              </a:rPr>
+              <a:t>nge</a:t>
+            </a:r>
+            <a:r>
+              <a:rPr lang="en-ID" sz="1100" b="0" i="0" u="none" strike="noStrike" cap="none" dirty="0">
+                <a:solidFill>
+                  <a:srgbClr val="000000"/>
+                </a:solidFill>
+                <a:effectLst/>
+                <a:latin typeface="Arial"/>
+                <a:ea typeface="Arial"/>
+                <a:cs typeface="Arial"/>
+                <a:sym typeface="Arial"/>
+              </a:rPr>
+              <a:t>-lag </a:t>
+            </a:r>
+            <a:r>
+              <a:rPr lang="en-ID" sz="1100" b="0" i="0" u="none" strike="noStrike" cap="none" dirty="0" err="1">
+                <a:solidFill>
+                  <a:srgbClr val="000000"/>
+                </a:solidFill>
+                <a:effectLst/>
+                <a:latin typeface="Arial"/>
+                <a:ea typeface="Arial"/>
+                <a:cs typeface="Arial"/>
+                <a:sym typeface="Arial"/>
+              </a:rPr>
+              <a:t>menekan</a:t>
+            </a:r>
+            <a:r>
+              <a:rPr lang="en-ID" sz="1100" b="0" i="0" u="none" strike="noStrike" cap="none" dirty="0">
+                <a:solidFill>
+                  <a:srgbClr val="000000"/>
+                </a:solidFill>
+                <a:effectLst/>
+                <a:latin typeface="Arial"/>
+                <a:ea typeface="Arial"/>
+                <a:cs typeface="Arial"/>
+                <a:sym typeface="Arial"/>
+              </a:rPr>
+              <a:t> </a:t>
+            </a:r>
+            <a:r>
+              <a:rPr lang="en-ID" sz="1100" b="0" i="0" u="none" strike="noStrike" cap="none" dirty="0" err="1">
+                <a:solidFill>
+                  <a:srgbClr val="000000"/>
+                </a:solidFill>
+                <a:effectLst/>
+                <a:latin typeface="Arial"/>
+                <a:ea typeface="Arial"/>
+                <a:cs typeface="Arial"/>
+                <a:sym typeface="Arial"/>
+              </a:rPr>
+              <a:t>tombol</a:t>
+            </a:r>
+            <a:r>
+              <a:rPr lang="en-ID" sz="1100" b="0" i="0" u="none" strike="noStrike" cap="none" dirty="0">
+                <a:solidFill>
+                  <a:srgbClr val="000000"/>
+                </a:solidFill>
+                <a:effectLst/>
+                <a:latin typeface="Arial"/>
+                <a:ea typeface="Arial"/>
+                <a:cs typeface="Arial"/>
+                <a:sym typeface="Arial"/>
+              </a:rPr>
+              <a:t> daftar </a:t>
+            </a:r>
+            <a:r>
+              <a:rPr lang="en-ID" sz="1100" b="0" i="0" u="none" strike="noStrike" cap="none" dirty="0" err="1">
+                <a:solidFill>
+                  <a:srgbClr val="000000"/>
+                </a:solidFill>
+                <a:effectLst/>
+                <a:latin typeface="Arial"/>
+                <a:ea typeface="Arial"/>
+                <a:cs typeface="Arial"/>
+                <a:sym typeface="Arial"/>
+              </a:rPr>
+              <a:t>berkali</a:t>
+            </a:r>
+            <a:r>
+              <a:rPr lang="en-ID" sz="1100" b="0" i="0" u="none" strike="noStrike" cap="none" dirty="0">
+                <a:solidFill>
+                  <a:srgbClr val="000000"/>
+                </a:solidFill>
+                <a:effectLst/>
+                <a:latin typeface="Arial"/>
+                <a:ea typeface="Arial"/>
+                <a:cs typeface="Arial"/>
+                <a:sym typeface="Arial"/>
+              </a:rPr>
+              <a:t>-kali.</a:t>
+            </a:r>
+          </a:p>
+          <a:p>
+            <a:r>
+              <a:rPr lang="en-ID" sz="1100" b="0" i="0" u="none" strike="noStrike" cap="none" dirty="0" err="1">
+                <a:solidFill>
+                  <a:srgbClr val="000000"/>
+                </a:solidFill>
+                <a:effectLst/>
+                <a:latin typeface="Arial"/>
+                <a:ea typeface="Arial"/>
+                <a:cs typeface="Arial"/>
+                <a:sym typeface="Arial"/>
+              </a:rPr>
+              <a:t>Untuk</a:t>
+            </a:r>
+            <a:r>
+              <a:rPr lang="en-ID" sz="1100" b="0" i="0" u="none" strike="noStrike" cap="none" dirty="0">
+                <a:solidFill>
+                  <a:srgbClr val="000000"/>
+                </a:solidFill>
+                <a:effectLst/>
+                <a:latin typeface="Arial"/>
+                <a:ea typeface="Arial"/>
+                <a:cs typeface="Arial"/>
+                <a:sym typeface="Arial"/>
+              </a:rPr>
+              <a:t> </a:t>
+            </a:r>
+            <a:r>
+              <a:rPr lang="en-ID" sz="1100" b="0" i="0" u="none" strike="noStrike" cap="none" dirty="0" err="1">
+                <a:solidFill>
+                  <a:srgbClr val="000000"/>
+                </a:solidFill>
+                <a:effectLst/>
+                <a:latin typeface="Arial"/>
+                <a:ea typeface="Arial"/>
+                <a:cs typeface="Arial"/>
+                <a:sym typeface="Arial"/>
+              </a:rPr>
+              <a:t>menyelesaikannya</a:t>
+            </a:r>
+            <a:r>
+              <a:rPr lang="en-ID" sz="1100" b="0" i="0" u="none" strike="noStrike" cap="none" dirty="0">
+                <a:solidFill>
+                  <a:srgbClr val="000000"/>
+                </a:solidFill>
+                <a:effectLst/>
+                <a:latin typeface="Arial"/>
+                <a:ea typeface="Arial"/>
+                <a:cs typeface="Arial"/>
+                <a:sym typeface="Arial"/>
+              </a:rPr>
+              <a:t>, </a:t>
+            </a:r>
+            <a:r>
+              <a:rPr lang="en-ID" sz="1100" b="0" i="0" u="none" strike="noStrike" cap="none" dirty="0" err="1">
+                <a:solidFill>
+                  <a:srgbClr val="000000"/>
+                </a:solidFill>
+                <a:effectLst/>
+                <a:latin typeface="Arial"/>
+                <a:ea typeface="Arial"/>
+                <a:cs typeface="Arial"/>
+                <a:sym typeface="Arial"/>
+              </a:rPr>
+              <a:t>MediBook</a:t>
+            </a:r>
+            <a:r>
+              <a:rPr lang="en-ID" sz="1100" b="0" i="0" u="none" strike="noStrike" cap="none" dirty="0">
+                <a:solidFill>
+                  <a:srgbClr val="000000"/>
+                </a:solidFill>
+                <a:effectLst/>
+                <a:latin typeface="Arial"/>
+                <a:ea typeface="Arial"/>
+                <a:cs typeface="Arial"/>
+                <a:sym typeface="Arial"/>
+              </a:rPr>
+              <a:t> API </a:t>
+            </a:r>
+            <a:r>
+              <a:rPr lang="en-ID" sz="1100" b="0" i="0" u="none" strike="noStrike" cap="none" dirty="0" err="1">
+                <a:solidFill>
+                  <a:srgbClr val="000000"/>
+                </a:solidFill>
+                <a:effectLst/>
+                <a:latin typeface="Arial"/>
+                <a:ea typeface="Arial"/>
+                <a:cs typeface="Arial"/>
+                <a:sym typeface="Arial"/>
+              </a:rPr>
+              <a:t>hadir</a:t>
+            </a:r>
+            <a:r>
+              <a:rPr lang="en-ID" sz="1100" b="0" i="0" u="none" strike="noStrike" cap="none" dirty="0">
+                <a:solidFill>
+                  <a:srgbClr val="000000"/>
+                </a:solidFill>
+                <a:effectLst/>
+                <a:latin typeface="Arial"/>
+                <a:ea typeface="Arial"/>
+                <a:cs typeface="Arial"/>
+                <a:sym typeface="Arial"/>
+              </a:rPr>
+              <a:t> </a:t>
+            </a:r>
+            <a:r>
+              <a:rPr lang="en-ID" sz="1100" b="0" i="0" u="none" strike="noStrike" cap="none" dirty="0" err="1">
+                <a:solidFill>
+                  <a:srgbClr val="000000"/>
+                </a:solidFill>
+                <a:effectLst/>
+                <a:latin typeface="Arial"/>
+                <a:ea typeface="Arial"/>
+                <a:cs typeface="Arial"/>
+                <a:sym typeface="Arial"/>
+              </a:rPr>
+              <a:t>dengan</a:t>
+            </a:r>
+            <a:r>
+              <a:rPr lang="en-ID" sz="1100" b="0" i="0" u="none" strike="noStrike" cap="none" dirty="0">
+                <a:solidFill>
+                  <a:srgbClr val="000000"/>
+                </a:solidFill>
+                <a:effectLst/>
+                <a:latin typeface="Arial"/>
+                <a:ea typeface="Arial"/>
+                <a:cs typeface="Arial"/>
+                <a:sym typeface="Arial"/>
+              </a:rPr>
+              <a:t> </a:t>
+            </a:r>
+            <a:r>
+              <a:rPr lang="en-ID" sz="1100" b="0" i="0" u="none" strike="noStrike" cap="none" dirty="0" err="1">
+                <a:solidFill>
+                  <a:srgbClr val="000000"/>
+                </a:solidFill>
+                <a:effectLst/>
+                <a:latin typeface="Arial"/>
+                <a:ea typeface="Arial"/>
+                <a:cs typeface="Arial"/>
+                <a:sym typeface="Arial"/>
+              </a:rPr>
+              <a:t>solusi</a:t>
+            </a:r>
+            <a:r>
+              <a:rPr lang="en-ID" sz="1100" b="0" i="0" u="none" strike="noStrike" cap="none" dirty="0">
+                <a:solidFill>
+                  <a:srgbClr val="000000"/>
+                </a:solidFill>
+                <a:effectLst/>
+                <a:latin typeface="Arial"/>
+                <a:ea typeface="Arial"/>
+                <a:cs typeface="Arial"/>
+                <a:sym typeface="Arial"/>
+              </a:rPr>
+              <a:t> </a:t>
+            </a:r>
+            <a:r>
+              <a:rPr lang="en-ID" sz="1100" b="0" i="0" u="none" strike="noStrike" cap="none" dirty="0" err="1">
+                <a:solidFill>
+                  <a:srgbClr val="000000"/>
+                </a:solidFill>
+                <a:effectLst/>
+                <a:latin typeface="Arial"/>
+                <a:ea typeface="Arial"/>
+                <a:cs typeface="Arial"/>
+                <a:sym typeface="Arial"/>
+              </a:rPr>
+              <a:t>arsitektur</a:t>
+            </a:r>
+            <a:r>
+              <a:rPr lang="en-ID" sz="1100" b="0" i="0" u="none" strike="noStrike" cap="none" dirty="0">
+                <a:solidFill>
+                  <a:srgbClr val="000000"/>
+                </a:solidFill>
+                <a:effectLst/>
+                <a:latin typeface="Arial"/>
+                <a:ea typeface="Arial"/>
+                <a:cs typeface="Arial"/>
+                <a:sym typeface="Arial"/>
+              </a:rPr>
+              <a:t> Enterprise: </a:t>
+            </a:r>
+            <a:r>
+              <a:rPr lang="en-ID" sz="1100" b="0" i="0" u="none" strike="noStrike" cap="none" dirty="0" err="1">
+                <a:solidFill>
+                  <a:srgbClr val="000000"/>
+                </a:solidFill>
+                <a:effectLst/>
+                <a:latin typeface="Arial"/>
+                <a:ea typeface="Arial"/>
+                <a:cs typeface="Arial"/>
+                <a:sym typeface="Arial"/>
+              </a:rPr>
+              <a:t>Sistem</a:t>
+            </a:r>
+            <a:r>
+              <a:rPr lang="en-ID" sz="1100" b="0" i="0" u="none" strike="noStrike" cap="none" dirty="0">
+                <a:solidFill>
+                  <a:srgbClr val="000000"/>
+                </a:solidFill>
+                <a:effectLst/>
+                <a:latin typeface="Arial"/>
+                <a:ea typeface="Arial"/>
+                <a:cs typeface="Arial"/>
+                <a:sym typeface="Arial"/>
+              </a:rPr>
+              <a:t> </a:t>
+            </a:r>
+            <a:r>
+              <a:rPr lang="en-ID" sz="1100" b="0" i="0" u="none" strike="noStrike" cap="none" dirty="0" err="1">
+                <a:solidFill>
+                  <a:srgbClr val="000000"/>
+                </a:solidFill>
+                <a:effectLst/>
+                <a:latin typeface="Arial"/>
+                <a:ea typeface="Arial"/>
+                <a:cs typeface="Arial"/>
+                <a:sym typeface="Arial"/>
+              </a:rPr>
+              <a:t>validasi</a:t>
+            </a:r>
+            <a:r>
+              <a:rPr lang="en-ID" sz="1100" b="0" i="0" u="none" strike="noStrike" cap="none" dirty="0">
+                <a:solidFill>
+                  <a:srgbClr val="000000"/>
+                </a:solidFill>
+                <a:effectLst/>
+                <a:latin typeface="Arial"/>
+                <a:ea typeface="Arial"/>
+                <a:cs typeface="Arial"/>
+                <a:sym typeface="Arial"/>
+              </a:rPr>
+              <a:t> </a:t>
+            </a:r>
+            <a:r>
+              <a:rPr lang="en-ID" sz="1100" b="0" i="0" u="none" strike="noStrike" cap="none" dirty="0" err="1">
+                <a:solidFill>
+                  <a:srgbClr val="000000"/>
+                </a:solidFill>
+                <a:effectLst/>
+                <a:latin typeface="Arial"/>
+                <a:ea typeface="Arial"/>
+                <a:cs typeface="Arial"/>
+                <a:sym typeface="Arial"/>
+              </a:rPr>
+              <a:t>kuota</a:t>
+            </a:r>
+            <a:r>
+              <a:rPr lang="en-ID" sz="1100" b="0" i="0" u="none" strike="noStrike" cap="none" dirty="0">
+                <a:solidFill>
+                  <a:srgbClr val="000000"/>
+                </a:solidFill>
+                <a:effectLst/>
+                <a:latin typeface="Arial"/>
+                <a:ea typeface="Arial"/>
+                <a:cs typeface="Arial"/>
+                <a:sym typeface="Arial"/>
+              </a:rPr>
+              <a:t> anti-</a:t>
+            </a:r>
+            <a:r>
+              <a:rPr lang="en-ID" sz="1100" b="0" i="0" u="none" strike="noStrike" cap="none" dirty="0" err="1">
+                <a:solidFill>
+                  <a:srgbClr val="000000"/>
+                </a:solidFill>
+                <a:effectLst/>
+                <a:latin typeface="Arial"/>
+                <a:ea typeface="Arial"/>
+                <a:cs typeface="Arial"/>
+                <a:sym typeface="Arial"/>
+              </a:rPr>
+              <a:t>bentrok</a:t>
+            </a:r>
+            <a:r>
+              <a:rPr lang="en-ID" sz="1100" b="0" i="0" u="none" strike="noStrike" cap="none" dirty="0">
+                <a:solidFill>
+                  <a:srgbClr val="000000"/>
+                </a:solidFill>
+                <a:effectLst/>
+                <a:latin typeface="Arial"/>
+                <a:ea typeface="Arial"/>
+                <a:cs typeface="Arial"/>
+                <a:sym typeface="Arial"/>
+              </a:rPr>
+              <a:t>, </a:t>
+            </a:r>
+            <a:r>
+              <a:rPr lang="en-ID" sz="1100" b="0" i="0" u="none" strike="noStrike" cap="none" dirty="0" err="1">
+                <a:solidFill>
+                  <a:srgbClr val="000000"/>
+                </a:solidFill>
+                <a:effectLst/>
+                <a:latin typeface="Arial"/>
+                <a:ea typeface="Arial"/>
+                <a:cs typeface="Arial"/>
+                <a:sym typeface="Arial"/>
+              </a:rPr>
+              <a:t>proteksi</a:t>
+            </a:r>
+            <a:r>
+              <a:rPr lang="en-ID" sz="1100" b="0" i="0" u="none" strike="noStrike" cap="none" dirty="0">
+                <a:solidFill>
+                  <a:srgbClr val="000000"/>
+                </a:solidFill>
+                <a:effectLst/>
+                <a:latin typeface="Arial"/>
+                <a:ea typeface="Arial"/>
+                <a:cs typeface="Arial"/>
+                <a:sym typeface="Arial"/>
+              </a:rPr>
+              <a:t> spam </a:t>
+            </a:r>
+            <a:r>
+              <a:rPr lang="en-ID" sz="1100" b="0" i="0" u="none" strike="noStrike" cap="none" dirty="0" err="1">
+                <a:solidFill>
+                  <a:srgbClr val="000000"/>
+                </a:solidFill>
+                <a:effectLst/>
+                <a:latin typeface="Arial"/>
+                <a:ea typeface="Arial"/>
+                <a:cs typeface="Arial"/>
+                <a:sym typeface="Arial"/>
+              </a:rPr>
+              <a:t>klik</a:t>
+            </a:r>
+            <a:r>
+              <a:rPr lang="en-ID" sz="1100" b="0" i="0" u="none" strike="noStrike" cap="none" dirty="0">
+                <a:solidFill>
+                  <a:srgbClr val="000000"/>
+                </a:solidFill>
+                <a:effectLst/>
+                <a:latin typeface="Arial"/>
+                <a:ea typeface="Arial"/>
+                <a:cs typeface="Arial"/>
+                <a:sym typeface="Arial"/>
+              </a:rPr>
+              <a:t> </a:t>
+            </a:r>
+            <a:r>
+              <a:rPr lang="en-ID" sz="1100" b="0" i="0" u="none" strike="noStrike" cap="none" dirty="0" err="1">
+                <a:solidFill>
+                  <a:srgbClr val="000000"/>
+                </a:solidFill>
+                <a:effectLst/>
+                <a:latin typeface="Arial"/>
+                <a:ea typeface="Arial"/>
+                <a:cs typeface="Arial"/>
+                <a:sym typeface="Arial"/>
+              </a:rPr>
+              <a:t>menggunakan</a:t>
+            </a:r>
+            <a:r>
+              <a:rPr lang="en-ID" sz="1100" b="0" i="0" u="none" strike="noStrike" cap="none" dirty="0">
+                <a:solidFill>
+                  <a:srgbClr val="000000"/>
+                </a:solidFill>
+                <a:effectLst/>
+                <a:latin typeface="Arial"/>
+                <a:ea typeface="Arial"/>
+                <a:cs typeface="Arial"/>
+                <a:sym typeface="Arial"/>
+              </a:rPr>
+              <a:t> In-Memory Cache, </a:t>
+            </a:r>
+            <a:r>
+              <a:rPr lang="en-ID" sz="1100" b="0" i="0" u="none" strike="noStrike" cap="none" dirty="0" err="1">
+                <a:solidFill>
+                  <a:srgbClr val="000000"/>
+                </a:solidFill>
+                <a:effectLst/>
+                <a:latin typeface="Arial"/>
+                <a:ea typeface="Arial"/>
+                <a:cs typeface="Arial"/>
+                <a:sym typeface="Arial"/>
+              </a:rPr>
+              <a:t>pembersih</a:t>
+            </a:r>
+            <a:r>
+              <a:rPr lang="en-ID" sz="1100" b="0" i="0" u="none" strike="noStrike" cap="none" dirty="0">
+                <a:solidFill>
+                  <a:srgbClr val="000000"/>
+                </a:solidFill>
+                <a:effectLst/>
+                <a:latin typeface="Arial"/>
+                <a:ea typeface="Arial"/>
+                <a:cs typeface="Arial"/>
+                <a:sym typeface="Arial"/>
+              </a:rPr>
+              <a:t> </a:t>
+            </a:r>
+            <a:r>
+              <a:rPr lang="en-ID" sz="1100" b="0" i="0" u="none" strike="noStrike" cap="none" dirty="0" err="1">
+                <a:solidFill>
+                  <a:srgbClr val="000000"/>
+                </a:solidFill>
+                <a:effectLst/>
+                <a:latin typeface="Arial"/>
+                <a:ea typeface="Arial"/>
+                <a:cs typeface="Arial"/>
+                <a:sym typeface="Arial"/>
+              </a:rPr>
+              <a:t>antrean</a:t>
+            </a:r>
+            <a:r>
+              <a:rPr lang="en-ID" sz="1100" b="0" i="0" u="none" strike="noStrike" cap="none" dirty="0">
+                <a:solidFill>
+                  <a:srgbClr val="000000"/>
+                </a:solidFill>
+                <a:effectLst/>
+                <a:latin typeface="Arial"/>
+                <a:ea typeface="Arial"/>
+                <a:cs typeface="Arial"/>
+                <a:sym typeface="Arial"/>
+              </a:rPr>
+              <a:t> </a:t>
+            </a:r>
+            <a:r>
+              <a:rPr lang="en-ID" sz="1100" b="0" i="0" u="none" strike="noStrike" cap="none" dirty="0" err="1">
+                <a:solidFill>
+                  <a:srgbClr val="000000"/>
+                </a:solidFill>
+                <a:effectLst/>
+                <a:latin typeface="Arial"/>
+                <a:ea typeface="Arial"/>
+                <a:cs typeface="Arial"/>
+                <a:sym typeface="Arial"/>
+              </a:rPr>
+              <a:t>otomatis</a:t>
+            </a:r>
+            <a:r>
+              <a:rPr lang="en-ID" sz="1100" b="0" i="0" u="none" strike="noStrike" cap="none" dirty="0">
+                <a:solidFill>
+                  <a:srgbClr val="000000"/>
+                </a:solidFill>
+                <a:effectLst/>
+                <a:latin typeface="Arial"/>
+                <a:ea typeface="Arial"/>
+                <a:cs typeface="Arial"/>
+                <a:sym typeface="Arial"/>
+              </a:rPr>
+              <a:t> </a:t>
+            </a:r>
+            <a:r>
+              <a:rPr lang="en-ID" sz="1100" b="0" i="0" u="none" strike="noStrike" cap="none" dirty="0" err="1">
+                <a:solidFill>
+                  <a:srgbClr val="000000"/>
+                </a:solidFill>
+                <a:effectLst/>
+                <a:latin typeface="Arial"/>
+                <a:ea typeface="Arial"/>
+                <a:cs typeface="Arial"/>
+                <a:sym typeface="Arial"/>
+              </a:rPr>
+              <a:t>jika</a:t>
+            </a:r>
+            <a:r>
+              <a:rPr lang="en-ID" sz="1100" b="0" i="0" u="none" strike="noStrike" cap="none" dirty="0">
+                <a:solidFill>
+                  <a:srgbClr val="000000"/>
+                </a:solidFill>
+                <a:effectLst/>
+                <a:latin typeface="Arial"/>
+                <a:ea typeface="Arial"/>
+                <a:cs typeface="Arial"/>
+                <a:sym typeface="Arial"/>
+              </a:rPr>
+              <a:t> </a:t>
+            </a:r>
+            <a:r>
+              <a:rPr lang="en-ID" sz="1100" b="0" i="0" u="none" strike="noStrike" cap="none" dirty="0" err="1">
+                <a:solidFill>
+                  <a:srgbClr val="000000"/>
+                </a:solidFill>
+                <a:effectLst/>
+                <a:latin typeface="Arial"/>
+                <a:ea typeface="Arial"/>
+                <a:cs typeface="Arial"/>
+                <a:sym typeface="Arial"/>
+              </a:rPr>
+              <a:t>pasien</a:t>
+            </a:r>
+            <a:r>
+              <a:rPr lang="en-ID" sz="1100" b="0" i="0" u="none" strike="noStrike" cap="none" dirty="0">
+                <a:solidFill>
+                  <a:srgbClr val="000000"/>
+                </a:solidFill>
+                <a:effectLst/>
+                <a:latin typeface="Arial"/>
+                <a:ea typeface="Arial"/>
+                <a:cs typeface="Arial"/>
+                <a:sym typeface="Arial"/>
+              </a:rPr>
+              <a:t> </a:t>
+            </a:r>
+            <a:r>
+              <a:rPr lang="en-ID" sz="1100" b="0" i="0" u="none" strike="noStrike" cap="none" dirty="0" err="1">
+                <a:solidFill>
+                  <a:srgbClr val="000000"/>
+                </a:solidFill>
+                <a:effectLst/>
+                <a:latin typeface="Arial"/>
+                <a:ea typeface="Arial"/>
+                <a:cs typeface="Arial"/>
+                <a:sym typeface="Arial"/>
+              </a:rPr>
+              <a:t>tidak</a:t>
+            </a:r>
+            <a:r>
+              <a:rPr lang="en-ID" sz="1100" b="0" i="0" u="none" strike="noStrike" cap="none" dirty="0">
+                <a:solidFill>
+                  <a:srgbClr val="000000"/>
+                </a:solidFill>
+                <a:effectLst/>
+                <a:latin typeface="Arial"/>
+                <a:ea typeface="Arial"/>
+                <a:cs typeface="Arial"/>
+                <a:sym typeface="Arial"/>
+              </a:rPr>
+              <a:t> </a:t>
+            </a:r>
+            <a:r>
+              <a:rPr lang="en-ID" sz="1100" b="0" i="0" u="none" strike="noStrike" cap="none" dirty="0" err="1">
+                <a:solidFill>
+                  <a:srgbClr val="000000"/>
+                </a:solidFill>
+                <a:effectLst/>
+                <a:latin typeface="Arial"/>
+                <a:ea typeface="Arial"/>
+                <a:cs typeface="Arial"/>
+                <a:sym typeface="Arial"/>
+              </a:rPr>
+              <a:t>membayar</a:t>
+            </a:r>
+            <a:r>
+              <a:rPr lang="en-ID" sz="1100" b="0" i="0" u="none" strike="noStrike" cap="none" dirty="0">
+                <a:solidFill>
+                  <a:srgbClr val="000000"/>
+                </a:solidFill>
+                <a:effectLst/>
+                <a:latin typeface="Arial"/>
+                <a:ea typeface="Arial"/>
+                <a:cs typeface="Arial"/>
+                <a:sym typeface="Arial"/>
+              </a:rPr>
+              <a:t> </a:t>
+            </a:r>
+            <a:r>
+              <a:rPr lang="en-ID" sz="1100" b="0" i="0" u="none" strike="noStrike" cap="none" dirty="0" err="1">
+                <a:solidFill>
+                  <a:srgbClr val="000000"/>
+                </a:solidFill>
+                <a:effectLst/>
+                <a:latin typeface="Arial"/>
+                <a:ea typeface="Arial"/>
+                <a:cs typeface="Arial"/>
+                <a:sym typeface="Arial"/>
+              </a:rPr>
+              <a:t>dalam</a:t>
+            </a:r>
+            <a:r>
+              <a:rPr lang="en-ID" sz="1100" b="0" i="0" u="none" strike="noStrike" cap="none" dirty="0">
+                <a:solidFill>
+                  <a:srgbClr val="000000"/>
+                </a:solidFill>
+                <a:effectLst/>
+                <a:latin typeface="Arial"/>
+                <a:ea typeface="Arial"/>
+                <a:cs typeface="Arial"/>
+                <a:sym typeface="Arial"/>
+              </a:rPr>
+              <a:t> 15 </a:t>
+            </a:r>
+            <a:r>
+              <a:rPr lang="en-ID" sz="1100" b="0" i="0" u="none" strike="noStrike" cap="none" dirty="0" err="1">
+                <a:solidFill>
+                  <a:srgbClr val="000000"/>
+                </a:solidFill>
+                <a:effectLst/>
+                <a:latin typeface="Arial"/>
+                <a:ea typeface="Arial"/>
+                <a:cs typeface="Arial"/>
+                <a:sym typeface="Arial"/>
+              </a:rPr>
+              <a:t>menit</a:t>
+            </a:r>
+            <a:r>
+              <a:rPr lang="en-ID" sz="1100" b="0" i="0" u="none" strike="noStrike" cap="none" dirty="0">
+                <a:solidFill>
+                  <a:srgbClr val="000000"/>
+                </a:solidFill>
+                <a:effectLst/>
+                <a:latin typeface="Arial"/>
+                <a:ea typeface="Arial"/>
+                <a:cs typeface="Arial"/>
+                <a:sym typeface="Arial"/>
+              </a:rPr>
+              <a:t>, dan </a:t>
+            </a:r>
+            <a:r>
+              <a:rPr lang="en-ID" sz="1100" b="0" i="0" u="none" strike="noStrike" cap="none" dirty="0" err="1">
+                <a:solidFill>
+                  <a:srgbClr val="000000"/>
+                </a:solidFill>
+                <a:effectLst/>
+                <a:latin typeface="Arial"/>
+                <a:ea typeface="Arial"/>
+                <a:cs typeface="Arial"/>
+                <a:sym typeface="Arial"/>
+              </a:rPr>
+              <a:t>kepatuhan</a:t>
+            </a:r>
+            <a:r>
+              <a:rPr lang="en-ID" sz="1100" b="0" i="0" u="none" strike="noStrike" cap="none" dirty="0">
+                <a:solidFill>
+                  <a:srgbClr val="000000"/>
+                </a:solidFill>
+                <a:effectLst/>
+                <a:latin typeface="Arial"/>
+                <a:ea typeface="Arial"/>
+                <a:cs typeface="Arial"/>
+                <a:sym typeface="Arial"/>
+              </a:rPr>
+              <a:t> </a:t>
+            </a:r>
+            <a:r>
+              <a:rPr lang="en-ID" sz="1100" b="0" i="0" u="none" strike="noStrike" cap="none" dirty="0" err="1">
+                <a:solidFill>
+                  <a:srgbClr val="000000"/>
+                </a:solidFill>
+                <a:effectLst/>
+                <a:latin typeface="Arial"/>
+                <a:ea typeface="Arial"/>
+                <a:cs typeface="Arial"/>
+                <a:sym typeface="Arial"/>
+              </a:rPr>
+              <a:t>pencatatan</a:t>
+            </a:r>
+            <a:r>
+              <a:rPr lang="en-ID" sz="1100" b="0" i="0" u="none" strike="noStrike" cap="none" dirty="0">
+                <a:solidFill>
+                  <a:srgbClr val="000000"/>
+                </a:solidFill>
+                <a:effectLst/>
+                <a:latin typeface="Arial"/>
+                <a:ea typeface="Arial"/>
+                <a:cs typeface="Arial"/>
+                <a:sym typeface="Arial"/>
+              </a:rPr>
+              <a:t> </a:t>
+            </a:r>
+            <a:r>
+              <a:rPr lang="en-ID" sz="1100" b="0" i="0" u="none" strike="noStrike" cap="none" dirty="0" err="1">
+                <a:solidFill>
+                  <a:srgbClr val="000000"/>
+                </a:solidFill>
+                <a:effectLst/>
+                <a:latin typeface="Arial"/>
+                <a:ea typeface="Arial"/>
+                <a:cs typeface="Arial"/>
+                <a:sym typeface="Arial"/>
+              </a:rPr>
+              <a:t>rekam</a:t>
+            </a:r>
+            <a:r>
+              <a:rPr lang="en-ID" sz="1100" b="0" i="0" u="none" strike="noStrike" cap="none" dirty="0">
+                <a:solidFill>
+                  <a:srgbClr val="000000"/>
+                </a:solidFill>
+                <a:effectLst/>
+                <a:latin typeface="Arial"/>
+                <a:ea typeface="Arial"/>
+                <a:cs typeface="Arial"/>
+                <a:sym typeface="Arial"/>
+              </a:rPr>
+              <a:t> </a:t>
+            </a:r>
+            <a:r>
+              <a:rPr lang="en-ID" sz="1100" b="0" i="0" u="none" strike="noStrike" cap="none" dirty="0" err="1">
+                <a:solidFill>
+                  <a:srgbClr val="000000"/>
+                </a:solidFill>
+                <a:effectLst/>
+                <a:latin typeface="Arial"/>
+                <a:ea typeface="Arial"/>
+                <a:cs typeface="Arial"/>
+                <a:sym typeface="Arial"/>
+              </a:rPr>
+              <a:t>medis</a:t>
+            </a:r>
+            <a:r>
+              <a:rPr lang="en-ID" sz="1100" b="0" i="0" u="none" strike="noStrike" cap="none" dirty="0">
+                <a:solidFill>
+                  <a:srgbClr val="000000"/>
+                </a:solidFill>
+                <a:effectLst/>
+                <a:latin typeface="Arial"/>
+                <a:ea typeface="Arial"/>
+                <a:cs typeface="Arial"/>
+                <a:sym typeface="Arial"/>
+              </a:rPr>
+              <a:t> </a:t>
+            </a:r>
+            <a:r>
+              <a:rPr lang="en-ID" sz="1100" b="0" i="0" u="none" strike="noStrike" cap="none" dirty="0" err="1">
+                <a:solidFill>
+                  <a:srgbClr val="000000"/>
+                </a:solidFill>
+                <a:effectLst/>
+                <a:latin typeface="Arial"/>
+                <a:ea typeface="Arial"/>
+                <a:cs typeface="Arial"/>
+                <a:sym typeface="Arial"/>
+              </a:rPr>
+              <a:t>menggunakan</a:t>
+            </a:r>
+            <a:r>
+              <a:rPr lang="en-ID" sz="1100" b="0" i="0" u="none" strike="noStrike" cap="none" dirty="0">
+                <a:solidFill>
+                  <a:srgbClr val="000000"/>
+                </a:solidFill>
+                <a:effectLst/>
+                <a:latin typeface="Arial"/>
+                <a:ea typeface="Arial"/>
+                <a:cs typeface="Arial"/>
+                <a:sym typeface="Arial"/>
+              </a:rPr>
+              <a:t> log audit</a:t>
+            </a:r>
+          </a:p>
+          <a:p>
             <a:pPr marL="0" lvl="0" indent="0" algn="l" rtl="0">
               <a:spcBef>
                 <a:spcPts val="0"/>
@@ -1416,7 +5555,7 @@
               </a:spcAft>
               <a:buNone/>
             </a:pPr>
-            <a:endParaRPr/>
+            <a:endParaRPr dirty="0"/>
           </a:p>
         </p:txBody>
       </p:sp>
@@ -12679,7 +16818,7 @@
         <p:spPr>
           <a:xfrm>
             <a:off x="581025" y="1080045"/>
-            <a:ext cx="11029950" cy="2995612"/>
+            <a:ext cx="11029950" cy="4773908"/>
           </a:xfrm>
           <a:prstGeom prst="roundRect">
             <a:avLst>
@@ -12712,6 +16851,816 @@
           </a:bodyPr>
           <a:lstStyle/>
           <a:p>
+            <a:r>
+              <a:rPr lang="en-ID" b="1" dirty="0"/>
+              <a:t>1. 🌐 Akses Publik (</a:t>
+            </a:r>
+            <a:r>
+              <a:rPr lang="en-ID" b="1" dirty="0" err="1"/>
+              <a:t>Tanpa</a:t>
+            </a:r>
+            <a:r>
+              <a:rPr lang="en-ID" b="1" dirty="0"/>
+              <a:t> Token)</a:t>
+            </a:r>
+            <a:endParaRPr lang="en-ID" dirty="0"/>
+          </a:p>
+          <a:p>
+            <a:pPr lvl="4"/>
+            <a:r>
+              <a:rPr lang="en-ID" dirty="0"/>
+              <a:t>	POST /</a:t>
+            </a:r>
+            <a:r>
+              <a:rPr lang="en-ID" dirty="0" err="1"/>
+              <a:t>api</a:t>
+            </a:r>
+            <a:r>
+              <a:rPr lang="en-ID" dirty="0"/>
+              <a:t>/auth/register : </a:t>
+            </a:r>
+            <a:r>
+              <a:rPr lang="en-ID" dirty="0" err="1"/>
+              <a:t>Mendaftarkan</a:t>
+            </a:r>
+            <a:r>
+              <a:rPr lang="en-ID" dirty="0"/>
+              <a:t> </a:t>
+            </a:r>
+            <a:r>
+              <a:rPr lang="en-ID" dirty="0" err="1"/>
+              <a:t>akun</a:t>
+            </a:r>
+            <a:r>
+              <a:rPr lang="en-ID" dirty="0"/>
+              <a:t> </a:t>
+            </a:r>
+            <a:r>
+              <a:rPr lang="en-ID" dirty="0" err="1"/>
+              <a:t>pasien</a:t>
+            </a:r>
+            <a:r>
+              <a:rPr lang="en-ID" dirty="0"/>
+              <a:t> </a:t>
+            </a:r>
+            <a:r>
+              <a:rPr lang="en-ID" dirty="0" err="1"/>
+              <a:t>baru</a:t>
+            </a:r>
+            <a:r>
+              <a:rPr lang="en-ID" dirty="0"/>
+              <a:t>.</a:t>
+            </a:r>
+          </a:p>
+          <a:p>
+            <a:pPr lvl="4"/>
+            <a:r>
+              <a:rPr lang="en-ID" dirty="0"/>
+              <a:t>	POST /</a:t>
+            </a:r>
+            <a:r>
+              <a:rPr lang="en-ID" dirty="0" err="1"/>
+              <a:t>api</a:t>
+            </a:r>
+            <a:r>
+              <a:rPr lang="en-ID" dirty="0"/>
+              <a:t>/auth/login : </a:t>
+            </a:r>
+            <a:r>
+              <a:rPr lang="en-ID" dirty="0" err="1"/>
+              <a:t>Autentikasi</a:t>
+            </a:r>
+            <a:r>
+              <a:rPr lang="en-ID" dirty="0"/>
+              <a:t> dan </a:t>
+            </a:r>
+            <a:r>
+              <a:rPr lang="en-ID" dirty="0" err="1"/>
+              <a:t>penerbitan</a:t>
+            </a:r>
+            <a:r>
+              <a:rPr lang="en-ID" dirty="0"/>
+              <a:t> token JWT.</a:t>
+            </a:r>
+          </a:p>
+          <a:p>
+            <a:pPr lvl="4"/>
+            <a:r>
+              <a:rPr lang="en-ID" dirty="0"/>
+              <a:t>	GET /</a:t>
+            </a:r>
+            <a:r>
+              <a:rPr lang="en-ID" dirty="0" err="1"/>
+              <a:t>api</a:t>
+            </a:r>
+            <a:r>
+              <a:rPr lang="en-ID" dirty="0"/>
+              <a:t>/</a:t>
+            </a:r>
+            <a:r>
+              <a:rPr lang="en-ID" dirty="0" err="1"/>
+              <a:t>catalog</a:t>
+            </a:r>
+            <a:r>
+              <a:rPr lang="en-ID" dirty="0"/>
+              <a:t>/doctors : </a:t>
+            </a:r>
+            <a:r>
+              <a:rPr lang="en-ID" dirty="0" err="1"/>
+              <a:t>Melihat</a:t>
+            </a:r>
+            <a:r>
+              <a:rPr lang="en-ID" dirty="0"/>
+              <a:t> </a:t>
+            </a:r>
+            <a:r>
+              <a:rPr lang="en-ID" dirty="0" err="1"/>
+              <a:t>katalog</a:t>
+            </a:r>
+            <a:r>
+              <a:rPr lang="en-ID" dirty="0"/>
+              <a:t> </a:t>
+            </a:r>
+            <a:r>
+              <a:rPr lang="en-ID" dirty="0" err="1"/>
+              <a:t>dokter</a:t>
+            </a:r>
+            <a:r>
+              <a:rPr lang="en-ID" dirty="0"/>
+              <a:t> </a:t>
+            </a:r>
+            <a:r>
+              <a:rPr lang="en-ID" dirty="0" err="1"/>
+              <a:t>beserta</a:t>
+            </a:r>
+            <a:r>
+              <a:rPr lang="en-ID" dirty="0"/>
+              <a:t> </a:t>
+            </a:r>
+            <a:r>
+              <a:rPr lang="en-ID" dirty="0" err="1"/>
+              <a:t>fitur</a:t>
+            </a:r>
+            <a:r>
+              <a:rPr lang="en-ID" dirty="0"/>
+              <a:t> </a:t>
+            </a:r>
+            <a:r>
+              <a:rPr lang="en-ID" dirty="0" err="1"/>
+              <a:t>pencarian</a:t>
+            </a:r>
+            <a:r>
+              <a:rPr lang="en-ID" dirty="0"/>
+              <a:t> dan </a:t>
+            </a:r>
+            <a:r>
+              <a:rPr lang="en-ID" dirty="0" err="1"/>
+              <a:t>paginasi</a:t>
+            </a:r>
+            <a:r>
+              <a:rPr lang="en-ID" dirty="0"/>
+              <a:t>.</a:t>
+            </a:r>
+          </a:p>
+          <a:p>
+            <a:pPr lvl="4"/>
+            <a:r>
+              <a:rPr lang="en-ID" dirty="0"/>
+              <a:t>	GET /</a:t>
+            </a:r>
+            <a:r>
+              <a:rPr lang="en-ID" dirty="0" err="1"/>
+              <a:t>api</a:t>
+            </a:r>
+            <a:r>
+              <a:rPr lang="en-ID" dirty="0"/>
+              <a:t>/</a:t>
+            </a:r>
+            <a:r>
+              <a:rPr lang="en-ID" dirty="0" err="1"/>
+              <a:t>catalog</a:t>
+            </a:r>
+            <a:r>
+              <a:rPr lang="en-ID" dirty="0"/>
+              <a:t>/services : </a:t>
+            </a:r>
+            <a:r>
+              <a:rPr lang="en-ID" dirty="0" err="1"/>
+              <a:t>Melihat</a:t>
+            </a:r>
+            <a:r>
+              <a:rPr lang="en-ID" dirty="0"/>
+              <a:t> daftar </a:t>
+            </a:r>
+            <a:r>
+              <a:rPr lang="en-ID" dirty="0" err="1"/>
+              <a:t>layanan</a:t>
+            </a:r>
+            <a:r>
+              <a:rPr lang="en-ID" dirty="0"/>
+              <a:t> </a:t>
+            </a:r>
+            <a:r>
+              <a:rPr lang="en-ID" dirty="0" err="1"/>
+              <a:t>poliklinik</a:t>
+            </a:r>
+            <a:r>
+              <a:rPr lang="en-ID" dirty="0"/>
+              <a:t>/</a:t>
+            </a:r>
+            <a:r>
+              <a:rPr lang="en-ID" dirty="0" err="1"/>
+              <a:t>penunjang</a:t>
+            </a:r>
+            <a:r>
+              <a:rPr lang="en-ID" dirty="0"/>
+              <a:t> </a:t>
+            </a:r>
+            <a:r>
+              <a:rPr lang="en-ID" dirty="0" err="1"/>
+              <a:t>medis</a:t>
+            </a:r>
+            <a:r>
+              <a:rPr lang="en-ID" dirty="0"/>
+              <a:t>.</a:t>
+            </a:r>
+          </a:p>
+          <a:p>
+            <a:r>
+              <a:rPr lang="en-ID" b="1" dirty="0"/>
+              <a:t>2. 🧑‍⚕️ Akses </a:t>
+            </a:r>
+            <a:r>
+              <a:rPr lang="en-ID" b="1" dirty="0" err="1"/>
+              <a:t>Pasien</a:t>
+            </a:r>
+            <a:r>
+              <a:rPr lang="en-ID" b="1" dirty="0"/>
+              <a:t> (Role: PATIENT)</a:t>
+            </a:r>
+            <a:endParaRPr lang="en-ID" dirty="0"/>
+          </a:p>
+          <a:p>
+            <a:r>
+              <a:rPr lang="en-ID" dirty="0"/>
+              <a:t>	GET /</a:t>
+            </a:r>
+            <a:r>
+              <a:rPr lang="en-ID" dirty="0" err="1"/>
+              <a:t>api</a:t>
+            </a:r>
+            <a:r>
+              <a:rPr lang="en-ID" dirty="0"/>
+              <a:t>/patients/me/profile : </a:t>
+            </a:r>
+            <a:r>
+              <a:rPr lang="en-ID" dirty="0" err="1"/>
+              <a:t>Melihat</a:t>
+            </a:r>
+            <a:r>
+              <a:rPr lang="en-ID" dirty="0"/>
+              <a:t> biodata </a:t>
+            </a:r>
+            <a:r>
+              <a:rPr lang="en-ID" dirty="0" err="1"/>
+              <a:t>rekam</a:t>
+            </a:r>
+            <a:r>
+              <a:rPr lang="en-ID" dirty="0"/>
+              <a:t> </a:t>
+            </a:r>
+            <a:r>
+              <a:rPr lang="en-ID" dirty="0" err="1"/>
+              <a:t>medis</a:t>
+            </a:r>
+            <a:r>
+              <a:rPr lang="en-ID" dirty="0"/>
+              <a:t> </a:t>
+            </a:r>
+            <a:r>
+              <a:rPr lang="en-ID" dirty="0" err="1"/>
+              <a:t>diri</a:t>
+            </a:r>
+            <a:r>
+              <a:rPr lang="en-ID" dirty="0"/>
+              <a:t> </a:t>
+            </a:r>
+            <a:r>
+              <a:rPr lang="en-ID" dirty="0" err="1"/>
+              <a:t>sendiri</a:t>
+            </a:r>
+            <a:r>
+              <a:rPr lang="en-ID" dirty="0"/>
+              <a:t>.</a:t>
+            </a:r>
+          </a:p>
+          <a:p>
+            <a:r>
+              <a:rPr lang="en-ID" dirty="0"/>
+              <a:t>	GET /</a:t>
+            </a:r>
+            <a:r>
+              <a:rPr lang="en-ID" dirty="0" err="1"/>
+              <a:t>api</a:t>
+            </a:r>
+            <a:r>
+              <a:rPr lang="en-ID" dirty="0"/>
+              <a:t>/patients/me/bookings : </a:t>
+            </a:r>
+            <a:r>
+              <a:rPr lang="en-ID" dirty="0" err="1"/>
+              <a:t>Melihat</a:t>
+            </a:r>
+            <a:r>
+              <a:rPr lang="en-ID" dirty="0"/>
+              <a:t> </a:t>
+            </a:r>
+            <a:r>
+              <a:rPr lang="en-ID" dirty="0" err="1"/>
+              <a:t>riwayat</a:t>
+            </a:r>
+            <a:r>
+              <a:rPr lang="en-ID" dirty="0"/>
+              <a:t> </a:t>
+            </a:r>
+            <a:r>
+              <a:rPr lang="en-ID" dirty="0" err="1"/>
+              <a:t>seluruh</a:t>
+            </a:r>
+            <a:r>
+              <a:rPr lang="en-ID" dirty="0"/>
+              <a:t> </a:t>
+            </a:r>
+            <a:r>
+              <a:rPr lang="en-ID" dirty="0" err="1"/>
+              <a:t>kunjungan</a:t>
+            </a:r>
+            <a:r>
+              <a:rPr lang="en-ID" dirty="0"/>
+              <a:t> dan status booking.</a:t>
+            </a:r>
+          </a:p>
+          <a:p>
+            <a:r>
+              <a:rPr lang="en-ID" dirty="0"/>
+              <a:t>	POST /</a:t>
+            </a:r>
+            <a:r>
+              <a:rPr lang="en-ID" dirty="0" err="1"/>
+              <a:t>api</a:t>
+            </a:r>
+            <a:r>
+              <a:rPr lang="en-ID" dirty="0"/>
+              <a:t>/bookings : </a:t>
+            </a:r>
+            <a:r>
+              <a:rPr lang="en-ID" dirty="0" err="1"/>
+              <a:t>Melakukan</a:t>
+            </a:r>
+            <a:r>
+              <a:rPr lang="en-ID" dirty="0"/>
+              <a:t> </a:t>
+            </a:r>
+            <a:r>
+              <a:rPr lang="en-ID" dirty="0" err="1"/>
+              <a:t>pendaftaran</a:t>
+            </a:r>
+            <a:r>
+              <a:rPr lang="en-ID" dirty="0"/>
+              <a:t>/</a:t>
+            </a:r>
+            <a:r>
+              <a:rPr lang="en-ID" dirty="0" err="1"/>
+              <a:t>reservasi</a:t>
+            </a:r>
+            <a:r>
+              <a:rPr lang="en-ID" dirty="0"/>
+              <a:t> </a:t>
+            </a:r>
+            <a:r>
+              <a:rPr lang="en-ID" dirty="0" err="1"/>
+              <a:t>jadwal</a:t>
+            </a:r>
+            <a:r>
+              <a:rPr lang="en-ID" dirty="0"/>
+              <a:t> (</a:t>
+            </a:r>
+            <a:r>
+              <a:rPr lang="en-ID" dirty="0" err="1"/>
+              <a:t>mendukung</a:t>
+            </a:r>
+            <a:r>
+              <a:rPr lang="en-ID" dirty="0"/>
+              <a:t> upload file).	</a:t>
+            </a:r>
+          </a:p>
+          <a:p>
+            <a:r>
+              <a:rPr lang="en-ID" dirty="0"/>
+              <a:t>	POST /</a:t>
+            </a:r>
+            <a:r>
+              <a:rPr lang="en-ID" dirty="0" err="1"/>
+              <a:t>api</a:t>
+            </a:r>
+            <a:r>
+              <a:rPr lang="en-ID" dirty="0"/>
+              <a:t>/bookings/{id}/pay : </a:t>
+            </a:r>
+            <a:r>
+              <a:rPr lang="en-ID" dirty="0" err="1"/>
+              <a:t>Membayar</a:t>
+            </a:r>
+            <a:r>
+              <a:rPr lang="en-ID" dirty="0"/>
+              <a:t> </a:t>
+            </a:r>
+            <a:r>
+              <a:rPr lang="en-ID" dirty="0" err="1"/>
+              <a:t>tagihan</a:t>
+            </a:r>
+            <a:r>
+              <a:rPr lang="en-ID" dirty="0"/>
+              <a:t> booking (</a:t>
+            </a:r>
+            <a:r>
+              <a:rPr lang="en-ID" dirty="0" err="1"/>
+              <a:t>simulasi</a:t>
+            </a:r>
+            <a:r>
+              <a:rPr lang="en-ID" dirty="0"/>
+              <a:t> </a:t>
+            </a:r>
+            <a:r>
+              <a:rPr lang="en-ID" i="1" dirty="0"/>
+              <a:t>sandbox</a:t>
+            </a:r>
+            <a:r>
+              <a:rPr lang="en-ID" dirty="0"/>
+              <a:t>).</a:t>
+            </a:r>
+          </a:p>
+          <a:p>
+            <a:r>
+              <a:rPr lang="en-ID" dirty="0"/>
+              <a:t>	POST /</a:t>
+            </a:r>
+            <a:r>
+              <a:rPr lang="en-ID" dirty="0" err="1"/>
+              <a:t>api</a:t>
+            </a:r>
+            <a:r>
+              <a:rPr lang="en-ID" dirty="0"/>
+              <a:t>/bookings/{id}/reviews : </a:t>
+            </a:r>
+            <a:r>
+              <a:rPr lang="en-ID" dirty="0" err="1"/>
+              <a:t>Memberikan</a:t>
+            </a:r>
+            <a:r>
+              <a:rPr lang="en-ID" dirty="0"/>
+              <a:t> </a:t>
+            </a:r>
+            <a:r>
+              <a:rPr lang="en-ID" dirty="0" err="1"/>
+              <a:t>ulasan</a:t>
+            </a:r>
+            <a:r>
+              <a:rPr lang="en-ID" dirty="0"/>
+              <a:t> dan rating pada </a:t>
+            </a:r>
+            <a:r>
+              <a:rPr lang="en-ID" dirty="0" err="1"/>
+              <a:t>pelayanan</a:t>
+            </a:r>
+            <a:r>
+              <a:rPr lang="en-ID" dirty="0"/>
+              <a:t>.</a:t>
+            </a:r>
+          </a:p>
+          <a:p>
+            <a:r>
+              <a:rPr lang="en-ID" b="1" dirty="0"/>
+              <a:t>3. 🩺 Akses Dokter (Role: DOCTOR)</a:t>
+            </a:r>
+            <a:endParaRPr lang="en-ID" dirty="0"/>
+          </a:p>
+          <a:p>
+            <a:r>
+              <a:rPr lang="en-ID" dirty="0"/>
+              <a:t>	GET /</a:t>
+            </a:r>
+            <a:r>
+              <a:rPr lang="en-ID" dirty="0" err="1"/>
+              <a:t>api</a:t>
+            </a:r>
+            <a:r>
+              <a:rPr lang="en-ID" dirty="0"/>
+              <a:t>/doctor-panel/bookings : </a:t>
+            </a:r>
+            <a:r>
+              <a:rPr lang="en-ID" dirty="0" err="1"/>
+              <a:t>Memantau</a:t>
+            </a:r>
+            <a:r>
+              <a:rPr lang="en-ID" dirty="0"/>
+              <a:t> daftar </a:t>
+            </a:r>
+            <a:r>
+              <a:rPr lang="en-ID" dirty="0" err="1"/>
+              <a:t>pasien</a:t>
+            </a:r>
+            <a:r>
+              <a:rPr lang="en-ID" dirty="0"/>
+              <a:t> yang antre pada </a:t>
+            </a:r>
+            <a:r>
+              <a:rPr lang="en-ID" dirty="0" err="1"/>
+              <a:t>jadwal</a:t>
+            </a:r>
+            <a:r>
+              <a:rPr lang="en-ID" dirty="0"/>
+              <a:t> </a:t>
+            </a:r>
+            <a:r>
+              <a:rPr lang="en-ID" dirty="0" err="1"/>
+              <a:t>hari</a:t>
+            </a:r>
+            <a:r>
+              <a:rPr lang="en-ID" dirty="0"/>
+              <a:t> </a:t>
+            </a:r>
+            <a:r>
+              <a:rPr lang="en-ID" dirty="0" err="1"/>
+              <a:t>ini</a:t>
+            </a:r>
+            <a:r>
+              <a:rPr lang="en-ID" dirty="0"/>
+              <a:t>.</a:t>
+            </a:r>
+          </a:p>
+          <a:p>
+            <a:r>
+              <a:rPr lang="en-ID" dirty="0"/>
+              <a:t>	PATCH /</a:t>
+            </a:r>
+            <a:r>
+              <a:rPr lang="en-ID" dirty="0" err="1"/>
+              <a:t>api</a:t>
+            </a:r>
+            <a:r>
+              <a:rPr lang="en-ID" dirty="0"/>
+              <a:t>/doctor-panel/bookings/{id}/status : </a:t>
+            </a:r>
+            <a:r>
+              <a:rPr lang="en-ID" dirty="0" err="1"/>
+              <a:t>Memanggil</a:t>
+            </a:r>
+            <a:r>
+              <a:rPr lang="en-ID" dirty="0"/>
+              <a:t> </a:t>
+            </a:r>
+            <a:r>
+              <a:rPr lang="en-ID" dirty="0" err="1"/>
+              <a:t>pasien</a:t>
+            </a:r>
+            <a:r>
+              <a:rPr lang="en-ID" dirty="0"/>
+              <a:t> dan </a:t>
+            </a:r>
+            <a:r>
+              <a:rPr lang="en-ID" dirty="0" err="1"/>
+              <a:t>mengubah</a:t>
+            </a:r>
+            <a:r>
+              <a:rPr lang="en-ID" dirty="0"/>
+              <a:t> status </a:t>
+            </a:r>
+            <a:r>
+              <a:rPr lang="en-ID" dirty="0" err="1"/>
+              <a:t>pemeriksaan</a:t>
+            </a:r>
+            <a:r>
+              <a:rPr lang="en-ID" dirty="0"/>
+              <a:t> 	(IN_PROGRESS </a:t>
+            </a:r>
+            <a:r>
+              <a:rPr lang="en-ID" dirty="0" err="1"/>
+              <a:t>hingga</a:t>
+            </a:r>
+            <a:r>
+              <a:rPr lang="en-ID" dirty="0"/>
+              <a:t> COMPLETED).</a:t>
+            </a:r>
+          </a:p>
+          <a:p>
+            <a:r>
+              <a:rPr lang="en-ID" b="1" dirty="0"/>
+              <a:t>4. 👑 Akses Administrator (Role: ADMIN)</a:t>
+            </a:r>
+            <a:endParaRPr lang="en-ID" dirty="0"/>
+          </a:p>
+          <a:p>
+            <a:r>
+              <a:rPr lang="en-ID" dirty="0"/>
+              <a:t>	POST, PUT, DELETE /</a:t>
+            </a:r>
+            <a:r>
+              <a:rPr lang="en-ID" dirty="0" err="1"/>
+              <a:t>api</a:t>
+            </a:r>
+            <a:r>
+              <a:rPr lang="en-ID" dirty="0"/>
+              <a:t>/doctors : </a:t>
+            </a:r>
+            <a:r>
+              <a:rPr lang="en-ID" dirty="0" err="1"/>
+              <a:t>Mengelola</a:t>
+            </a:r>
+            <a:r>
+              <a:rPr lang="en-ID" dirty="0"/>
+              <a:t> data master </a:t>
+            </a:r>
+            <a:r>
+              <a:rPr lang="en-ID" dirty="0" err="1"/>
+              <a:t>profil</a:t>
+            </a:r>
+            <a:r>
+              <a:rPr lang="en-ID" dirty="0"/>
+              <a:t> Dokter.</a:t>
+            </a:r>
+          </a:p>
+          <a:p>
+            <a:r>
+              <a:rPr lang="en-ID" dirty="0"/>
+              <a:t>	POST, PUT, DELETE /</a:t>
+            </a:r>
+            <a:r>
+              <a:rPr lang="en-ID" dirty="0" err="1"/>
+              <a:t>api</a:t>
+            </a:r>
+            <a:r>
+              <a:rPr lang="en-ID" dirty="0"/>
+              <a:t>/services : </a:t>
+            </a:r>
+            <a:r>
+              <a:rPr lang="en-ID" dirty="0" err="1"/>
+              <a:t>Mengelola</a:t>
+            </a:r>
+            <a:r>
+              <a:rPr lang="en-ID" dirty="0"/>
+              <a:t> data master </a:t>
+            </a:r>
+            <a:r>
+              <a:rPr lang="en-ID" dirty="0" err="1"/>
+              <a:t>Layanan</a:t>
+            </a:r>
+            <a:r>
+              <a:rPr lang="en-ID" dirty="0"/>
+              <a:t> Rumah Sakit.</a:t>
+            </a:r>
+          </a:p>
+          <a:p>
+            <a:r>
+              <a:rPr lang="en-ID" dirty="0"/>
+              <a:t>	POST, PUT, DELETE /</a:t>
+            </a:r>
+            <a:r>
+              <a:rPr lang="en-ID" dirty="0" err="1"/>
+              <a:t>api</a:t>
+            </a:r>
+            <a:r>
+              <a:rPr lang="en-ID" dirty="0"/>
+              <a:t>/schedules : </a:t>
+            </a:r>
+            <a:r>
+              <a:rPr lang="en-ID" dirty="0" err="1"/>
+              <a:t>Mengatur</a:t>
+            </a:r>
+            <a:r>
+              <a:rPr lang="en-ID" dirty="0"/>
+              <a:t> </a:t>
+            </a:r>
+            <a:r>
+              <a:rPr lang="en-ID" dirty="0" err="1"/>
+              <a:t>jadwal</a:t>
+            </a:r>
+            <a:r>
+              <a:rPr lang="en-ID" dirty="0"/>
+              <a:t> </a:t>
+            </a:r>
+            <a:r>
+              <a:rPr lang="en-ID" dirty="0" err="1"/>
+              <a:t>praktek</a:t>
+            </a:r>
+            <a:r>
+              <a:rPr lang="en-ID" dirty="0"/>
+              <a:t> </a:t>
+            </a:r>
+            <a:r>
+              <a:rPr lang="en-ID" dirty="0" err="1"/>
+              <a:t>beserta</a:t>
+            </a:r>
+            <a:r>
+              <a:rPr lang="en-ID" dirty="0"/>
+              <a:t> </a:t>
+            </a:r>
+            <a:r>
+              <a:rPr lang="en-ID" dirty="0" err="1"/>
+              <a:t>kuota</a:t>
+            </a:r>
+            <a:r>
+              <a:rPr lang="en-ID" dirty="0"/>
+              <a:t> </a:t>
+            </a:r>
+            <a:r>
+              <a:rPr lang="en-ID" dirty="0" err="1"/>
+              <a:t>harian</a:t>
+            </a:r>
+            <a:r>
+              <a:rPr lang="en-ID" dirty="0"/>
+              <a:t> </a:t>
+            </a:r>
+            <a:r>
+              <a:rPr lang="en-ID" dirty="0" err="1"/>
+              <a:t>dokter</a:t>
+            </a:r>
+            <a:r>
+              <a:rPr lang="en-ID" dirty="0"/>
+              <a:t>.</a:t>
+            </a:r>
+          </a:p>
+          <a:p>
+            <a:r>
+              <a:rPr lang="en-ID" dirty="0"/>
+              <a:t>	GET /</a:t>
+            </a:r>
+            <a:r>
+              <a:rPr lang="en-ID" dirty="0" err="1"/>
+              <a:t>api</a:t>
+            </a:r>
+            <a:r>
+              <a:rPr lang="en-ID" dirty="0"/>
+              <a:t>/reports/finance : </a:t>
+            </a:r>
+            <a:r>
+              <a:rPr lang="en-ID" dirty="0" err="1"/>
+              <a:t>Mengakses</a:t>
+            </a:r>
+            <a:r>
+              <a:rPr lang="en-ID" dirty="0"/>
+              <a:t> </a:t>
+            </a:r>
+            <a:r>
+              <a:rPr lang="en-ID" dirty="0" err="1"/>
+              <a:t>laporan</a:t>
+            </a:r>
+            <a:r>
+              <a:rPr lang="en-ID" dirty="0"/>
+              <a:t> </a:t>
+            </a:r>
+            <a:r>
+              <a:rPr lang="en-ID" dirty="0" err="1"/>
+              <a:t>ringkasan</a:t>
+            </a:r>
+            <a:r>
+              <a:rPr lang="en-ID" dirty="0"/>
+              <a:t> </a:t>
+            </a:r>
+            <a:r>
+              <a:rPr lang="en-ID" dirty="0" err="1"/>
+              <a:t>transaksi</a:t>
+            </a:r>
+            <a:r>
+              <a:rPr lang="en-ID" dirty="0"/>
+              <a:t> &amp; </a:t>
+            </a:r>
+            <a:r>
+              <a:rPr lang="en-ID" dirty="0" err="1"/>
+              <a:t>keuangan</a:t>
+            </a:r>
+            <a:r>
+              <a:rPr lang="en-ID" dirty="0"/>
+              <a:t> </a:t>
+            </a:r>
+            <a:r>
+              <a:rPr lang="en-ID" dirty="0" err="1"/>
+              <a:t>rumah</a:t>
+            </a:r>
+            <a:r>
+              <a:rPr lang="en-ID" dirty="0"/>
+              <a:t> </a:t>
+            </a:r>
+            <a:r>
+              <a:rPr lang="en-ID" dirty="0" err="1"/>
+              <a:t>sakit</a:t>
+            </a:r>
+            <a:r>
+              <a:rPr lang="en-ID" dirty="0"/>
+              <a:t>.</a:t>
+            </a:r>
+          </a:p>
+          <a:p>
             <a:pPr marL="0" marR="0" lvl="0" indent="0" algn="ctr" rtl="0">
               <a:spcBef>
                 <a:spcPts val="0"/>
@@ -12721,7 +17670,7 @@
               </a:spcAft>
               <a:buNone/>
             </a:pPr>
-            <a:endParaRPr sz="1800" b="0" i="0" u="none" strike="noStrike" cap="none">
+            <a:endParaRPr sz="1800" b="0" i="0" u="none" strike="noStrike" cap="none" dirty="0">
               <a:solidFill>
                 <a:schemeClr val="dk1"/>
               </a:solidFill>
@@ -12733,2648 +17682,6 @@
           </a:p>
         </p:txBody>
       </p:sp>
-      <p:graphicFrame>
-        <p:nvGraphicFramePr>
-          <p:cNvPr id="320" name="Google Shape;320;p21"/>
-          <p:cNvGraphicFramePr/>
-          <p:nvPr>
-            <p:extLst>
-              <p:ext uri="{D42A27DB-BD31-4B8C-83A1-F6EECF244321}">
-                <p14:modId xmlns:p14="http://schemas.microsoft.com/office/powerpoint/2010/main" val="1652514190"/>
-              </p:ext>
-            </p:extLst>
-          </p:nvPr>
-        </p:nvGraphicFramePr>
-        <p:xfrm>
-          <a:off x="581025" y="1080045"/>
-          <a:ext cx="11020425" cy="2995650"/>
-        </p:xfrm>
-        <a:graphic>
-          <a:graphicData uri="http://schemas.openxmlformats.org/drawingml/2006/table">
-            <a:tbl>
-              <a:tblPr firstRow="1" bandRow="1">
-                <a:noFill/>
-                <a:tableStyleId>{E7EEF7A6-C51F-4765-95DC-4421B0C34886}</a:tableStyleId>
-              </a:tblPr>
-              <a:tblGrid>
-                <a:gridCol w="2215515">
-                  <a:extLst>
-                    <a:ext uri="{9D8B030D-6E8A-4147-A177-3AD203B41FA5}">
-                      <a16:colId xmlns:a16="http://schemas.microsoft.com/office/drawing/2014/main" val="20000"/>
-                    </a:ext>
-                  </a:extLst>
-                </a:gridCol>
-                <a:gridCol w="1684020">
-                  <a:extLst>
-                    <a:ext uri="{9D8B030D-6E8A-4147-A177-3AD203B41FA5}">
-                      <a16:colId xmlns:a16="http://schemas.microsoft.com/office/drawing/2014/main" val="20001"/>
-                    </a:ext>
-                  </a:extLst>
-                </a:gridCol>
-                <a:gridCol w="3009900">
-                  <a:extLst>
-                    <a:ext uri="{9D8B030D-6E8A-4147-A177-3AD203B41FA5}">
-                      <a16:colId xmlns:a16="http://schemas.microsoft.com/office/drawing/2014/main" val="20002"/>
-                    </a:ext>
-                  </a:extLst>
-                </a:gridCol>
-                <a:gridCol w="4110990">
-                  <a:extLst>
-                    <a:ext uri="{9D8B030D-6E8A-4147-A177-3AD203B41FA5}">
-                      <a16:colId xmlns:a16="http://schemas.microsoft.com/office/drawing/2014/main" val="20003"/>
-                    </a:ext>
-                  </a:extLst>
-                </a:gridCol>
-              </a:tblGrid>
-              <a:tr h="427950">
-                <a:tc>
-                  <a:txBody>
-                    <a:bodyPr/>
-                    <a:lstStyle/>
-                    <a:p>
-                      <a:pPr marL="0" marR="0" lvl="0" indent="0" algn="l" rtl="0">
-                        <a:spcBef>
-                          <a:spcPts val="0"/>
-                        </a:spcBef>
-                        <a:spcAft>
-                          <a:spcPts val="0"/>
-                        </a:spcAft>
-                        <a:buNone/>
-                      </a:pPr>
-                      <a:r>
-                        <a:rPr lang="en-US" sz="1050" b="0" i="0" u="none" strike="noStrike" cap="none">
-                          <a:solidFill>
-                            <a:srgbClr val="FFFFFF"/>
-                          </a:solidFill>
-                          <a:latin typeface="Inter SemiBold"/>
-                          <a:ea typeface="Inter SemiBold"/>
-                          <a:cs typeface="Arial" panose="020B0604020202020204" pitchFamily="34" charset="0"/>
-                          <a:sym typeface="Inter SemiBold"/>
-                        </a:rPr>
-                        <a:t>Kategori Modul</a:t>
-                      </a:r>
-                      <a:endParaRPr/>
-                    </a:p>
-                  </a:txBody>
-                  <a:tcPr marL="63500" marR="63500" marT="25400" marB="25400" anchor="ctr">
-                    <a:lnL w="9525" cap="flat" cmpd="sng">
-                      <a:solidFill>
-                        <a:srgbClr val="000000">
-                          <a:alpha val="0"/>
-                        </a:srgbClr>
-                      </a:solidFill>
-                      <a:prstDash val="solid"/>
-                      <a:round/>
-                      <a:headEnd type="none" w="sm" len="sm"/>
-                      <a:tailEnd type="none" w="sm" len="sm"/>
-                    </a:lnL>
-                    <a:lnR w="9525" cap="flat" cmpd="sng">
-                      <a:solidFill>
-                        <a:srgbClr val="000000">
-                          <a:alpha val="0"/>
-                        </a:srgbClr>
-                      </a:solidFill>
-                      <a:prstDash val="solid"/>
-                      <a:round/>
-                      <a:headEnd type="none" w="sm" len="sm"/>
-                      <a:tailEnd type="none" w="sm" len="sm"/>
-                    </a:lnR>
-                    <a:lnT w="9525" cap="flat" cmpd="sng">
-                      <a:solidFill>
-                        <a:srgbClr val="000000">
-                          <a:alpha val="0"/>
-                        </a:srgbClr>
-                      </a:solidFill>
-                      <a:prstDash val="solid"/>
-                      <a:round/>
-                      <a:headEnd type="none" w="sm" len="sm"/>
-                      <a:tailEnd type="none" w="sm" len="sm"/>
-                    </a:lnT>
-                    <a:lnB w="9525" cap="flat" cmpd="sng">
-                      <a:solidFill>
-                        <a:srgbClr val="000000">
-                          <a:alpha val="0"/>
-                        </a:srgbClr>
-                      </a:solidFill>
-                      <a:prstDash val="solid"/>
-                      <a:round/>
-                      <a:headEnd type="none" w="sm" len="sm"/>
-                      <a:tailEnd type="none" w="sm" len="sm"/>
-                    </a:lnB>
-                    <a:solidFill>
-                      <a:srgbClr val="0F172A"/>
-                    </a:solidFill>
-                  </a:tcPr>
-                </a:tc>
-                <a:tc>
-                  <a:txBody>
-                    <a:bodyPr/>
-                    <a:lstStyle/>
-                    <a:p>
-                      <a:pPr marL="0" marR="0" lvl="0" indent="0" algn="l" rtl="0">
-                        <a:spcBef>
-                          <a:spcPts val="0"/>
-                        </a:spcBef>
-                        <a:spcAft>
-                          <a:spcPts val="0"/>
-                        </a:spcAft>
-                        <a:buNone/>
-                      </a:pPr>
-                      <a:r>
-                        <a:rPr lang="en-US" sz="1050" b="0" i="0" u="none" strike="noStrike" cap="none">
-                          <a:solidFill>
-                            <a:srgbClr val="FFFFFF"/>
-                          </a:solidFill>
-                          <a:latin typeface="Inter SemiBold"/>
-                          <a:ea typeface="Inter SemiBold"/>
-                          <a:cs typeface="Arial" panose="020B0604020202020204" pitchFamily="34" charset="0"/>
-                          <a:sym typeface="Inter SemiBold"/>
-                        </a:rPr>
-                        <a:t>HTTP Method</a:t>
-                      </a:r>
-                      <a:endParaRPr/>
-                    </a:p>
-                  </a:txBody>
-                  <a:tcPr marL="63500" marR="63500" marT="25400" marB="25400" anchor="ctr">
-                    <a:lnL w="9525" cap="flat" cmpd="sng">
-                      <a:solidFill>
-                        <a:srgbClr val="000000">
-                          <a:alpha val="0"/>
-                        </a:srgbClr>
-                      </a:solidFill>
-                      <a:prstDash val="solid"/>
-                      <a:round/>
-                      <a:headEnd type="none" w="sm" len="sm"/>
-                      <a:tailEnd type="none" w="sm" len="sm"/>
-                    </a:lnL>
-                    <a:lnR w="9525" cap="flat" cmpd="sng">
-                      <a:solidFill>
-                        <a:srgbClr val="000000">
-                          <a:alpha val="0"/>
-                        </a:srgbClr>
-                      </a:solidFill>
-                      <a:prstDash val="solid"/>
-                      <a:round/>
-                      <a:headEnd type="none" w="sm" len="sm"/>
-                      <a:tailEnd type="none" w="sm" len="sm"/>
-                    </a:lnR>
-                    <a:lnT w="9525" cap="flat" cmpd="sng">
-                      <a:solidFill>
-                        <a:srgbClr val="000000">
-                          <a:alpha val="0"/>
-                        </a:srgbClr>
-                      </a:solidFill>
-                      <a:prstDash val="solid"/>
-                      <a:round/>
-                      <a:headEnd type="none" w="sm" len="sm"/>
-                      <a:tailEnd type="none" w="sm" len="sm"/>
-                    </a:lnT>
-                    <a:lnB w="9525" cap="flat" cmpd="sng">
-                      <a:solidFill>
-                        <a:srgbClr val="000000">
-                          <a:alpha val="0"/>
-                        </a:srgbClr>
-                      </a:solidFill>
-                      <a:prstDash val="solid"/>
-                      <a:round/>
-                      <a:headEnd type="none" w="sm" len="sm"/>
-                      <a:tailEnd type="none" w="sm" len="sm"/>
-                    </a:lnB>
-                    <a:solidFill>
-                      <a:srgbClr val="0F172A"/>
-                    </a:solidFill>
-                  </a:tcPr>
-                </a:tc>
-                <a:tc>
-                  <a:txBody>
-                    <a:bodyPr/>
-                    <a:lstStyle/>
-                    <a:p>
-                      <a:pPr marL="0" marR="0" lvl="0" indent="0" algn="l" rtl="0">
-                        <a:spcBef>
-                          <a:spcPts val="0"/>
-                        </a:spcBef>
-                        <a:spcAft>
-                          <a:spcPts val="0"/>
-                        </a:spcAft>
-                        <a:buNone/>
-                      </a:pPr>
-                      <a:r>
-                        <a:rPr lang="en-US" sz="1050" b="0" i="0" u="none" strike="noStrike" cap="none">
-                          <a:solidFill>
-                            <a:srgbClr val="FFFFFF"/>
-                          </a:solidFill>
-                          <a:latin typeface="Inter SemiBold"/>
-                          <a:ea typeface="Inter SemiBold"/>
-                          <a:cs typeface="Arial" panose="020B0604020202020204" pitchFamily="34" charset="0"/>
-                          <a:sym typeface="Inter SemiBold"/>
-                        </a:rPr>
-                        <a:t>URI Endpoint</a:t>
-                      </a:r>
-                      <a:endParaRPr/>
-                    </a:p>
-                  </a:txBody>
-                  <a:tcPr marL="63500" marR="63500" marT="25400" marB="25400" anchor="ctr">
-                    <a:lnL w="9525" cap="flat" cmpd="sng">
-                      <a:solidFill>
-                        <a:srgbClr val="000000">
-                          <a:alpha val="0"/>
-                        </a:srgbClr>
-                      </a:solidFill>
-                      <a:prstDash val="solid"/>
-                      <a:round/>
-                      <a:headEnd type="none" w="sm" len="sm"/>
-                      <a:tailEnd type="none" w="sm" len="sm"/>
-                    </a:lnL>
-                    <a:lnR w="9525" cap="flat" cmpd="sng">
-                      <a:solidFill>
-                        <a:srgbClr val="000000">
-                          <a:alpha val="0"/>
-                        </a:srgbClr>
-                      </a:solidFill>
-                      <a:prstDash val="solid"/>
-                      <a:round/>
-                      <a:headEnd type="none" w="sm" len="sm"/>
-                      <a:tailEnd type="none" w="sm" len="sm"/>
-                    </a:lnR>
-                    <a:lnT w="9525" cap="flat" cmpd="sng">
-                      <a:solidFill>
-                        <a:srgbClr val="000000">
-                          <a:alpha val="0"/>
-                        </a:srgbClr>
-                      </a:solidFill>
-                      <a:prstDash val="solid"/>
-                      <a:round/>
-                      <a:headEnd type="none" w="sm" len="sm"/>
-                      <a:tailEnd type="none" w="sm" len="sm"/>
-                    </a:lnT>
-                    <a:lnB w="9525" cap="flat" cmpd="sng">
-                      <a:solidFill>
-                        <a:srgbClr val="000000">
-                          <a:alpha val="0"/>
-                        </a:srgbClr>
-                      </a:solidFill>
-                      <a:prstDash val="solid"/>
-                      <a:round/>
-                      <a:headEnd type="none" w="sm" len="sm"/>
-                      <a:tailEnd type="none" w="sm" len="sm"/>
-                    </a:lnB>
-                    <a:solidFill>
-                      <a:srgbClr val="0F172A"/>
-                    </a:solidFill>
-                  </a:tcPr>
-                </a:tc>
-                <a:tc>
-                  <a:txBody>
-                    <a:bodyPr/>
-                    <a:lstStyle/>
-                    <a:p>
-                      <a:pPr marL="0" marR="0" lvl="0" indent="0" algn="l" rtl="0">
-                        <a:spcBef>
-                          <a:spcPts val="0"/>
-                        </a:spcBef>
-                        <a:spcAft>
-                          <a:spcPts val="0"/>
-                        </a:spcAft>
-                        <a:buNone/>
-                      </a:pPr>
-                      <a:r>
-                        <a:rPr lang="en-US" sz="1050" b="0" i="0" u="none" strike="noStrike" cap="none">
-                          <a:solidFill>
-                            <a:srgbClr val="FFFFFF"/>
-                          </a:solidFill>
-                          <a:latin typeface="Inter SemiBold"/>
-                          <a:ea typeface="Inter SemiBold"/>
-                          <a:cs typeface="Arial" panose="020B0604020202020204" pitchFamily="34" charset="0"/>
-                          <a:sym typeface="Inter SemiBold"/>
-                        </a:rPr>
-                        <a:t>Deskripsi Output / Fungsi Keamanan</a:t>
-                      </a:r>
-                      <a:endParaRPr/>
-                    </a:p>
-                  </a:txBody>
-                  <a:tcPr marL="63500" marR="63500" marT="25400" marB="25400" anchor="ctr">
-                    <a:lnL w="9525" cap="flat" cmpd="sng">
-                      <a:solidFill>
-                        <a:srgbClr val="000000">
-                          <a:alpha val="0"/>
-                        </a:srgbClr>
-                      </a:solidFill>
-                      <a:prstDash val="solid"/>
-                      <a:round/>
-                      <a:headEnd type="none" w="sm" len="sm"/>
-                      <a:tailEnd type="none" w="sm" len="sm"/>
-                    </a:lnL>
-                    <a:lnR w="9525" cap="flat" cmpd="sng">
-                      <a:solidFill>
-                        <a:srgbClr val="000000">
-                          <a:alpha val="0"/>
-                        </a:srgbClr>
-                      </a:solidFill>
-                      <a:prstDash val="solid"/>
-                      <a:round/>
-                      <a:headEnd type="none" w="sm" len="sm"/>
-                      <a:tailEnd type="none" w="sm" len="sm"/>
-                    </a:lnR>
-                    <a:lnT w="9525" cap="flat" cmpd="sng">
-                      <a:solidFill>
-                        <a:srgbClr val="000000">
-                          <a:alpha val="0"/>
-                        </a:srgbClr>
-                      </a:solidFill>
-                      <a:prstDash val="solid"/>
-                      <a:round/>
-                      <a:headEnd type="none" w="sm" len="sm"/>
-                      <a:tailEnd type="none" w="sm" len="sm"/>
-                    </a:lnT>
-                    <a:lnB w="9525" cap="flat" cmpd="sng">
-                      <a:solidFill>
-                        <a:srgbClr val="000000">
-                          <a:alpha val="0"/>
-                        </a:srgbClr>
-                      </a:solidFill>
-                      <a:prstDash val="solid"/>
-                      <a:round/>
-                      <a:headEnd type="none" w="sm" len="sm"/>
-                      <a:tailEnd type="none" w="sm" len="sm"/>
-                    </a:lnB>
-                    <a:solidFill>
-                      <a:srgbClr val="0F172A"/>
-                    </a:solidFill>
-                  </a:tcPr>
-                </a:tc>
-                <a:extLst>
-                  <a:ext uri="{0D108BD9-81ED-4DB2-BD59-A6C34878D82A}">
-                    <a16:rowId xmlns:a16="http://schemas.microsoft.com/office/drawing/2014/main" val="10000"/>
-                  </a:ext>
-                </a:extLst>
-              </a:tr>
-              <a:tr h="427950">
-                <a:tc>
-                  <a:txBody>
-                    <a:bodyPr/>
-                    <a:lstStyle/>
-                    <a:p>
-                      <a:pPr marL="0" marR="0" lvl="0" indent="0" algn="l" rtl="0">
-                        <a:spcBef>
-                          <a:spcPts val="0"/>
-                        </a:spcBef>
-                        <a:spcAft>
-                          <a:spcPts val="0"/>
-                        </a:spcAft>
-                        <a:buNone/>
-                      </a:pPr>
-                      <a:r>
-                        <a:rPr lang="en-US" sz="1012" b="0" i="0" u="none" strike="noStrike" cap="none">
-                          <a:solidFill>
-                            <a:srgbClr val="0D9488"/>
-                          </a:solidFill>
-                          <a:latin typeface="Inter SemiBold"/>
-                          <a:ea typeface="Inter SemiBold"/>
-                          <a:cs typeface="Arial" panose="020B0604020202020204" pitchFamily="34" charset="0"/>
-                          <a:sym typeface="Inter SemiBold"/>
-                        </a:rPr>
-                        <a:t>Authentication &amp; Authorization</a:t>
-                      </a:r>
-                      <a:endParaRPr/>
-                    </a:p>
-                  </a:txBody>
-                  <a:tcPr marL="63500" marR="63500" marT="25400" marB="25400" anchor="ctr">
-                    <a:lnL w="9525" cap="flat" cmpd="sng">
-                      <a:solidFill>
-                        <a:srgbClr val="000000">
-                          <a:alpha val="0"/>
-                        </a:srgbClr>
-                      </a:solidFill>
-                      <a:prstDash val="solid"/>
-                      <a:round/>
-                      <a:headEnd type="none" w="sm" len="sm"/>
-                      <a:tailEnd type="none" w="sm" len="sm"/>
-                    </a:lnL>
-                    <a:lnR w="9525" cap="flat" cmpd="sng">
-                      <a:solidFill>
-                        <a:srgbClr val="000000">
-                          <a:alpha val="0"/>
-                        </a:srgbClr>
-                      </a:solidFill>
-                      <a:prstDash val="solid"/>
-                      <a:round/>
-                      <a:headEnd type="none" w="sm" len="sm"/>
-                      <a:tailEnd type="none" w="sm" len="sm"/>
-                    </a:lnR>
-                    <a:lnT w="9525" cap="flat" cmpd="sng">
-                      <a:solidFill>
-                        <a:srgbClr val="000000">
-                          <a:alpha val="0"/>
-                        </a:srgbClr>
-                      </a:solidFill>
-                      <a:prstDash val="solid"/>
-                      <a:round/>
-                      <a:headEnd type="none" w="sm" len="sm"/>
-                      <a:tailEnd type="none" w="sm" len="sm"/>
-                    </a:lnT>
-                    <a:lnB w="9525" cap="flat" cmpd="sng">
-                      <a:solidFill>
-                        <a:srgbClr val="000000">
-                          <a:alpha val="0"/>
-                        </a:srgbClr>
-                      </a:solidFill>
-                      <a:prstDash val="solid"/>
-                      <a:round/>
-                      <a:headEnd type="none" w="sm" len="sm"/>
-                      <a:tailEnd type="none" w="sm" len="sm"/>
-                    </a:lnB>
-                    <a:solidFill>
-                      <a:srgbClr val="F0FDF4"/>
-                    </a:solidFill>
-                  </a:tcPr>
-                </a:tc>
-                <a:tc>
-                  <a:txBody>
-                    <a:bodyPr/>
-                    <a:lstStyle/>
-                    <a:p>
-                      <a:pPr marL="0" marR="0" lvl="0" indent="0" algn="l" rtl="0">
-                        <a:spcBef>
-                          <a:spcPts val="0"/>
-                        </a:spcBef>
-                        <a:spcAft>
-                          <a:spcPts val="0"/>
-                        </a:spcAft>
-                        <a:buNone/>
-                      </a:pPr>
-                      <a:r>
-                        <a:rPr lang="en-US" sz="1012" b="1" i="0" u="none" strike="noStrike" cap="none">
-                          <a:solidFill>
-                            <a:srgbClr val="16A34A"/>
-                          </a:solidFill>
-                          <a:latin typeface="Arial"/>
-                          <a:ea typeface="Arial"/>
-                          <a:cs typeface="Arial"/>
-                          <a:sym typeface="Arial"/>
-                        </a:rPr>
-                        <a:t>POST</a:t>
-                      </a:r>
-                      <a:endParaRPr/>
-                    </a:p>
-                  </a:txBody>
-                  <a:tcPr marL="63500" marR="63500" marT="25400" marB="25400" anchor="ctr">
-                    <a:lnL w="9525" cap="flat" cmpd="sng">
-                      <a:solidFill>
-                        <a:srgbClr val="000000">
-                          <a:alpha val="0"/>
-                        </a:srgbClr>
-                      </a:solidFill>
-                      <a:prstDash val="solid"/>
-                      <a:round/>
-                      <a:headEnd type="none" w="sm" len="sm"/>
-                      <a:tailEnd type="none" w="sm" len="sm"/>
-                    </a:lnL>
-                    <a:lnR w="9525" cap="flat" cmpd="sng">
-                      <a:solidFill>
-                        <a:srgbClr val="000000">
-                          <a:alpha val="0"/>
-                        </a:srgbClr>
-                      </a:solidFill>
-                      <a:prstDash val="solid"/>
-                      <a:round/>
-                      <a:headEnd type="none" w="sm" len="sm"/>
-                      <a:tailEnd type="none" w="sm" len="sm"/>
-                    </a:lnR>
-                    <a:lnT w="9525" cap="flat" cmpd="sng">
-                      <a:solidFill>
-                        <a:srgbClr val="000000">
-                          <a:alpha val="0"/>
-                        </a:srgbClr>
-                      </a:solidFill>
-                      <a:prstDash val="solid"/>
-                      <a:round/>
-                      <a:headEnd type="none" w="sm" len="sm"/>
-                      <a:tailEnd type="none" w="sm" len="sm"/>
-                    </a:lnT>
-                    <a:lnB w="9525" cap="flat" cmpd="sng" algn="ctr">
-                      <a:solidFill>
-                        <a:srgbClr val="000000">
-                          <a:alpha val="0"/>
-                        </a:srgbClr>
-                      </a:solidFill>
-                      <a:prstDash val="solid"/>
-                      <a:round/>
-                      <a:headEnd type="none" w="sm" len="sm"/>
-                      <a:tailEnd type="none" w="sm" len="sm"/>
-                    </a:lnB>
-                  </a:tcPr>
-                </a:tc>
-                <a:tc>
-                  <a:txBody>
-                    <a:bodyPr/>
-                    <a:lstStyle/>
-                    <a:p>
-                      <a:pPr marL="0" marR="0" lvl="0" indent="0" algn="l" rtl="0">
-                        <a:spcBef>
-                          <a:spcPts val="0"/>
-                        </a:spcBef>
-                        <a:spcAft>
-                          <a:spcPts val="0"/>
-                        </a:spcAft>
-                        <a:buNone/>
-                      </a:pPr>
-                      <a:r>
-                        <a:rPr lang="en-US" sz="1012" b="0" i="0" u="none" strike="noStrike" cap="none">
-                          <a:solidFill>
-                            <a:srgbClr val="334155"/>
-                          </a:solidFill>
-                          <a:latin typeface="Arial"/>
-                          <a:ea typeface="Arial"/>
-                          <a:cs typeface="Arial"/>
-                          <a:sym typeface="Arial"/>
-                        </a:rPr>
-                        <a:t>/api/auth/register</a:t>
-                      </a:r>
-                      <a:endParaRPr/>
-                    </a:p>
-                  </a:txBody>
-                  <a:tcPr marL="63500" marR="63500" marT="25400" marB="25400" anchor="ctr">
-                    <a:lnL w="9525" cap="flat" cmpd="sng">
-                      <a:solidFill>
-                        <a:srgbClr val="000000">
-                          <a:alpha val="0"/>
-                        </a:srgbClr>
-                      </a:solidFill>
-                      <a:prstDash val="solid"/>
-                      <a:round/>
-                      <a:headEnd type="none" w="sm" len="sm"/>
-                      <a:tailEnd type="none" w="sm" len="sm"/>
-                    </a:lnL>
-                    <a:lnR w="9525" cap="flat" cmpd="sng">
-                      <a:solidFill>
-                        <a:srgbClr val="000000">
-                          <a:alpha val="0"/>
-                        </a:srgbClr>
-                      </a:solidFill>
-                      <a:prstDash val="solid"/>
-                      <a:round/>
-                      <a:headEnd type="none" w="sm" len="sm"/>
-                      <a:tailEnd type="none" w="sm" len="sm"/>
-                    </a:lnR>
-                    <a:lnT w="9525" cap="flat" cmpd="sng">
-                      <a:solidFill>
-                        <a:srgbClr val="000000">
-                          <a:alpha val="0"/>
-                        </a:srgbClr>
-                      </a:solidFill>
-                      <a:prstDash val="solid"/>
-                      <a:round/>
-                      <a:headEnd type="none" w="sm" len="sm"/>
-                      <a:tailEnd type="none" w="sm" len="sm"/>
-                    </a:lnT>
-                    <a:lnB w="9525" cap="flat" cmpd="sng" algn="ctr">
-                      <a:solidFill>
-                        <a:srgbClr val="000000">
-                          <a:alpha val="0"/>
-                        </a:srgbClr>
-                      </a:solidFill>
-                      <a:prstDash val="solid"/>
-                      <a:round/>
-                      <a:headEnd type="none" w="sm" len="sm"/>
-                      <a:tailEnd type="none" w="sm" len="sm"/>
-                    </a:lnB>
-                  </a:tcPr>
-                </a:tc>
-                <a:tc>
-                  <a:txBody>
-                    <a:bodyPr/>
-                    <a:lstStyle/>
-                    <a:p>
-                      <a:pPr marL="0" marR="0" lvl="0" indent="0" algn="l" rtl="0">
-                        <a:spcBef>
-                          <a:spcPts val="0"/>
-                        </a:spcBef>
-                        <a:spcAft>
-                          <a:spcPts val="0"/>
-                        </a:spcAft>
-                        <a:buNone/>
-                      </a:pPr>
-                      <a:r>
-                        <a:rPr lang="en-US" sz="1012" b="0" i="0" u="none" strike="noStrike" cap="none">
-                          <a:solidFill>
-                            <a:srgbClr val="334155"/>
-                          </a:solidFill>
-                          <a:latin typeface="Inter"/>
-                          <a:ea typeface="Inter"/>
-                          <a:cs typeface="Arial" panose="020B0604020202020204" pitchFamily="34" charset="0"/>
-                          <a:sym typeface="Inter"/>
-                        </a:rPr>
-                        <a:t>Melakukan pendaftaran akun kredensial pasien baru di rumah sakit.</a:t>
-                      </a:r>
-                      <a:endParaRPr/>
-                    </a:p>
-                  </a:txBody>
-                  <a:tcPr marL="63500" marR="63500" marT="25400" marB="25400" anchor="ctr">
-                    <a:lnL w="9525" cap="flat" cmpd="sng">
-                      <a:solidFill>
-                        <a:srgbClr val="000000">
-                          <a:alpha val="0"/>
-                        </a:srgbClr>
-                      </a:solidFill>
-                      <a:prstDash val="solid"/>
-                      <a:round/>
-                      <a:headEnd type="none" w="sm" len="sm"/>
-                      <a:tailEnd type="none" w="sm" len="sm"/>
-                    </a:lnL>
-                    <a:lnR w="9525" cap="flat" cmpd="sng">
-                      <a:solidFill>
-                        <a:srgbClr val="000000">
-                          <a:alpha val="0"/>
-                        </a:srgbClr>
-                      </a:solidFill>
-                      <a:prstDash val="solid"/>
-                      <a:round/>
-                      <a:headEnd type="none" w="sm" len="sm"/>
-                      <a:tailEnd type="none" w="sm" len="sm"/>
-                    </a:lnR>
-                    <a:lnT w="9525" cap="flat" cmpd="sng">
-                      <a:solidFill>
-                        <a:srgbClr val="000000">
-                          <a:alpha val="0"/>
-                        </a:srgbClr>
-                      </a:solidFill>
-                      <a:prstDash val="solid"/>
-                      <a:round/>
-                      <a:headEnd type="none" w="sm" len="sm"/>
-                      <a:tailEnd type="none" w="sm" len="sm"/>
-                    </a:lnT>
-                    <a:lnB w="9525" cap="flat" cmpd="sng" algn="ctr">
-                      <a:solidFill>
-                        <a:srgbClr val="000000">
-                          <a:alpha val="0"/>
-                        </a:srgbClr>
-                      </a:solidFill>
-                      <a:prstDash val="solid"/>
-                      <a:round/>
-                      <a:headEnd type="none" w="sm" len="sm"/>
-                      <a:tailEnd type="none" w="sm" len="sm"/>
-                    </a:lnB>
-                  </a:tcPr>
-                </a:tc>
-                <a:extLst>
-                  <a:ext uri="{0D108BD9-81ED-4DB2-BD59-A6C34878D82A}">
-                    <a16:rowId xmlns:a16="http://schemas.microsoft.com/office/drawing/2014/main" val="10001"/>
-                  </a:ext>
-                </a:extLst>
-              </a:tr>
-              <a:tr h="427950">
-                <a:tc>
-                  <a:txBody>
-                    <a:bodyPr/>
-                    <a:lstStyle/>
-                    <a:p>
-                      <a:pPr marL="0" marR="0" lvl="0" indent="0" algn="l" rtl="0">
-                        <a:spcBef>
-                          <a:spcPts val="0"/>
-                        </a:spcBef>
-                        <a:spcAft>
-                          <a:spcPts val="0"/>
-                        </a:spcAft>
-                        <a:buNone/>
-                      </a:pPr>
-                      <a:endParaRPr dirty="0"/>
-                    </a:p>
-                  </a:txBody>
-                  <a:tcPr marL="63500" marR="63500" marT="25400" marB="25400" anchor="ctr">
-                    <a:lnL w="9525" cap="flat" cmpd="sng">
-                      <a:solidFill>
-                        <a:srgbClr val="000000">
-                          <a:alpha val="0"/>
-                        </a:srgbClr>
-                      </a:solidFill>
-                      <a:prstDash val="solid"/>
-                      <a:round/>
-                      <a:headEnd type="none" w="sm" len="sm"/>
-                      <a:tailEnd type="none" w="sm" len="sm"/>
-                    </a:lnL>
-                    <a:lnR w="9525" cap="flat" cmpd="sng" algn="ctr">
-                      <a:solidFill>
-                        <a:srgbClr val="000000">
-                          <a:alpha val="0"/>
-                        </a:srgbClr>
-                      </a:solidFill>
-                      <a:prstDash val="solid"/>
-                      <a:round/>
-                      <a:headEnd type="none" w="sm" len="sm"/>
-                      <a:tailEnd type="none" w="sm" len="sm"/>
-                    </a:lnR>
-                    <a:lnT w="9525" cap="flat" cmpd="sng">
-                      <a:solidFill>
-                        <a:srgbClr val="000000">
-                          <a:alpha val="0"/>
-                        </a:srgbClr>
-                      </a:solidFill>
-                      <a:prstDash val="solid"/>
-                      <a:round/>
-                      <a:headEnd type="none" w="sm" len="sm"/>
-                      <a:tailEnd type="none" w="sm" len="sm"/>
-                    </a:lnT>
-                    <a:lnB w="9525" cap="flat" cmpd="sng">
-                      <a:solidFill>
-                        <a:srgbClr val="000000">
-                          <a:alpha val="0"/>
-                        </a:srgbClr>
-                      </a:solidFill>
-                      <a:prstDash val="solid"/>
-                      <a:round/>
-                      <a:headEnd type="none" w="sm" len="sm"/>
-                      <a:tailEnd type="none" w="sm" len="sm"/>
-                    </a:lnB>
-                    <a:solidFill>
-                      <a:srgbClr val="F8FAFC"/>
-                    </a:solidFill>
-                  </a:tcPr>
-                </a:tc>
-                <a:tc>
-                  <a:txBody>
-                    <a:bodyPr/>
-                    <a:lstStyle/>
-                    <a:p>
-                      <a:pPr marL="0" marR="0" lvl="0" indent="0" algn="l" rtl="0">
-                        <a:spcBef>
-                          <a:spcPts val="0"/>
-                        </a:spcBef>
-                        <a:spcAft>
-                          <a:spcPts val="0"/>
-                        </a:spcAft>
-                        <a:buNone/>
-                      </a:pPr>
-                      <a:r>
-                        <a:rPr lang="en-US" sz="1012" b="1" i="0" u="none" strike="noStrike" cap="none" dirty="0">
-                          <a:solidFill>
-                            <a:srgbClr val="16A34A"/>
-                          </a:solidFill>
-                          <a:latin typeface="Arial"/>
-                          <a:ea typeface="Arial"/>
-                          <a:cs typeface="Arial"/>
-                          <a:sym typeface="Arial"/>
-                        </a:rPr>
-                        <a:t>POST</a:t>
-                      </a:r>
-                      <a:endParaRPr dirty="0"/>
-                    </a:p>
-                  </a:txBody>
-                  <a:tcPr marL="63500" marR="63500" marT="25400" marB="25400" anchor="ctr">
-                    <a:lnL w="9525" cap="flat" cmpd="sng">
-                      <a:solidFill>
-                        <a:srgbClr val="000000">
-                          <a:alpha val="0"/>
-                        </a:srgbClr>
-                      </a:solidFill>
-                      <a:prstDash val="solid"/>
-                      <a:round/>
-                      <a:headEnd type="none" w="sm" len="sm"/>
-                      <a:tailEnd type="none" w="sm" len="sm"/>
-                    </a:lnL>
-                    <a:lnR w="9525" cap="flat" cmpd="sng">
-                      <a:solidFill>
-                        <a:srgbClr val="000000">
-                          <a:alpha val="0"/>
-                        </a:srgbClr>
-                      </a:solidFill>
-                      <a:prstDash val="solid"/>
-                      <a:round/>
-                      <a:headEnd type="none" w="sm" len="sm"/>
-                      <a:tailEnd type="none" w="sm" len="sm"/>
-                    </a:lnR>
-                    <a:lnT w="9525" cap="flat" cmpd="sng">
-                      <a:solidFill>
-                        <a:srgbClr val="000000">
-                          <a:alpha val="0"/>
-                        </a:srgbClr>
-                      </a:solidFill>
-                      <a:prstDash val="solid"/>
-                      <a:round/>
-                      <a:headEnd type="none" w="sm" len="sm"/>
-                      <a:tailEnd type="none" w="sm" len="sm"/>
-                    </a:lnT>
-                    <a:lnB w="9525" cap="flat" cmpd="sng">
-                      <a:solidFill>
-                        <a:srgbClr val="000000">
-                          <a:alpha val="0"/>
-                        </a:srgbClr>
-                      </a:solidFill>
-                      <a:prstDash val="solid"/>
-                      <a:round/>
-                      <a:headEnd type="none" w="sm" len="sm"/>
-                      <a:tailEnd type="none" w="sm" len="sm"/>
-                    </a:lnB>
-                    <a:solidFill>
-                      <a:srgbClr val="F8FAFC"/>
-                    </a:solidFill>
-                  </a:tcPr>
-                </a:tc>
-                <a:tc>
-                  <a:txBody>
-                    <a:bodyPr/>
-                    <a:lstStyle/>
-                    <a:p>
-                      <a:pPr marL="0" marR="0" lvl="0" indent="0" algn="l" rtl="0">
-                        <a:spcBef>
-                          <a:spcPts val="0"/>
-                        </a:spcBef>
-                        <a:spcAft>
-                          <a:spcPts val="0"/>
-                        </a:spcAft>
-                        <a:buNone/>
-                      </a:pPr>
-                      <a:r>
-                        <a:rPr lang="en-US" sz="1012" b="0" i="0" u="none" strike="noStrike" cap="none" dirty="0">
-                          <a:solidFill>
-                            <a:srgbClr val="334155"/>
-                          </a:solidFill>
-                          <a:latin typeface="Arial"/>
-                          <a:ea typeface="Arial"/>
-                          <a:cs typeface="Arial"/>
-                          <a:sym typeface="Arial"/>
-                        </a:rPr>
-                        <a:t>/</a:t>
-                      </a:r>
-                      <a:r>
-                        <a:rPr lang="en-US" sz="1012" b="0" i="0" u="none" strike="noStrike" cap="none" dirty="0" err="1">
-                          <a:solidFill>
-                            <a:srgbClr val="334155"/>
-                          </a:solidFill>
-                          <a:latin typeface="Arial"/>
-                          <a:ea typeface="Arial"/>
-                          <a:cs typeface="Arial"/>
-                          <a:sym typeface="Arial"/>
-                        </a:rPr>
-                        <a:t>api</a:t>
-                      </a:r>
-                      <a:r>
-                        <a:rPr lang="en-US" sz="1012" b="0" i="0" u="none" strike="noStrike" cap="none" dirty="0">
-                          <a:solidFill>
-                            <a:srgbClr val="334155"/>
-                          </a:solidFill>
-                          <a:latin typeface="Arial"/>
-                          <a:ea typeface="Arial"/>
-                          <a:cs typeface="Arial"/>
-                          <a:sym typeface="Arial"/>
-                        </a:rPr>
-                        <a:t>/auth/login</a:t>
-                      </a:r>
-                      <a:endParaRPr dirty="0"/>
-                    </a:p>
-                  </a:txBody>
-                  <a:tcPr marL="63500" marR="63500" marT="25400" marB="25400" anchor="ctr">
-                    <a:lnL w="9525" cap="flat" cmpd="sng">
-                      <a:solidFill>
-                        <a:srgbClr val="000000">
-                          <a:alpha val="0"/>
-                        </a:srgbClr>
-                      </a:solidFill>
-                      <a:prstDash val="solid"/>
-                      <a:round/>
-                      <a:headEnd type="none" w="sm" len="sm"/>
-                      <a:tailEnd type="none" w="sm" len="sm"/>
-                    </a:lnL>
-                    <a:lnR w="9525" cap="flat" cmpd="sng">
-                      <a:solidFill>
-                        <a:srgbClr val="000000">
-                          <a:alpha val="0"/>
-                        </a:srgbClr>
-                      </a:solidFill>
-                      <a:prstDash val="solid"/>
-                      <a:round/>
-                      <a:headEnd type="none" w="sm" len="sm"/>
-                      <a:tailEnd type="none" w="sm" len="sm"/>
-                    </a:lnR>
-                    <a:lnT w="9525" cap="flat" cmpd="sng">
-                      <a:solidFill>
-                        <a:srgbClr val="000000">
-                          <a:alpha val="0"/>
-                        </a:srgbClr>
-                      </a:solidFill>
-                      <a:prstDash val="solid"/>
-                      <a:round/>
-                      <a:headEnd type="none" w="sm" len="sm"/>
-                      <a:tailEnd type="none" w="sm" len="sm"/>
-                    </a:lnT>
-                    <a:lnB w="9525" cap="flat" cmpd="sng">
-                      <a:solidFill>
-                        <a:srgbClr val="000000">
-                          <a:alpha val="0"/>
-                        </a:srgbClr>
-                      </a:solidFill>
-                      <a:prstDash val="solid"/>
-                      <a:round/>
-                      <a:headEnd type="none" w="sm" len="sm"/>
-                      <a:tailEnd type="none" w="sm" len="sm"/>
-                    </a:lnB>
-                    <a:solidFill>
-                      <a:srgbClr val="F8FAFC"/>
-                    </a:solidFill>
-                  </a:tcPr>
-                </a:tc>
-                <a:tc>
-                  <a:txBody>
-                    <a:bodyPr/>
-                    <a:lstStyle/>
-                    <a:p>
-                      <a:pPr marL="0" marR="0" lvl="0" indent="0" algn="l" rtl="0">
-                        <a:spcBef>
-                          <a:spcPts val="0"/>
-                        </a:spcBef>
-                        <a:spcAft>
-                          <a:spcPts val="0"/>
-                        </a:spcAft>
-                        <a:buNone/>
-                      </a:pPr>
-                      <a:r>
-                        <a:rPr lang="en-US" sz="1012" b="0" i="0" u="none" strike="noStrike" cap="none" dirty="0" err="1">
-                          <a:solidFill>
-                            <a:srgbClr val="334155"/>
-                          </a:solidFill>
-                          <a:latin typeface="Inter"/>
-                          <a:ea typeface="Inter"/>
-                          <a:cs typeface="Arial" panose="020B0604020202020204" pitchFamily="34" charset="0"/>
-                          <a:sym typeface="Inter"/>
-                        </a:rPr>
-                        <a:t>Validasi</a:t>
-                      </a:r>
-                      <a:r>
-                        <a:rPr lang="en-US" sz="1012" b="0" i="0" u="none" strike="noStrike" cap="none" dirty="0">
-                          <a:solidFill>
-                            <a:srgbClr val="334155"/>
-                          </a:solidFill>
-                          <a:latin typeface="Inter"/>
-                          <a:ea typeface="Inter"/>
-                          <a:cs typeface="Arial" panose="020B0604020202020204" pitchFamily="34" charset="0"/>
-                          <a:sym typeface="Inter"/>
-                        </a:rPr>
-                        <a:t> login, me-return Stateless JWT token </a:t>
-                      </a:r>
-                      <a:r>
-                        <a:rPr lang="en-US" sz="1012" b="0" i="0" u="none" strike="noStrike" cap="none" dirty="0" err="1">
-                          <a:solidFill>
-                            <a:srgbClr val="334155"/>
-                          </a:solidFill>
-                          <a:latin typeface="Inter"/>
-                          <a:ea typeface="Inter"/>
-                          <a:cs typeface="Arial" panose="020B0604020202020204" pitchFamily="34" charset="0"/>
-                          <a:sym typeface="Inter"/>
-                        </a:rPr>
-                        <a:t>beserta</a:t>
-                      </a:r>
-                      <a:r>
-                        <a:rPr lang="en-US" sz="1012" b="0" i="0" u="none" strike="noStrike" cap="none" dirty="0">
-                          <a:solidFill>
-                            <a:srgbClr val="334155"/>
-                          </a:solidFill>
-                          <a:latin typeface="Inter"/>
-                          <a:ea typeface="Inter"/>
-                          <a:cs typeface="Arial" panose="020B0604020202020204" pitchFamily="34" charset="0"/>
-                          <a:sym typeface="Inter"/>
-                        </a:rPr>
-                        <a:t> </a:t>
-                      </a:r>
-                      <a:r>
-                        <a:rPr lang="en-US" sz="1012" b="0" i="0" u="none" strike="noStrike" cap="none" dirty="0" err="1">
-                          <a:solidFill>
-                            <a:srgbClr val="334155"/>
-                          </a:solidFill>
-                          <a:latin typeface="Inter"/>
-                          <a:ea typeface="Inter"/>
-                          <a:cs typeface="Arial" panose="020B0604020202020204" pitchFamily="34" charset="0"/>
-                          <a:sym typeface="Inter"/>
-                        </a:rPr>
-                        <a:t>otorisasi</a:t>
-                      </a:r>
-                      <a:r>
-                        <a:rPr lang="en-US" sz="1012" b="0" i="0" u="none" strike="noStrike" cap="none" dirty="0">
-                          <a:solidFill>
-                            <a:srgbClr val="334155"/>
-                          </a:solidFill>
-                          <a:latin typeface="Inter"/>
-                          <a:ea typeface="Inter"/>
-                          <a:cs typeface="Arial" panose="020B0604020202020204" pitchFamily="34" charset="0"/>
-                          <a:sym typeface="Inter"/>
-                        </a:rPr>
-                        <a:t> Role </a:t>
-                      </a:r>
-                      <a:r>
-                        <a:rPr lang="en-US" sz="1012" b="0" i="0" u="none" strike="noStrike" cap="none" dirty="0" err="1">
-                          <a:solidFill>
-                            <a:srgbClr val="334155"/>
-                          </a:solidFill>
-                          <a:latin typeface="Inter"/>
-                          <a:ea typeface="Inter"/>
-                          <a:cs typeface="Arial" panose="020B0604020202020204" pitchFamily="34" charset="0"/>
-                          <a:sym typeface="Inter"/>
-                        </a:rPr>
-                        <a:t>pengguna</a:t>
-                      </a:r>
-                      <a:r>
-                        <a:rPr lang="en-US" sz="1012" b="0" i="0" u="none" strike="noStrike" cap="none" dirty="0">
-                          <a:solidFill>
-                            <a:srgbClr val="334155"/>
-                          </a:solidFill>
-                          <a:latin typeface="Inter"/>
-                          <a:ea typeface="Inter"/>
-                          <a:cs typeface="Arial" panose="020B0604020202020204" pitchFamily="34" charset="0"/>
-                          <a:sym typeface="Inter"/>
-                        </a:rPr>
-                        <a:t>.</a:t>
-                      </a:r>
-                      <a:endParaRPr dirty="0"/>
-                    </a:p>
-                  </a:txBody>
-                  <a:tcPr marL="63500" marR="63500" marT="25400" marB="25400" anchor="ctr">
-                    <a:lnL w="9525" cap="flat" cmpd="sng">
-                      <a:solidFill>
-                        <a:srgbClr val="000000">
-                          <a:alpha val="0"/>
-                        </a:srgbClr>
-                      </a:solidFill>
-                      <a:prstDash val="solid"/>
-                      <a:round/>
-                      <a:headEnd type="none" w="sm" len="sm"/>
-                      <a:tailEnd type="none" w="sm" len="sm"/>
-                    </a:lnL>
-                    <a:lnR w="9525" cap="flat" cmpd="sng">
-                      <a:solidFill>
-                        <a:srgbClr val="000000">
-                          <a:alpha val="0"/>
-                        </a:srgbClr>
-                      </a:solidFill>
-                      <a:prstDash val="solid"/>
-                      <a:round/>
-                      <a:headEnd type="none" w="sm" len="sm"/>
-                      <a:tailEnd type="none" w="sm" len="sm"/>
-                    </a:lnR>
-                    <a:lnT w="9525" cap="flat" cmpd="sng">
-                      <a:solidFill>
-                        <a:srgbClr val="000000">
-                          <a:alpha val="0"/>
-                        </a:srgbClr>
-                      </a:solidFill>
-                      <a:prstDash val="solid"/>
-                      <a:round/>
-                      <a:headEnd type="none" w="sm" len="sm"/>
-                      <a:tailEnd type="none" w="sm" len="sm"/>
-                    </a:lnT>
-                    <a:lnB w="9525" cap="flat" cmpd="sng">
-                      <a:solidFill>
-                        <a:srgbClr val="000000">
-                          <a:alpha val="0"/>
-                        </a:srgbClr>
-                      </a:solidFill>
-                      <a:prstDash val="solid"/>
-                      <a:round/>
-                      <a:headEnd type="none" w="sm" len="sm"/>
-                      <a:tailEnd type="none" w="sm" len="sm"/>
-                    </a:lnB>
-                  </a:tcPr>
-                </a:tc>
-                <a:extLst>
-                  <a:ext uri="{0D108BD9-81ED-4DB2-BD59-A6C34878D82A}">
-                    <a16:rowId xmlns:a16="http://schemas.microsoft.com/office/drawing/2014/main" val="10002"/>
-                  </a:ext>
-                </a:extLst>
-              </a:tr>
-              <a:tr h="427950">
-                <a:tc>
-                  <a:txBody>
-                    <a:bodyPr/>
-                    <a:lstStyle/>
-                    <a:p>
-                      <a:pPr marL="0" marR="0" lvl="0" indent="0" algn="l" rtl="0">
-                        <a:spcBef>
-                          <a:spcPts val="0"/>
-                        </a:spcBef>
-                        <a:spcAft>
-                          <a:spcPts val="0"/>
-                        </a:spcAft>
-                        <a:buNone/>
-                      </a:pPr>
-                      <a:r>
-                        <a:rPr lang="en-US" sz="1012" b="0" i="0" u="none">
-                          <a:solidFill>
-                            <a:srgbClr val="0EA5E9"/>
-                          </a:solidFill>
-                          <a:latin typeface="Inter SemiBold"/>
-                          <a:ea typeface="Inter SemiBold"/>
-                          <a:cs typeface="Arial" panose="020B0604020202020204" pitchFamily="34" charset="0"/>
-                          <a:sym typeface="Inter SemiBold"/>
-                        </a:rPr>
-                        <a:t>Katalog &amp; CRUD Master</a:t>
-                      </a:r>
-                      <a:endParaRPr/>
-                    </a:p>
-                  </a:txBody>
-                  <a:tcPr marL="63500" marR="63500" marT="25400" marB="25400" anchor="ctr">
-                    <a:lnL w="9525" cap="flat" cmpd="sng">
-                      <a:solidFill>
-                        <a:srgbClr val="000000">
-                          <a:alpha val="0"/>
-                        </a:srgbClr>
-                      </a:solidFill>
-                      <a:prstDash val="solid"/>
-                      <a:round/>
-                      <a:headEnd type="none" w="sm" len="sm"/>
-                      <a:tailEnd type="none" w="sm" len="sm"/>
-                    </a:lnL>
-                    <a:lnR w="9525" cap="flat" cmpd="sng">
-                      <a:solidFill>
-                        <a:srgbClr val="000000">
-                          <a:alpha val="0"/>
-                        </a:srgbClr>
-                      </a:solidFill>
-                      <a:prstDash val="solid"/>
-                      <a:round/>
-                      <a:headEnd type="none" w="sm" len="sm"/>
-                      <a:tailEnd type="none" w="sm" len="sm"/>
-                    </a:lnR>
-                    <a:lnT w="9525" cap="flat" cmpd="sng">
-                      <a:solidFill>
-                        <a:srgbClr val="000000">
-                          <a:alpha val="0"/>
-                        </a:srgbClr>
-                      </a:solidFill>
-                      <a:prstDash val="solid"/>
-                      <a:round/>
-                      <a:headEnd type="none" w="sm" len="sm"/>
-                      <a:tailEnd type="none" w="sm" len="sm"/>
-                    </a:lnT>
-                    <a:lnB w="9525" cap="flat" cmpd="sng">
-                      <a:solidFill>
-                        <a:srgbClr val="000000">
-                          <a:alpha val="0"/>
-                        </a:srgbClr>
-                      </a:solidFill>
-                      <a:prstDash val="solid"/>
-                      <a:round/>
-                      <a:headEnd type="none" w="sm" len="sm"/>
-                      <a:tailEnd type="none" w="sm" len="sm"/>
-                    </a:lnB>
-                    <a:solidFill>
-                      <a:srgbClr val="F0F9FF"/>
-                    </a:solidFill>
-                  </a:tcPr>
-                </a:tc>
-                <a:tc>
-                  <a:txBody>
-                    <a:bodyPr/>
-                    <a:lstStyle/>
-                    <a:p>
-                      <a:pPr marL="0" marR="0" lvl="0" indent="0" algn="l" rtl="0">
-                        <a:spcBef>
-                          <a:spcPts val="0"/>
-                        </a:spcBef>
-                        <a:spcAft>
-                          <a:spcPts val="0"/>
-                        </a:spcAft>
-                        <a:buNone/>
-                      </a:pPr>
-                      <a:r>
-                        <a:rPr lang="en-US" sz="1012" b="1" i="0" u="none" dirty="0">
-                          <a:solidFill>
-                            <a:srgbClr val="2563EB"/>
-                          </a:solidFill>
-                          <a:latin typeface="Arial"/>
-                          <a:ea typeface="Arial"/>
-                          <a:cs typeface="Arial"/>
-                          <a:sym typeface="Arial"/>
-                        </a:rPr>
-                        <a:t>GET</a:t>
-                      </a:r>
-                      <a:endParaRPr dirty="0"/>
-                    </a:p>
-                  </a:txBody>
-                  <a:tcPr marL="63500" marR="63500" marT="25400" marB="25400" anchor="ctr">
-                    <a:lnL w="9525" cap="flat" cmpd="sng">
-                      <a:solidFill>
-                        <a:srgbClr val="000000">
-                          <a:alpha val="0"/>
-                        </a:srgbClr>
-                      </a:solidFill>
-                      <a:prstDash val="solid"/>
-                      <a:round/>
-                      <a:headEnd type="none" w="sm" len="sm"/>
-                      <a:tailEnd type="none" w="sm" len="sm"/>
-                    </a:lnL>
-                    <a:lnR w="9525" cap="flat" cmpd="sng">
-                      <a:solidFill>
-                        <a:srgbClr val="000000">
-                          <a:alpha val="0"/>
-                        </a:srgbClr>
-                      </a:solidFill>
-                      <a:prstDash val="solid"/>
-                      <a:round/>
-                      <a:headEnd type="none" w="sm" len="sm"/>
-                      <a:tailEnd type="none" w="sm" len="sm"/>
-                    </a:lnR>
-                    <a:lnT w="9525" cap="flat" cmpd="sng" algn="ctr">
-                      <a:solidFill>
-                        <a:srgbClr val="000000">
-                          <a:alpha val="0"/>
-                        </a:srgbClr>
-                      </a:solidFill>
-                      <a:prstDash val="solid"/>
-                      <a:round/>
-                      <a:headEnd type="none" w="sm" len="sm"/>
-                      <a:tailEnd type="none" w="sm" len="sm"/>
-                    </a:lnT>
-                    <a:lnB w="9525" cap="flat" cmpd="sng" algn="ctr">
-                      <a:solidFill>
-                        <a:srgbClr val="000000">
-                          <a:alpha val="0"/>
-                        </a:srgbClr>
-                      </a:solidFill>
-                      <a:prstDash val="solid"/>
-                      <a:round/>
-                      <a:headEnd type="none" w="sm" len="sm"/>
-                      <a:tailEnd type="none" w="sm" len="sm"/>
-                    </a:lnB>
-                  </a:tcPr>
-                </a:tc>
-                <a:tc>
-                  <a:txBody>
-                    <a:bodyPr/>
-                    <a:lstStyle/>
-                    <a:p>
-                      <a:pPr marL="0" marR="0" lvl="0" indent="0" algn="l" rtl="0">
-                        <a:spcBef>
-                          <a:spcPts val="0"/>
-                        </a:spcBef>
-                        <a:spcAft>
-                          <a:spcPts val="0"/>
-                        </a:spcAft>
-                        <a:buNone/>
-                      </a:pPr>
-                      <a:r>
-                        <a:rPr lang="en-US" sz="1012" b="0" i="0" u="none">
-                          <a:solidFill>
-                            <a:srgbClr val="334155"/>
-                          </a:solidFill>
-                          <a:latin typeface="Arial"/>
-                          <a:ea typeface="Arial"/>
-                          <a:cs typeface="Arial"/>
-                          <a:sym typeface="Arial"/>
-                        </a:rPr>
-                        <a:t>/api/doctors</a:t>
-                      </a:r>
-                      <a:endParaRPr/>
-                    </a:p>
-                  </a:txBody>
-                  <a:tcPr marL="63500" marR="63500" marT="25400" marB="25400" anchor="ctr">
-                    <a:lnL w="9525" cap="flat" cmpd="sng">
-                      <a:solidFill>
-                        <a:srgbClr val="000000">
-                          <a:alpha val="0"/>
-                        </a:srgbClr>
-                      </a:solidFill>
-                      <a:prstDash val="solid"/>
-                      <a:round/>
-                      <a:headEnd type="none" w="sm" len="sm"/>
-                      <a:tailEnd type="none" w="sm" len="sm"/>
-                    </a:lnL>
-                    <a:lnR w="9525" cap="flat" cmpd="sng">
-                      <a:solidFill>
-                        <a:srgbClr val="000000">
-                          <a:alpha val="0"/>
-                        </a:srgbClr>
-                      </a:solidFill>
-                      <a:prstDash val="solid"/>
-                      <a:round/>
-                      <a:headEnd type="none" w="sm" len="sm"/>
-                      <a:tailEnd type="none" w="sm" len="sm"/>
-                    </a:lnR>
-                    <a:lnT w="9525" cap="flat" cmpd="sng" algn="ctr">
-                      <a:solidFill>
-                        <a:srgbClr val="000000">
-                          <a:alpha val="0"/>
-                        </a:srgbClr>
-                      </a:solidFill>
-                      <a:prstDash val="solid"/>
-                      <a:round/>
-                      <a:headEnd type="none" w="sm" len="sm"/>
-                      <a:tailEnd type="none" w="sm" len="sm"/>
-                    </a:lnT>
-                    <a:lnB w="9525" cap="flat" cmpd="sng" algn="ctr">
-                      <a:solidFill>
-                        <a:srgbClr val="000000">
-                          <a:alpha val="0"/>
-                        </a:srgbClr>
-                      </a:solidFill>
-                      <a:prstDash val="solid"/>
-                      <a:round/>
-                      <a:headEnd type="none" w="sm" len="sm"/>
-                      <a:tailEnd type="none" w="sm" len="sm"/>
-                    </a:lnB>
-                  </a:tcPr>
-                </a:tc>
-                <a:tc>
-                  <a:txBody>
-                    <a:bodyPr/>
-                    <a:lstStyle/>
-                    <a:p>
-                      <a:pPr marL="0" marR="0" lvl="0" indent="0" algn="l" rtl="0">
-                        <a:spcBef>
-                          <a:spcPts val="0"/>
-                        </a:spcBef>
-                        <a:spcAft>
-                          <a:spcPts val="0"/>
-                        </a:spcAft>
-                        <a:buNone/>
-                      </a:pPr>
-                      <a:r>
-                        <a:rPr lang="en-US" sz="1012" b="0" i="0" u="none">
-                          <a:solidFill>
-                            <a:srgbClr val="334155"/>
-                          </a:solidFill>
-                          <a:latin typeface="Inter"/>
-                          <a:ea typeface="Inter"/>
-                          <a:cs typeface="Arial" panose="020B0604020202020204" pitchFamily="34" charset="0"/>
-                          <a:sym typeface="Inter"/>
-                        </a:rPr>
-                        <a:t>Mengambil data dokter aktif terpaginasi (filter spesialiasi dokter tersedia).</a:t>
-                      </a:r>
-                      <a:endParaRPr/>
-                    </a:p>
-                  </a:txBody>
-                  <a:tcPr marL="63500" marR="63500" marT="25400" marB="25400" anchor="ctr">
-                    <a:lnL w="9525" cap="flat" cmpd="sng">
-                      <a:solidFill>
-                        <a:srgbClr val="000000">
-                          <a:alpha val="0"/>
-                        </a:srgbClr>
-                      </a:solidFill>
-                      <a:prstDash val="solid"/>
-                      <a:round/>
-                      <a:headEnd type="none" w="sm" len="sm"/>
-                      <a:tailEnd type="none" w="sm" len="sm"/>
-                    </a:lnL>
-                    <a:lnR w="9525" cap="flat" cmpd="sng">
-                      <a:solidFill>
-                        <a:srgbClr val="000000">
-                          <a:alpha val="0"/>
-                        </a:srgbClr>
-                      </a:solidFill>
-                      <a:prstDash val="solid"/>
-                      <a:round/>
-                      <a:headEnd type="none" w="sm" len="sm"/>
-                      <a:tailEnd type="none" w="sm" len="sm"/>
-                    </a:lnR>
-                    <a:lnT w="9525" cap="flat" cmpd="sng" algn="ctr">
-                      <a:solidFill>
-                        <a:srgbClr val="000000">
-                          <a:alpha val="0"/>
-                        </a:srgbClr>
-                      </a:solidFill>
-                      <a:prstDash val="solid"/>
-                      <a:round/>
-                      <a:headEnd type="none" w="sm" len="sm"/>
-                      <a:tailEnd type="none" w="sm" len="sm"/>
-                    </a:lnT>
-                    <a:lnB w="9525" cap="flat" cmpd="sng" algn="ctr">
-                      <a:solidFill>
-                        <a:srgbClr val="000000">
-                          <a:alpha val="0"/>
-                        </a:srgbClr>
-                      </a:solidFill>
-                      <a:prstDash val="solid"/>
-                      <a:round/>
-                      <a:headEnd type="none" w="sm" len="sm"/>
-                      <a:tailEnd type="none" w="sm" len="sm"/>
-                    </a:lnB>
-                  </a:tcPr>
-                </a:tc>
-                <a:extLst>
-                  <a:ext uri="{0D108BD9-81ED-4DB2-BD59-A6C34878D82A}">
-                    <a16:rowId xmlns:a16="http://schemas.microsoft.com/office/drawing/2014/main" val="10003"/>
-                  </a:ext>
-                </a:extLst>
-              </a:tr>
-              <a:tr h="427950">
-                <a:tc>
-                  <a:txBody>
-                    <a:bodyPr/>
-                    <a:lstStyle/>
-                    <a:p>
-                      <a:pPr marL="0" marR="0" lvl="0" indent="0" algn="l" rtl="0">
-                        <a:spcBef>
-                          <a:spcPts val="0"/>
-                        </a:spcBef>
-                        <a:spcAft>
-                          <a:spcPts val="0"/>
-                        </a:spcAft>
-                        <a:buNone/>
-                      </a:pPr>
-                      <a:endParaRPr/>
-                    </a:p>
-                  </a:txBody>
-                  <a:tcPr marL="63500" marR="63500" marT="25400" marB="25400" anchor="ctr">
-                    <a:lnL w="9525" cap="flat" cmpd="sng">
-                      <a:solidFill>
-                        <a:srgbClr val="000000">
-                          <a:alpha val="0"/>
-                        </a:srgbClr>
-                      </a:solidFill>
-                      <a:prstDash val="solid"/>
-                      <a:round/>
-                      <a:headEnd type="none" w="sm" len="sm"/>
-                      <a:tailEnd type="none" w="sm" len="sm"/>
-                    </a:lnL>
-                    <a:lnR w="9525" cap="flat" cmpd="sng" algn="ctr">
-                      <a:solidFill>
-                        <a:srgbClr val="000000">
-                          <a:alpha val="0"/>
-                        </a:srgbClr>
-                      </a:solidFill>
-                      <a:prstDash val="solid"/>
-                      <a:round/>
-                      <a:headEnd type="none" w="sm" len="sm"/>
-                      <a:tailEnd type="none" w="sm" len="sm"/>
-                    </a:lnR>
-                    <a:lnT w="9525" cap="flat" cmpd="sng">
-                      <a:solidFill>
-                        <a:srgbClr val="000000">
-                          <a:alpha val="0"/>
-                        </a:srgbClr>
-                      </a:solidFill>
-                      <a:prstDash val="solid"/>
-                      <a:round/>
-                      <a:headEnd type="none" w="sm" len="sm"/>
-                      <a:tailEnd type="none" w="sm" len="sm"/>
-                    </a:lnT>
-                    <a:lnB w="9525" cap="flat" cmpd="sng">
-                      <a:solidFill>
-                        <a:srgbClr val="000000">
-                          <a:alpha val="0"/>
-                        </a:srgbClr>
-                      </a:solidFill>
-                      <a:prstDash val="solid"/>
-                      <a:round/>
-                      <a:headEnd type="none" w="sm" len="sm"/>
-                      <a:tailEnd type="none" w="sm" len="sm"/>
-                    </a:lnB>
-                    <a:solidFill>
-                      <a:srgbClr val="F8FAFC"/>
-                    </a:solidFill>
-                  </a:tcPr>
-                </a:tc>
-                <a:tc>
-                  <a:txBody>
-                    <a:bodyPr/>
-                    <a:lstStyle/>
-                    <a:p>
-                      <a:pPr marL="0" marR="0" lvl="0" indent="0" algn="l" rtl="0">
-                        <a:spcBef>
-                          <a:spcPts val="0"/>
-                        </a:spcBef>
-                        <a:spcAft>
-                          <a:spcPts val="0"/>
-                        </a:spcAft>
-                        <a:buNone/>
-                      </a:pPr>
-                      <a:r>
-                        <a:rPr lang="en-US" sz="1012" b="1" i="0" u="none" dirty="0">
-                          <a:solidFill>
-                            <a:srgbClr val="2563EB"/>
-                          </a:solidFill>
-                          <a:latin typeface="Arial"/>
-                          <a:ea typeface="Arial"/>
-                          <a:cs typeface="Arial"/>
-                          <a:sym typeface="Arial"/>
-                        </a:rPr>
-                        <a:t>GET</a:t>
-                      </a:r>
-                      <a:endParaRPr dirty="0"/>
-                    </a:p>
-                  </a:txBody>
-                  <a:tcPr marL="63500" marR="63500" marT="25400" marB="25400" anchor="ctr">
-                    <a:lnL w="9525" cap="flat" cmpd="sng">
-                      <a:solidFill>
-                        <a:srgbClr val="000000">
-                          <a:alpha val="0"/>
-                        </a:srgbClr>
-                      </a:solidFill>
-                      <a:prstDash val="solid"/>
-                      <a:round/>
-                      <a:headEnd type="none" w="sm" len="sm"/>
-                      <a:tailEnd type="none" w="sm" len="sm"/>
-                    </a:lnL>
-                    <a:lnR w="9525" cap="flat" cmpd="sng">
-                      <a:solidFill>
-                        <a:srgbClr val="000000">
-                          <a:alpha val="0"/>
-                        </a:srgbClr>
-                      </a:solidFill>
-                      <a:prstDash val="solid"/>
-                      <a:round/>
-                      <a:headEnd type="none" w="sm" len="sm"/>
-                      <a:tailEnd type="none" w="sm" len="sm"/>
-                    </a:lnR>
-                    <a:lnT w="9525" cap="flat" cmpd="sng">
-                      <a:solidFill>
-                        <a:srgbClr val="000000">
-                          <a:alpha val="0"/>
-                        </a:srgbClr>
-                      </a:solidFill>
-                      <a:prstDash val="solid"/>
-                      <a:round/>
-                      <a:headEnd type="none" w="sm" len="sm"/>
-                      <a:tailEnd type="none" w="sm" len="sm"/>
-                    </a:lnT>
-                    <a:lnB w="9525" cap="flat" cmpd="sng">
-                      <a:solidFill>
-                        <a:srgbClr val="000000">
-                          <a:alpha val="0"/>
-                        </a:srgbClr>
-                      </a:solidFill>
-                      <a:prstDash val="solid"/>
-                      <a:round/>
-                      <a:headEnd type="none" w="sm" len="sm"/>
-                      <a:tailEnd type="none" w="sm" len="sm"/>
-                    </a:lnB>
-                    <a:solidFill>
-                      <a:srgbClr val="F8FAFC"/>
-                    </a:solidFill>
-                  </a:tcPr>
-                </a:tc>
-                <a:tc>
-                  <a:txBody>
-                    <a:bodyPr/>
-                    <a:lstStyle/>
-                    <a:p>
-                      <a:pPr marL="0" marR="0" lvl="0" indent="0" algn="l" rtl="0">
-                        <a:spcBef>
-                          <a:spcPts val="0"/>
-                        </a:spcBef>
-                        <a:spcAft>
-                          <a:spcPts val="0"/>
-                        </a:spcAft>
-                        <a:buNone/>
-                      </a:pPr>
-                      <a:r>
-                        <a:rPr lang="en-US" sz="1012" b="0" i="0" u="none">
-                          <a:solidFill>
-                            <a:srgbClr val="334155"/>
-                          </a:solidFill>
-                          <a:latin typeface="Arial"/>
-                          <a:ea typeface="Arial"/>
-                          <a:cs typeface="Arial"/>
-                          <a:sym typeface="Arial"/>
-                        </a:rPr>
-                        <a:t>/api/services</a:t>
-                      </a:r>
-                      <a:endParaRPr/>
-                    </a:p>
-                  </a:txBody>
-                  <a:tcPr marL="63500" marR="63500" marT="25400" marB="25400" anchor="ctr">
-                    <a:lnL w="9525" cap="flat" cmpd="sng">
-                      <a:solidFill>
-                        <a:srgbClr val="000000">
-                          <a:alpha val="0"/>
-                        </a:srgbClr>
-                      </a:solidFill>
-                      <a:prstDash val="solid"/>
-                      <a:round/>
-                      <a:headEnd type="none" w="sm" len="sm"/>
-                      <a:tailEnd type="none" w="sm" len="sm"/>
-                    </a:lnL>
-                    <a:lnR w="9525" cap="flat" cmpd="sng">
-                      <a:solidFill>
-                        <a:srgbClr val="000000">
-                          <a:alpha val="0"/>
-                        </a:srgbClr>
-                      </a:solidFill>
-                      <a:prstDash val="solid"/>
-                      <a:round/>
-                      <a:headEnd type="none" w="sm" len="sm"/>
-                      <a:tailEnd type="none" w="sm" len="sm"/>
-                    </a:lnR>
-                    <a:lnT w="9525" cap="flat" cmpd="sng">
-                      <a:solidFill>
-                        <a:srgbClr val="000000">
-                          <a:alpha val="0"/>
-                        </a:srgbClr>
-                      </a:solidFill>
-                      <a:prstDash val="solid"/>
-                      <a:round/>
-                      <a:headEnd type="none" w="sm" len="sm"/>
-                      <a:tailEnd type="none" w="sm" len="sm"/>
-                    </a:lnT>
-                    <a:lnB w="9525" cap="flat" cmpd="sng">
-                      <a:solidFill>
-                        <a:srgbClr val="000000">
-                          <a:alpha val="0"/>
-                        </a:srgbClr>
-                      </a:solidFill>
-                      <a:prstDash val="solid"/>
-                      <a:round/>
-                      <a:headEnd type="none" w="sm" len="sm"/>
-                      <a:tailEnd type="none" w="sm" len="sm"/>
-                    </a:lnB>
-                    <a:solidFill>
-                      <a:srgbClr val="F8FAFC"/>
-                    </a:solidFill>
-                  </a:tcPr>
-                </a:tc>
-                <a:tc>
-                  <a:txBody>
-                    <a:bodyPr/>
-                    <a:lstStyle/>
-                    <a:p>
-                      <a:pPr marL="0" marR="0" lvl="0" indent="0" algn="l" rtl="0">
-                        <a:spcBef>
-                          <a:spcPts val="0"/>
-                        </a:spcBef>
-                        <a:spcAft>
-                          <a:spcPts val="0"/>
-                        </a:spcAft>
-                        <a:buNone/>
-                      </a:pPr>
-                      <a:r>
-                        <a:rPr lang="en-US" sz="1012" b="0" i="0" u="none" dirty="0" err="1">
-                          <a:solidFill>
-                            <a:srgbClr val="334155"/>
-                          </a:solidFill>
-                          <a:latin typeface="Inter"/>
-                          <a:ea typeface="Inter"/>
-                          <a:cs typeface="Arial" panose="020B0604020202020204" pitchFamily="34" charset="0"/>
-                          <a:sym typeface="Inter"/>
-                        </a:rPr>
-                        <a:t>Menampilkan</a:t>
-                      </a:r>
-                      <a:r>
-                        <a:rPr lang="en-US" sz="1012" b="0" i="0" u="none" dirty="0">
-                          <a:solidFill>
-                            <a:srgbClr val="334155"/>
-                          </a:solidFill>
-                          <a:latin typeface="Inter"/>
-                          <a:ea typeface="Inter"/>
-                          <a:cs typeface="Arial" panose="020B0604020202020204" pitchFamily="34" charset="0"/>
-                          <a:sym typeface="Inter"/>
-                        </a:rPr>
-                        <a:t> </a:t>
-                      </a:r>
-                      <a:r>
-                        <a:rPr lang="en-US" sz="1012" b="0" i="0" u="none" dirty="0" err="1">
-                          <a:solidFill>
-                            <a:srgbClr val="334155"/>
-                          </a:solidFill>
-                          <a:latin typeface="Inter"/>
-                          <a:ea typeface="Inter"/>
-                          <a:cs typeface="Arial" panose="020B0604020202020204" pitchFamily="34" charset="0"/>
-                          <a:sym typeface="Inter"/>
-                        </a:rPr>
-                        <a:t>katalog</a:t>
-                      </a:r>
-                      <a:r>
-                        <a:rPr lang="en-US" sz="1012" b="0" i="0" u="none" dirty="0">
-                          <a:solidFill>
-                            <a:srgbClr val="334155"/>
-                          </a:solidFill>
-                          <a:latin typeface="Inter"/>
-                          <a:ea typeface="Inter"/>
-                          <a:cs typeface="Arial" panose="020B0604020202020204" pitchFamily="34" charset="0"/>
-                          <a:sym typeface="Inter"/>
-                        </a:rPr>
-                        <a:t> </a:t>
-                      </a:r>
-                      <a:r>
-                        <a:rPr lang="en-US" sz="1012" b="0" i="0" u="none" dirty="0" err="1">
-                          <a:solidFill>
-                            <a:srgbClr val="334155"/>
-                          </a:solidFill>
-                          <a:latin typeface="Inter"/>
-                          <a:ea typeface="Inter"/>
-                          <a:cs typeface="Arial" panose="020B0604020202020204" pitchFamily="34" charset="0"/>
-                          <a:sym typeface="Inter"/>
-                        </a:rPr>
-                        <a:t>paket</a:t>
-                      </a:r>
-                      <a:r>
-                        <a:rPr lang="en-US" sz="1012" b="0" i="0" u="none" dirty="0">
-                          <a:solidFill>
-                            <a:srgbClr val="334155"/>
-                          </a:solidFill>
-                          <a:latin typeface="Inter"/>
-                          <a:ea typeface="Inter"/>
-                          <a:cs typeface="Arial" panose="020B0604020202020204" pitchFamily="34" charset="0"/>
-                          <a:sym typeface="Inter"/>
-                        </a:rPr>
-                        <a:t> </a:t>
-                      </a:r>
-                      <a:r>
-                        <a:rPr lang="en-US" sz="1012" b="0" i="0" u="none" dirty="0" err="1">
-                          <a:solidFill>
-                            <a:srgbClr val="334155"/>
-                          </a:solidFill>
-                          <a:latin typeface="Inter"/>
-                          <a:ea typeface="Inter"/>
-                          <a:cs typeface="Arial" panose="020B0604020202020204" pitchFamily="34" charset="0"/>
-                          <a:sym typeface="Inter"/>
-                        </a:rPr>
-                        <a:t>pemeriksaan</a:t>
-                      </a:r>
-                      <a:r>
-                        <a:rPr lang="en-US" sz="1012" b="0" i="0" u="none" dirty="0">
-                          <a:solidFill>
-                            <a:srgbClr val="334155"/>
-                          </a:solidFill>
-                          <a:latin typeface="Inter"/>
-                          <a:ea typeface="Inter"/>
-                          <a:cs typeface="Arial" panose="020B0604020202020204" pitchFamily="34" charset="0"/>
-                          <a:sym typeface="Inter"/>
-                        </a:rPr>
-                        <a:t> RS </a:t>
-                      </a:r>
-                      <a:r>
-                        <a:rPr lang="en-US" sz="1012" b="0" i="0" u="none" dirty="0" err="1">
-                          <a:solidFill>
-                            <a:srgbClr val="334155"/>
-                          </a:solidFill>
-                          <a:latin typeface="Inter"/>
-                          <a:ea typeface="Inter"/>
-                          <a:cs typeface="Arial" panose="020B0604020202020204" pitchFamily="34" charset="0"/>
-                          <a:sym typeface="Inter"/>
-                        </a:rPr>
-                        <a:t>langsung</a:t>
-                      </a:r>
-                      <a:r>
-                        <a:rPr lang="en-US" sz="1012" b="0" i="0" u="none" dirty="0">
-                          <a:solidFill>
-                            <a:srgbClr val="334155"/>
-                          </a:solidFill>
-                          <a:latin typeface="Inter"/>
-                          <a:ea typeface="Inter"/>
-                          <a:cs typeface="Arial" panose="020B0604020202020204" pitchFamily="34" charset="0"/>
-                          <a:sym typeface="Inter"/>
-                        </a:rPr>
-                        <a:t> </a:t>
-                      </a:r>
-                      <a:r>
-                        <a:rPr lang="en-US" sz="1012" b="0" i="0" u="none" dirty="0" err="1">
-                          <a:solidFill>
-                            <a:srgbClr val="334155"/>
-                          </a:solidFill>
-                          <a:latin typeface="Inter"/>
-                          <a:ea typeface="Inter"/>
-                          <a:cs typeface="Arial" panose="020B0604020202020204" pitchFamily="34" charset="0"/>
-                          <a:sym typeface="Inter"/>
-                        </a:rPr>
-                        <a:t>terpaginasi</a:t>
-                      </a:r>
-                      <a:r>
-                        <a:rPr lang="en-US" sz="1012" b="0" i="0" u="none" dirty="0">
-                          <a:solidFill>
-                            <a:srgbClr val="334155"/>
-                          </a:solidFill>
-                          <a:latin typeface="Inter"/>
-                          <a:ea typeface="Inter"/>
-                          <a:cs typeface="Arial" panose="020B0604020202020204" pitchFamily="34" charset="0"/>
-                          <a:sym typeface="Inter"/>
-                        </a:rPr>
-                        <a:t> (Lab, </a:t>
-                      </a:r>
-                      <a:r>
-                        <a:rPr lang="en-US" sz="1012" b="0" i="0" u="none" dirty="0" err="1">
-                          <a:solidFill>
-                            <a:srgbClr val="334155"/>
-                          </a:solidFill>
-                          <a:latin typeface="Inter"/>
-                          <a:ea typeface="Inter"/>
-                          <a:cs typeface="Arial" panose="020B0604020202020204" pitchFamily="34" charset="0"/>
-                          <a:sym typeface="Inter"/>
-                        </a:rPr>
-                        <a:t>Radiologi</a:t>
-                      </a:r>
-                      <a:r>
-                        <a:rPr lang="en-US" sz="1012" b="0" i="0" u="none" dirty="0">
-                          <a:solidFill>
-                            <a:srgbClr val="334155"/>
-                          </a:solidFill>
-                          <a:latin typeface="Inter"/>
-                          <a:ea typeface="Inter"/>
-                          <a:cs typeface="Arial" panose="020B0604020202020204" pitchFamily="34" charset="0"/>
-                          <a:sym typeface="Inter"/>
-                        </a:rPr>
-                        <a:t>).</a:t>
-                      </a:r>
-                      <a:endParaRPr dirty="0"/>
-                    </a:p>
-                  </a:txBody>
-                  <a:tcPr marL="63500" marR="63500" marT="25400" marB="25400" anchor="ctr">
-                    <a:lnL w="9525" cap="flat" cmpd="sng">
-                      <a:solidFill>
-                        <a:srgbClr val="000000">
-                          <a:alpha val="0"/>
-                        </a:srgbClr>
-                      </a:solidFill>
-                      <a:prstDash val="solid"/>
-                      <a:round/>
-                      <a:headEnd type="none" w="sm" len="sm"/>
-                      <a:tailEnd type="none" w="sm" len="sm"/>
-                    </a:lnL>
-                    <a:lnR w="9525" cap="flat" cmpd="sng">
-                      <a:solidFill>
-                        <a:srgbClr val="000000">
-                          <a:alpha val="0"/>
-                        </a:srgbClr>
-                      </a:solidFill>
-                      <a:prstDash val="solid"/>
-                      <a:round/>
-                      <a:headEnd type="none" w="sm" len="sm"/>
-                      <a:tailEnd type="none" w="sm" len="sm"/>
-                    </a:lnR>
-                    <a:lnT w="9525" cap="flat" cmpd="sng">
-                      <a:solidFill>
-                        <a:srgbClr val="000000">
-                          <a:alpha val="0"/>
-                        </a:srgbClr>
-                      </a:solidFill>
-                      <a:prstDash val="solid"/>
-                      <a:round/>
-                      <a:headEnd type="none" w="sm" len="sm"/>
-                      <a:tailEnd type="none" w="sm" len="sm"/>
-                    </a:lnT>
-                    <a:lnB w="9525" cap="flat" cmpd="sng">
-                      <a:solidFill>
-                        <a:srgbClr val="000000">
-                          <a:alpha val="0"/>
-                        </a:srgbClr>
-                      </a:solidFill>
-                      <a:prstDash val="solid"/>
-                      <a:round/>
-                      <a:headEnd type="none" w="sm" len="sm"/>
-                      <a:tailEnd type="none" w="sm" len="sm"/>
-                    </a:lnB>
-                  </a:tcPr>
-                </a:tc>
-                <a:extLst>
-                  <a:ext uri="{0D108BD9-81ED-4DB2-BD59-A6C34878D82A}">
-                    <a16:rowId xmlns:a16="http://schemas.microsoft.com/office/drawing/2014/main" val="10004"/>
-                  </a:ext>
-                </a:extLst>
-              </a:tr>
-              <a:tr h="427950">
-                <a:tc>
-                  <a:txBody>
-                    <a:bodyPr/>
-                    <a:lstStyle/>
-                    <a:p>
-                      <a:pPr marL="0" marR="0" lvl="0" indent="0" algn="l" rtl="0">
-                        <a:spcBef>
-                          <a:spcPts val="0"/>
-                        </a:spcBef>
-                        <a:spcAft>
-                          <a:spcPts val="0"/>
-                        </a:spcAft>
-                        <a:buNone/>
-                      </a:pPr>
-                      <a:r>
-                        <a:rPr lang="en-US" sz="1012" b="0" i="0" u="none">
-                          <a:solidFill>
-                            <a:srgbClr val="D97706"/>
-                          </a:solidFill>
-                          <a:latin typeface="Inter SemiBold"/>
-                          <a:ea typeface="Inter SemiBold"/>
-                          <a:cs typeface="Arial" panose="020B0604020202020204" pitchFamily="34" charset="0"/>
-                          <a:sym typeface="Inter SemiBold"/>
-                        </a:rPr>
-                        <a:t>Katalog Transaksi Booking</a:t>
-                      </a:r>
-                      <a:endParaRPr/>
-                    </a:p>
-                  </a:txBody>
-                  <a:tcPr marL="63500" marR="63500" marT="25400" marB="25400" anchor="ctr">
-                    <a:lnL w="9525" cap="flat" cmpd="sng">
-                      <a:solidFill>
-                        <a:srgbClr val="000000">
-                          <a:alpha val="0"/>
-                        </a:srgbClr>
-                      </a:solidFill>
-                      <a:prstDash val="solid"/>
-                      <a:round/>
-                      <a:headEnd type="none" w="sm" len="sm"/>
-                      <a:tailEnd type="none" w="sm" len="sm"/>
-                    </a:lnL>
-                    <a:lnR w="9525" cap="flat" cmpd="sng">
-                      <a:solidFill>
-                        <a:srgbClr val="000000">
-                          <a:alpha val="0"/>
-                        </a:srgbClr>
-                      </a:solidFill>
-                      <a:prstDash val="solid"/>
-                      <a:round/>
-                      <a:headEnd type="none" w="sm" len="sm"/>
-                      <a:tailEnd type="none" w="sm" len="sm"/>
-                    </a:lnR>
-                    <a:lnT w="9525" cap="flat" cmpd="sng">
-                      <a:solidFill>
-                        <a:srgbClr val="000000">
-                          <a:alpha val="0"/>
-                        </a:srgbClr>
-                      </a:solidFill>
-                      <a:prstDash val="solid"/>
-                      <a:round/>
-                      <a:headEnd type="none" w="sm" len="sm"/>
-                      <a:tailEnd type="none" w="sm" len="sm"/>
-                    </a:lnT>
-                    <a:lnB w="9525" cap="flat" cmpd="sng">
-                      <a:solidFill>
-                        <a:srgbClr val="000000">
-                          <a:alpha val="0"/>
-                        </a:srgbClr>
-                      </a:solidFill>
-                      <a:prstDash val="solid"/>
-                      <a:round/>
-                      <a:headEnd type="none" w="sm" len="sm"/>
-                      <a:tailEnd type="none" w="sm" len="sm"/>
-                    </a:lnB>
-                    <a:solidFill>
-                      <a:srgbClr val="FFFBEB"/>
-                    </a:solidFill>
-                  </a:tcPr>
-                </a:tc>
-                <a:tc>
-                  <a:txBody>
-                    <a:bodyPr/>
-                    <a:lstStyle/>
-                    <a:p>
-                      <a:pPr marL="0" marR="0" lvl="0" indent="0" algn="l" rtl="0">
-                        <a:spcBef>
-                          <a:spcPts val="0"/>
-                        </a:spcBef>
-                        <a:spcAft>
-                          <a:spcPts val="0"/>
-                        </a:spcAft>
-                        <a:buNone/>
-                      </a:pPr>
-                      <a:r>
-                        <a:rPr lang="en-US" sz="1012" b="1" i="0" u="none">
-                          <a:solidFill>
-                            <a:srgbClr val="16A34A"/>
-                          </a:solidFill>
-                          <a:latin typeface="Arial"/>
-                          <a:ea typeface="Arial"/>
-                          <a:cs typeface="Arial"/>
-                          <a:sym typeface="Arial"/>
-                        </a:rPr>
-                        <a:t>POST</a:t>
-                      </a:r>
-                      <a:endParaRPr/>
-                    </a:p>
-                  </a:txBody>
-                  <a:tcPr marL="63500" marR="63500" marT="25400" marB="25400" anchor="ctr">
-                    <a:lnL w="9525" cap="flat" cmpd="sng">
-                      <a:solidFill>
-                        <a:srgbClr val="000000">
-                          <a:alpha val="0"/>
-                        </a:srgbClr>
-                      </a:solidFill>
-                      <a:prstDash val="solid"/>
-                      <a:round/>
-                      <a:headEnd type="none" w="sm" len="sm"/>
-                      <a:tailEnd type="none" w="sm" len="sm"/>
-                    </a:lnL>
-                    <a:lnR w="9525" cap="flat" cmpd="sng">
-                      <a:solidFill>
-                        <a:srgbClr val="000000">
-                          <a:alpha val="0"/>
-                        </a:srgbClr>
-                      </a:solidFill>
-                      <a:prstDash val="solid"/>
-                      <a:round/>
-                      <a:headEnd type="none" w="sm" len="sm"/>
-                      <a:tailEnd type="none" w="sm" len="sm"/>
-                    </a:lnR>
-                    <a:lnT w="9525" cap="flat" cmpd="sng" algn="ctr">
-                      <a:solidFill>
-                        <a:srgbClr val="000000">
-                          <a:alpha val="0"/>
-                        </a:srgbClr>
-                      </a:solidFill>
-                      <a:prstDash val="solid"/>
-                      <a:round/>
-                      <a:headEnd type="none" w="sm" len="sm"/>
-                      <a:tailEnd type="none" w="sm" len="sm"/>
-                    </a:lnT>
-                    <a:lnB w="9525" cap="flat" cmpd="sng" algn="ctr">
-                      <a:solidFill>
-                        <a:srgbClr val="000000">
-                          <a:alpha val="0"/>
-                        </a:srgbClr>
-                      </a:solidFill>
-                      <a:prstDash val="solid"/>
-                      <a:round/>
-                      <a:headEnd type="none" w="sm" len="sm"/>
-                      <a:tailEnd type="none" w="sm" len="sm"/>
-                    </a:lnB>
-                  </a:tcPr>
-                </a:tc>
-                <a:tc>
-                  <a:txBody>
-                    <a:bodyPr/>
-                    <a:lstStyle/>
-                    <a:p>
-                      <a:pPr marL="0" marR="0" lvl="0" indent="0" algn="l" rtl="0">
-                        <a:spcBef>
-                          <a:spcPts val="0"/>
-                        </a:spcBef>
-                        <a:spcAft>
-                          <a:spcPts val="0"/>
-                        </a:spcAft>
-                        <a:buNone/>
-                      </a:pPr>
-                      <a:r>
-                        <a:rPr lang="en-US" sz="1012" b="0" i="0" u="none">
-                          <a:solidFill>
-                            <a:srgbClr val="334155"/>
-                          </a:solidFill>
-                          <a:latin typeface="Arial"/>
-                          <a:ea typeface="Arial"/>
-                          <a:cs typeface="Arial"/>
-                          <a:sym typeface="Arial"/>
-                        </a:rPr>
-                        <a:t>/api/bookings</a:t>
-                      </a:r>
-                      <a:endParaRPr/>
-                    </a:p>
-                  </a:txBody>
-                  <a:tcPr marL="63500" marR="63500" marT="25400" marB="25400" anchor="ctr">
-                    <a:lnL w="9525" cap="flat" cmpd="sng">
-                      <a:solidFill>
-                        <a:srgbClr val="000000">
-                          <a:alpha val="0"/>
-                        </a:srgbClr>
-                      </a:solidFill>
-                      <a:prstDash val="solid"/>
-                      <a:round/>
-                      <a:headEnd type="none" w="sm" len="sm"/>
-                      <a:tailEnd type="none" w="sm" len="sm"/>
-                    </a:lnL>
-                    <a:lnR w="9525" cap="flat" cmpd="sng">
-                      <a:solidFill>
-                        <a:srgbClr val="000000">
-                          <a:alpha val="0"/>
-                        </a:srgbClr>
-                      </a:solidFill>
-                      <a:prstDash val="solid"/>
-                      <a:round/>
-                      <a:headEnd type="none" w="sm" len="sm"/>
-                      <a:tailEnd type="none" w="sm" len="sm"/>
-                    </a:lnR>
-                    <a:lnT w="9525" cap="flat" cmpd="sng" algn="ctr">
-                      <a:solidFill>
-                        <a:srgbClr val="000000">
-                          <a:alpha val="0"/>
-                        </a:srgbClr>
-                      </a:solidFill>
-                      <a:prstDash val="solid"/>
-                      <a:round/>
-                      <a:headEnd type="none" w="sm" len="sm"/>
-                      <a:tailEnd type="none" w="sm" len="sm"/>
-                    </a:lnT>
-                    <a:lnB w="9525" cap="flat" cmpd="sng" algn="ctr">
-                      <a:solidFill>
-                        <a:srgbClr val="000000">
-                          <a:alpha val="0"/>
-                        </a:srgbClr>
-                      </a:solidFill>
-                      <a:prstDash val="solid"/>
-                      <a:round/>
-                      <a:headEnd type="none" w="sm" len="sm"/>
-                      <a:tailEnd type="none" w="sm" len="sm"/>
-                    </a:lnB>
-                  </a:tcPr>
-                </a:tc>
-                <a:tc>
-                  <a:txBody>
-                    <a:bodyPr/>
-                    <a:lstStyle/>
-                    <a:p>
-                      <a:pPr marL="0" marR="0" lvl="0" indent="0" algn="l" rtl="0">
-                        <a:spcBef>
-                          <a:spcPts val="0"/>
-                        </a:spcBef>
-                        <a:spcAft>
-                          <a:spcPts val="0"/>
-                        </a:spcAft>
-                        <a:buNone/>
-                      </a:pPr>
-                      <a:r>
-                        <a:rPr lang="en-US" sz="1012" b="0" i="0" u="none">
-                          <a:solidFill>
-                            <a:srgbClr val="334155"/>
-                          </a:solidFill>
-                          <a:latin typeface="Inter"/>
-                          <a:ea typeface="Inter"/>
-                          <a:cs typeface="Arial" panose="020B0604020202020204" pitchFamily="34" charset="0"/>
-                          <a:sym typeface="Inter"/>
-                        </a:rPr>
-                        <a:t>Membuat nomor pendaftaran baru, unggah berkas rujukan (Mengeset status PENDING).</a:t>
-                      </a:r>
-                      <a:endParaRPr/>
-                    </a:p>
-                  </a:txBody>
-                  <a:tcPr marL="63500" marR="63500" marT="25400" marB="25400" anchor="ctr">
-                    <a:lnL w="9525" cap="flat" cmpd="sng">
-                      <a:solidFill>
-                        <a:srgbClr val="000000">
-                          <a:alpha val="0"/>
-                        </a:srgbClr>
-                      </a:solidFill>
-                      <a:prstDash val="solid"/>
-                      <a:round/>
-                      <a:headEnd type="none" w="sm" len="sm"/>
-                      <a:tailEnd type="none" w="sm" len="sm"/>
-                    </a:lnL>
-                    <a:lnR w="9525" cap="flat" cmpd="sng">
-                      <a:solidFill>
-                        <a:srgbClr val="000000">
-                          <a:alpha val="0"/>
-                        </a:srgbClr>
-                      </a:solidFill>
-                      <a:prstDash val="solid"/>
-                      <a:round/>
-                      <a:headEnd type="none" w="sm" len="sm"/>
-                      <a:tailEnd type="none" w="sm" len="sm"/>
-                    </a:lnR>
-                    <a:lnT w="9525" cap="flat" cmpd="sng" algn="ctr">
-                      <a:solidFill>
-                        <a:srgbClr val="000000">
-                          <a:alpha val="0"/>
-                        </a:srgbClr>
-                      </a:solidFill>
-                      <a:prstDash val="solid"/>
-                      <a:round/>
-                      <a:headEnd type="none" w="sm" len="sm"/>
-                      <a:tailEnd type="none" w="sm" len="sm"/>
-                    </a:lnT>
-                    <a:lnB w="9525" cap="flat" cmpd="sng" algn="ctr">
-                      <a:solidFill>
-                        <a:srgbClr val="000000">
-                          <a:alpha val="0"/>
-                        </a:srgbClr>
-                      </a:solidFill>
-                      <a:prstDash val="solid"/>
-                      <a:round/>
-                      <a:headEnd type="none" w="sm" len="sm"/>
-                      <a:tailEnd type="none" w="sm" len="sm"/>
-                    </a:lnB>
-                  </a:tcPr>
-                </a:tc>
-                <a:extLst>
-                  <a:ext uri="{0D108BD9-81ED-4DB2-BD59-A6C34878D82A}">
-                    <a16:rowId xmlns:a16="http://schemas.microsoft.com/office/drawing/2014/main" val="10005"/>
-                  </a:ext>
-                </a:extLst>
-              </a:tr>
-              <a:tr h="427950">
-                <a:tc>
-                  <a:txBody>
-                    <a:bodyPr/>
-                    <a:lstStyle/>
-                    <a:p>
-                      <a:pPr marL="0" marR="0" lvl="0" indent="0" algn="l" rtl="0">
-                        <a:spcBef>
-                          <a:spcPts val="0"/>
-                        </a:spcBef>
-                        <a:spcAft>
-                          <a:spcPts val="0"/>
-                        </a:spcAft>
-                        <a:buNone/>
-                      </a:pPr>
-                      <a:endParaRPr/>
-                    </a:p>
-                  </a:txBody>
-                  <a:tcPr marL="63500" marR="63500" marT="25400" marB="25400" anchor="ctr">
-                    <a:lnL w="9525" cap="flat" cmpd="sng">
-                      <a:solidFill>
-                        <a:srgbClr val="000000">
-                          <a:alpha val="0"/>
-                        </a:srgbClr>
-                      </a:solidFill>
-                      <a:prstDash val="solid"/>
-                      <a:round/>
-                      <a:headEnd type="none" w="sm" len="sm"/>
-                      <a:tailEnd type="none" w="sm" len="sm"/>
-                    </a:lnL>
-                    <a:lnR w="9525" cap="flat" cmpd="sng" algn="ctr">
-                      <a:solidFill>
-                        <a:srgbClr val="000000">
-                          <a:alpha val="0"/>
-                        </a:srgbClr>
-                      </a:solidFill>
-                      <a:prstDash val="solid"/>
-                      <a:round/>
-                      <a:headEnd type="none" w="sm" len="sm"/>
-                      <a:tailEnd type="none" w="sm" len="sm"/>
-                    </a:lnR>
-                    <a:lnT w="9525" cap="flat" cmpd="sng">
-                      <a:solidFill>
-                        <a:srgbClr val="000000">
-                          <a:alpha val="0"/>
-                        </a:srgbClr>
-                      </a:solidFill>
-                      <a:prstDash val="solid"/>
-                      <a:round/>
-                      <a:headEnd type="none" w="sm" len="sm"/>
-                      <a:tailEnd type="none" w="sm" len="sm"/>
-                    </a:lnT>
-                    <a:lnB w="9525" cap="flat" cmpd="sng">
-                      <a:solidFill>
-                        <a:srgbClr val="000000">
-                          <a:alpha val="0"/>
-                        </a:srgbClr>
-                      </a:solidFill>
-                      <a:prstDash val="solid"/>
-                      <a:round/>
-                      <a:headEnd type="none" w="sm" len="sm"/>
-                      <a:tailEnd type="none" w="sm" len="sm"/>
-                    </a:lnB>
-                    <a:solidFill>
-                      <a:srgbClr val="F8FAFC"/>
-                    </a:solidFill>
-                  </a:tcPr>
-                </a:tc>
-                <a:tc>
-                  <a:txBody>
-                    <a:bodyPr/>
-                    <a:lstStyle/>
-                    <a:p>
-                      <a:pPr marL="0" marR="0" lvl="0" indent="0" algn="l" rtl="0">
-                        <a:spcBef>
-                          <a:spcPts val="0"/>
-                        </a:spcBef>
-                        <a:spcAft>
-                          <a:spcPts val="0"/>
-                        </a:spcAft>
-                        <a:buNone/>
-                      </a:pPr>
-                      <a:r>
-                        <a:rPr lang="en-US" sz="1012" b="1" i="0" u="none" dirty="0">
-                          <a:solidFill>
-                            <a:srgbClr val="16A34A"/>
-                          </a:solidFill>
-                          <a:latin typeface="Arial"/>
-                          <a:ea typeface="Arial"/>
-                          <a:cs typeface="Arial"/>
-                          <a:sym typeface="Arial"/>
-                        </a:rPr>
-                        <a:t>POST</a:t>
-                      </a:r>
-                      <a:endParaRPr dirty="0"/>
-                    </a:p>
-                  </a:txBody>
-                  <a:tcPr marL="63500" marR="63500" marT="25400" marB="25400" anchor="ctr">
-                    <a:lnL w="9525" cap="flat" cmpd="sng">
-                      <a:solidFill>
-                        <a:srgbClr val="000000">
-                          <a:alpha val="0"/>
-                        </a:srgbClr>
-                      </a:solidFill>
-                      <a:prstDash val="solid"/>
-                      <a:round/>
-                      <a:headEnd type="none" w="sm" len="sm"/>
-                      <a:tailEnd type="none" w="sm" len="sm"/>
-                    </a:lnL>
-                    <a:lnR w="9525" cap="flat" cmpd="sng">
-                      <a:solidFill>
-                        <a:srgbClr val="000000">
-                          <a:alpha val="0"/>
-                        </a:srgbClr>
-                      </a:solidFill>
-                      <a:prstDash val="solid"/>
-                      <a:round/>
-                      <a:headEnd type="none" w="sm" len="sm"/>
-                      <a:tailEnd type="none" w="sm" len="sm"/>
-                    </a:lnR>
-                    <a:lnT w="9525" cap="flat" cmpd="sng">
-                      <a:solidFill>
-                        <a:srgbClr val="000000">
-                          <a:alpha val="0"/>
-                        </a:srgbClr>
-                      </a:solidFill>
-                      <a:prstDash val="solid"/>
-                      <a:round/>
-                      <a:headEnd type="none" w="sm" len="sm"/>
-                      <a:tailEnd type="none" w="sm" len="sm"/>
-                    </a:lnT>
-                    <a:lnB w="9525" cap="flat" cmpd="sng">
-                      <a:solidFill>
-                        <a:srgbClr val="000000">
-                          <a:alpha val="0"/>
-                        </a:srgbClr>
-                      </a:solidFill>
-                      <a:prstDash val="solid"/>
-                      <a:round/>
-                      <a:headEnd type="none" w="sm" len="sm"/>
-                      <a:tailEnd type="none" w="sm" len="sm"/>
-                    </a:lnB>
-                    <a:solidFill>
-                      <a:srgbClr val="F8FAFC"/>
-                    </a:solidFill>
-                  </a:tcPr>
-                </a:tc>
-                <a:tc>
-                  <a:txBody>
-                    <a:bodyPr/>
-                    <a:lstStyle/>
-                    <a:p>
-                      <a:pPr marL="0" marR="0" lvl="0" indent="0" algn="l" rtl="0">
-                        <a:spcBef>
-                          <a:spcPts val="0"/>
-                        </a:spcBef>
-                        <a:spcAft>
-                          <a:spcPts val="0"/>
-                        </a:spcAft>
-                        <a:buNone/>
-                      </a:pPr>
-                      <a:r>
-                        <a:rPr lang="en-US" sz="1012" b="0" i="0" u="none">
-                          <a:solidFill>
-                            <a:srgbClr val="334155"/>
-                          </a:solidFill>
-                          <a:latin typeface="Arial"/>
-                          <a:ea typeface="Arial"/>
-                          <a:cs typeface="Arial"/>
-                          <a:sym typeface="Arial"/>
-                        </a:rPr>
-                        <a:t>/api/bookings/{id}/pay</a:t>
-                      </a:r>
-                      <a:endParaRPr/>
-                    </a:p>
-                  </a:txBody>
-                  <a:tcPr marL="63500" marR="63500" marT="25400" marB="25400" anchor="ctr">
-                    <a:lnL w="9525" cap="flat" cmpd="sng">
-                      <a:solidFill>
-                        <a:srgbClr val="000000">
-                          <a:alpha val="0"/>
-                        </a:srgbClr>
-                      </a:solidFill>
-                      <a:prstDash val="solid"/>
-                      <a:round/>
-                      <a:headEnd type="none" w="sm" len="sm"/>
-                      <a:tailEnd type="none" w="sm" len="sm"/>
-                    </a:lnL>
-                    <a:lnR w="9525" cap="flat" cmpd="sng">
-                      <a:solidFill>
-                        <a:srgbClr val="000000">
-                          <a:alpha val="0"/>
-                        </a:srgbClr>
-                      </a:solidFill>
-                      <a:prstDash val="solid"/>
-                      <a:round/>
-                      <a:headEnd type="none" w="sm" len="sm"/>
-                      <a:tailEnd type="none" w="sm" len="sm"/>
-                    </a:lnR>
-                    <a:lnT w="9525" cap="flat" cmpd="sng">
-                      <a:solidFill>
-                        <a:srgbClr val="000000">
-                          <a:alpha val="0"/>
-                        </a:srgbClr>
-                      </a:solidFill>
-                      <a:prstDash val="solid"/>
-                      <a:round/>
-                      <a:headEnd type="none" w="sm" len="sm"/>
-                      <a:tailEnd type="none" w="sm" len="sm"/>
-                    </a:lnT>
-                    <a:lnB w="9525" cap="flat" cmpd="sng">
-                      <a:solidFill>
-                        <a:srgbClr val="000000">
-                          <a:alpha val="0"/>
-                        </a:srgbClr>
-                      </a:solidFill>
-                      <a:prstDash val="solid"/>
-                      <a:round/>
-                      <a:headEnd type="none" w="sm" len="sm"/>
-                      <a:tailEnd type="none" w="sm" len="sm"/>
-                    </a:lnB>
-                    <a:solidFill>
-                      <a:srgbClr val="F8FAFC"/>
-                    </a:solidFill>
-                  </a:tcPr>
-                </a:tc>
-                <a:tc>
-                  <a:txBody>
-                    <a:bodyPr/>
-                    <a:lstStyle/>
-                    <a:p>
-                      <a:pPr marL="0" marR="0" lvl="0" indent="0" algn="l" rtl="0">
-                        <a:spcBef>
-                          <a:spcPts val="0"/>
-                        </a:spcBef>
-                        <a:spcAft>
-                          <a:spcPts val="0"/>
-                        </a:spcAft>
-                        <a:buNone/>
-                      </a:pPr>
-                      <a:r>
-                        <a:rPr lang="en-US" sz="1012" b="0" i="0" u="none" dirty="0" err="1">
-                          <a:solidFill>
-                            <a:srgbClr val="334155"/>
-                          </a:solidFill>
-                          <a:latin typeface="Inter"/>
-                          <a:ea typeface="Inter"/>
-                          <a:cs typeface="Arial" panose="020B0604020202020204" pitchFamily="34" charset="0"/>
-                          <a:sym typeface="Inter"/>
-                        </a:rPr>
-                        <a:t>Simulasi</a:t>
-                      </a:r>
-                      <a:r>
-                        <a:rPr lang="en-US" sz="1012" b="0" i="0" u="none" dirty="0">
-                          <a:solidFill>
-                            <a:srgbClr val="334155"/>
-                          </a:solidFill>
-                          <a:latin typeface="Inter"/>
-                          <a:ea typeface="Inter"/>
-                          <a:cs typeface="Arial" panose="020B0604020202020204" pitchFamily="34" charset="0"/>
-                          <a:sym typeface="Inter"/>
-                        </a:rPr>
-                        <a:t> sandbox </a:t>
-                      </a:r>
-                      <a:r>
-                        <a:rPr lang="en-US" sz="1012" b="0" i="0" u="none" dirty="0" err="1">
-                          <a:solidFill>
-                            <a:srgbClr val="334155"/>
-                          </a:solidFill>
-                          <a:latin typeface="Inter"/>
-                          <a:ea typeface="Inter"/>
-                          <a:cs typeface="Arial" panose="020B0604020202020204" pitchFamily="34" charset="0"/>
-                          <a:sym typeface="Inter"/>
-                        </a:rPr>
-                        <a:t>pembayaran</a:t>
-                      </a:r>
-                      <a:r>
-                        <a:rPr lang="en-US" sz="1012" b="0" i="0" u="none" dirty="0">
-                          <a:solidFill>
-                            <a:srgbClr val="334155"/>
-                          </a:solidFill>
-                          <a:latin typeface="Inter"/>
-                          <a:ea typeface="Inter"/>
-                          <a:cs typeface="Arial" panose="020B0604020202020204" pitchFamily="34" charset="0"/>
-                          <a:sym typeface="Inter"/>
-                        </a:rPr>
-                        <a:t>, </a:t>
-                      </a:r>
-                      <a:r>
-                        <a:rPr lang="en-US" sz="1012" b="0" i="0" u="none" dirty="0" err="1">
-                          <a:solidFill>
-                            <a:srgbClr val="334155"/>
-                          </a:solidFill>
-                          <a:latin typeface="Inter"/>
-                          <a:ea typeface="Inter"/>
-                          <a:cs typeface="Arial" panose="020B0604020202020204" pitchFamily="34" charset="0"/>
-                          <a:sym typeface="Inter"/>
-                        </a:rPr>
-                        <a:t>memicu</a:t>
-                      </a:r>
-                      <a:r>
-                        <a:rPr lang="en-US" sz="1012" b="0" i="0" u="none" dirty="0">
-                          <a:solidFill>
-                            <a:srgbClr val="334155"/>
-                          </a:solidFill>
-                          <a:latin typeface="Inter"/>
-                          <a:ea typeface="Inter"/>
-                          <a:cs typeface="Arial" panose="020B0604020202020204" pitchFamily="34" charset="0"/>
-                          <a:sym typeface="Inter"/>
-                        </a:rPr>
-                        <a:t> </a:t>
-                      </a:r>
-                      <a:r>
-                        <a:rPr lang="en-US" sz="1012" b="0" i="0" u="none" dirty="0" err="1">
-                          <a:solidFill>
-                            <a:srgbClr val="334155"/>
-                          </a:solidFill>
-                          <a:latin typeface="Inter"/>
-                          <a:ea typeface="Inter"/>
-                          <a:cs typeface="Arial" panose="020B0604020202020204" pitchFamily="34" charset="0"/>
-                          <a:sym typeface="Inter"/>
-                        </a:rPr>
-                        <a:t>transisi</a:t>
-                      </a:r>
-                      <a:r>
-                        <a:rPr lang="en-US" sz="1012" b="0" i="0" u="none" dirty="0">
-                          <a:solidFill>
-                            <a:srgbClr val="334155"/>
-                          </a:solidFill>
-                          <a:latin typeface="Inter"/>
-                          <a:ea typeface="Inter"/>
-                          <a:cs typeface="Arial" panose="020B0604020202020204" pitchFamily="34" charset="0"/>
-                          <a:sym typeface="Inter"/>
-                        </a:rPr>
-                        <a:t> </a:t>
-                      </a:r>
-                      <a:r>
-                        <a:rPr lang="en-US" sz="1012" b="0" i="0" u="none" dirty="0" err="1">
-                          <a:solidFill>
-                            <a:srgbClr val="334155"/>
-                          </a:solidFill>
-                          <a:latin typeface="Inter"/>
-                          <a:ea typeface="Inter"/>
-                          <a:cs typeface="Arial" panose="020B0604020202020204" pitchFamily="34" charset="0"/>
-                          <a:sym typeface="Inter"/>
-                        </a:rPr>
-                        <a:t>otomatis</a:t>
-                      </a:r>
-                      <a:r>
-                        <a:rPr lang="en-US" sz="1012" b="0" i="0" u="none" dirty="0">
-                          <a:solidFill>
-                            <a:srgbClr val="334155"/>
-                          </a:solidFill>
-                          <a:latin typeface="Inter"/>
-                          <a:ea typeface="Inter"/>
-                          <a:cs typeface="Arial" panose="020B0604020202020204" pitchFamily="34" charset="0"/>
-                          <a:sym typeface="Inter"/>
-                        </a:rPr>
-                        <a:t> status </a:t>
-                      </a:r>
-                      <a:r>
-                        <a:rPr lang="en-US" sz="1012" b="0" i="0" u="none" dirty="0" err="1">
-                          <a:solidFill>
-                            <a:srgbClr val="334155"/>
-                          </a:solidFill>
-                          <a:latin typeface="Inter"/>
-                          <a:ea typeface="Inter"/>
-                          <a:cs typeface="Arial" panose="020B0604020202020204" pitchFamily="34" charset="0"/>
-                          <a:sym typeface="Inter"/>
-                        </a:rPr>
-                        <a:t>menjadi</a:t>
-                      </a:r>
-                      <a:r>
-                        <a:rPr lang="en-US" sz="1012" b="0" i="0" u="none" dirty="0">
-                          <a:solidFill>
-                            <a:srgbClr val="334155"/>
-                          </a:solidFill>
-                          <a:latin typeface="Inter"/>
-                          <a:ea typeface="Inter"/>
-                          <a:cs typeface="Arial" panose="020B0604020202020204" pitchFamily="34" charset="0"/>
-                          <a:sym typeface="Inter"/>
-                        </a:rPr>
-                        <a:t> CONFIRMED.</a:t>
-                      </a:r>
-                      <a:endParaRPr dirty="0"/>
-                    </a:p>
-                  </a:txBody>
-                  <a:tcPr marL="63500" marR="63500" marT="25400" marB="25400" anchor="ctr">
-                    <a:lnL w="9525" cap="flat" cmpd="sng">
-                      <a:solidFill>
-                        <a:srgbClr val="000000">
-                          <a:alpha val="0"/>
-                        </a:srgbClr>
-                      </a:solidFill>
-                      <a:prstDash val="solid"/>
-                      <a:round/>
-                      <a:headEnd type="none" w="sm" len="sm"/>
-                      <a:tailEnd type="none" w="sm" len="sm"/>
-                    </a:lnL>
-                    <a:lnR w="9525" cap="flat" cmpd="sng">
-                      <a:solidFill>
-                        <a:srgbClr val="000000">
-                          <a:alpha val="0"/>
-                        </a:srgbClr>
-                      </a:solidFill>
-                      <a:prstDash val="solid"/>
-                      <a:round/>
-                      <a:headEnd type="none" w="sm" len="sm"/>
-                      <a:tailEnd type="none" w="sm" len="sm"/>
-                    </a:lnR>
-                    <a:lnT w="9525" cap="flat" cmpd="sng">
-                      <a:solidFill>
-                        <a:srgbClr val="000000">
-                          <a:alpha val="0"/>
-                        </a:srgbClr>
-                      </a:solidFill>
-                      <a:prstDash val="solid"/>
-                      <a:round/>
-                      <a:headEnd type="none" w="sm" len="sm"/>
-                      <a:tailEnd type="none" w="sm" len="sm"/>
-                    </a:lnT>
-                    <a:lnB w="9525" cap="flat" cmpd="sng">
-                      <a:solidFill>
-                        <a:srgbClr val="000000">
-                          <a:alpha val="0"/>
-                        </a:srgbClr>
-                      </a:solidFill>
-                      <a:prstDash val="solid"/>
-                      <a:round/>
-                      <a:headEnd type="none" w="sm" len="sm"/>
-                      <a:tailEnd type="none" w="sm" len="sm"/>
-                    </a:lnB>
-                  </a:tcPr>
-                </a:tc>
-                <a:extLst>
-                  <a:ext uri="{0D108BD9-81ED-4DB2-BD59-A6C34878D82A}">
-                    <a16:rowId xmlns:a16="http://schemas.microsoft.com/office/drawing/2014/main" val="10006"/>
-                  </a:ext>
-                </a:extLst>
-              </a:tr>
-            </a:tbl>
-          </a:graphicData>
-        </a:graphic>
-      </p:graphicFrame>
       <p:sp>
         <p:nvSpPr>
           <p:cNvPr id="337" name="Google Shape;337;p21"/>
@@ -15575,8 +17882,8 @@
         </p:nvSpPr>
         <p:spPr>
           <a:xfrm>
-            <a:off x="723900" y="485775"/>
-            <a:ext cx="11431428" cy="365670"/>
+            <a:off x="723900" y="447011"/>
+            <a:ext cx="11431428" cy="443198"/>
           </a:xfrm>
           <a:prstGeom prst="rect">
             <a:avLst/>
@@ -15614,7 +17921,7 @@
                 <a:cs typeface="Plus Jakarta Sans"/>
                 <a:sym typeface="Plus Jakarta Sans"/>
               </a:rPr>
-              <a:t>SPESIFIKASI API ENDPOINTS (CP1)</a:t>
+              <a:t>API ENDPOINTS </a:t>
             </a:r>
             <a:endParaRPr dirty="0"/>
           </a:p>
@@ -19121,7 +21428,7 @@
               <a:buNone/>
             </a:pPr>
             <a:r>
-              <a:rPr lang="en-US" sz="1125" b="1" i="0" u="none" strike="noStrike" cap="none">
+              <a:rPr lang="en-US" sz="1125" b="1" i="0" u="none" strike="noStrike" cap="none" dirty="0">
                 <a:solidFill>
                   <a:srgbClr val="0D9488"/>
                 </a:solidFill>
@@ -19130,9 +21437,21 @@
                 <a:cs typeface="Plus Jakarta Sans"/>
                 <a:sym typeface="Plus Jakarta Sans"/>
               </a:rPr>
-              <a:t>Target Pengguna</a:t>
-            </a:r>
-            <a:endParaRPr/>
+              <a:t>Target </a:t>
+            </a:r>
+            <a:r>
+              <a:rPr lang="en-US" sz="1125" b="1" i="0" u="none" strike="noStrike" cap="none" dirty="0" err="1">
+                <a:solidFill>
+                  <a:srgbClr val="0D9488"/>
+                </a:solidFill>
+                <a:latin typeface="Plus Jakarta Sans"/>
+                <a:ea typeface="Plus Jakarta Sans"/>
+                <a:cs typeface="Plus Jakarta Sans"/>
+                <a:sym typeface="Plus Jakarta Sans"/>
+              </a:rPr>
+              <a:t>Pengguna</a:t>
+            </a:r>
+            <a:endParaRPr dirty="0"/>
           </a:p>
         </p:txBody>
       </p:sp>
@@ -19174,7 +21493,7 @@
               <a:buNone/>
             </a:pPr>
             <a:r>
-              <a:rPr lang="en-US" sz="1125" b="1" i="0" u="none" strike="noStrike" cap="none">
+              <a:rPr lang="en-US" sz="1125" b="1" i="0" u="none" strike="noStrike" cap="none" dirty="0" err="1">
                 <a:solidFill>
                   <a:srgbClr val="E11D48"/>
                 </a:solidFill>
@@ -19183,9 +21502,33 @@
                 <a:cs typeface="Plus Jakarta Sans"/>
                 <a:sym typeface="Plus Jakarta Sans"/>
               </a:rPr>
-              <a:t>Masalah Utama Yang Diselesaikan</a:t>
-            </a:r>
-            <a:endParaRPr/>
+              <a:t>Masalah</a:t>
+            </a:r>
+            <a:r>
+              <a:rPr lang="en-US" sz="1125" b="1" i="0" u="none" strike="noStrike" cap="none" dirty="0">
+                <a:solidFill>
+                  <a:srgbClr val="E11D48"/>
+                </a:solidFill>
+                <a:latin typeface="Plus Jakarta Sans"/>
+                <a:ea typeface="Plus Jakarta Sans"/>
+                <a:cs typeface="Plus Jakarta Sans"/>
+                <a:sym typeface="Plus Jakarta Sans"/>
+              </a:rPr>
+              <a:t> Utama Yang </a:t>
+            </a:r>
+            <a:r>
+              <a:rPr lang="en-US" sz="1125" b="1" i="0" u="none" strike="noStrike" cap="none" dirty="0" err="1">
+                <a:solidFill>
+                  <a:srgbClr val="E11D48"/>
+                </a:solidFill>
+                <a:latin typeface="Plus Jakarta Sans"/>
+                <a:ea typeface="Plus Jakarta Sans"/>
+                <a:cs typeface="Plus Jakarta Sans"/>
+                <a:sym typeface="Plus Jakarta Sans"/>
+              </a:rPr>
+              <a:t>Diselesaikan</a:t>
+            </a:r>
+            <a:endParaRPr dirty="0"/>
           </a:p>
         </p:txBody>
       </p:sp>
@@ -19227,7 +21570,7 @@
               <a:buNone/>
             </a:pPr>
             <a:r>
-              <a:rPr lang="en-US" sz="975" b="0" i="0" u="none" strike="noStrike" cap="none">
+              <a:rPr lang="en-US" sz="975" b="0" i="0" u="none" strike="noStrike" cap="none" dirty="0" err="1">
                 <a:solidFill>
                   <a:srgbClr val="475569"/>
                 </a:solidFill>
@@ -19236,9 +21579,381 @@
                 <a:cs typeface="Inter"/>
                 <a:sym typeface="Inter"/>
               </a:rPr>
-              <a:t>Mengurangi antrean fisik pendaftaran rumah sakit, mencegah overbooking kuota dokter, dan memitigasi manipulasi/kebocoran berkas resep kertas fisik.</a:t>
-            </a:r>
-            <a:endParaRPr/>
+              <a:t>Mengurangi</a:t>
+            </a:r>
+            <a:r>
+              <a:rPr lang="en-US" sz="975" b="0" i="0" u="none" strike="noStrike" cap="none" dirty="0">
+                <a:solidFill>
+                  <a:srgbClr val="475569"/>
+                </a:solidFill>
+                <a:latin typeface="Inter"/>
+                <a:ea typeface="Inter"/>
+                <a:cs typeface="Inter"/>
+                <a:sym typeface="Inter"/>
+              </a:rPr>
+              <a:t> </a:t>
+            </a:r>
+            <a:r>
+              <a:rPr lang="en-US" sz="975" b="0" i="0" u="none" strike="noStrike" cap="none" dirty="0" err="1">
+                <a:solidFill>
+                  <a:srgbClr val="475569"/>
+                </a:solidFill>
+                <a:latin typeface="Inter"/>
+                <a:ea typeface="Inter"/>
+                <a:cs typeface="Inter"/>
+                <a:sym typeface="Inter"/>
+              </a:rPr>
+              <a:t>antrean</a:t>
+            </a:r>
+            <a:r>
+              <a:rPr lang="en-US" sz="975" b="0" i="0" u="none" strike="noStrike" cap="none" dirty="0">
+                <a:solidFill>
+                  <a:srgbClr val="475569"/>
+                </a:solidFill>
+                <a:latin typeface="Inter"/>
+                <a:ea typeface="Inter"/>
+                <a:cs typeface="Inter"/>
+                <a:sym typeface="Inter"/>
+              </a:rPr>
+              <a:t> </a:t>
+            </a:r>
+            <a:r>
+              <a:rPr lang="en-US" sz="975" b="0" i="0" u="none" strike="noStrike" cap="none" dirty="0" err="1">
+                <a:solidFill>
+                  <a:srgbClr val="475569"/>
+                </a:solidFill>
+                <a:latin typeface="Inter"/>
+                <a:ea typeface="Inter"/>
+                <a:cs typeface="Inter"/>
+                <a:sym typeface="Inter"/>
+              </a:rPr>
+              <a:t>fisik</a:t>
+            </a:r>
+            <a:r>
+              <a:rPr lang="en-US" sz="975" b="0" i="0" u="none" strike="noStrike" cap="none" dirty="0">
+                <a:solidFill>
+                  <a:srgbClr val="475569"/>
+                </a:solidFill>
+                <a:latin typeface="Inter"/>
+                <a:ea typeface="Inter"/>
+                <a:cs typeface="Inter"/>
+                <a:sym typeface="Inter"/>
+              </a:rPr>
+              <a:t> </a:t>
+            </a:r>
+            <a:r>
+              <a:rPr lang="en-US" sz="975" b="0" i="0" u="none" strike="noStrike" cap="none" dirty="0" err="1">
+                <a:solidFill>
+                  <a:srgbClr val="475569"/>
+                </a:solidFill>
+                <a:latin typeface="Inter"/>
+                <a:ea typeface="Inter"/>
+                <a:cs typeface="Inter"/>
+                <a:sym typeface="Inter"/>
+              </a:rPr>
+              <a:t>pendaftaran</a:t>
+            </a:r>
+            <a:r>
+              <a:rPr lang="en-US" sz="975" b="0" i="0" u="none" strike="noStrike" cap="none" dirty="0">
+                <a:solidFill>
+                  <a:srgbClr val="475569"/>
+                </a:solidFill>
+                <a:latin typeface="Inter"/>
+                <a:ea typeface="Inter"/>
+                <a:cs typeface="Inter"/>
+                <a:sym typeface="Inter"/>
+              </a:rPr>
+              <a:t> </a:t>
+            </a:r>
+            <a:r>
+              <a:rPr lang="en-US" sz="975" b="0" i="0" u="none" strike="noStrike" cap="none" dirty="0" err="1">
+                <a:solidFill>
+                  <a:srgbClr val="475569"/>
+                </a:solidFill>
+                <a:latin typeface="Inter"/>
+                <a:ea typeface="Inter"/>
+                <a:cs typeface="Inter"/>
+                <a:sym typeface="Inter"/>
+              </a:rPr>
+              <a:t>rumah</a:t>
+            </a:r>
+            <a:r>
+              <a:rPr lang="en-US" sz="975" b="0" i="0" u="none" strike="noStrike" cap="none" dirty="0">
+                <a:solidFill>
+                  <a:srgbClr val="475569"/>
+                </a:solidFill>
+                <a:latin typeface="Inter"/>
+                <a:ea typeface="Inter"/>
+                <a:cs typeface="Inter"/>
+                <a:sym typeface="Inter"/>
+              </a:rPr>
+              <a:t> </a:t>
+            </a:r>
+            <a:r>
+              <a:rPr lang="en-US" sz="975" b="0" i="0" u="none" strike="noStrike" cap="none" dirty="0" err="1">
+                <a:solidFill>
+                  <a:srgbClr val="475569"/>
+                </a:solidFill>
+                <a:latin typeface="Inter"/>
+                <a:ea typeface="Inter"/>
+                <a:cs typeface="Inter"/>
+                <a:sym typeface="Inter"/>
+              </a:rPr>
+              <a:t>sakit</a:t>
+            </a:r>
+            <a:r>
+              <a:rPr lang="en-US" sz="975" b="0" i="0" u="none" strike="noStrike" cap="none" dirty="0">
+                <a:solidFill>
+                  <a:srgbClr val="475569"/>
+                </a:solidFill>
+                <a:latin typeface="Inter"/>
+                <a:ea typeface="Inter"/>
+                <a:cs typeface="Inter"/>
+                <a:sym typeface="Inter"/>
+              </a:rPr>
+              <a:t>, </a:t>
+            </a:r>
+            <a:r>
+              <a:rPr lang="en-US" sz="975" b="0" i="0" u="none" strike="noStrike" cap="none" dirty="0" err="1">
+                <a:solidFill>
+                  <a:srgbClr val="475569"/>
+                </a:solidFill>
+                <a:latin typeface="Inter"/>
+                <a:ea typeface="Inter"/>
+                <a:cs typeface="Inter"/>
+                <a:sym typeface="Inter"/>
+              </a:rPr>
+              <a:t>mencegah</a:t>
+            </a:r>
+            <a:r>
+              <a:rPr lang="en-US" sz="975" b="0" i="0" u="none" strike="noStrike" cap="none" dirty="0">
+                <a:solidFill>
+                  <a:srgbClr val="475569"/>
+                </a:solidFill>
+                <a:latin typeface="Inter"/>
+                <a:ea typeface="Inter"/>
+                <a:cs typeface="Inter"/>
+                <a:sym typeface="Inter"/>
+              </a:rPr>
+              <a:t> overbooking </a:t>
+            </a:r>
+            <a:r>
+              <a:rPr lang="en-US" sz="975" b="0" i="0" u="none" strike="noStrike" cap="none" dirty="0" err="1">
+                <a:solidFill>
+                  <a:srgbClr val="475569"/>
+                </a:solidFill>
+                <a:latin typeface="Inter"/>
+                <a:ea typeface="Inter"/>
+                <a:cs typeface="Inter"/>
+                <a:sym typeface="Inter"/>
+              </a:rPr>
+              <a:t>kuota</a:t>
+            </a:r>
+            <a:r>
+              <a:rPr lang="en-US" sz="975" b="0" i="0" u="none" strike="noStrike" cap="none" dirty="0">
+                <a:solidFill>
+                  <a:srgbClr val="475569"/>
+                </a:solidFill>
+                <a:latin typeface="Inter"/>
+                <a:ea typeface="Inter"/>
+                <a:cs typeface="Inter"/>
+                <a:sym typeface="Inter"/>
+              </a:rPr>
+              <a:t> </a:t>
+            </a:r>
+            <a:r>
+              <a:rPr lang="en-US" sz="975" b="0" i="0" u="none" strike="noStrike" cap="none" dirty="0" err="1">
+                <a:solidFill>
+                  <a:srgbClr val="475569"/>
+                </a:solidFill>
+                <a:latin typeface="Inter"/>
+                <a:ea typeface="Inter"/>
+                <a:cs typeface="Inter"/>
+                <a:sym typeface="Inter"/>
+              </a:rPr>
+              <a:t>dokter</a:t>
+            </a:r>
+            <a:r>
+              <a:rPr lang="en-US" sz="975" b="0" i="0" u="none" strike="noStrike" cap="none" dirty="0">
+                <a:solidFill>
+                  <a:srgbClr val="475569"/>
+                </a:solidFill>
+                <a:latin typeface="Inter"/>
+                <a:ea typeface="Inter"/>
+                <a:cs typeface="Inter"/>
+                <a:sym typeface="Inter"/>
+              </a:rPr>
+              <a:t>, dan </a:t>
+            </a:r>
+            <a:r>
+              <a:rPr lang="en-US" sz="975" b="0" i="0" u="none" strike="noStrike" cap="none" dirty="0" err="1">
+                <a:solidFill>
+                  <a:srgbClr val="475569"/>
+                </a:solidFill>
+                <a:latin typeface="Inter"/>
+                <a:ea typeface="Inter"/>
+                <a:cs typeface="Inter"/>
+                <a:sym typeface="Inter"/>
+              </a:rPr>
+              <a:t>memitigasi</a:t>
+            </a:r>
+            <a:r>
+              <a:rPr lang="en-US" sz="975" b="0" i="0" u="none" strike="noStrike" cap="none" dirty="0">
+                <a:solidFill>
+                  <a:srgbClr val="475569"/>
+                </a:solidFill>
+                <a:latin typeface="Inter"/>
+                <a:ea typeface="Inter"/>
+                <a:cs typeface="Inter"/>
+                <a:sym typeface="Inter"/>
+              </a:rPr>
+              <a:t> </a:t>
+            </a:r>
+            <a:r>
+              <a:rPr lang="en-US" sz="975" b="0" i="0" u="none" strike="noStrike" cap="none" dirty="0" err="1">
+                <a:solidFill>
+                  <a:srgbClr val="475569"/>
+                </a:solidFill>
+                <a:latin typeface="Inter"/>
+                <a:ea typeface="Inter"/>
+                <a:cs typeface="Inter"/>
+                <a:sym typeface="Inter"/>
+              </a:rPr>
+              <a:t>manipulasi</a:t>
+            </a:r>
+            <a:r>
+              <a:rPr lang="en-US" sz="975" b="0" i="0" u="none" strike="noStrike" cap="none" dirty="0">
+                <a:solidFill>
+                  <a:srgbClr val="475569"/>
+                </a:solidFill>
+                <a:latin typeface="Inter"/>
+                <a:ea typeface="Inter"/>
+                <a:cs typeface="Inter"/>
+                <a:sym typeface="Inter"/>
+              </a:rPr>
+              <a:t>/</a:t>
+            </a:r>
+            <a:r>
+              <a:rPr lang="en-US" sz="975" b="0" i="0" u="none" strike="noStrike" cap="none" dirty="0" err="1">
+                <a:solidFill>
+                  <a:srgbClr val="475569"/>
+                </a:solidFill>
+                <a:latin typeface="Inter"/>
+                <a:ea typeface="Inter"/>
+                <a:cs typeface="Inter"/>
+                <a:sym typeface="Inter"/>
+              </a:rPr>
+              <a:t>kebocoran</a:t>
+            </a:r>
+            <a:r>
+              <a:rPr lang="en-US" sz="975" b="0" i="0" u="none" strike="noStrike" cap="none" dirty="0">
+                <a:solidFill>
+                  <a:srgbClr val="475569"/>
+                </a:solidFill>
+                <a:latin typeface="Inter"/>
+                <a:ea typeface="Inter"/>
+                <a:cs typeface="Inter"/>
+                <a:sym typeface="Inter"/>
+              </a:rPr>
+              <a:t> </a:t>
+            </a:r>
+            <a:r>
+              <a:rPr lang="en-US" sz="975" b="0" i="0" u="none" strike="noStrike" cap="none" dirty="0" err="1">
+                <a:solidFill>
+                  <a:srgbClr val="475569"/>
+                </a:solidFill>
+                <a:latin typeface="Inter"/>
+                <a:ea typeface="Inter"/>
+                <a:cs typeface="Inter"/>
+                <a:sym typeface="Inter"/>
+              </a:rPr>
+              <a:t>berkas</a:t>
+            </a:r>
+            <a:r>
+              <a:rPr lang="en-US" sz="975" b="0" i="0" u="none" strike="noStrike" cap="none" dirty="0">
+                <a:solidFill>
+                  <a:srgbClr val="475569"/>
+                </a:solidFill>
+                <a:latin typeface="Inter"/>
+                <a:ea typeface="Inter"/>
+                <a:cs typeface="Inter"/>
+                <a:sym typeface="Inter"/>
+              </a:rPr>
+              <a:t> </a:t>
+            </a:r>
+            <a:r>
+              <a:rPr lang="en-US" sz="975" b="0" i="0" u="none" strike="noStrike" cap="none" dirty="0" err="1">
+                <a:solidFill>
+                  <a:srgbClr val="475569"/>
+                </a:solidFill>
+                <a:latin typeface="Inter"/>
+                <a:ea typeface="Inter"/>
+                <a:cs typeface="Inter"/>
+                <a:sym typeface="Inter"/>
+              </a:rPr>
+              <a:t>resep</a:t>
+            </a:r>
+            <a:r>
+              <a:rPr lang="en-US" sz="975" b="0" i="0" u="none" strike="noStrike" cap="none" dirty="0">
+                <a:solidFill>
+                  <a:srgbClr val="475569"/>
+                </a:solidFill>
+                <a:latin typeface="Inter"/>
+                <a:ea typeface="Inter"/>
+                <a:cs typeface="Inter"/>
+                <a:sym typeface="Inter"/>
+              </a:rPr>
+              <a:t> </a:t>
+            </a:r>
+            <a:r>
+              <a:rPr lang="en-US" sz="975" b="0" i="0" u="none" strike="noStrike" cap="none" dirty="0" err="1">
+                <a:solidFill>
+                  <a:srgbClr val="475569"/>
+                </a:solidFill>
+                <a:latin typeface="Inter"/>
+                <a:ea typeface="Inter"/>
+                <a:cs typeface="Inter"/>
+                <a:sym typeface="Inter"/>
+              </a:rPr>
+              <a:t>kertas</a:t>
+            </a:r>
+            <a:r>
+              <a:rPr lang="en-US" sz="975" b="0" i="0" u="none" strike="noStrike" cap="none" dirty="0">
+                <a:solidFill>
+                  <a:srgbClr val="475569"/>
+                </a:solidFill>
+                <a:latin typeface="Inter"/>
+                <a:ea typeface="Inter"/>
+                <a:cs typeface="Inter"/>
+                <a:sym typeface="Inter"/>
+              </a:rPr>
+              <a:t> </a:t>
+            </a:r>
+            <a:r>
+              <a:rPr lang="en-US" sz="975" b="0" i="0" u="none" strike="noStrike" cap="none" dirty="0" err="1">
+                <a:solidFill>
+                  <a:srgbClr val="475569"/>
+                </a:solidFill>
+                <a:latin typeface="Inter"/>
+                <a:ea typeface="Inter"/>
+                <a:cs typeface="Inter"/>
+                <a:sym typeface="Inter"/>
+              </a:rPr>
+              <a:t>fisik</a:t>
+            </a:r>
+            <a:r>
+              <a:rPr lang="en-US" sz="975" b="0" i="0" u="none" strike="noStrike" cap="none" dirty="0">
+                <a:solidFill>
+                  <a:srgbClr val="475569"/>
+                </a:solidFill>
+                <a:latin typeface="Inter"/>
+                <a:ea typeface="Inter"/>
+                <a:cs typeface="Inter"/>
+                <a:sym typeface="Inter"/>
+              </a:rPr>
+              <a:t>.</a:t>
+            </a:r>
+            <a:endParaRPr dirty="0"/>
           </a:p>
         </p:txBody>
       </p:sp>

--- a/MediBook API Presentation.pptx
+++ b/MediBook API Presentation.pptx
@@ -1199,1489 +1199,6 @@
           </a:bodyPr>
           <a:lstStyle/>
           <a:p>
-            <a:r>
-              <a:rPr lang="en-ID" sz="1100" b="0" i="0" u="none" strike="noStrike" cap="none" dirty="0" err="1">
-                <a:solidFill>
-                  <a:srgbClr val="000000"/>
-                </a:solidFill>
-                <a:effectLst/>
-                <a:latin typeface="Arial"/>
-                <a:ea typeface="Arial"/>
-                <a:cs typeface="Arial"/>
-                <a:sym typeface="Arial"/>
-              </a:rPr>
-              <a:t>Sebelum</a:t>
-            </a:r>
-            <a:r>
-              <a:rPr lang="en-ID" sz="1100" b="0" i="0" u="none" strike="noStrike" cap="none" dirty="0">
-                <a:solidFill>
-                  <a:srgbClr val="000000"/>
-                </a:solidFill>
-                <a:effectLst/>
-                <a:latin typeface="Arial"/>
-                <a:ea typeface="Arial"/>
-                <a:cs typeface="Arial"/>
-                <a:sym typeface="Arial"/>
-              </a:rPr>
-              <a:t> </a:t>
-            </a:r>
-            <a:r>
-              <a:rPr lang="en-ID" sz="1100" b="0" i="0" u="none" strike="noStrike" cap="none" dirty="0" err="1">
-                <a:solidFill>
-                  <a:srgbClr val="000000"/>
-                </a:solidFill>
-                <a:effectLst/>
-                <a:latin typeface="Arial"/>
-                <a:ea typeface="Arial"/>
-                <a:cs typeface="Arial"/>
-                <a:sym typeface="Arial"/>
-              </a:rPr>
-              <a:t>mengerjakan</a:t>
-            </a:r>
-            <a:r>
-              <a:rPr lang="en-ID" sz="1100" b="0" i="0" u="none" strike="noStrike" cap="none" dirty="0">
-                <a:solidFill>
-                  <a:srgbClr val="000000"/>
-                </a:solidFill>
-                <a:effectLst/>
-                <a:latin typeface="Arial"/>
-                <a:ea typeface="Arial"/>
-                <a:cs typeface="Arial"/>
-                <a:sym typeface="Arial"/>
-              </a:rPr>
-              <a:t> </a:t>
-            </a:r>
-            <a:r>
-              <a:rPr lang="en-ID" sz="1100" b="0" i="0" u="none" strike="noStrike" cap="none" dirty="0" err="1">
-                <a:solidFill>
-                  <a:srgbClr val="000000"/>
-                </a:solidFill>
-                <a:effectLst/>
-                <a:latin typeface="Arial"/>
-                <a:ea typeface="Arial"/>
-                <a:cs typeface="Arial"/>
-                <a:sym typeface="Arial"/>
-              </a:rPr>
-              <a:t>proyek</a:t>
-            </a:r>
-            <a:r>
-              <a:rPr lang="en-ID" sz="1100" b="0" i="0" u="none" strike="noStrike" cap="none" dirty="0">
-                <a:solidFill>
-                  <a:srgbClr val="000000"/>
-                </a:solidFill>
-                <a:effectLst/>
-                <a:latin typeface="Arial"/>
-                <a:ea typeface="Arial"/>
-                <a:cs typeface="Arial"/>
-                <a:sym typeface="Arial"/>
-              </a:rPr>
-              <a:t> final </a:t>
-            </a:r>
-            <a:r>
-              <a:rPr lang="en-ID" sz="1100" b="0" i="0" u="none" strike="noStrike" cap="none" dirty="0" err="1">
-                <a:solidFill>
-                  <a:srgbClr val="000000"/>
-                </a:solidFill>
-                <a:effectLst/>
-                <a:latin typeface="Arial"/>
-                <a:ea typeface="Arial"/>
-                <a:cs typeface="Arial"/>
-                <a:sym typeface="Arial"/>
-              </a:rPr>
-              <a:t>ini</a:t>
-            </a:r>
-            <a:r>
-              <a:rPr lang="en-ID" sz="1100" b="0" i="0" u="none" strike="noStrike" cap="none" dirty="0">
-                <a:solidFill>
-                  <a:srgbClr val="000000"/>
-                </a:solidFill>
-                <a:effectLst/>
-                <a:latin typeface="Arial"/>
-                <a:ea typeface="Arial"/>
-                <a:cs typeface="Arial"/>
-                <a:sym typeface="Arial"/>
-              </a:rPr>
-              <a:t>, </a:t>
-            </a:r>
-            <a:r>
-              <a:rPr lang="en-ID" sz="1100" b="0" i="0" u="none" strike="noStrike" cap="none" dirty="0" err="1">
-                <a:solidFill>
-                  <a:srgbClr val="000000"/>
-                </a:solidFill>
-                <a:effectLst/>
-                <a:latin typeface="Arial"/>
-                <a:ea typeface="Arial"/>
-                <a:cs typeface="Arial"/>
-                <a:sym typeface="Arial"/>
-              </a:rPr>
-              <a:t>saya</a:t>
-            </a:r>
-            <a:r>
-              <a:rPr lang="en-ID" sz="1100" b="0" i="0" u="none" strike="noStrike" cap="none" dirty="0">
-                <a:solidFill>
-                  <a:srgbClr val="000000"/>
-                </a:solidFill>
-                <a:effectLst/>
-                <a:latin typeface="Arial"/>
-                <a:ea typeface="Arial"/>
-                <a:cs typeface="Arial"/>
-                <a:sym typeface="Arial"/>
-              </a:rPr>
-              <a:t> </a:t>
-            </a:r>
-            <a:r>
-              <a:rPr lang="en-ID" sz="1100" b="0" i="0" u="none" strike="noStrike" cap="none" dirty="0" err="1">
-                <a:solidFill>
-                  <a:srgbClr val="000000"/>
-                </a:solidFill>
-                <a:effectLst/>
-                <a:latin typeface="Arial"/>
-                <a:ea typeface="Arial"/>
-                <a:cs typeface="Arial"/>
-                <a:sym typeface="Arial"/>
-              </a:rPr>
-              <a:t>telah</a:t>
-            </a:r>
-            <a:r>
-              <a:rPr lang="en-ID" sz="1100" b="0" i="0" u="none" strike="noStrike" cap="none" dirty="0">
-                <a:solidFill>
-                  <a:srgbClr val="000000"/>
-                </a:solidFill>
-                <a:effectLst/>
-                <a:latin typeface="Arial"/>
-                <a:ea typeface="Arial"/>
-                <a:cs typeface="Arial"/>
-                <a:sym typeface="Arial"/>
-              </a:rPr>
-              <a:t> </a:t>
-            </a:r>
-            <a:r>
-              <a:rPr lang="en-ID" sz="1100" b="0" i="0" u="none" strike="noStrike" cap="none" dirty="0" err="1">
-                <a:solidFill>
-                  <a:srgbClr val="000000"/>
-                </a:solidFill>
-                <a:effectLst/>
-                <a:latin typeface="Arial"/>
-                <a:ea typeface="Arial"/>
-                <a:cs typeface="Arial"/>
-                <a:sym typeface="Arial"/>
-              </a:rPr>
-              <a:t>merampungkan</a:t>
-            </a:r>
-            <a:r>
-              <a:rPr lang="en-ID" sz="1100" b="0" i="0" u="none" strike="noStrike" cap="none" dirty="0">
-                <a:solidFill>
-                  <a:srgbClr val="000000"/>
-                </a:solidFill>
-                <a:effectLst/>
-                <a:latin typeface="Arial"/>
-                <a:ea typeface="Arial"/>
-                <a:cs typeface="Arial"/>
-                <a:sym typeface="Arial"/>
-              </a:rPr>
-              <a:t> </a:t>
-            </a:r>
-            <a:r>
-              <a:rPr lang="en-ID" sz="1100" b="0" i="0" u="none" strike="noStrike" cap="none" dirty="0" err="1">
-                <a:solidFill>
-                  <a:srgbClr val="000000"/>
-                </a:solidFill>
-                <a:effectLst/>
-                <a:latin typeface="Arial"/>
-                <a:ea typeface="Arial"/>
-                <a:cs typeface="Arial"/>
-                <a:sym typeface="Arial"/>
-              </a:rPr>
-              <a:t>tiga</a:t>
-            </a:r>
-            <a:r>
-              <a:rPr lang="en-ID" sz="1100" b="0" i="0" u="none" strike="noStrike" cap="none" dirty="0">
-                <a:solidFill>
-                  <a:srgbClr val="000000"/>
-                </a:solidFill>
-                <a:effectLst/>
-                <a:latin typeface="Arial"/>
-                <a:ea typeface="Arial"/>
-                <a:cs typeface="Arial"/>
-                <a:sym typeface="Arial"/>
-              </a:rPr>
-              <a:t> </a:t>
-            </a:r>
-            <a:r>
-              <a:rPr lang="en-ID" sz="1100" b="0" i="0" u="none" strike="noStrike" cap="none" dirty="0" err="1">
-                <a:solidFill>
-                  <a:srgbClr val="000000"/>
-                </a:solidFill>
-                <a:effectLst/>
-                <a:latin typeface="Arial"/>
-                <a:ea typeface="Arial"/>
-                <a:cs typeface="Arial"/>
-                <a:sym typeface="Arial"/>
-              </a:rPr>
-              <a:t>portofolio</a:t>
-            </a:r>
-            <a:r>
-              <a:rPr lang="en-ID" sz="1100" b="0" i="0" u="none" strike="noStrike" cap="none" dirty="0">
-                <a:solidFill>
-                  <a:srgbClr val="000000"/>
-                </a:solidFill>
-                <a:effectLst/>
-                <a:latin typeface="Arial"/>
-                <a:ea typeface="Arial"/>
-                <a:cs typeface="Arial"/>
-                <a:sym typeface="Arial"/>
-              </a:rPr>
-              <a:t> </a:t>
-            </a:r>
-            <a:r>
-              <a:rPr lang="en-ID" sz="1100" b="0" i="0" u="none" strike="noStrike" cap="none" dirty="0" err="1">
-                <a:solidFill>
-                  <a:srgbClr val="000000"/>
-                </a:solidFill>
-                <a:effectLst/>
-                <a:latin typeface="Arial"/>
-                <a:ea typeface="Arial"/>
-                <a:cs typeface="Arial"/>
-                <a:sym typeface="Arial"/>
-              </a:rPr>
-              <a:t>utama</a:t>
-            </a:r>
-            <a:r>
-              <a:rPr lang="en-ID" sz="1100" b="0" i="0" u="none" strike="noStrike" cap="none" dirty="0">
-                <a:solidFill>
-                  <a:srgbClr val="000000"/>
-                </a:solidFill>
-                <a:effectLst/>
-                <a:latin typeface="Arial"/>
-                <a:ea typeface="Arial"/>
-                <a:cs typeface="Arial"/>
-                <a:sym typeface="Arial"/>
-              </a:rPr>
-              <a:t>. </a:t>
-            </a:r>
-            <a:r>
-              <a:rPr lang="en-ID" sz="1100" b="0" i="0" u="none" strike="noStrike" cap="none" dirty="0" err="1">
-                <a:solidFill>
-                  <a:srgbClr val="000000"/>
-                </a:solidFill>
-                <a:effectLst/>
-                <a:latin typeface="Arial"/>
-                <a:ea typeface="Arial"/>
-                <a:cs typeface="Arial"/>
-                <a:sym typeface="Arial"/>
-              </a:rPr>
-              <a:t>Pertama</a:t>
-            </a:r>
-            <a:r>
-              <a:rPr lang="en-ID" sz="1100" b="0" i="0" u="none" strike="noStrike" cap="none" dirty="0">
-                <a:solidFill>
-                  <a:srgbClr val="000000"/>
-                </a:solidFill>
-                <a:effectLst/>
-                <a:latin typeface="Arial"/>
-                <a:ea typeface="Arial"/>
-                <a:cs typeface="Arial"/>
-                <a:sym typeface="Arial"/>
-              </a:rPr>
-              <a:t>, </a:t>
-            </a:r>
-            <a:r>
-              <a:rPr lang="en-ID" sz="1100" b="1" i="0" u="none" strike="noStrike" cap="none" dirty="0">
-                <a:solidFill>
-                  <a:srgbClr val="000000"/>
-                </a:solidFill>
-                <a:effectLst/>
-                <a:latin typeface="Arial"/>
-                <a:ea typeface="Arial"/>
-                <a:cs typeface="Arial"/>
-                <a:sym typeface="Arial"/>
-              </a:rPr>
-              <a:t>Wallet Service API</a:t>
-            </a:r>
-            <a:r>
-              <a:rPr lang="en-ID" sz="1100" b="0" i="0" u="none" strike="noStrike" cap="none" dirty="0">
-                <a:solidFill>
-                  <a:srgbClr val="000000"/>
-                </a:solidFill>
-                <a:effectLst/>
-                <a:latin typeface="Arial"/>
-                <a:ea typeface="Arial"/>
-                <a:cs typeface="Arial"/>
-                <a:sym typeface="Arial"/>
-              </a:rPr>
-              <a:t>, di mana </a:t>
-            </a:r>
-            <a:r>
-              <a:rPr lang="en-ID" sz="1100" b="0" i="0" u="none" strike="noStrike" cap="none" dirty="0" err="1">
-                <a:solidFill>
-                  <a:srgbClr val="000000"/>
-                </a:solidFill>
-                <a:effectLst/>
-                <a:latin typeface="Arial"/>
-                <a:ea typeface="Arial"/>
-                <a:cs typeface="Arial"/>
-                <a:sym typeface="Arial"/>
-              </a:rPr>
-              <a:t>saya</a:t>
-            </a:r>
-            <a:r>
-              <a:rPr lang="en-ID" sz="1100" b="0" i="0" u="none" strike="noStrike" cap="none" dirty="0">
-                <a:solidFill>
-                  <a:srgbClr val="000000"/>
-                </a:solidFill>
-                <a:effectLst/>
-                <a:latin typeface="Arial"/>
-                <a:ea typeface="Arial"/>
-                <a:cs typeface="Arial"/>
-                <a:sym typeface="Arial"/>
-              </a:rPr>
-              <a:t> </a:t>
-            </a:r>
-            <a:r>
-              <a:rPr lang="en-ID" sz="1100" b="0" i="0" u="none" strike="noStrike" cap="none" dirty="0" err="1">
-                <a:solidFill>
-                  <a:srgbClr val="000000"/>
-                </a:solidFill>
-                <a:effectLst/>
-                <a:latin typeface="Arial"/>
-                <a:ea typeface="Arial"/>
-                <a:cs typeface="Arial"/>
-                <a:sym typeface="Arial"/>
-              </a:rPr>
-              <a:t>belajar</a:t>
-            </a:r>
-            <a:r>
-              <a:rPr lang="en-ID" sz="1100" b="0" i="0" u="none" strike="noStrike" cap="none" dirty="0">
-                <a:solidFill>
-                  <a:srgbClr val="000000"/>
-                </a:solidFill>
-                <a:effectLst/>
-                <a:latin typeface="Arial"/>
-                <a:ea typeface="Arial"/>
-                <a:cs typeface="Arial"/>
-                <a:sym typeface="Arial"/>
-              </a:rPr>
-              <a:t> </a:t>
-            </a:r>
-            <a:r>
-              <a:rPr lang="en-ID" sz="1100" b="0" i="0" u="none" strike="noStrike" cap="none" dirty="0" err="1">
-                <a:solidFill>
-                  <a:srgbClr val="000000"/>
-                </a:solidFill>
-                <a:effectLst/>
-                <a:latin typeface="Arial"/>
-                <a:ea typeface="Arial"/>
-                <a:cs typeface="Arial"/>
-                <a:sym typeface="Arial"/>
-              </a:rPr>
-              <a:t>merancang</a:t>
-            </a:r>
-            <a:r>
-              <a:rPr lang="en-ID" sz="1100" b="0" i="0" u="none" strike="noStrike" cap="none" dirty="0">
-                <a:solidFill>
-                  <a:srgbClr val="000000"/>
-                </a:solidFill>
-                <a:effectLst/>
-                <a:latin typeface="Arial"/>
-                <a:ea typeface="Arial"/>
-                <a:cs typeface="Arial"/>
-                <a:sym typeface="Arial"/>
-              </a:rPr>
-              <a:t> </a:t>
-            </a:r>
-            <a:r>
-              <a:rPr lang="en-ID" sz="1100" b="0" i="0" u="none" strike="noStrike" cap="none" dirty="0" err="1">
-                <a:solidFill>
-                  <a:srgbClr val="000000"/>
-                </a:solidFill>
-                <a:effectLst/>
-                <a:latin typeface="Arial"/>
-                <a:ea typeface="Arial"/>
-                <a:cs typeface="Arial"/>
-                <a:sym typeface="Arial"/>
-              </a:rPr>
-              <a:t>arsitektur</a:t>
-            </a:r>
-            <a:r>
-              <a:rPr lang="en-ID" sz="1100" b="0" i="0" u="none" strike="noStrike" cap="none" dirty="0">
-                <a:solidFill>
-                  <a:srgbClr val="000000"/>
-                </a:solidFill>
-                <a:effectLst/>
-                <a:latin typeface="Arial"/>
-                <a:ea typeface="Arial"/>
-                <a:cs typeface="Arial"/>
-                <a:sym typeface="Arial"/>
-              </a:rPr>
-              <a:t> </a:t>
-            </a:r>
-            <a:r>
-              <a:rPr lang="en-ID" sz="1100" b="0" i="0" u="none" strike="noStrike" cap="none" dirty="0" err="1">
-                <a:solidFill>
-                  <a:srgbClr val="000000"/>
-                </a:solidFill>
-                <a:effectLst/>
-                <a:latin typeface="Arial"/>
-                <a:ea typeface="Arial"/>
-                <a:cs typeface="Arial"/>
-                <a:sym typeface="Arial"/>
-              </a:rPr>
-              <a:t>transaksi</a:t>
-            </a:r>
-            <a:r>
-              <a:rPr lang="en-ID" sz="1100" b="0" i="0" u="none" strike="noStrike" cap="none" dirty="0">
-                <a:solidFill>
-                  <a:srgbClr val="000000"/>
-                </a:solidFill>
-                <a:effectLst/>
-                <a:latin typeface="Arial"/>
-                <a:ea typeface="Arial"/>
-                <a:cs typeface="Arial"/>
-                <a:sym typeface="Arial"/>
-              </a:rPr>
-              <a:t> </a:t>
-            </a:r>
-            <a:r>
-              <a:rPr lang="en-ID" sz="1100" b="0" i="0" u="none" strike="noStrike" cap="none" dirty="0" err="1">
-                <a:solidFill>
-                  <a:srgbClr val="000000"/>
-                </a:solidFill>
-                <a:effectLst/>
-                <a:latin typeface="Arial"/>
-                <a:ea typeface="Arial"/>
-                <a:cs typeface="Arial"/>
-                <a:sym typeface="Arial"/>
-              </a:rPr>
-              <a:t>finansial</a:t>
-            </a:r>
-            <a:r>
-              <a:rPr lang="en-ID" sz="1100" b="0" i="0" u="none" strike="noStrike" cap="none" dirty="0">
-                <a:solidFill>
-                  <a:srgbClr val="000000"/>
-                </a:solidFill>
-                <a:effectLst/>
-                <a:latin typeface="Arial"/>
-                <a:ea typeface="Arial"/>
-                <a:cs typeface="Arial"/>
-                <a:sym typeface="Arial"/>
-              </a:rPr>
-              <a:t> digital dan </a:t>
-            </a:r>
-            <a:r>
-              <a:rPr lang="en-ID" sz="1100" b="0" i="0" u="none" strike="noStrike" cap="none" dirty="0" err="1">
-                <a:solidFill>
-                  <a:srgbClr val="000000"/>
-                </a:solidFill>
-                <a:effectLst/>
-                <a:latin typeface="Arial"/>
-                <a:ea typeface="Arial"/>
-                <a:cs typeface="Arial"/>
-                <a:sym typeface="Arial"/>
-              </a:rPr>
-              <a:t>keamanan</a:t>
-            </a:r>
-            <a:r>
-              <a:rPr lang="en-ID" sz="1100" b="0" i="0" u="none" strike="noStrike" cap="none" dirty="0">
-                <a:solidFill>
-                  <a:srgbClr val="000000"/>
-                </a:solidFill>
-                <a:effectLst/>
-                <a:latin typeface="Arial"/>
-                <a:ea typeface="Arial"/>
-                <a:cs typeface="Arial"/>
-                <a:sym typeface="Arial"/>
-              </a:rPr>
-              <a:t> 'idempotency'. </a:t>
-            </a:r>
-            <a:r>
-              <a:rPr lang="en-ID" sz="1100" b="0" i="0" u="none" strike="noStrike" cap="none" dirty="0" err="1">
-                <a:solidFill>
-                  <a:srgbClr val="000000"/>
-                </a:solidFill>
-                <a:effectLst/>
-                <a:latin typeface="Arial"/>
-                <a:ea typeface="Arial"/>
-                <a:cs typeface="Arial"/>
-                <a:sym typeface="Arial"/>
-              </a:rPr>
-              <a:t>Kedua</a:t>
-            </a:r>
-            <a:r>
-              <a:rPr lang="en-ID" sz="1100" b="0" i="0" u="none" strike="noStrike" cap="none" dirty="0">
-                <a:solidFill>
-                  <a:srgbClr val="000000"/>
-                </a:solidFill>
-                <a:effectLst/>
-                <a:latin typeface="Arial"/>
-                <a:ea typeface="Arial"/>
-                <a:cs typeface="Arial"/>
-                <a:sym typeface="Arial"/>
-              </a:rPr>
-              <a:t>, </a:t>
-            </a:r>
-            <a:r>
-              <a:rPr lang="en-ID" sz="1100" b="1" i="0" u="none" strike="noStrike" cap="none" dirty="0">
-                <a:solidFill>
-                  <a:srgbClr val="000000"/>
-                </a:solidFill>
-                <a:effectLst/>
-                <a:latin typeface="Arial"/>
-                <a:ea typeface="Arial"/>
-                <a:cs typeface="Arial"/>
-                <a:sym typeface="Arial"/>
-              </a:rPr>
-              <a:t>File Storage API</a:t>
-            </a:r>
-            <a:r>
-              <a:rPr lang="en-ID" sz="1100" b="0" i="0" u="none" strike="noStrike" cap="none" dirty="0">
-                <a:solidFill>
-                  <a:srgbClr val="000000"/>
-                </a:solidFill>
-                <a:effectLst/>
-                <a:latin typeface="Arial"/>
-                <a:ea typeface="Arial"/>
-                <a:cs typeface="Arial"/>
-                <a:sym typeface="Arial"/>
-              </a:rPr>
-              <a:t>, </a:t>
-            </a:r>
-            <a:r>
-              <a:rPr lang="en-ID" sz="1100" b="0" i="0" u="none" strike="noStrike" cap="none" dirty="0" err="1">
-                <a:solidFill>
-                  <a:srgbClr val="000000"/>
-                </a:solidFill>
-                <a:effectLst/>
-                <a:latin typeface="Arial"/>
-                <a:ea typeface="Arial"/>
-                <a:cs typeface="Arial"/>
-                <a:sym typeface="Arial"/>
-              </a:rPr>
-              <a:t>untuk</a:t>
-            </a:r>
-            <a:r>
-              <a:rPr lang="en-ID" sz="1100" b="0" i="0" u="none" strike="noStrike" cap="none" dirty="0">
-                <a:solidFill>
-                  <a:srgbClr val="000000"/>
-                </a:solidFill>
-                <a:effectLst/>
-                <a:latin typeface="Arial"/>
-                <a:ea typeface="Arial"/>
-                <a:cs typeface="Arial"/>
-                <a:sym typeface="Arial"/>
-              </a:rPr>
-              <a:t> </a:t>
-            </a:r>
-            <a:r>
-              <a:rPr lang="en-ID" sz="1100" b="0" i="0" u="none" strike="noStrike" cap="none" dirty="0" err="1">
-                <a:solidFill>
-                  <a:srgbClr val="000000"/>
-                </a:solidFill>
-                <a:effectLst/>
-                <a:latin typeface="Arial"/>
-                <a:ea typeface="Arial"/>
-                <a:cs typeface="Arial"/>
-                <a:sym typeface="Arial"/>
-              </a:rPr>
-              <a:t>mematangkan</a:t>
-            </a:r>
-            <a:r>
-              <a:rPr lang="en-ID" sz="1100" b="0" i="0" u="none" strike="noStrike" cap="none" dirty="0">
-                <a:solidFill>
-                  <a:srgbClr val="000000"/>
-                </a:solidFill>
-                <a:effectLst/>
-                <a:latin typeface="Arial"/>
-                <a:ea typeface="Arial"/>
-                <a:cs typeface="Arial"/>
-                <a:sym typeface="Arial"/>
-              </a:rPr>
-              <a:t> </a:t>
-            </a:r>
-            <a:r>
-              <a:rPr lang="en-ID" sz="1100" b="0" i="0" u="none" strike="noStrike" cap="none" dirty="0" err="1">
-                <a:solidFill>
-                  <a:srgbClr val="000000"/>
-                </a:solidFill>
-                <a:effectLst/>
-                <a:latin typeface="Arial"/>
-                <a:ea typeface="Arial"/>
-                <a:cs typeface="Arial"/>
-                <a:sym typeface="Arial"/>
-              </a:rPr>
-              <a:t>manajemen</a:t>
-            </a:r>
-            <a:r>
-              <a:rPr lang="en-ID" sz="1100" b="0" i="0" u="none" strike="noStrike" cap="none" dirty="0">
-                <a:solidFill>
-                  <a:srgbClr val="000000"/>
-                </a:solidFill>
-                <a:effectLst/>
-                <a:latin typeface="Arial"/>
-                <a:ea typeface="Arial"/>
-                <a:cs typeface="Arial"/>
-                <a:sym typeface="Arial"/>
-              </a:rPr>
-              <a:t> file dan </a:t>
-            </a:r>
-            <a:r>
-              <a:rPr lang="en-ID" sz="1100" b="0" i="0" u="none" strike="noStrike" cap="none" dirty="0" err="1">
-                <a:solidFill>
-                  <a:srgbClr val="000000"/>
-                </a:solidFill>
-                <a:effectLst/>
-                <a:latin typeface="Arial"/>
-                <a:ea typeface="Arial"/>
-                <a:cs typeface="Arial"/>
-                <a:sym typeface="Arial"/>
-              </a:rPr>
-              <a:t>otomatisasi</a:t>
-            </a:r>
-            <a:r>
-              <a:rPr lang="en-ID" sz="1100" b="0" i="0" u="none" strike="noStrike" cap="none" dirty="0">
-                <a:solidFill>
-                  <a:srgbClr val="000000"/>
-                </a:solidFill>
-                <a:effectLst/>
-                <a:latin typeface="Arial"/>
-                <a:ea typeface="Arial"/>
-                <a:cs typeface="Arial"/>
-                <a:sym typeface="Arial"/>
-              </a:rPr>
-              <a:t> </a:t>
-            </a:r>
-            <a:r>
-              <a:rPr lang="en-ID" sz="1100" b="0" i="1" u="none" strike="noStrike" cap="none" dirty="0">
-                <a:solidFill>
-                  <a:srgbClr val="000000"/>
-                </a:solidFill>
-                <a:effectLst/>
-                <a:latin typeface="Arial"/>
-                <a:ea typeface="Arial"/>
-                <a:cs typeface="Arial"/>
-                <a:sym typeface="Arial"/>
-              </a:rPr>
-              <a:t>deployment</a:t>
-            </a:r>
-            <a:r>
-              <a:rPr lang="en-ID" sz="1100" b="0" i="0" u="none" strike="noStrike" cap="none" dirty="0">
-                <a:solidFill>
-                  <a:srgbClr val="000000"/>
-                </a:solidFill>
-                <a:effectLst/>
-                <a:latin typeface="Arial"/>
-                <a:ea typeface="Arial"/>
-                <a:cs typeface="Arial"/>
-                <a:sym typeface="Arial"/>
-              </a:rPr>
-              <a:t> </a:t>
-            </a:r>
-            <a:r>
-              <a:rPr lang="en-ID" sz="1100" b="0" i="0" u="none" strike="noStrike" cap="none" dirty="0" err="1">
-                <a:solidFill>
-                  <a:srgbClr val="000000"/>
-                </a:solidFill>
-                <a:effectLst/>
-                <a:latin typeface="Arial"/>
-                <a:ea typeface="Arial"/>
-                <a:cs typeface="Arial"/>
-                <a:sym typeface="Arial"/>
-              </a:rPr>
-              <a:t>menggunakan</a:t>
-            </a:r>
-            <a:r>
-              <a:rPr lang="en-ID" sz="1100" b="0" i="0" u="none" strike="noStrike" cap="none" dirty="0">
-                <a:solidFill>
-                  <a:srgbClr val="000000"/>
-                </a:solidFill>
-                <a:effectLst/>
-                <a:latin typeface="Arial"/>
-                <a:ea typeface="Arial"/>
-                <a:cs typeface="Arial"/>
-                <a:sym typeface="Arial"/>
-              </a:rPr>
-              <a:t> Docker dan GitHub Actions.</a:t>
-            </a:r>
-          </a:p>
-          <a:p>
-            <a:r>
-              <a:rPr lang="en-ID" sz="1100" b="0" i="0" u="none" strike="noStrike" cap="none" dirty="0" err="1">
-                <a:solidFill>
-                  <a:srgbClr val="000000"/>
-                </a:solidFill>
-                <a:effectLst/>
-                <a:latin typeface="Arial"/>
-                <a:ea typeface="Arial"/>
-                <a:cs typeface="Arial"/>
-                <a:sym typeface="Arial"/>
-              </a:rPr>
-              <a:t>Puncaknya</a:t>
-            </a:r>
-            <a:r>
-              <a:rPr lang="en-ID" sz="1100" b="0" i="0" u="none" strike="noStrike" cap="none" dirty="0">
-                <a:solidFill>
-                  <a:srgbClr val="000000"/>
-                </a:solidFill>
-                <a:effectLst/>
-                <a:latin typeface="Arial"/>
-                <a:ea typeface="Arial"/>
-                <a:cs typeface="Arial"/>
-                <a:sym typeface="Arial"/>
-              </a:rPr>
-              <a:t>, </a:t>
-            </a:r>
-            <a:r>
-              <a:rPr lang="en-ID" sz="1100" b="0" i="0" u="none" strike="noStrike" cap="none" dirty="0" err="1">
-                <a:solidFill>
-                  <a:srgbClr val="000000"/>
-                </a:solidFill>
-                <a:effectLst/>
-                <a:latin typeface="Arial"/>
-                <a:ea typeface="Arial"/>
-                <a:cs typeface="Arial"/>
-                <a:sym typeface="Arial"/>
-              </a:rPr>
-              <a:t>saya</a:t>
-            </a:r>
-            <a:r>
-              <a:rPr lang="en-ID" sz="1100" b="0" i="0" u="none" strike="noStrike" cap="none" dirty="0">
-                <a:solidFill>
-                  <a:srgbClr val="000000"/>
-                </a:solidFill>
-                <a:effectLst/>
-                <a:latin typeface="Arial"/>
-                <a:ea typeface="Arial"/>
-                <a:cs typeface="Arial"/>
-                <a:sym typeface="Arial"/>
-              </a:rPr>
-              <a:t> </a:t>
-            </a:r>
-            <a:r>
-              <a:rPr lang="en-ID" sz="1100" b="0" i="0" u="none" strike="noStrike" cap="none" dirty="0" err="1">
-                <a:solidFill>
-                  <a:srgbClr val="000000"/>
-                </a:solidFill>
-                <a:effectLst/>
-                <a:latin typeface="Arial"/>
-                <a:ea typeface="Arial"/>
-                <a:cs typeface="Arial"/>
-                <a:sym typeface="Arial"/>
-              </a:rPr>
-              <a:t>mengembangkan</a:t>
-            </a:r>
-            <a:r>
-              <a:rPr lang="en-ID" sz="1100" b="0" i="0" u="none" strike="noStrike" cap="none" dirty="0">
-                <a:solidFill>
-                  <a:srgbClr val="000000"/>
-                </a:solidFill>
-                <a:effectLst/>
-                <a:latin typeface="Arial"/>
-                <a:ea typeface="Arial"/>
-                <a:cs typeface="Arial"/>
-                <a:sym typeface="Arial"/>
-              </a:rPr>
-              <a:t> </a:t>
-            </a:r>
-            <a:r>
-              <a:rPr lang="en-ID" sz="1100" b="1" i="0" u="none" strike="noStrike" cap="none" dirty="0" err="1">
-                <a:solidFill>
-                  <a:srgbClr val="000000"/>
-                </a:solidFill>
-                <a:effectLst/>
-                <a:latin typeface="Arial"/>
-                <a:ea typeface="Arial"/>
-                <a:cs typeface="Arial"/>
-                <a:sym typeface="Arial"/>
-              </a:rPr>
-              <a:t>CareLink</a:t>
-            </a:r>
-            <a:r>
-              <a:rPr lang="en-ID" sz="1100" b="0" i="0" u="none" strike="noStrike" cap="none" dirty="0">
-                <a:solidFill>
-                  <a:srgbClr val="000000"/>
-                </a:solidFill>
-                <a:effectLst/>
-                <a:latin typeface="Arial"/>
-                <a:ea typeface="Arial"/>
-                <a:cs typeface="Arial"/>
-                <a:sym typeface="Arial"/>
-              </a:rPr>
-              <a:t>, </a:t>
-            </a:r>
-            <a:r>
-              <a:rPr lang="en-ID" sz="1100" b="0" i="0" u="none" strike="noStrike" cap="none" dirty="0" err="1">
-                <a:solidFill>
-                  <a:srgbClr val="000000"/>
-                </a:solidFill>
-                <a:effectLst/>
-                <a:latin typeface="Arial"/>
-                <a:ea typeface="Arial"/>
-                <a:cs typeface="Arial"/>
-                <a:sym typeface="Arial"/>
-              </a:rPr>
-              <a:t>sebuah</a:t>
-            </a:r>
-            <a:r>
-              <a:rPr lang="en-ID" sz="1100" b="0" i="0" u="none" strike="noStrike" cap="none" dirty="0">
-                <a:solidFill>
-                  <a:srgbClr val="000000"/>
-                </a:solidFill>
-                <a:effectLst/>
-                <a:latin typeface="Arial"/>
-                <a:ea typeface="Arial"/>
-                <a:cs typeface="Arial"/>
-                <a:sym typeface="Arial"/>
-              </a:rPr>
-              <a:t> </a:t>
-            </a:r>
-            <a:r>
-              <a:rPr lang="en-ID" sz="1100" b="0" i="0" u="none" strike="noStrike" cap="none" dirty="0" err="1">
-                <a:solidFill>
-                  <a:srgbClr val="000000"/>
-                </a:solidFill>
-                <a:effectLst/>
-                <a:latin typeface="Arial"/>
-                <a:ea typeface="Arial"/>
-                <a:cs typeface="Arial"/>
-                <a:sym typeface="Arial"/>
-              </a:rPr>
-              <a:t>sistem</a:t>
-            </a:r>
-            <a:r>
-              <a:rPr lang="en-ID" sz="1100" b="0" i="0" u="none" strike="noStrike" cap="none" dirty="0">
-                <a:solidFill>
-                  <a:srgbClr val="000000"/>
-                </a:solidFill>
-                <a:effectLst/>
-                <a:latin typeface="Arial"/>
-                <a:ea typeface="Arial"/>
-                <a:cs typeface="Arial"/>
-                <a:sym typeface="Arial"/>
-              </a:rPr>
-              <a:t> </a:t>
-            </a:r>
-            <a:r>
-              <a:rPr lang="en-ID" sz="1100" b="0" i="0" u="none" strike="noStrike" cap="none" dirty="0" err="1">
-                <a:solidFill>
-                  <a:srgbClr val="000000"/>
-                </a:solidFill>
-                <a:effectLst/>
-                <a:latin typeface="Arial"/>
-                <a:ea typeface="Arial"/>
-                <a:cs typeface="Arial"/>
-                <a:sym typeface="Arial"/>
-              </a:rPr>
-              <a:t>peringatan</a:t>
-            </a:r>
-            <a:r>
-              <a:rPr lang="en-ID" sz="1100" b="0" i="0" u="none" strike="noStrike" cap="none" dirty="0">
-                <a:solidFill>
-                  <a:srgbClr val="000000"/>
-                </a:solidFill>
-                <a:effectLst/>
-                <a:latin typeface="Arial"/>
-                <a:ea typeface="Arial"/>
-                <a:cs typeface="Arial"/>
-                <a:sym typeface="Arial"/>
-              </a:rPr>
-              <a:t> </a:t>
-            </a:r>
-            <a:r>
-              <a:rPr lang="en-ID" sz="1100" b="0" i="0" u="none" strike="noStrike" cap="none" dirty="0" err="1">
-                <a:solidFill>
-                  <a:srgbClr val="000000"/>
-                </a:solidFill>
-                <a:effectLst/>
-                <a:latin typeface="Arial"/>
-                <a:ea typeface="Arial"/>
-                <a:cs typeface="Arial"/>
-                <a:sym typeface="Arial"/>
-              </a:rPr>
-              <a:t>darurat</a:t>
-            </a:r>
-            <a:r>
-              <a:rPr lang="en-ID" sz="1100" b="0" i="0" u="none" strike="noStrike" cap="none" dirty="0">
-                <a:solidFill>
-                  <a:srgbClr val="000000"/>
-                </a:solidFill>
-                <a:effectLst/>
-                <a:latin typeface="Arial"/>
-                <a:ea typeface="Arial"/>
-                <a:cs typeface="Arial"/>
-                <a:sym typeface="Arial"/>
-              </a:rPr>
-              <a:t> </a:t>
-            </a:r>
-            <a:r>
-              <a:rPr lang="en-ID" sz="1100" b="0" i="0" u="none" strike="noStrike" cap="none" dirty="0" err="1">
-                <a:solidFill>
-                  <a:srgbClr val="000000"/>
-                </a:solidFill>
-                <a:effectLst/>
-                <a:latin typeface="Arial"/>
-                <a:ea typeface="Arial"/>
-                <a:cs typeface="Arial"/>
-                <a:sym typeface="Arial"/>
-              </a:rPr>
-              <a:t>rumah</a:t>
-            </a:r>
-            <a:r>
-              <a:rPr lang="en-ID" sz="1100" b="0" i="0" u="none" strike="noStrike" cap="none" dirty="0">
-                <a:solidFill>
-                  <a:srgbClr val="000000"/>
-                </a:solidFill>
-                <a:effectLst/>
-                <a:latin typeface="Arial"/>
-                <a:ea typeface="Arial"/>
-                <a:cs typeface="Arial"/>
-                <a:sym typeface="Arial"/>
-              </a:rPr>
-              <a:t> </a:t>
-            </a:r>
-            <a:r>
-              <a:rPr lang="en-ID" sz="1100" b="0" i="0" u="none" strike="noStrike" cap="none" dirty="0" err="1">
-                <a:solidFill>
-                  <a:srgbClr val="000000"/>
-                </a:solidFill>
-                <a:effectLst/>
-                <a:latin typeface="Arial"/>
-                <a:ea typeface="Arial"/>
-                <a:cs typeface="Arial"/>
-                <a:sym typeface="Arial"/>
-              </a:rPr>
-              <a:t>sakit</a:t>
-            </a:r>
-            <a:r>
-              <a:rPr lang="en-ID" sz="1100" b="0" i="0" u="none" strike="noStrike" cap="none" dirty="0">
-                <a:solidFill>
-                  <a:srgbClr val="000000"/>
-                </a:solidFill>
-                <a:effectLst/>
-                <a:latin typeface="Arial"/>
-                <a:ea typeface="Arial"/>
-                <a:cs typeface="Arial"/>
-                <a:sym typeface="Arial"/>
-              </a:rPr>
-              <a:t> </a:t>
-            </a:r>
-            <a:r>
-              <a:rPr lang="en-ID" sz="1100" b="0" i="0" u="none" strike="noStrike" cap="none" dirty="0" err="1">
-                <a:solidFill>
-                  <a:srgbClr val="000000"/>
-                </a:solidFill>
-                <a:effectLst/>
-                <a:latin typeface="Arial"/>
-                <a:ea typeface="Arial"/>
-                <a:cs typeface="Arial"/>
-                <a:sym typeface="Arial"/>
-              </a:rPr>
-              <a:t>berskala</a:t>
-            </a:r>
-            <a:r>
-              <a:rPr lang="en-ID" sz="1100" b="0" i="0" u="none" strike="noStrike" cap="none" dirty="0">
-                <a:solidFill>
-                  <a:srgbClr val="000000"/>
-                </a:solidFill>
-                <a:effectLst/>
-                <a:latin typeface="Arial"/>
-                <a:ea typeface="Arial"/>
-                <a:cs typeface="Arial"/>
-                <a:sym typeface="Arial"/>
-              </a:rPr>
-              <a:t> Full-Stack yang </a:t>
-            </a:r>
-            <a:r>
-              <a:rPr lang="en-ID" sz="1100" b="0" i="0" u="none" strike="noStrike" cap="none" dirty="0" err="1">
-                <a:solidFill>
-                  <a:srgbClr val="000000"/>
-                </a:solidFill>
-                <a:effectLst/>
-                <a:latin typeface="Arial"/>
-                <a:ea typeface="Arial"/>
-                <a:cs typeface="Arial"/>
-                <a:sym typeface="Arial"/>
-              </a:rPr>
-              <a:t>mengintegrasikan</a:t>
-            </a:r>
-            <a:r>
-              <a:rPr lang="en-ID" sz="1100" b="0" i="0" u="none" strike="noStrike" cap="none" dirty="0">
-                <a:solidFill>
-                  <a:srgbClr val="000000"/>
-                </a:solidFill>
-                <a:effectLst/>
-                <a:latin typeface="Arial"/>
-                <a:ea typeface="Arial"/>
-                <a:cs typeface="Arial"/>
-                <a:sym typeface="Arial"/>
-              </a:rPr>
-              <a:t> Message Broker (RabbitMQ) dan In-Memory Cache (Redis). </a:t>
-            </a:r>
-            <a:r>
-              <a:rPr lang="en-ID" sz="1100" b="0" i="0" u="none" strike="noStrike" cap="none" dirty="0" err="1">
-                <a:solidFill>
-                  <a:srgbClr val="000000"/>
-                </a:solidFill>
-                <a:effectLst/>
-                <a:latin typeface="Arial"/>
-                <a:ea typeface="Arial"/>
-                <a:cs typeface="Arial"/>
-                <a:sym typeface="Arial"/>
-              </a:rPr>
-              <a:t>Bermodal</a:t>
-            </a:r>
-            <a:r>
-              <a:rPr lang="en-ID" sz="1100" b="0" i="0" u="none" strike="noStrike" cap="none" dirty="0">
-                <a:solidFill>
-                  <a:srgbClr val="000000"/>
-                </a:solidFill>
-                <a:effectLst/>
-                <a:latin typeface="Arial"/>
-                <a:ea typeface="Arial"/>
-                <a:cs typeface="Arial"/>
-                <a:sym typeface="Arial"/>
-              </a:rPr>
-              <a:t> jam terbang </a:t>
-            </a:r>
-            <a:r>
-              <a:rPr lang="en-ID" sz="1100" b="0" i="0" u="none" strike="noStrike" cap="none" dirty="0" err="1">
-                <a:solidFill>
-                  <a:srgbClr val="000000"/>
-                </a:solidFill>
-                <a:effectLst/>
-                <a:latin typeface="Arial"/>
-                <a:ea typeface="Arial"/>
-                <a:cs typeface="Arial"/>
-                <a:sym typeface="Arial"/>
-              </a:rPr>
-              <a:t>arsitektur</a:t>
-            </a:r>
-            <a:r>
-              <a:rPr lang="en-ID" sz="1100" b="0" i="0" u="none" strike="noStrike" cap="none" dirty="0">
-                <a:solidFill>
-                  <a:srgbClr val="000000"/>
-                </a:solidFill>
-                <a:effectLst/>
-                <a:latin typeface="Arial"/>
-                <a:ea typeface="Arial"/>
-                <a:cs typeface="Arial"/>
-                <a:sym typeface="Arial"/>
-              </a:rPr>
-              <a:t> </a:t>
-            </a:r>
-            <a:r>
-              <a:rPr lang="en-ID" sz="1100" b="0" i="0" u="none" strike="noStrike" cap="none" dirty="0" err="1">
-                <a:solidFill>
-                  <a:srgbClr val="000000"/>
-                </a:solidFill>
-                <a:effectLst/>
-                <a:latin typeface="Arial"/>
-                <a:ea typeface="Arial"/>
-                <a:cs typeface="Arial"/>
-                <a:sym typeface="Arial"/>
-              </a:rPr>
-              <a:t>tingkat</a:t>
-            </a:r>
-            <a:r>
-              <a:rPr lang="en-ID" sz="1100" b="0" i="0" u="none" strike="noStrike" cap="none" dirty="0">
-                <a:solidFill>
-                  <a:srgbClr val="000000"/>
-                </a:solidFill>
-                <a:effectLst/>
-                <a:latin typeface="Arial"/>
-                <a:ea typeface="Arial"/>
-                <a:cs typeface="Arial"/>
-                <a:sym typeface="Arial"/>
-              </a:rPr>
-              <a:t> </a:t>
-            </a:r>
-            <a:r>
-              <a:rPr lang="en-ID" sz="1100" b="0" i="0" u="none" strike="noStrike" cap="none" dirty="0" err="1">
-                <a:solidFill>
-                  <a:srgbClr val="000000"/>
-                </a:solidFill>
-                <a:effectLst/>
-                <a:latin typeface="Arial"/>
-                <a:ea typeface="Arial"/>
-                <a:cs typeface="Arial"/>
-                <a:sym typeface="Arial"/>
-              </a:rPr>
-              <a:t>lanjut</a:t>
-            </a:r>
-            <a:r>
-              <a:rPr lang="en-ID" sz="1100" b="0" i="0" u="none" strike="noStrike" cap="none" dirty="0">
-                <a:solidFill>
-                  <a:srgbClr val="000000"/>
-                </a:solidFill>
-                <a:effectLst/>
-                <a:latin typeface="Arial"/>
-                <a:ea typeface="Arial"/>
-                <a:cs typeface="Arial"/>
-                <a:sym typeface="Arial"/>
-              </a:rPr>
-              <a:t> </a:t>
-            </a:r>
-            <a:r>
-              <a:rPr lang="en-ID" sz="1100" b="0" i="0" u="none" strike="noStrike" cap="none" dirty="0" err="1">
-                <a:solidFill>
-                  <a:srgbClr val="000000"/>
-                </a:solidFill>
-                <a:effectLst/>
-                <a:latin typeface="Arial"/>
-                <a:ea typeface="Arial"/>
-                <a:cs typeface="Arial"/>
-                <a:sym typeface="Arial"/>
-              </a:rPr>
-              <a:t>dari</a:t>
-            </a:r>
-            <a:r>
-              <a:rPr lang="en-ID" sz="1100" b="0" i="0" u="none" strike="noStrike" cap="none" dirty="0">
-                <a:solidFill>
-                  <a:srgbClr val="000000"/>
-                </a:solidFill>
-                <a:effectLst/>
-                <a:latin typeface="Arial"/>
-                <a:ea typeface="Arial"/>
-                <a:cs typeface="Arial"/>
-                <a:sym typeface="Arial"/>
-              </a:rPr>
-              <a:t> </a:t>
-            </a:r>
-            <a:r>
-              <a:rPr lang="en-ID" sz="1100" b="0" i="0" u="none" strike="noStrike" cap="none" dirty="0" err="1">
-                <a:solidFill>
-                  <a:srgbClr val="000000"/>
-                </a:solidFill>
-                <a:effectLst/>
-                <a:latin typeface="Arial"/>
-                <a:ea typeface="Arial"/>
-                <a:cs typeface="Arial"/>
-                <a:sym typeface="Arial"/>
-              </a:rPr>
-              <a:t>ketiga</a:t>
-            </a:r>
-            <a:r>
-              <a:rPr lang="en-ID" sz="1100" b="0" i="0" u="none" strike="noStrike" cap="none" dirty="0">
-                <a:solidFill>
-                  <a:srgbClr val="000000"/>
-                </a:solidFill>
-                <a:effectLst/>
-                <a:latin typeface="Arial"/>
-                <a:ea typeface="Arial"/>
-                <a:cs typeface="Arial"/>
-                <a:sym typeface="Arial"/>
-              </a:rPr>
-              <a:t> </a:t>
-            </a:r>
-            <a:r>
-              <a:rPr lang="en-ID" sz="1100" b="0" i="0" u="none" strike="noStrike" cap="none" dirty="0" err="1">
-                <a:solidFill>
-                  <a:srgbClr val="000000"/>
-                </a:solidFill>
-                <a:effectLst/>
-                <a:latin typeface="Arial"/>
-                <a:ea typeface="Arial"/>
-                <a:cs typeface="Arial"/>
-                <a:sym typeface="Arial"/>
-              </a:rPr>
-              <a:t>proyek</a:t>
-            </a:r>
-            <a:r>
-              <a:rPr lang="en-ID" sz="1100" b="0" i="0" u="none" strike="noStrike" cap="none" dirty="0">
-                <a:solidFill>
-                  <a:srgbClr val="000000"/>
-                </a:solidFill>
-                <a:effectLst/>
-                <a:latin typeface="Arial"/>
-                <a:ea typeface="Arial"/>
-                <a:cs typeface="Arial"/>
-                <a:sym typeface="Arial"/>
-              </a:rPr>
-              <a:t> </a:t>
-            </a:r>
-            <a:r>
-              <a:rPr lang="en-ID" sz="1100" b="0" i="0" u="none" strike="noStrike" cap="none" dirty="0" err="1">
-                <a:solidFill>
-                  <a:srgbClr val="000000"/>
-                </a:solidFill>
-                <a:effectLst/>
-                <a:latin typeface="Arial"/>
-                <a:ea typeface="Arial"/>
-                <a:cs typeface="Arial"/>
-                <a:sym typeface="Arial"/>
-              </a:rPr>
-              <a:t>unggulan</a:t>
-            </a:r>
-            <a:r>
-              <a:rPr lang="en-ID" sz="1100" b="0" i="0" u="none" strike="noStrike" cap="none" dirty="0">
-                <a:solidFill>
-                  <a:srgbClr val="000000"/>
-                </a:solidFill>
-                <a:effectLst/>
-                <a:latin typeface="Arial"/>
-                <a:ea typeface="Arial"/>
-                <a:cs typeface="Arial"/>
-                <a:sym typeface="Arial"/>
-              </a:rPr>
-              <a:t> </a:t>
-            </a:r>
-            <a:r>
-              <a:rPr lang="en-ID" sz="1100" b="0" i="0" u="none" strike="noStrike" cap="none" dirty="0" err="1">
-                <a:solidFill>
-                  <a:srgbClr val="000000"/>
-                </a:solidFill>
-                <a:effectLst/>
-                <a:latin typeface="Arial"/>
-                <a:ea typeface="Arial"/>
-                <a:cs typeface="Arial"/>
-                <a:sym typeface="Arial"/>
-              </a:rPr>
-              <a:t>inilah</a:t>
-            </a:r>
-            <a:r>
-              <a:rPr lang="en-ID" sz="1100" b="0" i="0" u="none" strike="noStrike" cap="none" dirty="0">
-                <a:solidFill>
-                  <a:srgbClr val="000000"/>
-                </a:solidFill>
-                <a:effectLst/>
-                <a:latin typeface="Arial"/>
-                <a:ea typeface="Arial"/>
-                <a:cs typeface="Arial"/>
-                <a:sym typeface="Arial"/>
-              </a:rPr>
-              <a:t>, </a:t>
-            </a:r>
-            <a:r>
-              <a:rPr lang="en-ID" sz="1100" b="0" i="0" u="none" strike="noStrike" cap="none" dirty="0" err="1">
-                <a:solidFill>
-                  <a:srgbClr val="000000"/>
-                </a:solidFill>
-                <a:effectLst/>
-                <a:latin typeface="Arial"/>
-                <a:ea typeface="Arial"/>
-                <a:cs typeface="Arial"/>
-                <a:sym typeface="Arial"/>
-              </a:rPr>
-              <a:t>saya</a:t>
-            </a:r>
-            <a:r>
-              <a:rPr lang="en-ID" sz="1100" b="0" i="0" u="none" strike="noStrike" cap="none" dirty="0">
-                <a:solidFill>
-                  <a:srgbClr val="000000"/>
-                </a:solidFill>
-                <a:effectLst/>
-                <a:latin typeface="Arial"/>
-                <a:ea typeface="Arial"/>
-                <a:cs typeface="Arial"/>
-                <a:sym typeface="Arial"/>
-              </a:rPr>
-              <a:t> </a:t>
-            </a:r>
-            <a:r>
-              <a:rPr lang="en-ID" sz="1100" b="0" i="0" u="none" strike="noStrike" cap="none" dirty="0" err="1">
-                <a:solidFill>
-                  <a:srgbClr val="000000"/>
-                </a:solidFill>
-                <a:effectLst/>
-                <a:latin typeface="Arial"/>
-                <a:ea typeface="Arial"/>
-                <a:cs typeface="Arial"/>
-                <a:sym typeface="Arial"/>
-              </a:rPr>
-              <a:t>memiliki</a:t>
-            </a:r>
-            <a:r>
-              <a:rPr lang="en-ID" sz="1100" b="0" i="0" u="none" strike="noStrike" cap="none" dirty="0">
-                <a:solidFill>
-                  <a:srgbClr val="000000"/>
-                </a:solidFill>
-                <a:effectLst/>
-                <a:latin typeface="Arial"/>
-                <a:ea typeface="Arial"/>
-                <a:cs typeface="Arial"/>
-                <a:sym typeface="Arial"/>
-              </a:rPr>
-              <a:t> </a:t>
-            </a:r>
-            <a:r>
-              <a:rPr lang="en-ID" sz="1100" b="0" i="0" u="none" strike="noStrike" cap="none" dirty="0" err="1">
-                <a:solidFill>
-                  <a:srgbClr val="000000"/>
-                </a:solidFill>
-                <a:effectLst/>
-                <a:latin typeface="Arial"/>
-                <a:ea typeface="Arial"/>
-                <a:cs typeface="Arial"/>
-                <a:sym typeface="Arial"/>
-              </a:rPr>
-              <a:t>fondasi</a:t>
-            </a:r>
-            <a:r>
-              <a:rPr lang="en-ID" sz="1100" b="0" i="0" u="none" strike="noStrike" cap="none" dirty="0">
-                <a:solidFill>
-                  <a:srgbClr val="000000"/>
-                </a:solidFill>
-                <a:effectLst/>
-                <a:latin typeface="Arial"/>
-                <a:ea typeface="Arial"/>
-                <a:cs typeface="Arial"/>
-                <a:sym typeface="Arial"/>
-              </a:rPr>
-              <a:t> yang sangat </a:t>
-            </a:r>
-            <a:r>
-              <a:rPr lang="en-ID" sz="1100" b="0" i="0" u="none" strike="noStrike" cap="none" dirty="0" err="1">
-                <a:solidFill>
-                  <a:srgbClr val="000000"/>
-                </a:solidFill>
-                <a:effectLst/>
-                <a:latin typeface="Arial"/>
-                <a:ea typeface="Arial"/>
-                <a:cs typeface="Arial"/>
-                <a:sym typeface="Arial"/>
-              </a:rPr>
-              <a:t>matang</a:t>
-            </a:r>
-            <a:r>
-              <a:rPr lang="en-ID" sz="1100" b="0" i="0" u="none" strike="noStrike" cap="none" dirty="0">
-                <a:solidFill>
-                  <a:srgbClr val="000000"/>
-                </a:solidFill>
-                <a:effectLst/>
-                <a:latin typeface="Arial"/>
-                <a:ea typeface="Arial"/>
-                <a:cs typeface="Arial"/>
-                <a:sym typeface="Arial"/>
-              </a:rPr>
-              <a:t> </a:t>
-            </a:r>
-            <a:r>
-              <a:rPr lang="en-ID" sz="1100" b="0" i="0" u="none" strike="noStrike" cap="none" dirty="0" err="1">
-                <a:solidFill>
-                  <a:srgbClr val="000000"/>
-                </a:solidFill>
-                <a:effectLst/>
-                <a:latin typeface="Arial"/>
-                <a:ea typeface="Arial"/>
-                <a:cs typeface="Arial"/>
-                <a:sym typeface="Arial"/>
-              </a:rPr>
-              <a:t>untuk</a:t>
-            </a:r>
-            <a:r>
-              <a:rPr lang="en-ID" sz="1100" b="0" i="0" u="none" strike="noStrike" cap="none" dirty="0">
-                <a:solidFill>
-                  <a:srgbClr val="000000"/>
-                </a:solidFill>
-                <a:effectLst/>
-                <a:latin typeface="Arial"/>
-                <a:ea typeface="Arial"/>
-                <a:cs typeface="Arial"/>
-                <a:sym typeface="Arial"/>
-              </a:rPr>
-              <a:t> </a:t>
-            </a:r>
-            <a:r>
-              <a:rPr lang="en-ID" sz="1100" b="0" i="0" u="none" strike="noStrike" cap="none" dirty="0" err="1">
-                <a:solidFill>
-                  <a:srgbClr val="000000"/>
-                </a:solidFill>
-                <a:effectLst/>
-                <a:latin typeface="Arial"/>
-                <a:ea typeface="Arial"/>
-                <a:cs typeface="Arial"/>
-                <a:sym typeface="Arial"/>
-              </a:rPr>
-              <a:t>mengeksekusi</a:t>
-            </a:r>
-            <a:r>
-              <a:rPr lang="en-ID" sz="1100" b="0" i="0" u="none" strike="noStrike" cap="none" dirty="0">
-                <a:solidFill>
-                  <a:srgbClr val="000000"/>
-                </a:solidFill>
-                <a:effectLst/>
-                <a:latin typeface="Arial"/>
-                <a:ea typeface="Arial"/>
-                <a:cs typeface="Arial"/>
-                <a:sym typeface="Arial"/>
-              </a:rPr>
-              <a:t> Final Project </a:t>
-            </a:r>
-            <a:r>
-              <a:rPr lang="en-ID" sz="1100" b="0" i="0" u="none" strike="noStrike" cap="none" dirty="0" err="1">
-                <a:solidFill>
-                  <a:srgbClr val="000000"/>
-                </a:solidFill>
-                <a:effectLst/>
-                <a:latin typeface="Arial"/>
-                <a:ea typeface="Arial"/>
-                <a:cs typeface="Arial"/>
-                <a:sym typeface="Arial"/>
-              </a:rPr>
-              <a:t>saya</a:t>
-            </a:r>
-            <a:r>
-              <a:rPr lang="en-ID" sz="1100" b="0" i="0" u="none" strike="noStrike" cap="none" dirty="0">
-                <a:solidFill>
-                  <a:srgbClr val="000000"/>
-                </a:solidFill>
-                <a:effectLst/>
-                <a:latin typeface="Arial"/>
-                <a:ea typeface="Arial"/>
-                <a:cs typeface="Arial"/>
-                <a:sym typeface="Arial"/>
-              </a:rPr>
-              <a:t> </a:t>
-            </a:r>
-            <a:r>
-              <a:rPr lang="en-ID" sz="1100" b="0" i="0" u="none" strike="noStrike" cap="none" dirty="0" err="1">
-                <a:solidFill>
-                  <a:srgbClr val="000000"/>
-                </a:solidFill>
-                <a:effectLst/>
-                <a:latin typeface="Arial"/>
-                <a:ea typeface="Arial"/>
-                <a:cs typeface="Arial"/>
-                <a:sym typeface="Arial"/>
-              </a:rPr>
-              <a:t>hari</a:t>
-            </a:r>
-            <a:r>
-              <a:rPr lang="en-ID" sz="1100" b="0" i="0" u="none" strike="noStrike" cap="none" dirty="0">
-                <a:solidFill>
-                  <a:srgbClr val="000000"/>
-                </a:solidFill>
-                <a:effectLst/>
-                <a:latin typeface="Arial"/>
-                <a:ea typeface="Arial"/>
-                <a:cs typeface="Arial"/>
-                <a:sym typeface="Arial"/>
-              </a:rPr>
-              <a:t> </a:t>
-            </a:r>
-            <a:r>
-              <a:rPr lang="en-ID" sz="1100" b="0" i="0" u="none" strike="noStrike" cap="none" dirty="0" err="1">
-                <a:solidFill>
-                  <a:srgbClr val="000000"/>
-                </a:solidFill>
-                <a:effectLst/>
-                <a:latin typeface="Arial"/>
-                <a:ea typeface="Arial"/>
-                <a:cs typeface="Arial"/>
-                <a:sym typeface="Arial"/>
-              </a:rPr>
-              <a:t>ini</a:t>
-            </a:r>
-            <a:endParaRPr lang="en-ID" sz="1100" b="0" i="0" u="none" strike="noStrike" cap="none" dirty="0">
-              <a:solidFill>
-                <a:srgbClr val="000000"/>
-              </a:solidFill>
-              <a:effectLst/>
-              <a:latin typeface="Arial"/>
-              <a:ea typeface="Arial"/>
-              <a:cs typeface="Arial"/>
-              <a:sym typeface="Arial"/>
-            </a:endParaRPr>
-          </a:p>
-          <a:p>
             <a:pPr marL="0" lvl="0" indent="0" algn="l" rtl="0">
               <a:spcBef>
                 <a:spcPts val="0"/>
@@ -2691,7 +1208,7 @@
               </a:spcAft>
               <a:buNone/>
             </a:pPr>
-            <a:endParaRPr dirty="0"/>
+            <a:endParaRPr/>
           </a:p>
         </p:txBody>
       </p:sp>
@@ -2795,969 +1312,7 @@
               </a:spcAft>
               <a:buNone/>
             </a:pPr>
-            <a:r>
-              <a:rPr lang="en-ID" sz="1100" b="0" i="0" u="none" strike="noStrike" cap="none" dirty="0">
-                <a:solidFill>
-                  <a:srgbClr val="000000"/>
-                </a:solidFill>
-                <a:effectLst/>
-                <a:latin typeface="Arial"/>
-                <a:ea typeface="Arial"/>
-                <a:cs typeface="Arial"/>
-                <a:sym typeface="Arial"/>
-              </a:rPr>
-              <a:t>Final Project </a:t>
-            </a:r>
-            <a:r>
-              <a:rPr lang="en-ID" sz="1100" b="0" i="0" u="none" strike="noStrike" cap="none" dirty="0" err="1">
-                <a:solidFill>
-                  <a:srgbClr val="000000"/>
-                </a:solidFill>
-                <a:effectLst/>
-                <a:latin typeface="Arial"/>
-                <a:ea typeface="Arial"/>
-                <a:cs typeface="Arial"/>
-                <a:sym typeface="Arial"/>
-              </a:rPr>
-              <a:t>saya</a:t>
-            </a:r>
-            <a:r>
-              <a:rPr lang="en-ID" sz="1100" b="0" i="0" u="none" strike="noStrike" cap="none" dirty="0">
-                <a:solidFill>
-                  <a:srgbClr val="000000"/>
-                </a:solidFill>
-                <a:effectLst/>
-                <a:latin typeface="Arial"/>
-                <a:ea typeface="Arial"/>
-                <a:cs typeface="Arial"/>
-                <a:sym typeface="Arial"/>
-              </a:rPr>
-              <a:t> </a:t>
-            </a:r>
-            <a:r>
-              <a:rPr lang="en-ID" sz="1100" b="0" i="0" u="none" strike="noStrike" cap="none" dirty="0" err="1">
-                <a:solidFill>
-                  <a:srgbClr val="000000"/>
-                </a:solidFill>
-                <a:effectLst/>
-                <a:latin typeface="Arial"/>
-                <a:ea typeface="Arial"/>
-                <a:cs typeface="Arial"/>
-                <a:sym typeface="Arial"/>
-              </a:rPr>
-              <a:t>adalah</a:t>
-            </a:r>
-            <a:r>
-              <a:rPr lang="en-ID" sz="1100" b="0" i="0" u="none" strike="noStrike" cap="none" dirty="0">
-                <a:solidFill>
-                  <a:srgbClr val="000000"/>
-                </a:solidFill>
-                <a:effectLst/>
-                <a:latin typeface="Arial"/>
-                <a:ea typeface="Arial"/>
-                <a:cs typeface="Arial"/>
-                <a:sym typeface="Arial"/>
-              </a:rPr>
-              <a:t> </a:t>
-            </a:r>
-            <a:r>
-              <a:rPr lang="en-ID" sz="1100" b="1" i="0" u="none" strike="noStrike" cap="none" dirty="0" err="1">
-                <a:solidFill>
-                  <a:srgbClr val="000000"/>
-                </a:solidFill>
-                <a:effectLst/>
-                <a:latin typeface="Arial"/>
-                <a:ea typeface="Arial"/>
-                <a:cs typeface="Arial"/>
-                <a:sym typeface="Arial"/>
-              </a:rPr>
-              <a:t>MediBook</a:t>
-            </a:r>
-            <a:r>
-              <a:rPr lang="en-ID" sz="1100" b="1" i="0" u="none" strike="noStrike" cap="none" dirty="0">
-                <a:solidFill>
-                  <a:srgbClr val="000000"/>
-                </a:solidFill>
-                <a:effectLst/>
-                <a:latin typeface="Arial"/>
-                <a:ea typeface="Arial"/>
-                <a:cs typeface="Arial"/>
-                <a:sym typeface="Arial"/>
-              </a:rPr>
-              <a:t> API</a:t>
-            </a:r>
-            <a:r>
-              <a:rPr lang="en-ID" sz="1100" b="0" i="0" u="none" strike="noStrike" cap="none" dirty="0">
-                <a:solidFill>
-                  <a:srgbClr val="000000"/>
-                </a:solidFill>
-                <a:effectLst/>
-                <a:latin typeface="Arial"/>
-                <a:ea typeface="Arial"/>
-                <a:cs typeface="Arial"/>
-                <a:sym typeface="Arial"/>
-              </a:rPr>
-              <a:t>, </a:t>
-            </a:r>
-            <a:r>
-              <a:rPr lang="en-ID" sz="1100" b="0" i="0" u="none" strike="noStrike" cap="none" dirty="0" err="1">
-                <a:solidFill>
-                  <a:srgbClr val="000000"/>
-                </a:solidFill>
-                <a:effectLst/>
-                <a:latin typeface="Arial"/>
-                <a:ea typeface="Arial"/>
-                <a:cs typeface="Arial"/>
-                <a:sym typeface="Arial"/>
-              </a:rPr>
-              <a:t>sebuah</a:t>
-            </a:r>
-            <a:r>
-              <a:rPr lang="en-ID" sz="1100" b="0" i="0" u="none" strike="noStrike" cap="none" dirty="0">
-                <a:solidFill>
-                  <a:srgbClr val="000000"/>
-                </a:solidFill>
-                <a:effectLst/>
-                <a:latin typeface="Arial"/>
-                <a:ea typeface="Arial"/>
-                <a:cs typeface="Arial"/>
-                <a:sym typeface="Arial"/>
-              </a:rPr>
-              <a:t> </a:t>
-            </a:r>
-            <a:r>
-              <a:rPr lang="en-ID" sz="1100" b="0" i="0" u="none" strike="noStrike" cap="none" dirty="0" err="1">
-                <a:solidFill>
-                  <a:srgbClr val="000000"/>
-                </a:solidFill>
-                <a:effectLst/>
-                <a:latin typeface="Arial"/>
-                <a:ea typeface="Arial"/>
-                <a:cs typeface="Arial"/>
-                <a:sym typeface="Arial"/>
-              </a:rPr>
-              <a:t>Sistem</a:t>
-            </a:r>
-            <a:r>
-              <a:rPr lang="en-ID" sz="1100" b="0" i="0" u="none" strike="noStrike" cap="none" dirty="0">
-                <a:solidFill>
-                  <a:srgbClr val="000000"/>
-                </a:solidFill>
-                <a:effectLst/>
-                <a:latin typeface="Arial"/>
-                <a:ea typeface="Arial"/>
-                <a:cs typeface="Arial"/>
-                <a:sym typeface="Arial"/>
-              </a:rPr>
-              <a:t> </a:t>
-            </a:r>
-            <a:r>
-              <a:rPr lang="en-ID" sz="1100" b="0" i="0" u="none" strike="noStrike" cap="none" dirty="0" err="1">
-                <a:solidFill>
-                  <a:srgbClr val="000000"/>
-                </a:solidFill>
-                <a:effectLst/>
-                <a:latin typeface="Arial"/>
-                <a:ea typeface="Arial"/>
-                <a:cs typeface="Arial"/>
-                <a:sym typeface="Arial"/>
-              </a:rPr>
-              <a:t>Manajemen</a:t>
-            </a:r>
-            <a:r>
-              <a:rPr lang="en-ID" sz="1100" b="0" i="0" u="none" strike="noStrike" cap="none" dirty="0">
-                <a:solidFill>
-                  <a:srgbClr val="000000"/>
-                </a:solidFill>
-                <a:effectLst/>
-                <a:latin typeface="Arial"/>
-                <a:ea typeface="Arial"/>
-                <a:cs typeface="Arial"/>
-                <a:sym typeface="Arial"/>
-              </a:rPr>
-              <a:t> </a:t>
-            </a:r>
-            <a:r>
-              <a:rPr lang="en-ID" sz="1100" b="0" i="0" u="none" strike="noStrike" cap="none" dirty="0" err="1">
-                <a:solidFill>
-                  <a:srgbClr val="000000"/>
-                </a:solidFill>
-                <a:effectLst/>
-                <a:latin typeface="Arial"/>
-                <a:ea typeface="Arial"/>
-                <a:cs typeface="Arial"/>
-                <a:sym typeface="Arial"/>
-              </a:rPr>
-              <a:t>Pendaftaran</a:t>
-            </a:r>
-            <a:r>
-              <a:rPr lang="en-ID" sz="1100" b="0" i="0" u="none" strike="noStrike" cap="none" dirty="0">
-                <a:solidFill>
-                  <a:srgbClr val="000000"/>
-                </a:solidFill>
-                <a:effectLst/>
-                <a:latin typeface="Arial"/>
-                <a:ea typeface="Arial"/>
-                <a:cs typeface="Arial"/>
-                <a:sym typeface="Arial"/>
-              </a:rPr>
-              <a:t> Rumah Sakit </a:t>
-            </a:r>
-            <a:r>
-              <a:rPr lang="en-ID" sz="1100" b="0" i="0" u="none" strike="noStrike" cap="none" dirty="0" err="1">
-                <a:solidFill>
-                  <a:srgbClr val="000000"/>
-                </a:solidFill>
-                <a:effectLst/>
-                <a:latin typeface="Arial"/>
-                <a:ea typeface="Arial"/>
-                <a:cs typeface="Arial"/>
-                <a:sym typeface="Arial"/>
-              </a:rPr>
-              <a:t>berbasis</a:t>
-            </a:r>
-            <a:r>
-              <a:rPr lang="en-ID" sz="1100" b="0" i="0" u="none" strike="noStrike" cap="none" dirty="0">
-                <a:solidFill>
-                  <a:srgbClr val="000000"/>
-                </a:solidFill>
-                <a:effectLst/>
-                <a:latin typeface="Arial"/>
-                <a:ea typeface="Arial"/>
-                <a:cs typeface="Arial"/>
-                <a:sym typeface="Arial"/>
-              </a:rPr>
-              <a:t> RESTful. Saya </a:t>
-            </a:r>
-            <a:r>
-              <a:rPr lang="en-ID" sz="1100" b="0" i="0" u="none" strike="noStrike" cap="none" dirty="0" err="1">
-                <a:solidFill>
-                  <a:srgbClr val="000000"/>
-                </a:solidFill>
-                <a:effectLst/>
-                <a:latin typeface="Arial"/>
-                <a:ea typeface="Arial"/>
-                <a:cs typeface="Arial"/>
-                <a:sym typeface="Arial"/>
-              </a:rPr>
-              <a:t>berangkat</a:t>
-            </a:r>
-            <a:r>
-              <a:rPr lang="en-ID" sz="1100" b="0" i="0" u="none" strike="noStrike" cap="none" dirty="0">
-                <a:solidFill>
-                  <a:srgbClr val="000000"/>
-                </a:solidFill>
-                <a:effectLst/>
-                <a:latin typeface="Arial"/>
-                <a:ea typeface="Arial"/>
-                <a:cs typeface="Arial"/>
-                <a:sym typeface="Arial"/>
-              </a:rPr>
-              <a:t> </a:t>
-            </a:r>
-            <a:r>
-              <a:rPr lang="en-ID" sz="1100" b="0" i="0" u="none" strike="noStrike" cap="none" dirty="0" err="1">
-                <a:solidFill>
-                  <a:srgbClr val="000000"/>
-                </a:solidFill>
-                <a:effectLst/>
-                <a:latin typeface="Arial"/>
-                <a:ea typeface="Arial"/>
-                <a:cs typeface="Arial"/>
-                <a:sym typeface="Arial"/>
-              </a:rPr>
-              <a:t>dari</a:t>
-            </a:r>
-            <a:r>
-              <a:rPr lang="en-ID" sz="1100" b="0" i="0" u="none" strike="noStrike" cap="none" dirty="0">
-                <a:solidFill>
-                  <a:srgbClr val="000000"/>
-                </a:solidFill>
-                <a:effectLst/>
-                <a:latin typeface="Arial"/>
-                <a:ea typeface="Arial"/>
-                <a:cs typeface="Arial"/>
-                <a:sym typeface="Arial"/>
-              </a:rPr>
-              <a:t> </a:t>
-            </a:r>
-            <a:r>
-              <a:rPr lang="en-ID" sz="1100" b="0" i="0" u="none" strike="noStrike" cap="none" dirty="0" err="1">
-                <a:solidFill>
-                  <a:srgbClr val="000000"/>
-                </a:solidFill>
-                <a:effectLst/>
-                <a:latin typeface="Arial"/>
-                <a:ea typeface="Arial"/>
-                <a:cs typeface="Arial"/>
-                <a:sym typeface="Arial"/>
-              </a:rPr>
-              <a:t>masalah</a:t>
-            </a:r>
-            <a:r>
-              <a:rPr lang="en-ID" sz="1100" b="0" i="0" u="none" strike="noStrike" cap="none" dirty="0">
-                <a:solidFill>
-                  <a:srgbClr val="000000"/>
-                </a:solidFill>
-                <a:effectLst/>
-                <a:latin typeface="Arial"/>
-                <a:ea typeface="Arial"/>
-                <a:cs typeface="Arial"/>
-                <a:sym typeface="Arial"/>
-              </a:rPr>
-              <a:t> </a:t>
-            </a:r>
-            <a:r>
-              <a:rPr lang="en-ID" sz="1100" b="0" i="0" u="none" strike="noStrike" cap="none" dirty="0" err="1">
-                <a:solidFill>
-                  <a:srgbClr val="000000"/>
-                </a:solidFill>
-                <a:effectLst/>
-                <a:latin typeface="Arial"/>
-                <a:ea typeface="Arial"/>
-                <a:cs typeface="Arial"/>
-                <a:sym typeface="Arial"/>
-              </a:rPr>
-              <a:t>klasik</a:t>
-            </a:r>
-            <a:r>
-              <a:rPr lang="en-ID" sz="1100" b="0" i="0" u="none" strike="noStrike" cap="none" dirty="0">
-                <a:solidFill>
-                  <a:srgbClr val="000000"/>
-                </a:solidFill>
-                <a:effectLst/>
-                <a:latin typeface="Arial"/>
-                <a:ea typeface="Arial"/>
-                <a:cs typeface="Arial"/>
-                <a:sym typeface="Arial"/>
-              </a:rPr>
-              <a:t> yang </a:t>
-            </a:r>
-            <a:r>
-              <a:rPr lang="en-ID" sz="1100" b="0" i="0" u="none" strike="noStrike" cap="none" dirty="0" err="1">
-                <a:solidFill>
-                  <a:srgbClr val="000000"/>
-                </a:solidFill>
-                <a:effectLst/>
-                <a:latin typeface="Arial"/>
-                <a:ea typeface="Arial"/>
-                <a:cs typeface="Arial"/>
-                <a:sym typeface="Arial"/>
-              </a:rPr>
-              <a:t>selalu</a:t>
-            </a:r>
-            <a:r>
-              <a:rPr lang="en-ID" sz="1100" b="0" i="0" u="none" strike="noStrike" cap="none" dirty="0">
-                <a:solidFill>
-                  <a:srgbClr val="000000"/>
-                </a:solidFill>
-                <a:effectLst/>
-                <a:latin typeface="Arial"/>
-                <a:ea typeface="Arial"/>
-                <a:cs typeface="Arial"/>
-                <a:sym typeface="Arial"/>
-              </a:rPr>
-              <a:t> </a:t>
-            </a:r>
-            <a:r>
-              <a:rPr lang="en-ID" sz="1100" b="0" i="0" u="none" strike="noStrike" cap="none" dirty="0" err="1">
-                <a:solidFill>
-                  <a:srgbClr val="000000"/>
-                </a:solidFill>
-                <a:effectLst/>
-                <a:latin typeface="Arial"/>
-                <a:ea typeface="Arial"/>
-                <a:cs typeface="Arial"/>
-                <a:sym typeface="Arial"/>
-              </a:rPr>
-              <a:t>terjadi</a:t>
-            </a:r>
-            <a:r>
-              <a:rPr lang="en-ID" sz="1100" b="0" i="0" u="none" strike="noStrike" cap="none" dirty="0">
-                <a:solidFill>
-                  <a:srgbClr val="000000"/>
-                </a:solidFill>
-                <a:effectLst/>
-                <a:latin typeface="Arial"/>
-                <a:ea typeface="Arial"/>
-                <a:cs typeface="Arial"/>
-                <a:sym typeface="Arial"/>
-              </a:rPr>
-              <a:t> di </a:t>
-            </a:r>
-            <a:r>
-              <a:rPr lang="en-ID" sz="1100" b="0" i="0" u="none" strike="noStrike" cap="none" dirty="0" err="1">
-                <a:solidFill>
-                  <a:srgbClr val="000000"/>
-                </a:solidFill>
-                <a:effectLst/>
-                <a:latin typeface="Arial"/>
-                <a:ea typeface="Arial"/>
-                <a:cs typeface="Arial"/>
-                <a:sym typeface="Arial"/>
-              </a:rPr>
-              <a:t>rumah</a:t>
-            </a:r>
-            <a:r>
-              <a:rPr lang="en-ID" sz="1100" b="0" i="0" u="none" strike="noStrike" cap="none" dirty="0">
-                <a:solidFill>
-                  <a:srgbClr val="000000"/>
-                </a:solidFill>
-                <a:effectLst/>
-                <a:latin typeface="Arial"/>
-                <a:ea typeface="Arial"/>
-                <a:cs typeface="Arial"/>
-                <a:sym typeface="Arial"/>
-              </a:rPr>
-              <a:t> </a:t>
-            </a:r>
-            <a:r>
-              <a:rPr lang="en-ID" sz="1100" b="0" i="0" u="none" strike="noStrike" cap="none" dirty="0" err="1">
-                <a:solidFill>
-                  <a:srgbClr val="000000"/>
-                </a:solidFill>
-                <a:effectLst/>
-                <a:latin typeface="Arial"/>
-                <a:ea typeface="Arial"/>
-                <a:cs typeface="Arial"/>
-                <a:sym typeface="Arial"/>
-              </a:rPr>
-              <a:t>sakit</a:t>
-            </a:r>
-            <a:r>
-              <a:rPr lang="en-ID" sz="1100" b="0" i="0" u="none" strike="noStrike" cap="none" dirty="0">
-                <a:solidFill>
-                  <a:srgbClr val="000000"/>
-                </a:solidFill>
-                <a:effectLst/>
-                <a:latin typeface="Arial"/>
-                <a:ea typeface="Arial"/>
-                <a:cs typeface="Arial"/>
-                <a:sym typeface="Arial"/>
-              </a:rPr>
-              <a:t>: </a:t>
-            </a:r>
-            <a:r>
-              <a:rPr lang="en-ID" sz="1100" b="0" i="0" u="none" strike="noStrike" cap="none" dirty="0" err="1">
-                <a:solidFill>
-                  <a:srgbClr val="000000"/>
-                </a:solidFill>
-                <a:effectLst/>
-                <a:latin typeface="Arial"/>
-                <a:ea typeface="Arial"/>
-                <a:cs typeface="Arial"/>
-                <a:sym typeface="Arial"/>
-              </a:rPr>
-              <a:t>Pasien</a:t>
-            </a:r>
-            <a:r>
-              <a:rPr lang="en-ID" sz="1100" b="0" i="0" u="none" strike="noStrike" cap="none" dirty="0">
-                <a:solidFill>
-                  <a:srgbClr val="000000"/>
-                </a:solidFill>
-                <a:effectLst/>
-                <a:latin typeface="Arial"/>
-                <a:ea typeface="Arial"/>
-                <a:cs typeface="Arial"/>
-                <a:sym typeface="Arial"/>
-              </a:rPr>
-              <a:t> antre </a:t>
-            </a:r>
-            <a:r>
-              <a:rPr lang="en-ID" sz="1100" b="0" i="0" u="none" strike="noStrike" cap="none" dirty="0" err="1">
-                <a:solidFill>
-                  <a:srgbClr val="000000"/>
-                </a:solidFill>
-                <a:effectLst/>
-                <a:latin typeface="Arial"/>
-                <a:ea typeface="Arial"/>
-                <a:cs typeface="Arial"/>
-                <a:sym typeface="Arial"/>
-              </a:rPr>
-              <a:t>berjam</a:t>
-            </a:r>
-            <a:r>
-              <a:rPr lang="en-ID" sz="1100" b="0" i="0" u="none" strike="noStrike" cap="none" dirty="0">
-                <a:solidFill>
-                  <a:srgbClr val="000000"/>
-                </a:solidFill>
-                <a:effectLst/>
-                <a:latin typeface="Arial"/>
-                <a:ea typeface="Arial"/>
-                <a:cs typeface="Arial"/>
-                <a:sym typeface="Arial"/>
-              </a:rPr>
-              <a:t>-jam </a:t>
-            </a:r>
-            <a:r>
-              <a:rPr lang="en-ID" sz="1100" b="0" i="0" u="none" strike="noStrike" cap="none" dirty="0" err="1">
-                <a:solidFill>
-                  <a:srgbClr val="000000"/>
-                </a:solidFill>
-                <a:effectLst/>
-                <a:latin typeface="Arial"/>
-                <a:ea typeface="Arial"/>
-                <a:cs typeface="Arial"/>
-                <a:sym typeface="Arial"/>
-              </a:rPr>
-              <a:t>sejak</a:t>
-            </a:r>
-            <a:r>
-              <a:rPr lang="en-ID" sz="1100" b="0" i="0" u="none" strike="noStrike" cap="none" dirty="0">
-                <a:solidFill>
-                  <a:srgbClr val="000000"/>
-                </a:solidFill>
-                <a:effectLst/>
-                <a:latin typeface="Arial"/>
-                <a:ea typeface="Arial"/>
-                <a:cs typeface="Arial"/>
-                <a:sym typeface="Arial"/>
-              </a:rPr>
-              <a:t> </a:t>
-            </a:r>
-            <a:r>
-              <a:rPr lang="en-ID" sz="1100" b="0" i="0" u="none" strike="noStrike" cap="none" dirty="0" err="1">
-                <a:solidFill>
-                  <a:srgbClr val="000000"/>
-                </a:solidFill>
-                <a:effectLst/>
-                <a:latin typeface="Arial"/>
-                <a:ea typeface="Arial"/>
-                <a:cs typeface="Arial"/>
-                <a:sym typeface="Arial"/>
-              </a:rPr>
-              <a:t>subuh</a:t>
-            </a:r>
-            <a:r>
-              <a:rPr lang="en-ID" sz="1100" b="0" i="0" u="none" strike="noStrike" cap="none" dirty="0">
-                <a:solidFill>
-                  <a:srgbClr val="000000"/>
-                </a:solidFill>
-                <a:effectLst/>
-                <a:latin typeface="Arial"/>
-                <a:ea typeface="Arial"/>
-                <a:cs typeface="Arial"/>
-                <a:sym typeface="Arial"/>
-              </a:rPr>
-              <a:t>, </a:t>
-            </a:r>
-            <a:r>
-              <a:rPr lang="en-ID" sz="1100" b="0" i="0" u="none" strike="noStrike" cap="none" dirty="0" err="1">
-                <a:solidFill>
-                  <a:srgbClr val="000000"/>
-                </a:solidFill>
-                <a:effectLst/>
-                <a:latin typeface="Arial"/>
-                <a:ea typeface="Arial"/>
-                <a:cs typeface="Arial"/>
-                <a:sym typeface="Arial"/>
-              </a:rPr>
-              <a:t>kuota</a:t>
-            </a:r>
-            <a:r>
-              <a:rPr lang="en-ID" sz="1100" b="0" i="0" u="none" strike="noStrike" cap="none" dirty="0">
-                <a:solidFill>
-                  <a:srgbClr val="000000"/>
-                </a:solidFill>
-                <a:effectLst/>
-                <a:latin typeface="Arial"/>
-                <a:ea typeface="Arial"/>
-                <a:cs typeface="Arial"/>
-                <a:sym typeface="Arial"/>
-              </a:rPr>
-              <a:t> </a:t>
-            </a:r>
-            <a:r>
-              <a:rPr lang="en-ID" sz="1100" b="0" i="0" u="none" strike="noStrike" cap="none" dirty="0" err="1">
-                <a:solidFill>
-                  <a:srgbClr val="000000"/>
-                </a:solidFill>
-                <a:effectLst/>
-                <a:latin typeface="Arial"/>
-                <a:ea typeface="Arial"/>
-                <a:cs typeface="Arial"/>
-                <a:sym typeface="Arial"/>
-              </a:rPr>
-              <a:t>dokter</a:t>
-            </a:r>
-            <a:r>
-              <a:rPr lang="en-ID" sz="1100" b="0" i="0" u="none" strike="noStrike" cap="none" dirty="0">
-                <a:solidFill>
-                  <a:srgbClr val="000000"/>
-                </a:solidFill>
-                <a:effectLst/>
-                <a:latin typeface="Arial"/>
-                <a:ea typeface="Arial"/>
-                <a:cs typeface="Arial"/>
-                <a:sym typeface="Arial"/>
-              </a:rPr>
-              <a:t> yang </a:t>
-            </a:r>
-            <a:r>
-              <a:rPr lang="en-ID" sz="1100" b="0" i="0" u="none" strike="noStrike" cap="none" dirty="0" err="1">
-                <a:solidFill>
-                  <a:srgbClr val="000000"/>
-                </a:solidFill>
-                <a:effectLst/>
-                <a:latin typeface="Arial"/>
-                <a:ea typeface="Arial"/>
-                <a:cs typeface="Arial"/>
-                <a:sym typeface="Arial"/>
-              </a:rPr>
-              <a:t>sering</a:t>
-            </a:r>
-            <a:r>
-              <a:rPr lang="en-ID" sz="1100" b="0" i="0" u="none" strike="noStrike" cap="none" dirty="0">
-                <a:solidFill>
-                  <a:srgbClr val="000000"/>
-                </a:solidFill>
-                <a:effectLst/>
-                <a:latin typeface="Arial"/>
-                <a:ea typeface="Arial"/>
-                <a:cs typeface="Arial"/>
-                <a:sym typeface="Arial"/>
-              </a:rPr>
-              <a:t> </a:t>
-            </a:r>
-            <a:r>
-              <a:rPr lang="en-ID" sz="1100" b="0" i="0" u="none" strike="noStrike" cap="none" dirty="0" err="1">
-                <a:solidFill>
-                  <a:srgbClr val="000000"/>
-                </a:solidFill>
-                <a:effectLst/>
-                <a:latin typeface="Arial"/>
-                <a:ea typeface="Arial"/>
-                <a:cs typeface="Arial"/>
-                <a:sym typeface="Arial"/>
-              </a:rPr>
-              <a:t>kebobolan</a:t>
-            </a:r>
-            <a:r>
-              <a:rPr lang="en-ID" sz="1100" b="0" i="0" u="none" strike="noStrike" cap="none" dirty="0">
-                <a:solidFill>
-                  <a:srgbClr val="000000"/>
-                </a:solidFill>
-                <a:effectLst/>
-                <a:latin typeface="Arial"/>
-                <a:ea typeface="Arial"/>
-                <a:cs typeface="Arial"/>
-                <a:sym typeface="Arial"/>
-              </a:rPr>
-              <a:t> </a:t>
-            </a:r>
-            <a:r>
-              <a:rPr lang="en-ID" sz="1100" b="0" i="0" u="none" strike="noStrike" cap="none" dirty="0" err="1">
-                <a:solidFill>
-                  <a:srgbClr val="000000"/>
-                </a:solidFill>
-                <a:effectLst/>
-                <a:latin typeface="Arial"/>
-                <a:ea typeface="Arial"/>
-                <a:cs typeface="Arial"/>
-                <a:sym typeface="Arial"/>
-              </a:rPr>
-              <a:t>karena</a:t>
-            </a:r>
-            <a:r>
-              <a:rPr lang="en-ID" sz="1100" b="0" i="0" u="none" strike="noStrike" cap="none" dirty="0">
-                <a:solidFill>
-                  <a:srgbClr val="000000"/>
-                </a:solidFill>
-                <a:effectLst/>
-                <a:latin typeface="Arial"/>
-                <a:ea typeface="Arial"/>
-                <a:cs typeface="Arial"/>
-                <a:sym typeface="Arial"/>
-              </a:rPr>
-              <a:t> </a:t>
-            </a:r>
-            <a:r>
-              <a:rPr lang="en-ID" sz="1100" b="0" i="0" u="none" strike="noStrike" cap="none" dirty="0" err="1">
-                <a:solidFill>
-                  <a:srgbClr val="000000"/>
-                </a:solidFill>
-                <a:effectLst/>
-                <a:latin typeface="Arial"/>
-                <a:ea typeface="Arial"/>
-                <a:cs typeface="Arial"/>
-                <a:sym typeface="Arial"/>
-              </a:rPr>
-              <a:t>sistem</a:t>
-            </a:r>
-            <a:r>
-              <a:rPr lang="en-ID" sz="1100" b="0" i="0" u="none" strike="noStrike" cap="none" dirty="0">
-                <a:solidFill>
-                  <a:srgbClr val="000000"/>
-                </a:solidFill>
-                <a:effectLst/>
-                <a:latin typeface="Arial"/>
-                <a:ea typeface="Arial"/>
-                <a:cs typeface="Arial"/>
-                <a:sym typeface="Arial"/>
-              </a:rPr>
-              <a:t> </a:t>
-            </a:r>
-            <a:r>
-              <a:rPr lang="en-ID" sz="1100" b="0" i="0" u="none" strike="noStrike" cap="none" dirty="0" err="1">
-                <a:solidFill>
-                  <a:srgbClr val="000000"/>
-                </a:solidFill>
-                <a:effectLst/>
-                <a:latin typeface="Arial"/>
-                <a:ea typeface="Arial"/>
-                <a:cs typeface="Arial"/>
-                <a:sym typeface="Arial"/>
-              </a:rPr>
-              <a:t>tidak</a:t>
-            </a:r>
-            <a:r>
-              <a:rPr lang="en-ID" sz="1100" b="0" i="0" u="none" strike="noStrike" cap="none" dirty="0">
-                <a:solidFill>
-                  <a:srgbClr val="000000"/>
-                </a:solidFill>
-                <a:effectLst/>
-                <a:latin typeface="Arial"/>
-                <a:ea typeface="Arial"/>
-                <a:cs typeface="Arial"/>
-                <a:sym typeface="Arial"/>
-              </a:rPr>
-              <a:t> </a:t>
-            </a:r>
-            <a:r>
-              <a:rPr lang="en-ID" sz="1100" b="0" i="0" u="none" strike="noStrike" cap="none" dirty="0" err="1">
-                <a:solidFill>
-                  <a:srgbClr val="000000"/>
-                </a:solidFill>
-                <a:effectLst/>
-                <a:latin typeface="Arial"/>
-                <a:ea typeface="Arial"/>
-                <a:cs typeface="Arial"/>
-                <a:sym typeface="Arial"/>
-              </a:rPr>
-              <a:t>siap</a:t>
-            </a:r>
-            <a:r>
-              <a:rPr lang="en-ID" sz="1100" b="0" i="0" u="none" strike="noStrike" cap="none" dirty="0">
-                <a:solidFill>
-                  <a:srgbClr val="000000"/>
-                </a:solidFill>
-                <a:effectLst/>
-                <a:latin typeface="Arial"/>
-                <a:ea typeface="Arial"/>
-                <a:cs typeface="Arial"/>
-                <a:sym typeface="Arial"/>
-              </a:rPr>
-              <a:t> </a:t>
-            </a:r>
-            <a:r>
-              <a:rPr lang="en-ID" sz="1100" b="0" i="0" u="none" strike="noStrike" cap="none" dirty="0" err="1">
-                <a:solidFill>
-                  <a:srgbClr val="000000"/>
-                </a:solidFill>
-                <a:effectLst/>
-                <a:latin typeface="Arial"/>
-                <a:ea typeface="Arial"/>
-                <a:cs typeface="Arial"/>
-                <a:sym typeface="Arial"/>
-              </a:rPr>
-              <a:t>menerima</a:t>
-            </a:r>
-            <a:r>
-              <a:rPr lang="en-ID" sz="1100" b="0" i="0" u="none" strike="noStrike" cap="none" dirty="0">
-                <a:solidFill>
-                  <a:srgbClr val="000000"/>
-                </a:solidFill>
-                <a:effectLst/>
-                <a:latin typeface="Arial"/>
-                <a:ea typeface="Arial"/>
-                <a:cs typeface="Arial"/>
-                <a:sym typeface="Arial"/>
-              </a:rPr>
-              <a:t> 'request' </a:t>
-            </a:r>
-            <a:r>
-              <a:rPr lang="en-ID" sz="1100" b="0" i="0" u="none" strike="noStrike" cap="none" dirty="0" err="1">
-                <a:solidFill>
-                  <a:srgbClr val="000000"/>
-                </a:solidFill>
-                <a:effectLst/>
-                <a:latin typeface="Arial"/>
-                <a:ea typeface="Arial"/>
-                <a:cs typeface="Arial"/>
-                <a:sym typeface="Arial"/>
-              </a:rPr>
-              <a:t>bersamaan</a:t>
-            </a:r>
-            <a:r>
-              <a:rPr lang="en-ID" sz="1100" b="0" i="0" u="none" strike="noStrike" cap="none" dirty="0">
-                <a:solidFill>
-                  <a:srgbClr val="000000"/>
-                </a:solidFill>
-                <a:effectLst/>
-                <a:latin typeface="Arial"/>
-                <a:ea typeface="Arial"/>
-                <a:cs typeface="Arial"/>
-                <a:sym typeface="Arial"/>
-              </a:rPr>
-              <a:t>, dan server yang down </a:t>
-            </a:r>
-            <a:r>
-              <a:rPr lang="en-ID" sz="1100" b="0" i="0" u="none" strike="noStrike" cap="none" dirty="0" err="1">
-                <a:solidFill>
-                  <a:srgbClr val="000000"/>
-                </a:solidFill>
-                <a:effectLst/>
-                <a:latin typeface="Arial"/>
-                <a:ea typeface="Arial"/>
-                <a:cs typeface="Arial"/>
-                <a:sym typeface="Arial"/>
-              </a:rPr>
-              <a:t>karena</a:t>
-            </a:r>
-            <a:r>
-              <a:rPr lang="en-ID" sz="1100" b="0" i="0" u="none" strike="noStrike" cap="none" dirty="0">
-                <a:solidFill>
-                  <a:srgbClr val="000000"/>
-                </a:solidFill>
-                <a:effectLst/>
-                <a:latin typeface="Arial"/>
-                <a:ea typeface="Arial"/>
-                <a:cs typeface="Arial"/>
-                <a:sym typeface="Arial"/>
-              </a:rPr>
-              <a:t> </a:t>
-            </a:r>
-            <a:r>
-              <a:rPr lang="en-ID" sz="1100" b="0" i="0" u="none" strike="noStrike" cap="none" dirty="0" err="1">
-                <a:solidFill>
-                  <a:srgbClr val="000000"/>
-                </a:solidFill>
-                <a:effectLst/>
-                <a:latin typeface="Arial"/>
-                <a:ea typeface="Arial"/>
-                <a:cs typeface="Arial"/>
-                <a:sym typeface="Arial"/>
-              </a:rPr>
-              <a:t>pasien</a:t>
-            </a:r>
-            <a:r>
-              <a:rPr lang="en-ID" sz="1100" b="0" i="0" u="none" strike="noStrike" cap="none" dirty="0">
-                <a:solidFill>
-                  <a:srgbClr val="000000"/>
-                </a:solidFill>
-                <a:effectLst/>
-                <a:latin typeface="Arial"/>
-                <a:ea typeface="Arial"/>
-                <a:cs typeface="Arial"/>
-                <a:sym typeface="Arial"/>
-              </a:rPr>
-              <a:t> </a:t>
-            </a:r>
-            <a:r>
-              <a:rPr lang="en-ID" sz="1100" b="0" i="0" u="none" strike="noStrike" cap="none" dirty="0" err="1">
-                <a:solidFill>
-                  <a:srgbClr val="000000"/>
-                </a:solidFill>
-                <a:effectLst/>
-                <a:latin typeface="Arial"/>
-                <a:ea typeface="Arial"/>
-                <a:cs typeface="Arial"/>
-                <a:sym typeface="Arial"/>
-              </a:rPr>
-              <a:t>nge</a:t>
-            </a:r>
-            <a:r>
-              <a:rPr lang="en-ID" sz="1100" b="0" i="0" u="none" strike="noStrike" cap="none" dirty="0">
-                <a:solidFill>
-                  <a:srgbClr val="000000"/>
-                </a:solidFill>
-                <a:effectLst/>
-                <a:latin typeface="Arial"/>
-                <a:ea typeface="Arial"/>
-                <a:cs typeface="Arial"/>
-                <a:sym typeface="Arial"/>
-              </a:rPr>
-              <a:t>-lag </a:t>
-            </a:r>
-            <a:r>
-              <a:rPr lang="en-ID" sz="1100" b="0" i="0" u="none" strike="noStrike" cap="none" dirty="0" err="1">
-                <a:solidFill>
-                  <a:srgbClr val="000000"/>
-                </a:solidFill>
-                <a:effectLst/>
-                <a:latin typeface="Arial"/>
-                <a:ea typeface="Arial"/>
-                <a:cs typeface="Arial"/>
-                <a:sym typeface="Arial"/>
-              </a:rPr>
-              <a:t>menekan</a:t>
-            </a:r>
-            <a:r>
-              <a:rPr lang="en-ID" sz="1100" b="0" i="0" u="none" strike="noStrike" cap="none" dirty="0">
-                <a:solidFill>
-                  <a:srgbClr val="000000"/>
-                </a:solidFill>
-                <a:effectLst/>
-                <a:latin typeface="Arial"/>
-                <a:ea typeface="Arial"/>
-                <a:cs typeface="Arial"/>
-                <a:sym typeface="Arial"/>
-              </a:rPr>
-              <a:t> </a:t>
-            </a:r>
-            <a:r>
-              <a:rPr lang="en-ID" sz="1100" b="0" i="0" u="none" strike="noStrike" cap="none" dirty="0" err="1">
-                <a:solidFill>
-                  <a:srgbClr val="000000"/>
-                </a:solidFill>
-                <a:effectLst/>
-                <a:latin typeface="Arial"/>
-                <a:ea typeface="Arial"/>
-                <a:cs typeface="Arial"/>
-                <a:sym typeface="Arial"/>
-              </a:rPr>
-              <a:t>tombol</a:t>
-            </a:r>
-            <a:r>
-              <a:rPr lang="en-ID" sz="1100" b="0" i="0" u="none" strike="noStrike" cap="none" dirty="0">
-                <a:solidFill>
-                  <a:srgbClr val="000000"/>
-                </a:solidFill>
-                <a:effectLst/>
-                <a:latin typeface="Arial"/>
-                <a:ea typeface="Arial"/>
-                <a:cs typeface="Arial"/>
-                <a:sym typeface="Arial"/>
-              </a:rPr>
-              <a:t> daftar </a:t>
-            </a:r>
-            <a:r>
-              <a:rPr lang="en-ID" sz="1100" b="0" i="0" u="none" strike="noStrike" cap="none" dirty="0" err="1">
-                <a:solidFill>
-                  <a:srgbClr val="000000"/>
-                </a:solidFill>
-                <a:effectLst/>
-                <a:latin typeface="Arial"/>
-                <a:ea typeface="Arial"/>
-                <a:cs typeface="Arial"/>
-                <a:sym typeface="Arial"/>
-              </a:rPr>
-              <a:t>berkali</a:t>
-            </a:r>
-            <a:r>
-              <a:rPr lang="en-ID" sz="1100" b="0" i="0" u="none" strike="noStrike" cap="none" dirty="0">
-                <a:solidFill>
-                  <a:srgbClr val="000000"/>
-                </a:solidFill>
-                <a:effectLst/>
-                <a:latin typeface="Arial"/>
-                <a:ea typeface="Arial"/>
-                <a:cs typeface="Arial"/>
-                <a:sym typeface="Arial"/>
-              </a:rPr>
-              <a:t>-kali.</a:t>
-            </a:r>
-            <a:endParaRPr dirty="0"/>
+            <a:endParaRPr/>
           </a:p>
         </p:txBody>
       </p:sp>
@@ -3852,1700 +1407,6 @@
           </a:bodyPr>
           <a:lstStyle/>
           <a:p>
-            <a:r>
-              <a:rPr lang="en-ID" sz="1100" b="0" i="0" u="none" strike="noStrike" cap="none" dirty="0">
-                <a:solidFill>
-                  <a:srgbClr val="000000"/>
-                </a:solidFill>
-                <a:effectLst/>
-                <a:latin typeface="Arial"/>
-                <a:ea typeface="Arial"/>
-                <a:cs typeface="Arial"/>
-                <a:sym typeface="Arial"/>
-              </a:rPr>
-              <a:t>Final Project </a:t>
-            </a:r>
-            <a:r>
-              <a:rPr lang="en-ID" sz="1100" b="0" i="0" u="none" strike="noStrike" cap="none" dirty="0" err="1">
-                <a:solidFill>
-                  <a:srgbClr val="000000"/>
-                </a:solidFill>
-                <a:effectLst/>
-                <a:latin typeface="Arial"/>
-                <a:ea typeface="Arial"/>
-                <a:cs typeface="Arial"/>
-                <a:sym typeface="Arial"/>
-              </a:rPr>
-              <a:t>saya</a:t>
-            </a:r>
-            <a:r>
-              <a:rPr lang="en-ID" sz="1100" b="0" i="0" u="none" strike="noStrike" cap="none" dirty="0">
-                <a:solidFill>
-                  <a:srgbClr val="000000"/>
-                </a:solidFill>
-                <a:effectLst/>
-                <a:latin typeface="Arial"/>
-                <a:ea typeface="Arial"/>
-                <a:cs typeface="Arial"/>
-                <a:sym typeface="Arial"/>
-              </a:rPr>
-              <a:t> </a:t>
-            </a:r>
-            <a:r>
-              <a:rPr lang="en-ID" sz="1100" b="0" i="0" u="none" strike="noStrike" cap="none" dirty="0" err="1">
-                <a:solidFill>
-                  <a:srgbClr val="000000"/>
-                </a:solidFill>
-                <a:effectLst/>
-                <a:latin typeface="Arial"/>
-                <a:ea typeface="Arial"/>
-                <a:cs typeface="Arial"/>
-                <a:sym typeface="Arial"/>
-              </a:rPr>
-              <a:t>adalah</a:t>
-            </a:r>
-            <a:r>
-              <a:rPr lang="en-ID" sz="1100" b="0" i="0" u="none" strike="noStrike" cap="none" dirty="0">
-                <a:solidFill>
-                  <a:srgbClr val="000000"/>
-                </a:solidFill>
-                <a:effectLst/>
-                <a:latin typeface="Arial"/>
-                <a:ea typeface="Arial"/>
-                <a:cs typeface="Arial"/>
-                <a:sym typeface="Arial"/>
-              </a:rPr>
-              <a:t> </a:t>
-            </a:r>
-            <a:r>
-              <a:rPr lang="en-ID" sz="1100" b="1" i="0" u="none" strike="noStrike" cap="none" dirty="0" err="1">
-                <a:solidFill>
-                  <a:srgbClr val="000000"/>
-                </a:solidFill>
-                <a:effectLst/>
-                <a:latin typeface="Arial"/>
-                <a:ea typeface="Arial"/>
-                <a:cs typeface="Arial"/>
-                <a:sym typeface="Arial"/>
-              </a:rPr>
-              <a:t>MediBook</a:t>
-            </a:r>
-            <a:r>
-              <a:rPr lang="en-ID" sz="1100" b="1" i="0" u="none" strike="noStrike" cap="none" dirty="0">
-                <a:solidFill>
-                  <a:srgbClr val="000000"/>
-                </a:solidFill>
-                <a:effectLst/>
-                <a:latin typeface="Arial"/>
-                <a:ea typeface="Arial"/>
-                <a:cs typeface="Arial"/>
-                <a:sym typeface="Arial"/>
-              </a:rPr>
-              <a:t> API</a:t>
-            </a:r>
-            <a:r>
-              <a:rPr lang="en-ID" sz="1100" b="0" i="0" u="none" strike="noStrike" cap="none" dirty="0">
-                <a:solidFill>
-                  <a:srgbClr val="000000"/>
-                </a:solidFill>
-                <a:effectLst/>
-                <a:latin typeface="Arial"/>
-                <a:ea typeface="Arial"/>
-                <a:cs typeface="Arial"/>
-                <a:sym typeface="Arial"/>
-              </a:rPr>
-              <a:t>, </a:t>
-            </a:r>
-            <a:r>
-              <a:rPr lang="en-ID" sz="1100" b="0" i="0" u="none" strike="noStrike" cap="none" dirty="0" err="1">
-                <a:solidFill>
-                  <a:srgbClr val="000000"/>
-                </a:solidFill>
-                <a:effectLst/>
-                <a:latin typeface="Arial"/>
-                <a:ea typeface="Arial"/>
-                <a:cs typeface="Arial"/>
-                <a:sym typeface="Arial"/>
-              </a:rPr>
-              <a:t>sebuah</a:t>
-            </a:r>
-            <a:r>
-              <a:rPr lang="en-ID" sz="1100" b="0" i="0" u="none" strike="noStrike" cap="none" dirty="0">
-                <a:solidFill>
-                  <a:srgbClr val="000000"/>
-                </a:solidFill>
-                <a:effectLst/>
-                <a:latin typeface="Arial"/>
-                <a:ea typeface="Arial"/>
-                <a:cs typeface="Arial"/>
-                <a:sym typeface="Arial"/>
-              </a:rPr>
-              <a:t> </a:t>
-            </a:r>
-            <a:r>
-              <a:rPr lang="en-ID" sz="1100" b="0" i="0" u="none" strike="noStrike" cap="none" dirty="0" err="1">
-                <a:solidFill>
-                  <a:srgbClr val="000000"/>
-                </a:solidFill>
-                <a:effectLst/>
-                <a:latin typeface="Arial"/>
-                <a:ea typeface="Arial"/>
-                <a:cs typeface="Arial"/>
-                <a:sym typeface="Arial"/>
-              </a:rPr>
-              <a:t>Sistem</a:t>
-            </a:r>
-            <a:r>
-              <a:rPr lang="en-ID" sz="1100" b="0" i="0" u="none" strike="noStrike" cap="none" dirty="0">
-                <a:solidFill>
-                  <a:srgbClr val="000000"/>
-                </a:solidFill>
-                <a:effectLst/>
-                <a:latin typeface="Arial"/>
-                <a:ea typeface="Arial"/>
-                <a:cs typeface="Arial"/>
-                <a:sym typeface="Arial"/>
-              </a:rPr>
-              <a:t> </a:t>
-            </a:r>
-            <a:r>
-              <a:rPr lang="en-ID" sz="1100" b="0" i="0" u="none" strike="noStrike" cap="none" dirty="0" err="1">
-                <a:solidFill>
-                  <a:srgbClr val="000000"/>
-                </a:solidFill>
-                <a:effectLst/>
-                <a:latin typeface="Arial"/>
-                <a:ea typeface="Arial"/>
-                <a:cs typeface="Arial"/>
-                <a:sym typeface="Arial"/>
-              </a:rPr>
-              <a:t>Manajemen</a:t>
-            </a:r>
-            <a:r>
-              <a:rPr lang="en-ID" sz="1100" b="0" i="0" u="none" strike="noStrike" cap="none" dirty="0">
-                <a:solidFill>
-                  <a:srgbClr val="000000"/>
-                </a:solidFill>
-                <a:effectLst/>
-                <a:latin typeface="Arial"/>
-                <a:ea typeface="Arial"/>
-                <a:cs typeface="Arial"/>
-                <a:sym typeface="Arial"/>
-              </a:rPr>
-              <a:t> </a:t>
-            </a:r>
-            <a:r>
-              <a:rPr lang="en-ID" sz="1100" b="0" i="0" u="none" strike="noStrike" cap="none" dirty="0" err="1">
-                <a:solidFill>
-                  <a:srgbClr val="000000"/>
-                </a:solidFill>
-                <a:effectLst/>
-                <a:latin typeface="Arial"/>
-                <a:ea typeface="Arial"/>
-                <a:cs typeface="Arial"/>
-                <a:sym typeface="Arial"/>
-              </a:rPr>
-              <a:t>Pendaftaran</a:t>
-            </a:r>
-            <a:r>
-              <a:rPr lang="en-ID" sz="1100" b="0" i="0" u="none" strike="noStrike" cap="none" dirty="0">
-                <a:solidFill>
-                  <a:srgbClr val="000000"/>
-                </a:solidFill>
-                <a:effectLst/>
-                <a:latin typeface="Arial"/>
-                <a:ea typeface="Arial"/>
-                <a:cs typeface="Arial"/>
-                <a:sym typeface="Arial"/>
-              </a:rPr>
-              <a:t> Rumah Sakit </a:t>
-            </a:r>
-            <a:r>
-              <a:rPr lang="en-ID" sz="1100" b="0" i="0" u="none" strike="noStrike" cap="none" dirty="0" err="1">
-                <a:solidFill>
-                  <a:srgbClr val="000000"/>
-                </a:solidFill>
-                <a:effectLst/>
-                <a:latin typeface="Arial"/>
-                <a:ea typeface="Arial"/>
-                <a:cs typeface="Arial"/>
-                <a:sym typeface="Arial"/>
-              </a:rPr>
-              <a:t>berbasis</a:t>
-            </a:r>
-            <a:r>
-              <a:rPr lang="en-ID" sz="1100" b="0" i="0" u="none" strike="noStrike" cap="none" dirty="0">
-                <a:solidFill>
-                  <a:srgbClr val="000000"/>
-                </a:solidFill>
-                <a:effectLst/>
-                <a:latin typeface="Arial"/>
-                <a:ea typeface="Arial"/>
-                <a:cs typeface="Arial"/>
-                <a:sym typeface="Arial"/>
-              </a:rPr>
-              <a:t> RESTful. Saya </a:t>
-            </a:r>
-            <a:r>
-              <a:rPr lang="en-ID" sz="1100" b="0" i="0" u="none" strike="noStrike" cap="none" dirty="0" err="1">
-                <a:solidFill>
-                  <a:srgbClr val="000000"/>
-                </a:solidFill>
-                <a:effectLst/>
-                <a:latin typeface="Arial"/>
-                <a:ea typeface="Arial"/>
-                <a:cs typeface="Arial"/>
-                <a:sym typeface="Arial"/>
-              </a:rPr>
-              <a:t>berangkat</a:t>
-            </a:r>
-            <a:r>
-              <a:rPr lang="en-ID" sz="1100" b="0" i="0" u="none" strike="noStrike" cap="none" dirty="0">
-                <a:solidFill>
-                  <a:srgbClr val="000000"/>
-                </a:solidFill>
-                <a:effectLst/>
-                <a:latin typeface="Arial"/>
-                <a:ea typeface="Arial"/>
-                <a:cs typeface="Arial"/>
-                <a:sym typeface="Arial"/>
-              </a:rPr>
-              <a:t> </a:t>
-            </a:r>
-            <a:r>
-              <a:rPr lang="en-ID" sz="1100" b="0" i="0" u="none" strike="noStrike" cap="none" dirty="0" err="1">
-                <a:solidFill>
-                  <a:srgbClr val="000000"/>
-                </a:solidFill>
-                <a:effectLst/>
-                <a:latin typeface="Arial"/>
-                <a:ea typeface="Arial"/>
-                <a:cs typeface="Arial"/>
-                <a:sym typeface="Arial"/>
-              </a:rPr>
-              <a:t>dari</a:t>
-            </a:r>
-            <a:r>
-              <a:rPr lang="en-ID" sz="1100" b="0" i="0" u="none" strike="noStrike" cap="none" dirty="0">
-                <a:solidFill>
-                  <a:srgbClr val="000000"/>
-                </a:solidFill>
-                <a:effectLst/>
-                <a:latin typeface="Arial"/>
-                <a:ea typeface="Arial"/>
-                <a:cs typeface="Arial"/>
-                <a:sym typeface="Arial"/>
-              </a:rPr>
-              <a:t> </a:t>
-            </a:r>
-            <a:r>
-              <a:rPr lang="en-ID" sz="1100" b="0" i="0" u="none" strike="noStrike" cap="none" dirty="0" err="1">
-                <a:solidFill>
-                  <a:srgbClr val="000000"/>
-                </a:solidFill>
-                <a:effectLst/>
-                <a:latin typeface="Arial"/>
-                <a:ea typeface="Arial"/>
-                <a:cs typeface="Arial"/>
-                <a:sym typeface="Arial"/>
-              </a:rPr>
-              <a:t>masalah</a:t>
-            </a:r>
-            <a:r>
-              <a:rPr lang="en-ID" sz="1100" b="0" i="0" u="none" strike="noStrike" cap="none" dirty="0">
-                <a:solidFill>
-                  <a:srgbClr val="000000"/>
-                </a:solidFill>
-                <a:effectLst/>
-                <a:latin typeface="Arial"/>
-                <a:ea typeface="Arial"/>
-                <a:cs typeface="Arial"/>
-                <a:sym typeface="Arial"/>
-              </a:rPr>
-              <a:t> </a:t>
-            </a:r>
-            <a:r>
-              <a:rPr lang="en-ID" sz="1100" b="0" i="0" u="none" strike="noStrike" cap="none" dirty="0" err="1">
-                <a:solidFill>
-                  <a:srgbClr val="000000"/>
-                </a:solidFill>
-                <a:effectLst/>
-                <a:latin typeface="Arial"/>
-                <a:ea typeface="Arial"/>
-                <a:cs typeface="Arial"/>
-                <a:sym typeface="Arial"/>
-              </a:rPr>
-              <a:t>klasik</a:t>
-            </a:r>
-            <a:r>
-              <a:rPr lang="en-ID" sz="1100" b="0" i="0" u="none" strike="noStrike" cap="none" dirty="0">
-                <a:solidFill>
-                  <a:srgbClr val="000000"/>
-                </a:solidFill>
-                <a:effectLst/>
-                <a:latin typeface="Arial"/>
-                <a:ea typeface="Arial"/>
-                <a:cs typeface="Arial"/>
-                <a:sym typeface="Arial"/>
-              </a:rPr>
-              <a:t> yang </a:t>
-            </a:r>
-            <a:r>
-              <a:rPr lang="en-ID" sz="1100" b="0" i="0" u="none" strike="noStrike" cap="none" dirty="0" err="1">
-                <a:solidFill>
-                  <a:srgbClr val="000000"/>
-                </a:solidFill>
-                <a:effectLst/>
-                <a:latin typeface="Arial"/>
-                <a:ea typeface="Arial"/>
-                <a:cs typeface="Arial"/>
-                <a:sym typeface="Arial"/>
-              </a:rPr>
-              <a:t>selalu</a:t>
-            </a:r>
-            <a:r>
-              <a:rPr lang="en-ID" sz="1100" b="0" i="0" u="none" strike="noStrike" cap="none" dirty="0">
-                <a:solidFill>
-                  <a:srgbClr val="000000"/>
-                </a:solidFill>
-                <a:effectLst/>
-                <a:latin typeface="Arial"/>
-                <a:ea typeface="Arial"/>
-                <a:cs typeface="Arial"/>
-                <a:sym typeface="Arial"/>
-              </a:rPr>
-              <a:t> </a:t>
-            </a:r>
-            <a:r>
-              <a:rPr lang="en-ID" sz="1100" b="0" i="0" u="none" strike="noStrike" cap="none" dirty="0" err="1">
-                <a:solidFill>
-                  <a:srgbClr val="000000"/>
-                </a:solidFill>
-                <a:effectLst/>
-                <a:latin typeface="Arial"/>
-                <a:ea typeface="Arial"/>
-                <a:cs typeface="Arial"/>
-                <a:sym typeface="Arial"/>
-              </a:rPr>
-              <a:t>terjadi</a:t>
-            </a:r>
-            <a:r>
-              <a:rPr lang="en-ID" sz="1100" b="0" i="0" u="none" strike="noStrike" cap="none" dirty="0">
-                <a:solidFill>
-                  <a:srgbClr val="000000"/>
-                </a:solidFill>
-                <a:effectLst/>
-                <a:latin typeface="Arial"/>
-                <a:ea typeface="Arial"/>
-                <a:cs typeface="Arial"/>
-                <a:sym typeface="Arial"/>
-              </a:rPr>
-              <a:t> di </a:t>
-            </a:r>
-            <a:r>
-              <a:rPr lang="en-ID" sz="1100" b="0" i="0" u="none" strike="noStrike" cap="none" dirty="0" err="1">
-                <a:solidFill>
-                  <a:srgbClr val="000000"/>
-                </a:solidFill>
-                <a:effectLst/>
-                <a:latin typeface="Arial"/>
-                <a:ea typeface="Arial"/>
-                <a:cs typeface="Arial"/>
-                <a:sym typeface="Arial"/>
-              </a:rPr>
-              <a:t>rumah</a:t>
-            </a:r>
-            <a:r>
-              <a:rPr lang="en-ID" sz="1100" b="0" i="0" u="none" strike="noStrike" cap="none" dirty="0">
-                <a:solidFill>
-                  <a:srgbClr val="000000"/>
-                </a:solidFill>
-                <a:effectLst/>
-                <a:latin typeface="Arial"/>
-                <a:ea typeface="Arial"/>
-                <a:cs typeface="Arial"/>
-                <a:sym typeface="Arial"/>
-              </a:rPr>
-              <a:t> </a:t>
-            </a:r>
-            <a:r>
-              <a:rPr lang="en-ID" sz="1100" b="0" i="0" u="none" strike="noStrike" cap="none" dirty="0" err="1">
-                <a:solidFill>
-                  <a:srgbClr val="000000"/>
-                </a:solidFill>
-                <a:effectLst/>
-                <a:latin typeface="Arial"/>
-                <a:ea typeface="Arial"/>
-                <a:cs typeface="Arial"/>
-                <a:sym typeface="Arial"/>
-              </a:rPr>
-              <a:t>sakit</a:t>
-            </a:r>
-            <a:r>
-              <a:rPr lang="en-ID" sz="1100" b="0" i="0" u="none" strike="noStrike" cap="none" dirty="0">
-                <a:solidFill>
-                  <a:srgbClr val="000000"/>
-                </a:solidFill>
-                <a:effectLst/>
-                <a:latin typeface="Arial"/>
-                <a:ea typeface="Arial"/>
-                <a:cs typeface="Arial"/>
-                <a:sym typeface="Arial"/>
-              </a:rPr>
-              <a:t>: </a:t>
-            </a:r>
-            <a:r>
-              <a:rPr lang="en-ID" sz="1100" b="0" i="0" u="none" strike="noStrike" cap="none" dirty="0" err="1">
-                <a:solidFill>
-                  <a:srgbClr val="000000"/>
-                </a:solidFill>
-                <a:effectLst/>
-                <a:latin typeface="Arial"/>
-                <a:ea typeface="Arial"/>
-                <a:cs typeface="Arial"/>
-                <a:sym typeface="Arial"/>
-              </a:rPr>
-              <a:t>Pasien</a:t>
-            </a:r>
-            <a:r>
-              <a:rPr lang="en-ID" sz="1100" b="0" i="0" u="none" strike="noStrike" cap="none" dirty="0">
-                <a:solidFill>
-                  <a:srgbClr val="000000"/>
-                </a:solidFill>
-                <a:effectLst/>
-                <a:latin typeface="Arial"/>
-                <a:ea typeface="Arial"/>
-                <a:cs typeface="Arial"/>
-                <a:sym typeface="Arial"/>
-              </a:rPr>
-              <a:t> antre </a:t>
-            </a:r>
-            <a:r>
-              <a:rPr lang="en-ID" sz="1100" b="0" i="0" u="none" strike="noStrike" cap="none" dirty="0" err="1">
-                <a:solidFill>
-                  <a:srgbClr val="000000"/>
-                </a:solidFill>
-                <a:effectLst/>
-                <a:latin typeface="Arial"/>
-                <a:ea typeface="Arial"/>
-                <a:cs typeface="Arial"/>
-                <a:sym typeface="Arial"/>
-              </a:rPr>
-              <a:t>berjam</a:t>
-            </a:r>
-            <a:r>
-              <a:rPr lang="en-ID" sz="1100" b="0" i="0" u="none" strike="noStrike" cap="none" dirty="0">
-                <a:solidFill>
-                  <a:srgbClr val="000000"/>
-                </a:solidFill>
-                <a:effectLst/>
-                <a:latin typeface="Arial"/>
-                <a:ea typeface="Arial"/>
-                <a:cs typeface="Arial"/>
-                <a:sym typeface="Arial"/>
-              </a:rPr>
-              <a:t>-jam </a:t>
-            </a:r>
-            <a:r>
-              <a:rPr lang="en-ID" sz="1100" b="0" i="0" u="none" strike="noStrike" cap="none" dirty="0" err="1">
-                <a:solidFill>
-                  <a:srgbClr val="000000"/>
-                </a:solidFill>
-                <a:effectLst/>
-                <a:latin typeface="Arial"/>
-                <a:ea typeface="Arial"/>
-                <a:cs typeface="Arial"/>
-                <a:sym typeface="Arial"/>
-              </a:rPr>
-              <a:t>sejak</a:t>
-            </a:r>
-            <a:r>
-              <a:rPr lang="en-ID" sz="1100" b="0" i="0" u="none" strike="noStrike" cap="none" dirty="0">
-                <a:solidFill>
-                  <a:srgbClr val="000000"/>
-                </a:solidFill>
-                <a:effectLst/>
-                <a:latin typeface="Arial"/>
-                <a:ea typeface="Arial"/>
-                <a:cs typeface="Arial"/>
-                <a:sym typeface="Arial"/>
-              </a:rPr>
-              <a:t> </a:t>
-            </a:r>
-            <a:r>
-              <a:rPr lang="en-ID" sz="1100" b="0" i="0" u="none" strike="noStrike" cap="none" dirty="0" err="1">
-                <a:solidFill>
-                  <a:srgbClr val="000000"/>
-                </a:solidFill>
-                <a:effectLst/>
-                <a:latin typeface="Arial"/>
-                <a:ea typeface="Arial"/>
-                <a:cs typeface="Arial"/>
-                <a:sym typeface="Arial"/>
-              </a:rPr>
-              <a:t>subuh</a:t>
-            </a:r>
-            <a:r>
-              <a:rPr lang="en-ID" sz="1100" b="0" i="0" u="none" strike="noStrike" cap="none" dirty="0">
-                <a:solidFill>
-                  <a:srgbClr val="000000"/>
-                </a:solidFill>
-                <a:effectLst/>
-                <a:latin typeface="Arial"/>
-                <a:ea typeface="Arial"/>
-                <a:cs typeface="Arial"/>
-                <a:sym typeface="Arial"/>
-              </a:rPr>
-              <a:t>, </a:t>
-            </a:r>
-            <a:r>
-              <a:rPr lang="en-ID" sz="1100" b="0" i="0" u="none" strike="noStrike" cap="none" dirty="0" err="1">
-                <a:solidFill>
-                  <a:srgbClr val="000000"/>
-                </a:solidFill>
-                <a:effectLst/>
-                <a:latin typeface="Arial"/>
-                <a:ea typeface="Arial"/>
-                <a:cs typeface="Arial"/>
-                <a:sym typeface="Arial"/>
-              </a:rPr>
-              <a:t>kuota</a:t>
-            </a:r>
-            <a:r>
-              <a:rPr lang="en-ID" sz="1100" b="0" i="0" u="none" strike="noStrike" cap="none" dirty="0">
-                <a:solidFill>
-                  <a:srgbClr val="000000"/>
-                </a:solidFill>
-                <a:effectLst/>
-                <a:latin typeface="Arial"/>
-                <a:ea typeface="Arial"/>
-                <a:cs typeface="Arial"/>
-                <a:sym typeface="Arial"/>
-              </a:rPr>
-              <a:t> </a:t>
-            </a:r>
-            <a:r>
-              <a:rPr lang="en-ID" sz="1100" b="0" i="0" u="none" strike="noStrike" cap="none" dirty="0" err="1">
-                <a:solidFill>
-                  <a:srgbClr val="000000"/>
-                </a:solidFill>
-                <a:effectLst/>
-                <a:latin typeface="Arial"/>
-                <a:ea typeface="Arial"/>
-                <a:cs typeface="Arial"/>
-                <a:sym typeface="Arial"/>
-              </a:rPr>
-              <a:t>dokter</a:t>
-            </a:r>
-            <a:r>
-              <a:rPr lang="en-ID" sz="1100" b="0" i="0" u="none" strike="noStrike" cap="none" dirty="0">
-                <a:solidFill>
-                  <a:srgbClr val="000000"/>
-                </a:solidFill>
-                <a:effectLst/>
-                <a:latin typeface="Arial"/>
-                <a:ea typeface="Arial"/>
-                <a:cs typeface="Arial"/>
-                <a:sym typeface="Arial"/>
-              </a:rPr>
-              <a:t> yang </a:t>
-            </a:r>
-            <a:r>
-              <a:rPr lang="en-ID" sz="1100" b="0" i="0" u="none" strike="noStrike" cap="none" dirty="0" err="1">
-                <a:solidFill>
-                  <a:srgbClr val="000000"/>
-                </a:solidFill>
-                <a:effectLst/>
-                <a:latin typeface="Arial"/>
-                <a:ea typeface="Arial"/>
-                <a:cs typeface="Arial"/>
-                <a:sym typeface="Arial"/>
-              </a:rPr>
-              <a:t>sering</a:t>
-            </a:r>
-            <a:r>
-              <a:rPr lang="en-ID" sz="1100" b="0" i="0" u="none" strike="noStrike" cap="none" dirty="0">
-                <a:solidFill>
-                  <a:srgbClr val="000000"/>
-                </a:solidFill>
-                <a:effectLst/>
-                <a:latin typeface="Arial"/>
-                <a:ea typeface="Arial"/>
-                <a:cs typeface="Arial"/>
-                <a:sym typeface="Arial"/>
-              </a:rPr>
-              <a:t> </a:t>
-            </a:r>
-            <a:r>
-              <a:rPr lang="en-ID" sz="1100" b="0" i="0" u="none" strike="noStrike" cap="none" dirty="0" err="1">
-                <a:solidFill>
-                  <a:srgbClr val="000000"/>
-                </a:solidFill>
-                <a:effectLst/>
-                <a:latin typeface="Arial"/>
-                <a:ea typeface="Arial"/>
-                <a:cs typeface="Arial"/>
-                <a:sym typeface="Arial"/>
-              </a:rPr>
-              <a:t>kebobolan</a:t>
-            </a:r>
-            <a:r>
-              <a:rPr lang="en-ID" sz="1100" b="0" i="0" u="none" strike="noStrike" cap="none" dirty="0">
-                <a:solidFill>
-                  <a:srgbClr val="000000"/>
-                </a:solidFill>
-                <a:effectLst/>
-                <a:latin typeface="Arial"/>
-                <a:ea typeface="Arial"/>
-                <a:cs typeface="Arial"/>
-                <a:sym typeface="Arial"/>
-              </a:rPr>
-              <a:t> </a:t>
-            </a:r>
-            <a:r>
-              <a:rPr lang="en-ID" sz="1100" b="0" i="0" u="none" strike="noStrike" cap="none" dirty="0" err="1">
-                <a:solidFill>
-                  <a:srgbClr val="000000"/>
-                </a:solidFill>
-                <a:effectLst/>
-                <a:latin typeface="Arial"/>
-                <a:ea typeface="Arial"/>
-                <a:cs typeface="Arial"/>
-                <a:sym typeface="Arial"/>
-              </a:rPr>
-              <a:t>karena</a:t>
-            </a:r>
-            <a:r>
-              <a:rPr lang="en-ID" sz="1100" b="0" i="0" u="none" strike="noStrike" cap="none" dirty="0">
-                <a:solidFill>
-                  <a:srgbClr val="000000"/>
-                </a:solidFill>
-                <a:effectLst/>
-                <a:latin typeface="Arial"/>
-                <a:ea typeface="Arial"/>
-                <a:cs typeface="Arial"/>
-                <a:sym typeface="Arial"/>
-              </a:rPr>
-              <a:t> </a:t>
-            </a:r>
-            <a:r>
-              <a:rPr lang="en-ID" sz="1100" b="0" i="0" u="none" strike="noStrike" cap="none" dirty="0" err="1">
-                <a:solidFill>
-                  <a:srgbClr val="000000"/>
-                </a:solidFill>
-                <a:effectLst/>
-                <a:latin typeface="Arial"/>
-                <a:ea typeface="Arial"/>
-                <a:cs typeface="Arial"/>
-                <a:sym typeface="Arial"/>
-              </a:rPr>
-              <a:t>sistem</a:t>
-            </a:r>
-            <a:r>
-              <a:rPr lang="en-ID" sz="1100" b="0" i="0" u="none" strike="noStrike" cap="none" dirty="0">
-                <a:solidFill>
-                  <a:srgbClr val="000000"/>
-                </a:solidFill>
-                <a:effectLst/>
-                <a:latin typeface="Arial"/>
-                <a:ea typeface="Arial"/>
-                <a:cs typeface="Arial"/>
-                <a:sym typeface="Arial"/>
-              </a:rPr>
-              <a:t> </a:t>
-            </a:r>
-            <a:r>
-              <a:rPr lang="en-ID" sz="1100" b="0" i="0" u="none" strike="noStrike" cap="none" dirty="0" err="1">
-                <a:solidFill>
-                  <a:srgbClr val="000000"/>
-                </a:solidFill>
-                <a:effectLst/>
-                <a:latin typeface="Arial"/>
-                <a:ea typeface="Arial"/>
-                <a:cs typeface="Arial"/>
-                <a:sym typeface="Arial"/>
-              </a:rPr>
-              <a:t>tidak</a:t>
-            </a:r>
-            <a:r>
-              <a:rPr lang="en-ID" sz="1100" b="0" i="0" u="none" strike="noStrike" cap="none" dirty="0">
-                <a:solidFill>
-                  <a:srgbClr val="000000"/>
-                </a:solidFill>
-                <a:effectLst/>
-                <a:latin typeface="Arial"/>
-                <a:ea typeface="Arial"/>
-                <a:cs typeface="Arial"/>
-                <a:sym typeface="Arial"/>
-              </a:rPr>
-              <a:t> </a:t>
-            </a:r>
-            <a:r>
-              <a:rPr lang="en-ID" sz="1100" b="0" i="0" u="none" strike="noStrike" cap="none" dirty="0" err="1">
-                <a:solidFill>
-                  <a:srgbClr val="000000"/>
-                </a:solidFill>
-                <a:effectLst/>
-                <a:latin typeface="Arial"/>
-                <a:ea typeface="Arial"/>
-                <a:cs typeface="Arial"/>
-                <a:sym typeface="Arial"/>
-              </a:rPr>
-              <a:t>siap</a:t>
-            </a:r>
-            <a:r>
-              <a:rPr lang="en-ID" sz="1100" b="0" i="0" u="none" strike="noStrike" cap="none" dirty="0">
-                <a:solidFill>
-                  <a:srgbClr val="000000"/>
-                </a:solidFill>
-                <a:effectLst/>
-                <a:latin typeface="Arial"/>
-                <a:ea typeface="Arial"/>
-                <a:cs typeface="Arial"/>
-                <a:sym typeface="Arial"/>
-              </a:rPr>
-              <a:t> </a:t>
-            </a:r>
-            <a:r>
-              <a:rPr lang="en-ID" sz="1100" b="0" i="0" u="none" strike="noStrike" cap="none" dirty="0" err="1">
-                <a:solidFill>
-                  <a:srgbClr val="000000"/>
-                </a:solidFill>
-                <a:effectLst/>
-                <a:latin typeface="Arial"/>
-                <a:ea typeface="Arial"/>
-                <a:cs typeface="Arial"/>
-                <a:sym typeface="Arial"/>
-              </a:rPr>
-              <a:t>menerima</a:t>
-            </a:r>
-            <a:r>
-              <a:rPr lang="en-ID" sz="1100" b="0" i="0" u="none" strike="noStrike" cap="none" dirty="0">
-                <a:solidFill>
-                  <a:srgbClr val="000000"/>
-                </a:solidFill>
-                <a:effectLst/>
-                <a:latin typeface="Arial"/>
-                <a:ea typeface="Arial"/>
-                <a:cs typeface="Arial"/>
-                <a:sym typeface="Arial"/>
-              </a:rPr>
-              <a:t> 'request' </a:t>
-            </a:r>
-            <a:r>
-              <a:rPr lang="en-ID" sz="1100" b="0" i="0" u="none" strike="noStrike" cap="none" dirty="0" err="1">
-                <a:solidFill>
-                  <a:srgbClr val="000000"/>
-                </a:solidFill>
-                <a:effectLst/>
-                <a:latin typeface="Arial"/>
-                <a:ea typeface="Arial"/>
-                <a:cs typeface="Arial"/>
-                <a:sym typeface="Arial"/>
-              </a:rPr>
-              <a:t>bersamaan</a:t>
-            </a:r>
-            <a:r>
-              <a:rPr lang="en-ID" sz="1100" b="0" i="0" u="none" strike="noStrike" cap="none" dirty="0">
-                <a:solidFill>
-                  <a:srgbClr val="000000"/>
-                </a:solidFill>
-                <a:effectLst/>
-                <a:latin typeface="Arial"/>
-                <a:ea typeface="Arial"/>
-                <a:cs typeface="Arial"/>
-                <a:sym typeface="Arial"/>
-              </a:rPr>
-              <a:t>, dan server yang down </a:t>
-            </a:r>
-            <a:r>
-              <a:rPr lang="en-ID" sz="1100" b="0" i="0" u="none" strike="noStrike" cap="none" dirty="0" err="1">
-                <a:solidFill>
-                  <a:srgbClr val="000000"/>
-                </a:solidFill>
-                <a:effectLst/>
-                <a:latin typeface="Arial"/>
-                <a:ea typeface="Arial"/>
-                <a:cs typeface="Arial"/>
-                <a:sym typeface="Arial"/>
-              </a:rPr>
-              <a:t>karena</a:t>
-            </a:r>
-            <a:r>
-              <a:rPr lang="en-ID" sz="1100" b="0" i="0" u="none" strike="noStrike" cap="none" dirty="0">
-                <a:solidFill>
-                  <a:srgbClr val="000000"/>
-                </a:solidFill>
-                <a:effectLst/>
-                <a:latin typeface="Arial"/>
-                <a:ea typeface="Arial"/>
-                <a:cs typeface="Arial"/>
-                <a:sym typeface="Arial"/>
-              </a:rPr>
-              <a:t> </a:t>
-            </a:r>
-            <a:r>
-              <a:rPr lang="en-ID" sz="1100" b="0" i="0" u="none" strike="noStrike" cap="none" dirty="0" err="1">
-                <a:solidFill>
-                  <a:srgbClr val="000000"/>
-                </a:solidFill>
-                <a:effectLst/>
-                <a:latin typeface="Arial"/>
-                <a:ea typeface="Arial"/>
-                <a:cs typeface="Arial"/>
-                <a:sym typeface="Arial"/>
-              </a:rPr>
-              <a:t>pasien</a:t>
-            </a:r>
-            <a:r>
-              <a:rPr lang="en-ID" sz="1100" b="0" i="0" u="none" strike="noStrike" cap="none" dirty="0">
-                <a:solidFill>
-                  <a:srgbClr val="000000"/>
-                </a:solidFill>
-                <a:effectLst/>
-                <a:latin typeface="Arial"/>
-                <a:ea typeface="Arial"/>
-                <a:cs typeface="Arial"/>
-                <a:sym typeface="Arial"/>
-              </a:rPr>
-              <a:t> </a:t>
-            </a:r>
-            <a:r>
-              <a:rPr lang="en-ID" sz="1100" b="0" i="0" u="none" strike="noStrike" cap="none" dirty="0" err="1">
-                <a:solidFill>
-                  <a:srgbClr val="000000"/>
-                </a:solidFill>
-                <a:effectLst/>
-                <a:latin typeface="Arial"/>
-                <a:ea typeface="Arial"/>
-                <a:cs typeface="Arial"/>
-                <a:sym typeface="Arial"/>
-              </a:rPr>
-              <a:t>nge</a:t>
-            </a:r>
-            <a:r>
-              <a:rPr lang="en-ID" sz="1100" b="0" i="0" u="none" strike="noStrike" cap="none" dirty="0">
-                <a:solidFill>
-                  <a:srgbClr val="000000"/>
-                </a:solidFill>
-                <a:effectLst/>
-                <a:latin typeface="Arial"/>
-                <a:ea typeface="Arial"/>
-                <a:cs typeface="Arial"/>
-                <a:sym typeface="Arial"/>
-              </a:rPr>
-              <a:t>-lag </a:t>
-            </a:r>
-            <a:r>
-              <a:rPr lang="en-ID" sz="1100" b="0" i="0" u="none" strike="noStrike" cap="none" dirty="0" err="1">
-                <a:solidFill>
-                  <a:srgbClr val="000000"/>
-                </a:solidFill>
-                <a:effectLst/>
-                <a:latin typeface="Arial"/>
-                <a:ea typeface="Arial"/>
-                <a:cs typeface="Arial"/>
-                <a:sym typeface="Arial"/>
-              </a:rPr>
-              <a:t>menekan</a:t>
-            </a:r>
-            <a:r>
-              <a:rPr lang="en-ID" sz="1100" b="0" i="0" u="none" strike="noStrike" cap="none" dirty="0">
-                <a:solidFill>
-                  <a:srgbClr val="000000"/>
-                </a:solidFill>
-                <a:effectLst/>
-                <a:latin typeface="Arial"/>
-                <a:ea typeface="Arial"/>
-                <a:cs typeface="Arial"/>
-                <a:sym typeface="Arial"/>
-              </a:rPr>
-              <a:t> </a:t>
-            </a:r>
-            <a:r>
-              <a:rPr lang="en-ID" sz="1100" b="0" i="0" u="none" strike="noStrike" cap="none" dirty="0" err="1">
-                <a:solidFill>
-                  <a:srgbClr val="000000"/>
-                </a:solidFill>
-                <a:effectLst/>
-                <a:latin typeface="Arial"/>
-                <a:ea typeface="Arial"/>
-                <a:cs typeface="Arial"/>
-                <a:sym typeface="Arial"/>
-              </a:rPr>
-              <a:t>tombol</a:t>
-            </a:r>
-            <a:r>
-              <a:rPr lang="en-ID" sz="1100" b="0" i="0" u="none" strike="noStrike" cap="none" dirty="0">
-                <a:solidFill>
-                  <a:srgbClr val="000000"/>
-                </a:solidFill>
-                <a:effectLst/>
-                <a:latin typeface="Arial"/>
-                <a:ea typeface="Arial"/>
-                <a:cs typeface="Arial"/>
-                <a:sym typeface="Arial"/>
-              </a:rPr>
-              <a:t> daftar </a:t>
-            </a:r>
-            <a:r>
-              <a:rPr lang="en-ID" sz="1100" b="0" i="0" u="none" strike="noStrike" cap="none" dirty="0" err="1">
-                <a:solidFill>
-                  <a:srgbClr val="000000"/>
-                </a:solidFill>
-                <a:effectLst/>
-                <a:latin typeface="Arial"/>
-                <a:ea typeface="Arial"/>
-                <a:cs typeface="Arial"/>
-                <a:sym typeface="Arial"/>
-              </a:rPr>
-              <a:t>berkali</a:t>
-            </a:r>
-            <a:r>
-              <a:rPr lang="en-ID" sz="1100" b="0" i="0" u="none" strike="noStrike" cap="none" dirty="0">
-                <a:solidFill>
-                  <a:srgbClr val="000000"/>
-                </a:solidFill>
-                <a:effectLst/>
-                <a:latin typeface="Arial"/>
-                <a:ea typeface="Arial"/>
-                <a:cs typeface="Arial"/>
-                <a:sym typeface="Arial"/>
-              </a:rPr>
-              <a:t>-kali.</a:t>
-            </a:r>
-          </a:p>
-          <a:p>
-            <a:r>
-              <a:rPr lang="en-ID" sz="1100" b="0" i="0" u="none" strike="noStrike" cap="none" dirty="0" err="1">
-                <a:solidFill>
-                  <a:srgbClr val="000000"/>
-                </a:solidFill>
-                <a:effectLst/>
-                <a:latin typeface="Arial"/>
-                <a:ea typeface="Arial"/>
-                <a:cs typeface="Arial"/>
-                <a:sym typeface="Arial"/>
-              </a:rPr>
-              <a:t>Untuk</a:t>
-            </a:r>
-            <a:r>
-              <a:rPr lang="en-ID" sz="1100" b="0" i="0" u="none" strike="noStrike" cap="none" dirty="0">
-                <a:solidFill>
-                  <a:srgbClr val="000000"/>
-                </a:solidFill>
-                <a:effectLst/>
-                <a:latin typeface="Arial"/>
-                <a:ea typeface="Arial"/>
-                <a:cs typeface="Arial"/>
-                <a:sym typeface="Arial"/>
-              </a:rPr>
-              <a:t> </a:t>
-            </a:r>
-            <a:r>
-              <a:rPr lang="en-ID" sz="1100" b="0" i="0" u="none" strike="noStrike" cap="none" dirty="0" err="1">
-                <a:solidFill>
-                  <a:srgbClr val="000000"/>
-                </a:solidFill>
-                <a:effectLst/>
-                <a:latin typeface="Arial"/>
-                <a:ea typeface="Arial"/>
-                <a:cs typeface="Arial"/>
-                <a:sym typeface="Arial"/>
-              </a:rPr>
-              <a:t>menyelesaikannya</a:t>
-            </a:r>
-            <a:r>
-              <a:rPr lang="en-ID" sz="1100" b="0" i="0" u="none" strike="noStrike" cap="none" dirty="0">
-                <a:solidFill>
-                  <a:srgbClr val="000000"/>
-                </a:solidFill>
-                <a:effectLst/>
-                <a:latin typeface="Arial"/>
-                <a:ea typeface="Arial"/>
-                <a:cs typeface="Arial"/>
-                <a:sym typeface="Arial"/>
-              </a:rPr>
-              <a:t>, </a:t>
-            </a:r>
-            <a:r>
-              <a:rPr lang="en-ID" sz="1100" b="0" i="0" u="none" strike="noStrike" cap="none" dirty="0" err="1">
-                <a:solidFill>
-                  <a:srgbClr val="000000"/>
-                </a:solidFill>
-                <a:effectLst/>
-                <a:latin typeface="Arial"/>
-                <a:ea typeface="Arial"/>
-                <a:cs typeface="Arial"/>
-                <a:sym typeface="Arial"/>
-              </a:rPr>
-              <a:t>MediBook</a:t>
-            </a:r>
-            <a:r>
-              <a:rPr lang="en-ID" sz="1100" b="0" i="0" u="none" strike="noStrike" cap="none" dirty="0">
-                <a:solidFill>
-                  <a:srgbClr val="000000"/>
-                </a:solidFill>
-                <a:effectLst/>
-                <a:latin typeface="Arial"/>
-                <a:ea typeface="Arial"/>
-                <a:cs typeface="Arial"/>
-                <a:sym typeface="Arial"/>
-              </a:rPr>
-              <a:t> API </a:t>
-            </a:r>
-            <a:r>
-              <a:rPr lang="en-ID" sz="1100" b="0" i="0" u="none" strike="noStrike" cap="none" dirty="0" err="1">
-                <a:solidFill>
-                  <a:srgbClr val="000000"/>
-                </a:solidFill>
-                <a:effectLst/>
-                <a:latin typeface="Arial"/>
-                <a:ea typeface="Arial"/>
-                <a:cs typeface="Arial"/>
-                <a:sym typeface="Arial"/>
-              </a:rPr>
-              <a:t>hadir</a:t>
-            </a:r>
-            <a:r>
-              <a:rPr lang="en-ID" sz="1100" b="0" i="0" u="none" strike="noStrike" cap="none" dirty="0">
-                <a:solidFill>
-                  <a:srgbClr val="000000"/>
-                </a:solidFill>
-                <a:effectLst/>
-                <a:latin typeface="Arial"/>
-                <a:ea typeface="Arial"/>
-                <a:cs typeface="Arial"/>
-                <a:sym typeface="Arial"/>
-              </a:rPr>
-              <a:t> </a:t>
-            </a:r>
-            <a:r>
-              <a:rPr lang="en-ID" sz="1100" b="0" i="0" u="none" strike="noStrike" cap="none" dirty="0" err="1">
-                <a:solidFill>
-                  <a:srgbClr val="000000"/>
-                </a:solidFill>
-                <a:effectLst/>
-                <a:latin typeface="Arial"/>
-                <a:ea typeface="Arial"/>
-                <a:cs typeface="Arial"/>
-                <a:sym typeface="Arial"/>
-              </a:rPr>
-              <a:t>dengan</a:t>
-            </a:r>
-            <a:r>
-              <a:rPr lang="en-ID" sz="1100" b="0" i="0" u="none" strike="noStrike" cap="none" dirty="0">
-                <a:solidFill>
-                  <a:srgbClr val="000000"/>
-                </a:solidFill>
-                <a:effectLst/>
-                <a:latin typeface="Arial"/>
-                <a:ea typeface="Arial"/>
-                <a:cs typeface="Arial"/>
-                <a:sym typeface="Arial"/>
-              </a:rPr>
-              <a:t> </a:t>
-            </a:r>
-            <a:r>
-              <a:rPr lang="en-ID" sz="1100" b="0" i="0" u="none" strike="noStrike" cap="none" dirty="0" err="1">
-                <a:solidFill>
-                  <a:srgbClr val="000000"/>
-                </a:solidFill>
-                <a:effectLst/>
-                <a:latin typeface="Arial"/>
-                <a:ea typeface="Arial"/>
-                <a:cs typeface="Arial"/>
-                <a:sym typeface="Arial"/>
-              </a:rPr>
-              <a:t>solusi</a:t>
-            </a:r>
-            <a:r>
-              <a:rPr lang="en-ID" sz="1100" b="0" i="0" u="none" strike="noStrike" cap="none" dirty="0">
-                <a:solidFill>
-                  <a:srgbClr val="000000"/>
-                </a:solidFill>
-                <a:effectLst/>
-                <a:latin typeface="Arial"/>
-                <a:ea typeface="Arial"/>
-                <a:cs typeface="Arial"/>
-                <a:sym typeface="Arial"/>
-              </a:rPr>
-              <a:t> </a:t>
-            </a:r>
-            <a:r>
-              <a:rPr lang="en-ID" sz="1100" b="0" i="0" u="none" strike="noStrike" cap="none" dirty="0" err="1">
-                <a:solidFill>
-                  <a:srgbClr val="000000"/>
-                </a:solidFill>
-                <a:effectLst/>
-                <a:latin typeface="Arial"/>
-                <a:ea typeface="Arial"/>
-                <a:cs typeface="Arial"/>
-                <a:sym typeface="Arial"/>
-              </a:rPr>
-              <a:t>arsitektur</a:t>
-            </a:r>
-            <a:r>
-              <a:rPr lang="en-ID" sz="1100" b="0" i="0" u="none" strike="noStrike" cap="none" dirty="0">
-                <a:solidFill>
-                  <a:srgbClr val="000000"/>
-                </a:solidFill>
-                <a:effectLst/>
-                <a:latin typeface="Arial"/>
-                <a:ea typeface="Arial"/>
-                <a:cs typeface="Arial"/>
-                <a:sym typeface="Arial"/>
-              </a:rPr>
-              <a:t> Enterprise: </a:t>
-            </a:r>
-            <a:r>
-              <a:rPr lang="en-ID" sz="1100" b="0" i="0" u="none" strike="noStrike" cap="none" dirty="0" err="1">
-                <a:solidFill>
-                  <a:srgbClr val="000000"/>
-                </a:solidFill>
-                <a:effectLst/>
-                <a:latin typeface="Arial"/>
-                <a:ea typeface="Arial"/>
-                <a:cs typeface="Arial"/>
-                <a:sym typeface="Arial"/>
-              </a:rPr>
-              <a:t>Sistem</a:t>
-            </a:r>
-            <a:r>
-              <a:rPr lang="en-ID" sz="1100" b="0" i="0" u="none" strike="noStrike" cap="none" dirty="0">
-                <a:solidFill>
-                  <a:srgbClr val="000000"/>
-                </a:solidFill>
-                <a:effectLst/>
-                <a:latin typeface="Arial"/>
-                <a:ea typeface="Arial"/>
-                <a:cs typeface="Arial"/>
-                <a:sym typeface="Arial"/>
-              </a:rPr>
-              <a:t> </a:t>
-            </a:r>
-            <a:r>
-              <a:rPr lang="en-ID" sz="1100" b="0" i="0" u="none" strike="noStrike" cap="none" dirty="0" err="1">
-                <a:solidFill>
-                  <a:srgbClr val="000000"/>
-                </a:solidFill>
-                <a:effectLst/>
-                <a:latin typeface="Arial"/>
-                <a:ea typeface="Arial"/>
-                <a:cs typeface="Arial"/>
-                <a:sym typeface="Arial"/>
-              </a:rPr>
-              <a:t>validasi</a:t>
-            </a:r>
-            <a:r>
-              <a:rPr lang="en-ID" sz="1100" b="0" i="0" u="none" strike="noStrike" cap="none" dirty="0">
-                <a:solidFill>
-                  <a:srgbClr val="000000"/>
-                </a:solidFill>
-                <a:effectLst/>
-                <a:latin typeface="Arial"/>
-                <a:ea typeface="Arial"/>
-                <a:cs typeface="Arial"/>
-                <a:sym typeface="Arial"/>
-              </a:rPr>
-              <a:t> </a:t>
-            </a:r>
-            <a:r>
-              <a:rPr lang="en-ID" sz="1100" b="0" i="0" u="none" strike="noStrike" cap="none" dirty="0" err="1">
-                <a:solidFill>
-                  <a:srgbClr val="000000"/>
-                </a:solidFill>
-                <a:effectLst/>
-                <a:latin typeface="Arial"/>
-                <a:ea typeface="Arial"/>
-                <a:cs typeface="Arial"/>
-                <a:sym typeface="Arial"/>
-              </a:rPr>
-              <a:t>kuota</a:t>
-            </a:r>
-            <a:r>
-              <a:rPr lang="en-ID" sz="1100" b="0" i="0" u="none" strike="noStrike" cap="none" dirty="0">
-                <a:solidFill>
-                  <a:srgbClr val="000000"/>
-                </a:solidFill>
-                <a:effectLst/>
-                <a:latin typeface="Arial"/>
-                <a:ea typeface="Arial"/>
-                <a:cs typeface="Arial"/>
-                <a:sym typeface="Arial"/>
-              </a:rPr>
-              <a:t> anti-</a:t>
-            </a:r>
-            <a:r>
-              <a:rPr lang="en-ID" sz="1100" b="0" i="0" u="none" strike="noStrike" cap="none" dirty="0" err="1">
-                <a:solidFill>
-                  <a:srgbClr val="000000"/>
-                </a:solidFill>
-                <a:effectLst/>
-                <a:latin typeface="Arial"/>
-                <a:ea typeface="Arial"/>
-                <a:cs typeface="Arial"/>
-                <a:sym typeface="Arial"/>
-              </a:rPr>
-              <a:t>bentrok</a:t>
-            </a:r>
-            <a:r>
-              <a:rPr lang="en-ID" sz="1100" b="0" i="0" u="none" strike="noStrike" cap="none" dirty="0">
-                <a:solidFill>
-                  <a:srgbClr val="000000"/>
-                </a:solidFill>
-                <a:effectLst/>
-                <a:latin typeface="Arial"/>
-                <a:ea typeface="Arial"/>
-                <a:cs typeface="Arial"/>
-                <a:sym typeface="Arial"/>
-              </a:rPr>
-              <a:t>, </a:t>
-            </a:r>
-            <a:r>
-              <a:rPr lang="en-ID" sz="1100" b="0" i="0" u="none" strike="noStrike" cap="none" dirty="0" err="1">
-                <a:solidFill>
-                  <a:srgbClr val="000000"/>
-                </a:solidFill>
-                <a:effectLst/>
-                <a:latin typeface="Arial"/>
-                <a:ea typeface="Arial"/>
-                <a:cs typeface="Arial"/>
-                <a:sym typeface="Arial"/>
-              </a:rPr>
-              <a:t>proteksi</a:t>
-            </a:r>
-            <a:r>
-              <a:rPr lang="en-ID" sz="1100" b="0" i="0" u="none" strike="noStrike" cap="none" dirty="0">
-                <a:solidFill>
-                  <a:srgbClr val="000000"/>
-                </a:solidFill>
-                <a:effectLst/>
-                <a:latin typeface="Arial"/>
-                <a:ea typeface="Arial"/>
-                <a:cs typeface="Arial"/>
-                <a:sym typeface="Arial"/>
-              </a:rPr>
-              <a:t> spam </a:t>
-            </a:r>
-            <a:r>
-              <a:rPr lang="en-ID" sz="1100" b="0" i="0" u="none" strike="noStrike" cap="none" dirty="0" err="1">
-                <a:solidFill>
-                  <a:srgbClr val="000000"/>
-                </a:solidFill>
-                <a:effectLst/>
-                <a:latin typeface="Arial"/>
-                <a:ea typeface="Arial"/>
-                <a:cs typeface="Arial"/>
-                <a:sym typeface="Arial"/>
-              </a:rPr>
-              <a:t>klik</a:t>
-            </a:r>
-            <a:r>
-              <a:rPr lang="en-ID" sz="1100" b="0" i="0" u="none" strike="noStrike" cap="none" dirty="0">
-                <a:solidFill>
-                  <a:srgbClr val="000000"/>
-                </a:solidFill>
-                <a:effectLst/>
-                <a:latin typeface="Arial"/>
-                <a:ea typeface="Arial"/>
-                <a:cs typeface="Arial"/>
-                <a:sym typeface="Arial"/>
-              </a:rPr>
-              <a:t> </a:t>
-            </a:r>
-            <a:r>
-              <a:rPr lang="en-ID" sz="1100" b="0" i="0" u="none" strike="noStrike" cap="none" dirty="0" err="1">
-                <a:solidFill>
-                  <a:srgbClr val="000000"/>
-                </a:solidFill>
-                <a:effectLst/>
-                <a:latin typeface="Arial"/>
-                <a:ea typeface="Arial"/>
-                <a:cs typeface="Arial"/>
-                <a:sym typeface="Arial"/>
-              </a:rPr>
-              <a:t>menggunakan</a:t>
-            </a:r>
-            <a:r>
-              <a:rPr lang="en-ID" sz="1100" b="0" i="0" u="none" strike="noStrike" cap="none" dirty="0">
-                <a:solidFill>
-                  <a:srgbClr val="000000"/>
-                </a:solidFill>
-                <a:effectLst/>
-                <a:latin typeface="Arial"/>
-                <a:ea typeface="Arial"/>
-                <a:cs typeface="Arial"/>
-                <a:sym typeface="Arial"/>
-              </a:rPr>
-              <a:t> In-Memory Cache, </a:t>
-            </a:r>
-            <a:r>
-              <a:rPr lang="en-ID" sz="1100" b="0" i="0" u="none" strike="noStrike" cap="none" dirty="0" err="1">
-                <a:solidFill>
-                  <a:srgbClr val="000000"/>
-                </a:solidFill>
-                <a:effectLst/>
-                <a:latin typeface="Arial"/>
-                <a:ea typeface="Arial"/>
-                <a:cs typeface="Arial"/>
-                <a:sym typeface="Arial"/>
-              </a:rPr>
-              <a:t>pembersih</a:t>
-            </a:r>
-            <a:r>
-              <a:rPr lang="en-ID" sz="1100" b="0" i="0" u="none" strike="noStrike" cap="none" dirty="0">
-                <a:solidFill>
-                  <a:srgbClr val="000000"/>
-                </a:solidFill>
-                <a:effectLst/>
-                <a:latin typeface="Arial"/>
-                <a:ea typeface="Arial"/>
-                <a:cs typeface="Arial"/>
-                <a:sym typeface="Arial"/>
-              </a:rPr>
-              <a:t> </a:t>
-            </a:r>
-            <a:r>
-              <a:rPr lang="en-ID" sz="1100" b="0" i="0" u="none" strike="noStrike" cap="none" dirty="0" err="1">
-                <a:solidFill>
-                  <a:srgbClr val="000000"/>
-                </a:solidFill>
-                <a:effectLst/>
-                <a:latin typeface="Arial"/>
-                <a:ea typeface="Arial"/>
-                <a:cs typeface="Arial"/>
-                <a:sym typeface="Arial"/>
-              </a:rPr>
-              <a:t>antrean</a:t>
-            </a:r>
-            <a:r>
-              <a:rPr lang="en-ID" sz="1100" b="0" i="0" u="none" strike="noStrike" cap="none" dirty="0">
-                <a:solidFill>
-                  <a:srgbClr val="000000"/>
-                </a:solidFill>
-                <a:effectLst/>
-                <a:latin typeface="Arial"/>
-                <a:ea typeface="Arial"/>
-                <a:cs typeface="Arial"/>
-                <a:sym typeface="Arial"/>
-              </a:rPr>
-              <a:t> </a:t>
-            </a:r>
-            <a:r>
-              <a:rPr lang="en-ID" sz="1100" b="0" i="0" u="none" strike="noStrike" cap="none" dirty="0" err="1">
-                <a:solidFill>
-                  <a:srgbClr val="000000"/>
-                </a:solidFill>
-                <a:effectLst/>
-                <a:latin typeface="Arial"/>
-                <a:ea typeface="Arial"/>
-                <a:cs typeface="Arial"/>
-                <a:sym typeface="Arial"/>
-              </a:rPr>
-              <a:t>otomatis</a:t>
-            </a:r>
-            <a:r>
-              <a:rPr lang="en-ID" sz="1100" b="0" i="0" u="none" strike="noStrike" cap="none" dirty="0">
-                <a:solidFill>
-                  <a:srgbClr val="000000"/>
-                </a:solidFill>
-                <a:effectLst/>
-                <a:latin typeface="Arial"/>
-                <a:ea typeface="Arial"/>
-                <a:cs typeface="Arial"/>
-                <a:sym typeface="Arial"/>
-              </a:rPr>
-              <a:t> </a:t>
-            </a:r>
-            <a:r>
-              <a:rPr lang="en-ID" sz="1100" b="0" i="0" u="none" strike="noStrike" cap="none" dirty="0" err="1">
-                <a:solidFill>
-                  <a:srgbClr val="000000"/>
-                </a:solidFill>
-                <a:effectLst/>
-                <a:latin typeface="Arial"/>
-                <a:ea typeface="Arial"/>
-                <a:cs typeface="Arial"/>
-                <a:sym typeface="Arial"/>
-              </a:rPr>
-              <a:t>jika</a:t>
-            </a:r>
-            <a:r>
-              <a:rPr lang="en-ID" sz="1100" b="0" i="0" u="none" strike="noStrike" cap="none" dirty="0">
-                <a:solidFill>
-                  <a:srgbClr val="000000"/>
-                </a:solidFill>
-                <a:effectLst/>
-                <a:latin typeface="Arial"/>
-                <a:ea typeface="Arial"/>
-                <a:cs typeface="Arial"/>
-                <a:sym typeface="Arial"/>
-              </a:rPr>
-              <a:t> </a:t>
-            </a:r>
-            <a:r>
-              <a:rPr lang="en-ID" sz="1100" b="0" i="0" u="none" strike="noStrike" cap="none" dirty="0" err="1">
-                <a:solidFill>
-                  <a:srgbClr val="000000"/>
-                </a:solidFill>
-                <a:effectLst/>
-                <a:latin typeface="Arial"/>
-                <a:ea typeface="Arial"/>
-                <a:cs typeface="Arial"/>
-                <a:sym typeface="Arial"/>
-              </a:rPr>
-              <a:t>pasien</a:t>
-            </a:r>
-            <a:r>
-              <a:rPr lang="en-ID" sz="1100" b="0" i="0" u="none" strike="noStrike" cap="none" dirty="0">
-                <a:solidFill>
-                  <a:srgbClr val="000000"/>
-                </a:solidFill>
-                <a:effectLst/>
-                <a:latin typeface="Arial"/>
-                <a:ea typeface="Arial"/>
-                <a:cs typeface="Arial"/>
-                <a:sym typeface="Arial"/>
-              </a:rPr>
-              <a:t> </a:t>
-            </a:r>
-            <a:r>
-              <a:rPr lang="en-ID" sz="1100" b="0" i="0" u="none" strike="noStrike" cap="none" dirty="0" err="1">
-                <a:solidFill>
-                  <a:srgbClr val="000000"/>
-                </a:solidFill>
-                <a:effectLst/>
-                <a:latin typeface="Arial"/>
-                <a:ea typeface="Arial"/>
-                <a:cs typeface="Arial"/>
-                <a:sym typeface="Arial"/>
-              </a:rPr>
-              <a:t>tidak</a:t>
-            </a:r>
-            <a:r>
-              <a:rPr lang="en-ID" sz="1100" b="0" i="0" u="none" strike="noStrike" cap="none" dirty="0">
-                <a:solidFill>
-                  <a:srgbClr val="000000"/>
-                </a:solidFill>
-                <a:effectLst/>
-                <a:latin typeface="Arial"/>
-                <a:ea typeface="Arial"/>
-                <a:cs typeface="Arial"/>
-                <a:sym typeface="Arial"/>
-              </a:rPr>
-              <a:t> </a:t>
-            </a:r>
-            <a:r>
-              <a:rPr lang="en-ID" sz="1100" b="0" i="0" u="none" strike="noStrike" cap="none" dirty="0" err="1">
-                <a:solidFill>
-                  <a:srgbClr val="000000"/>
-                </a:solidFill>
-                <a:effectLst/>
-                <a:latin typeface="Arial"/>
-                <a:ea typeface="Arial"/>
-                <a:cs typeface="Arial"/>
-                <a:sym typeface="Arial"/>
-              </a:rPr>
-              <a:t>membayar</a:t>
-            </a:r>
-            <a:r>
-              <a:rPr lang="en-ID" sz="1100" b="0" i="0" u="none" strike="noStrike" cap="none" dirty="0">
-                <a:solidFill>
-                  <a:srgbClr val="000000"/>
-                </a:solidFill>
-                <a:effectLst/>
-                <a:latin typeface="Arial"/>
-                <a:ea typeface="Arial"/>
-                <a:cs typeface="Arial"/>
-                <a:sym typeface="Arial"/>
-              </a:rPr>
-              <a:t> </a:t>
-            </a:r>
-            <a:r>
-              <a:rPr lang="en-ID" sz="1100" b="0" i="0" u="none" strike="noStrike" cap="none" dirty="0" err="1">
-                <a:solidFill>
-                  <a:srgbClr val="000000"/>
-                </a:solidFill>
-                <a:effectLst/>
-                <a:latin typeface="Arial"/>
-                <a:ea typeface="Arial"/>
-                <a:cs typeface="Arial"/>
-                <a:sym typeface="Arial"/>
-              </a:rPr>
-              <a:t>dalam</a:t>
-            </a:r>
-            <a:r>
-              <a:rPr lang="en-ID" sz="1100" b="0" i="0" u="none" strike="noStrike" cap="none" dirty="0">
-                <a:solidFill>
-                  <a:srgbClr val="000000"/>
-                </a:solidFill>
-                <a:effectLst/>
-                <a:latin typeface="Arial"/>
-                <a:ea typeface="Arial"/>
-                <a:cs typeface="Arial"/>
-                <a:sym typeface="Arial"/>
-              </a:rPr>
-              <a:t> 15 </a:t>
-            </a:r>
-            <a:r>
-              <a:rPr lang="en-ID" sz="1100" b="0" i="0" u="none" strike="noStrike" cap="none" dirty="0" err="1">
-                <a:solidFill>
-                  <a:srgbClr val="000000"/>
-                </a:solidFill>
-                <a:effectLst/>
-                <a:latin typeface="Arial"/>
-                <a:ea typeface="Arial"/>
-                <a:cs typeface="Arial"/>
-                <a:sym typeface="Arial"/>
-              </a:rPr>
-              <a:t>menit</a:t>
-            </a:r>
-            <a:r>
-              <a:rPr lang="en-ID" sz="1100" b="0" i="0" u="none" strike="noStrike" cap="none" dirty="0">
-                <a:solidFill>
-                  <a:srgbClr val="000000"/>
-                </a:solidFill>
-                <a:effectLst/>
-                <a:latin typeface="Arial"/>
-                <a:ea typeface="Arial"/>
-                <a:cs typeface="Arial"/>
-                <a:sym typeface="Arial"/>
-              </a:rPr>
-              <a:t>, dan </a:t>
-            </a:r>
-            <a:r>
-              <a:rPr lang="en-ID" sz="1100" b="0" i="0" u="none" strike="noStrike" cap="none" dirty="0" err="1">
-                <a:solidFill>
-                  <a:srgbClr val="000000"/>
-                </a:solidFill>
-                <a:effectLst/>
-                <a:latin typeface="Arial"/>
-                <a:ea typeface="Arial"/>
-                <a:cs typeface="Arial"/>
-                <a:sym typeface="Arial"/>
-              </a:rPr>
-              <a:t>kepatuhan</a:t>
-            </a:r>
-            <a:r>
-              <a:rPr lang="en-ID" sz="1100" b="0" i="0" u="none" strike="noStrike" cap="none" dirty="0">
-                <a:solidFill>
-                  <a:srgbClr val="000000"/>
-                </a:solidFill>
-                <a:effectLst/>
-                <a:latin typeface="Arial"/>
-                <a:ea typeface="Arial"/>
-                <a:cs typeface="Arial"/>
-                <a:sym typeface="Arial"/>
-              </a:rPr>
-              <a:t> </a:t>
-            </a:r>
-            <a:r>
-              <a:rPr lang="en-ID" sz="1100" b="0" i="0" u="none" strike="noStrike" cap="none" dirty="0" err="1">
-                <a:solidFill>
-                  <a:srgbClr val="000000"/>
-                </a:solidFill>
-                <a:effectLst/>
-                <a:latin typeface="Arial"/>
-                <a:ea typeface="Arial"/>
-                <a:cs typeface="Arial"/>
-                <a:sym typeface="Arial"/>
-              </a:rPr>
-              <a:t>pencatatan</a:t>
-            </a:r>
-            <a:r>
-              <a:rPr lang="en-ID" sz="1100" b="0" i="0" u="none" strike="noStrike" cap="none" dirty="0">
-                <a:solidFill>
-                  <a:srgbClr val="000000"/>
-                </a:solidFill>
-                <a:effectLst/>
-                <a:latin typeface="Arial"/>
-                <a:ea typeface="Arial"/>
-                <a:cs typeface="Arial"/>
-                <a:sym typeface="Arial"/>
-              </a:rPr>
-              <a:t> </a:t>
-            </a:r>
-            <a:r>
-              <a:rPr lang="en-ID" sz="1100" b="0" i="0" u="none" strike="noStrike" cap="none" dirty="0" err="1">
-                <a:solidFill>
-                  <a:srgbClr val="000000"/>
-                </a:solidFill>
-                <a:effectLst/>
-                <a:latin typeface="Arial"/>
-                <a:ea typeface="Arial"/>
-                <a:cs typeface="Arial"/>
-                <a:sym typeface="Arial"/>
-              </a:rPr>
-              <a:t>rekam</a:t>
-            </a:r>
-            <a:r>
-              <a:rPr lang="en-ID" sz="1100" b="0" i="0" u="none" strike="noStrike" cap="none" dirty="0">
-                <a:solidFill>
-                  <a:srgbClr val="000000"/>
-                </a:solidFill>
-                <a:effectLst/>
-                <a:latin typeface="Arial"/>
-                <a:ea typeface="Arial"/>
-                <a:cs typeface="Arial"/>
-                <a:sym typeface="Arial"/>
-              </a:rPr>
-              <a:t> </a:t>
-            </a:r>
-            <a:r>
-              <a:rPr lang="en-ID" sz="1100" b="0" i="0" u="none" strike="noStrike" cap="none" dirty="0" err="1">
-                <a:solidFill>
-                  <a:srgbClr val="000000"/>
-                </a:solidFill>
-                <a:effectLst/>
-                <a:latin typeface="Arial"/>
-                <a:ea typeface="Arial"/>
-                <a:cs typeface="Arial"/>
-                <a:sym typeface="Arial"/>
-              </a:rPr>
-              <a:t>medis</a:t>
-            </a:r>
-            <a:r>
-              <a:rPr lang="en-ID" sz="1100" b="0" i="0" u="none" strike="noStrike" cap="none" dirty="0">
-                <a:solidFill>
-                  <a:srgbClr val="000000"/>
-                </a:solidFill>
-                <a:effectLst/>
-                <a:latin typeface="Arial"/>
-                <a:ea typeface="Arial"/>
-                <a:cs typeface="Arial"/>
-                <a:sym typeface="Arial"/>
-              </a:rPr>
-              <a:t> </a:t>
-            </a:r>
-            <a:r>
-              <a:rPr lang="en-ID" sz="1100" b="0" i="0" u="none" strike="noStrike" cap="none" dirty="0" err="1">
-                <a:solidFill>
-                  <a:srgbClr val="000000"/>
-                </a:solidFill>
-                <a:effectLst/>
-                <a:latin typeface="Arial"/>
-                <a:ea typeface="Arial"/>
-                <a:cs typeface="Arial"/>
-                <a:sym typeface="Arial"/>
-              </a:rPr>
-              <a:t>menggunakan</a:t>
-            </a:r>
-            <a:r>
-              <a:rPr lang="en-ID" sz="1100" b="0" i="0" u="none" strike="noStrike" cap="none" dirty="0">
-                <a:solidFill>
-                  <a:srgbClr val="000000"/>
-                </a:solidFill>
-                <a:effectLst/>
-                <a:latin typeface="Arial"/>
-                <a:ea typeface="Arial"/>
-                <a:cs typeface="Arial"/>
-                <a:sym typeface="Arial"/>
-              </a:rPr>
-              <a:t> log audit</a:t>
-            </a:r>
-          </a:p>
-          <a:p>
             <a:pPr marL="0" lvl="0" indent="0" algn="l" rtl="0">
               <a:spcBef>
                 <a:spcPts val="0"/>
@@ -5555,7 +1416,7 @@
               </a:spcAft>
               <a:buNone/>
             </a:pPr>
-            <a:endParaRPr dirty="0"/>
+            <a:endParaRPr/>
           </a:p>
         </p:txBody>
       </p:sp>
@@ -16818,7 +12679,7 @@
         <p:spPr>
           <a:xfrm>
             <a:off x="581025" y="1080045"/>
-            <a:ext cx="11029950" cy="4773908"/>
+            <a:ext cx="11029950" cy="2995612"/>
           </a:xfrm>
           <a:prstGeom prst="roundRect">
             <a:avLst>
@@ -16851,816 +12712,6 @@
           </a:bodyPr>
           <a:lstStyle/>
           <a:p>
-            <a:r>
-              <a:rPr lang="en-ID" b="1" dirty="0"/>
-              <a:t>1. 🌐 Akses Publik (</a:t>
-            </a:r>
-            <a:r>
-              <a:rPr lang="en-ID" b="1" dirty="0" err="1"/>
-              <a:t>Tanpa</a:t>
-            </a:r>
-            <a:r>
-              <a:rPr lang="en-ID" b="1" dirty="0"/>
-              <a:t> Token)</a:t>
-            </a:r>
-            <a:endParaRPr lang="en-ID" dirty="0"/>
-          </a:p>
-          <a:p>
-            <a:pPr lvl="4"/>
-            <a:r>
-              <a:rPr lang="en-ID" dirty="0"/>
-              <a:t>	POST /</a:t>
-            </a:r>
-            <a:r>
-              <a:rPr lang="en-ID" dirty="0" err="1"/>
-              <a:t>api</a:t>
-            </a:r>
-            <a:r>
-              <a:rPr lang="en-ID" dirty="0"/>
-              <a:t>/auth/register : </a:t>
-            </a:r>
-            <a:r>
-              <a:rPr lang="en-ID" dirty="0" err="1"/>
-              <a:t>Mendaftarkan</a:t>
-            </a:r>
-            <a:r>
-              <a:rPr lang="en-ID" dirty="0"/>
-              <a:t> </a:t>
-            </a:r>
-            <a:r>
-              <a:rPr lang="en-ID" dirty="0" err="1"/>
-              <a:t>akun</a:t>
-            </a:r>
-            <a:r>
-              <a:rPr lang="en-ID" dirty="0"/>
-              <a:t> </a:t>
-            </a:r>
-            <a:r>
-              <a:rPr lang="en-ID" dirty="0" err="1"/>
-              <a:t>pasien</a:t>
-            </a:r>
-            <a:r>
-              <a:rPr lang="en-ID" dirty="0"/>
-              <a:t> </a:t>
-            </a:r>
-            <a:r>
-              <a:rPr lang="en-ID" dirty="0" err="1"/>
-              <a:t>baru</a:t>
-            </a:r>
-            <a:r>
-              <a:rPr lang="en-ID" dirty="0"/>
-              <a:t>.</a:t>
-            </a:r>
-          </a:p>
-          <a:p>
-            <a:pPr lvl="4"/>
-            <a:r>
-              <a:rPr lang="en-ID" dirty="0"/>
-              <a:t>	POST /</a:t>
-            </a:r>
-            <a:r>
-              <a:rPr lang="en-ID" dirty="0" err="1"/>
-              <a:t>api</a:t>
-            </a:r>
-            <a:r>
-              <a:rPr lang="en-ID" dirty="0"/>
-              <a:t>/auth/login : </a:t>
-            </a:r>
-            <a:r>
-              <a:rPr lang="en-ID" dirty="0" err="1"/>
-              <a:t>Autentikasi</a:t>
-            </a:r>
-            <a:r>
-              <a:rPr lang="en-ID" dirty="0"/>
-              <a:t> dan </a:t>
-            </a:r>
-            <a:r>
-              <a:rPr lang="en-ID" dirty="0" err="1"/>
-              <a:t>penerbitan</a:t>
-            </a:r>
-            <a:r>
-              <a:rPr lang="en-ID" dirty="0"/>
-              <a:t> token JWT.</a:t>
-            </a:r>
-          </a:p>
-          <a:p>
-            <a:pPr lvl="4"/>
-            <a:r>
-              <a:rPr lang="en-ID" dirty="0"/>
-              <a:t>	GET /</a:t>
-            </a:r>
-            <a:r>
-              <a:rPr lang="en-ID" dirty="0" err="1"/>
-              <a:t>api</a:t>
-            </a:r>
-            <a:r>
-              <a:rPr lang="en-ID" dirty="0"/>
-              <a:t>/</a:t>
-            </a:r>
-            <a:r>
-              <a:rPr lang="en-ID" dirty="0" err="1"/>
-              <a:t>catalog</a:t>
-            </a:r>
-            <a:r>
-              <a:rPr lang="en-ID" dirty="0"/>
-              <a:t>/doctors : </a:t>
-            </a:r>
-            <a:r>
-              <a:rPr lang="en-ID" dirty="0" err="1"/>
-              <a:t>Melihat</a:t>
-            </a:r>
-            <a:r>
-              <a:rPr lang="en-ID" dirty="0"/>
-              <a:t> </a:t>
-            </a:r>
-            <a:r>
-              <a:rPr lang="en-ID" dirty="0" err="1"/>
-              <a:t>katalog</a:t>
-            </a:r>
-            <a:r>
-              <a:rPr lang="en-ID" dirty="0"/>
-              <a:t> </a:t>
-            </a:r>
-            <a:r>
-              <a:rPr lang="en-ID" dirty="0" err="1"/>
-              <a:t>dokter</a:t>
-            </a:r>
-            <a:r>
-              <a:rPr lang="en-ID" dirty="0"/>
-              <a:t> </a:t>
-            </a:r>
-            <a:r>
-              <a:rPr lang="en-ID" dirty="0" err="1"/>
-              <a:t>beserta</a:t>
-            </a:r>
-            <a:r>
-              <a:rPr lang="en-ID" dirty="0"/>
-              <a:t> </a:t>
-            </a:r>
-            <a:r>
-              <a:rPr lang="en-ID" dirty="0" err="1"/>
-              <a:t>fitur</a:t>
-            </a:r>
-            <a:r>
-              <a:rPr lang="en-ID" dirty="0"/>
-              <a:t> </a:t>
-            </a:r>
-            <a:r>
-              <a:rPr lang="en-ID" dirty="0" err="1"/>
-              <a:t>pencarian</a:t>
-            </a:r>
-            <a:r>
-              <a:rPr lang="en-ID" dirty="0"/>
-              <a:t> dan </a:t>
-            </a:r>
-            <a:r>
-              <a:rPr lang="en-ID" dirty="0" err="1"/>
-              <a:t>paginasi</a:t>
-            </a:r>
-            <a:r>
-              <a:rPr lang="en-ID" dirty="0"/>
-              <a:t>.</a:t>
-            </a:r>
-          </a:p>
-          <a:p>
-            <a:pPr lvl="4"/>
-            <a:r>
-              <a:rPr lang="en-ID" dirty="0"/>
-              <a:t>	GET /</a:t>
-            </a:r>
-            <a:r>
-              <a:rPr lang="en-ID" dirty="0" err="1"/>
-              <a:t>api</a:t>
-            </a:r>
-            <a:r>
-              <a:rPr lang="en-ID" dirty="0"/>
-              <a:t>/</a:t>
-            </a:r>
-            <a:r>
-              <a:rPr lang="en-ID" dirty="0" err="1"/>
-              <a:t>catalog</a:t>
-            </a:r>
-            <a:r>
-              <a:rPr lang="en-ID" dirty="0"/>
-              <a:t>/services : </a:t>
-            </a:r>
-            <a:r>
-              <a:rPr lang="en-ID" dirty="0" err="1"/>
-              <a:t>Melihat</a:t>
-            </a:r>
-            <a:r>
-              <a:rPr lang="en-ID" dirty="0"/>
-              <a:t> daftar </a:t>
-            </a:r>
-            <a:r>
-              <a:rPr lang="en-ID" dirty="0" err="1"/>
-              <a:t>layanan</a:t>
-            </a:r>
-            <a:r>
-              <a:rPr lang="en-ID" dirty="0"/>
-              <a:t> </a:t>
-            </a:r>
-            <a:r>
-              <a:rPr lang="en-ID" dirty="0" err="1"/>
-              <a:t>poliklinik</a:t>
-            </a:r>
-            <a:r>
-              <a:rPr lang="en-ID" dirty="0"/>
-              <a:t>/</a:t>
-            </a:r>
-            <a:r>
-              <a:rPr lang="en-ID" dirty="0" err="1"/>
-              <a:t>penunjang</a:t>
-            </a:r>
-            <a:r>
-              <a:rPr lang="en-ID" dirty="0"/>
-              <a:t> </a:t>
-            </a:r>
-            <a:r>
-              <a:rPr lang="en-ID" dirty="0" err="1"/>
-              <a:t>medis</a:t>
-            </a:r>
-            <a:r>
-              <a:rPr lang="en-ID" dirty="0"/>
-              <a:t>.</a:t>
-            </a:r>
-          </a:p>
-          <a:p>
-            <a:r>
-              <a:rPr lang="en-ID" b="1" dirty="0"/>
-              <a:t>2. 🧑‍⚕️ Akses </a:t>
-            </a:r>
-            <a:r>
-              <a:rPr lang="en-ID" b="1" dirty="0" err="1"/>
-              <a:t>Pasien</a:t>
-            </a:r>
-            <a:r>
-              <a:rPr lang="en-ID" b="1" dirty="0"/>
-              <a:t> (Role: PATIENT)</a:t>
-            </a:r>
-            <a:endParaRPr lang="en-ID" dirty="0"/>
-          </a:p>
-          <a:p>
-            <a:r>
-              <a:rPr lang="en-ID" dirty="0"/>
-              <a:t>	GET /</a:t>
-            </a:r>
-            <a:r>
-              <a:rPr lang="en-ID" dirty="0" err="1"/>
-              <a:t>api</a:t>
-            </a:r>
-            <a:r>
-              <a:rPr lang="en-ID" dirty="0"/>
-              <a:t>/patients/me/profile : </a:t>
-            </a:r>
-            <a:r>
-              <a:rPr lang="en-ID" dirty="0" err="1"/>
-              <a:t>Melihat</a:t>
-            </a:r>
-            <a:r>
-              <a:rPr lang="en-ID" dirty="0"/>
-              <a:t> biodata </a:t>
-            </a:r>
-            <a:r>
-              <a:rPr lang="en-ID" dirty="0" err="1"/>
-              <a:t>rekam</a:t>
-            </a:r>
-            <a:r>
-              <a:rPr lang="en-ID" dirty="0"/>
-              <a:t> </a:t>
-            </a:r>
-            <a:r>
-              <a:rPr lang="en-ID" dirty="0" err="1"/>
-              <a:t>medis</a:t>
-            </a:r>
-            <a:r>
-              <a:rPr lang="en-ID" dirty="0"/>
-              <a:t> </a:t>
-            </a:r>
-            <a:r>
-              <a:rPr lang="en-ID" dirty="0" err="1"/>
-              <a:t>diri</a:t>
-            </a:r>
-            <a:r>
-              <a:rPr lang="en-ID" dirty="0"/>
-              <a:t> </a:t>
-            </a:r>
-            <a:r>
-              <a:rPr lang="en-ID" dirty="0" err="1"/>
-              <a:t>sendiri</a:t>
-            </a:r>
-            <a:r>
-              <a:rPr lang="en-ID" dirty="0"/>
-              <a:t>.</a:t>
-            </a:r>
-          </a:p>
-          <a:p>
-            <a:r>
-              <a:rPr lang="en-ID" dirty="0"/>
-              <a:t>	GET /</a:t>
-            </a:r>
-            <a:r>
-              <a:rPr lang="en-ID" dirty="0" err="1"/>
-              <a:t>api</a:t>
-            </a:r>
-            <a:r>
-              <a:rPr lang="en-ID" dirty="0"/>
-              <a:t>/patients/me/bookings : </a:t>
-            </a:r>
-            <a:r>
-              <a:rPr lang="en-ID" dirty="0" err="1"/>
-              <a:t>Melihat</a:t>
-            </a:r>
-            <a:r>
-              <a:rPr lang="en-ID" dirty="0"/>
-              <a:t> </a:t>
-            </a:r>
-            <a:r>
-              <a:rPr lang="en-ID" dirty="0" err="1"/>
-              <a:t>riwayat</a:t>
-            </a:r>
-            <a:r>
-              <a:rPr lang="en-ID" dirty="0"/>
-              <a:t> </a:t>
-            </a:r>
-            <a:r>
-              <a:rPr lang="en-ID" dirty="0" err="1"/>
-              <a:t>seluruh</a:t>
-            </a:r>
-            <a:r>
-              <a:rPr lang="en-ID" dirty="0"/>
-              <a:t> </a:t>
-            </a:r>
-            <a:r>
-              <a:rPr lang="en-ID" dirty="0" err="1"/>
-              <a:t>kunjungan</a:t>
-            </a:r>
-            <a:r>
-              <a:rPr lang="en-ID" dirty="0"/>
-              <a:t> dan status booking.</a:t>
-            </a:r>
-          </a:p>
-          <a:p>
-            <a:r>
-              <a:rPr lang="en-ID" dirty="0"/>
-              <a:t>	POST /</a:t>
-            </a:r>
-            <a:r>
-              <a:rPr lang="en-ID" dirty="0" err="1"/>
-              <a:t>api</a:t>
-            </a:r>
-            <a:r>
-              <a:rPr lang="en-ID" dirty="0"/>
-              <a:t>/bookings : </a:t>
-            </a:r>
-            <a:r>
-              <a:rPr lang="en-ID" dirty="0" err="1"/>
-              <a:t>Melakukan</a:t>
-            </a:r>
-            <a:r>
-              <a:rPr lang="en-ID" dirty="0"/>
-              <a:t> </a:t>
-            </a:r>
-            <a:r>
-              <a:rPr lang="en-ID" dirty="0" err="1"/>
-              <a:t>pendaftaran</a:t>
-            </a:r>
-            <a:r>
-              <a:rPr lang="en-ID" dirty="0"/>
-              <a:t>/</a:t>
-            </a:r>
-            <a:r>
-              <a:rPr lang="en-ID" dirty="0" err="1"/>
-              <a:t>reservasi</a:t>
-            </a:r>
-            <a:r>
-              <a:rPr lang="en-ID" dirty="0"/>
-              <a:t> </a:t>
-            </a:r>
-            <a:r>
-              <a:rPr lang="en-ID" dirty="0" err="1"/>
-              <a:t>jadwal</a:t>
-            </a:r>
-            <a:r>
-              <a:rPr lang="en-ID" dirty="0"/>
-              <a:t> (</a:t>
-            </a:r>
-            <a:r>
-              <a:rPr lang="en-ID" dirty="0" err="1"/>
-              <a:t>mendukung</a:t>
-            </a:r>
-            <a:r>
-              <a:rPr lang="en-ID" dirty="0"/>
-              <a:t> upload file).	</a:t>
-            </a:r>
-          </a:p>
-          <a:p>
-            <a:r>
-              <a:rPr lang="en-ID" dirty="0"/>
-              <a:t>	POST /</a:t>
-            </a:r>
-            <a:r>
-              <a:rPr lang="en-ID" dirty="0" err="1"/>
-              <a:t>api</a:t>
-            </a:r>
-            <a:r>
-              <a:rPr lang="en-ID" dirty="0"/>
-              <a:t>/bookings/{id}/pay : </a:t>
-            </a:r>
-            <a:r>
-              <a:rPr lang="en-ID" dirty="0" err="1"/>
-              <a:t>Membayar</a:t>
-            </a:r>
-            <a:r>
-              <a:rPr lang="en-ID" dirty="0"/>
-              <a:t> </a:t>
-            </a:r>
-            <a:r>
-              <a:rPr lang="en-ID" dirty="0" err="1"/>
-              <a:t>tagihan</a:t>
-            </a:r>
-            <a:r>
-              <a:rPr lang="en-ID" dirty="0"/>
-              <a:t> booking (</a:t>
-            </a:r>
-            <a:r>
-              <a:rPr lang="en-ID" dirty="0" err="1"/>
-              <a:t>simulasi</a:t>
-            </a:r>
-            <a:r>
-              <a:rPr lang="en-ID" dirty="0"/>
-              <a:t> </a:t>
-            </a:r>
-            <a:r>
-              <a:rPr lang="en-ID" i="1" dirty="0"/>
-              <a:t>sandbox</a:t>
-            </a:r>
-            <a:r>
-              <a:rPr lang="en-ID" dirty="0"/>
-              <a:t>).</a:t>
-            </a:r>
-          </a:p>
-          <a:p>
-            <a:r>
-              <a:rPr lang="en-ID" dirty="0"/>
-              <a:t>	POST /</a:t>
-            </a:r>
-            <a:r>
-              <a:rPr lang="en-ID" dirty="0" err="1"/>
-              <a:t>api</a:t>
-            </a:r>
-            <a:r>
-              <a:rPr lang="en-ID" dirty="0"/>
-              <a:t>/bookings/{id}/reviews : </a:t>
-            </a:r>
-            <a:r>
-              <a:rPr lang="en-ID" dirty="0" err="1"/>
-              <a:t>Memberikan</a:t>
-            </a:r>
-            <a:r>
-              <a:rPr lang="en-ID" dirty="0"/>
-              <a:t> </a:t>
-            </a:r>
-            <a:r>
-              <a:rPr lang="en-ID" dirty="0" err="1"/>
-              <a:t>ulasan</a:t>
-            </a:r>
-            <a:r>
-              <a:rPr lang="en-ID" dirty="0"/>
-              <a:t> dan rating pada </a:t>
-            </a:r>
-            <a:r>
-              <a:rPr lang="en-ID" dirty="0" err="1"/>
-              <a:t>pelayanan</a:t>
-            </a:r>
-            <a:r>
-              <a:rPr lang="en-ID" dirty="0"/>
-              <a:t>.</a:t>
-            </a:r>
-          </a:p>
-          <a:p>
-            <a:r>
-              <a:rPr lang="en-ID" b="1" dirty="0"/>
-              <a:t>3. 🩺 Akses Dokter (Role: DOCTOR)</a:t>
-            </a:r>
-            <a:endParaRPr lang="en-ID" dirty="0"/>
-          </a:p>
-          <a:p>
-            <a:r>
-              <a:rPr lang="en-ID" dirty="0"/>
-              <a:t>	GET /</a:t>
-            </a:r>
-            <a:r>
-              <a:rPr lang="en-ID" dirty="0" err="1"/>
-              <a:t>api</a:t>
-            </a:r>
-            <a:r>
-              <a:rPr lang="en-ID" dirty="0"/>
-              <a:t>/doctor-panel/bookings : </a:t>
-            </a:r>
-            <a:r>
-              <a:rPr lang="en-ID" dirty="0" err="1"/>
-              <a:t>Memantau</a:t>
-            </a:r>
-            <a:r>
-              <a:rPr lang="en-ID" dirty="0"/>
-              <a:t> daftar </a:t>
-            </a:r>
-            <a:r>
-              <a:rPr lang="en-ID" dirty="0" err="1"/>
-              <a:t>pasien</a:t>
-            </a:r>
-            <a:r>
-              <a:rPr lang="en-ID" dirty="0"/>
-              <a:t> yang antre pada </a:t>
-            </a:r>
-            <a:r>
-              <a:rPr lang="en-ID" dirty="0" err="1"/>
-              <a:t>jadwal</a:t>
-            </a:r>
-            <a:r>
-              <a:rPr lang="en-ID" dirty="0"/>
-              <a:t> </a:t>
-            </a:r>
-            <a:r>
-              <a:rPr lang="en-ID" dirty="0" err="1"/>
-              <a:t>hari</a:t>
-            </a:r>
-            <a:r>
-              <a:rPr lang="en-ID" dirty="0"/>
-              <a:t> </a:t>
-            </a:r>
-            <a:r>
-              <a:rPr lang="en-ID" dirty="0" err="1"/>
-              <a:t>ini</a:t>
-            </a:r>
-            <a:r>
-              <a:rPr lang="en-ID" dirty="0"/>
-              <a:t>.</a:t>
-            </a:r>
-          </a:p>
-          <a:p>
-            <a:r>
-              <a:rPr lang="en-ID" dirty="0"/>
-              <a:t>	PATCH /</a:t>
-            </a:r>
-            <a:r>
-              <a:rPr lang="en-ID" dirty="0" err="1"/>
-              <a:t>api</a:t>
-            </a:r>
-            <a:r>
-              <a:rPr lang="en-ID" dirty="0"/>
-              <a:t>/doctor-panel/bookings/{id}/status : </a:t>
-            </a:r>
-            <a:r>
-              <a:rPr lang="en-ID" dirty="0" err="1"/>
-              <a:t>Memanggil</a:t>
-            </a:r>
-            <a:r>
-              <a:rPr lang="en-ID" dirty="0"/>
-              <a:t> </a:t>
-            </a:r>
-            <a:r>
-              <a:rPr lang="en-ID" dirty="0" err="1"/>
-              <a:t>pasien</a:t>
-            </a:r>
-            <a:r>
-              <a:rPr lang="en-ID" dirty="0"/>
-              <a:t> dan </a:t>
-            </a:r>
-            <a:r>
-              <a:rPr lang="en-ID" dirty="0" err="1"/>
-              <a:t>mengubah</a:t>
-            </a:r>
-            <a:r>
-              <a:rPr lang="en-ID" dirty="0"/>
-              <a:t> status </a:t>
-            </a:r>
-            <a:r>
-              <a:rPr lang="en-ID" dirty="0" err="1"/>
-              <a:t>pemeriksaan</a:t>
-            </a:r>
-            <a:r>
-              <a:rPr lang="en-ID" dirty="0"/>
-              <a:t> 	(IN_PROGRESS </a:t>
-            </a:r>
-            <a:r>
-              <a:rPr lang="en-ID" dirty="0" err="1"/>
-              <a:t>hingga</a:t>
-            </a:r>
-            <a:r>
-              <a:rPr lang="en-ID" dirty="0"/>
-              <a:t> COMPLETED).</a:t>
-            </a:r>
-          </a:p>
-          <a:p>
-            <a:r>
-              <a:rPr lang="en-ID" b="1" dirty="0"/>
-              <a:t>4. 👑 Akses Administrator (Role: ADMIN)</a:t>
-            </a:r>
-            <a:endParaRPr lang="en-ID" dirty="0"/>
-          </a:p>
-          <a:p>
-            <a:r>
-              <a:rPr lang="en-ID" dirty="0"/>
-              <a:t>	POST, PUT, DELETE /</a:t>
-            </a:r>
-            <a:r>
-              <a:rPr lang="en-ID" dirty="0" err="1"/>
-              <a:t>api</a:t>
-            </a:r>
-            <a:r>
-              <a:rPr lang="en-ID" dirty="0"/>
-              <a:t>/doctors : </a:t>
-            </a:r>
-            <a:r>
-              <a:rPr lang="en-ID" dirty="0" err="1"/>
-              <a:t>Mengelola</a:t>
-            </a:r>
-            <a:r>
-              <a:rPr lang="en-ID" dirty="0"/>
-              <a:t> data master </a:t>
-            </a:r>
-            <a:r>
-              <a:rPr lang="en-ID" dirty="0" err="1"/>
-              <a:t>profil</a:t>
-            </a:r>
-            <a:r>
-              <a:rPr lang="en-ID" dirty="0"/>
-              <a:t> Dokter.</a:t>
-            </a:r>
-          </a:p>
-          <a:p>
-            <a:r>
-              <a:rPr lang="en-ID" dirty="0"/>
-              <a:t>	POST, PUT, DELETE /</a:t>
-            </a:r>
-            <a:r>
-              <a:rPr lang="en-ID" dirty="0" err="1"/>
-              <a:t>api</a:t>
-            </a:r>
-            <a:r>
-              <a:rPr lang="en-ID" dirty="0"/>
-              <a:t>/services : </a:t>
-            </a:r>
-            <a:r>
-              <a:rPr lang="en-ID" dirty="0" err="1"/>
-              <a:t>Mengelola</a:t>
-            </a:r>
-            <a:r>
-              <a:rPr lang="en-ID" dirty="0"/>
-              <a:t> data master </a:t>
-            </a:r>
-            <a:r>
-              <a:rPr lang="en-ID" dirty="0" err="1"/>
-              <a:t>Layanan</a:t>
-            </a:r>
-            <a:r>
-              <a:rPr lang="en-ID" dirty="0"/>
-              <a:t> Rumah Sakit.</a:t>
-            </a:r>
-          </a:p>
-          <a:p>
-            <a:r>
-              <a:rPr lang="en-ID" dirty="0"/>
-              <a:t>	POST, PUT, DELETE /</a:t>
-            </a:r>
-            <a:r>
-              <a:rPr lang="en-ID" dirty="0" err="1"/>
-              <a:t>api</a:t>
-            </a:r>
-            <a:r>
-              <a:rPr lang="en-ID" dirty="0"/>
-              <a:t>/schedules : </a:t>
-            </a:r>
-            <a:r>
-              <a:rPr lang="en-ID" dirty="0" err="1"/>
-              <a:t>Mengatur</a:t>
-            </a:r>
-            <a:r>
-              <a:rPr lang="en-ID" dirty="0"/>
-              <a:t> </a:t>
-            </a:r>
-            <a:r>
-              <a:rPr lang="en-ID" dirty="0" err="1"/>
-              <a:t>jadwal</a:t>
-            </a:r>
-            <a:r>
-              <a:rPr lang="en-ID" dirty="0"/>
-              <a:t> </a:t>
-            </a:r>
-            <a:r>
-              <a:rPr lang="en-ID" dirty="0" err="1"/>
-              <a:t>praktek</a:t>
-            </a:r>
-            <a:r>
-              <a:rPr lang="en-ID" dirty="0"/>
-              <a:t> </a:t>
-            </a:r>
-            <a:r>
-              <a:rPr lang="en-ID" dirty="0" err="1"/>
-              <a:t>beserta</a:t>
-            </a:r>
-            <a:r>
-              <a:rPr lang="en-ID" dirty="0"/>
-              <a:t> </a:t>
-            </a:r>
-            <a:r>
-              <a:rPr lang="en-ID" dirty="0" err="1"/>
-              <a:t>kuota</a:t>
-            </a:r>
-            <a:r>
-              <a:rPr lang="en-ID" dirty="0"/>
-              <a:t> </a:t>
-            </a:r>
-            <a:r>
-              <a:rPr lang="en-ID" dirty="0" err="1"/>
-              <a:t>harian</a:t>
-            </a:r>
-            <a:r>
-              <a:rPr lang="en-ID" dirty="0"/>
-              <a:t> </a:t>
-            </a:r>
-            <a:r>
-              <a:rPr lang="en-ID" dirty="0" err="1"/>
-              <a:t>dokter</a:t>
-            </a:r>
-            <a:r>
-              <a:rPr lang="en-ID" dirty="0"/>
-              <a:t>.</a:t>
-            </a:r>
-          </a:p>
-          <a:p>
-            <a:r>
-              <a:rPr lang="en-ID" dirty="0"/>
-              <a:t>	GET /</a:t>
-            </a:r>
-            <a:r>
-              <a:rPr lang="en-ID" dirty="0" err="1"/>
-              <a:t>api</a:t>
-            </a:r>
-            <a:r>
-              <a:rPr lang="en-ID" dirty="0"/>
-              <a:t>/reports/finance : </a:t>
-            </a:r>
-            <a:r>
-              <a:rPr lang="en-ID" dirty="0" err="1"/>
-              <a:t>Mengakses</a:t>
-            </a:r>
-            <a:r>
-              <a:rPr lang="en-ID" dirty="0"/>
-              <a:t> </a:t>
-            </a:r>
-            <a:r>
-              <a:rPr lang="en-ID" dirty="0" err="1"/>
-              <a:t>laporan</a:t>
-            </a:r>
-            <a:r>
-              <a:rPr lang="en-ID" dirty="0"/>
-              <a:t> </a:t>
-            </a:r>
-            <a:r>
-              <a:rPr lang="en-ID" dirty="0" err="1"/>
-              <a:t>ringkasan</a:t>
-            </a:r>
-            <a:r>
-              <a:rPr lang="en-ID" dirty="0"/>
-              <a:t> </a:t>
-            </a:r>
-            <a:r>
-              <a:rPr lang="en-ID" dirty="0" err="1"/>
-              <a:t>transaksi</a:t>
-            </a:r>
-            <a:r>
-              <a:rPr lang="en-ID" dirty="0"/>
-              <a:t> &amp; </a:t>
-            </a:r>
-            <a:r>
-              <a:rPr lang="en-ID" dirty="0" err="1"/>
-              <a:t>keuangan</a:t>
-            </a:r>
-            <a:r>
-              <a:rPr lang="en-ID" dirty="0"/>
-              <a:t> </a:t>
-            </a:r>
-            <a:r>
-              <a:rPr lang="en-ID" dirty="0" err="1"/>
-              <a:t>rumah</a:t>
-            </a:r>
-            <a:r>
-              <a:rPr lang="en-ID" dirty="0"/>
-              <a:t> </a:t>
-            </a:r>
-            <a:r>
-              <a:rPr lang="en-ID" dirty="0" err="1"/>
-              <a:t>sakit</a:t>
-            </a:r>
-            <a:r>
-              <a:rPr lang="en-ID" dirty="0"/>
-              <a:t>.</a:t>
-            </a:r>
-          </a:p>
-          <a:p>
             <a:pPr marL="0" marR="0" lvl="0" indent="0" algn="ctr" rtl="0">
               <a:spcBef>
                 <a:spcPts val="0"/>
@@ -17670,7 +12721,7 @@
               </a:spcAft>
               <a:buNone/>
             </a:pPr>
-            <a:endParaRPr sz="1800" b="0" i="0" u="none" strike="noStrike" cap="none" dirty="0">
+            <a:endParaRPr sz="1800" b="0" i="0" u="none" strike="noStrike" cap="none">
               <a:solidFill>
                 <a:schemeClr val="dk1"/>
               </a:solidFill>
@@ -17682,6 +12733,2648 @@
           </a:p>
         </p:txBody>
       </p:sp>
+      <p:graphicFrame>
+        <p:nvGraphicFramePr>
+          <p:cNvPr id="320" name="Google Shape;320;p21"/>
+          <p:cNvGraphicFramePr/>
+          <p:nvPr>
+            <p:extLst>
+              <p:ext uri="{D42A27DB-BD31-4B8C-83A1-F6EECF244321}">
+                <p14:modId xmlns:p14="http://schemas.microsoft.com/office/powerpoint/2010/main" val="1652514190"/>
+              </p:ext>
+            </p:extLst>
+          </p:nvPr>
+        </p:nvGraphicFramePr>
+        <p:xfrm>
+          <a:off x="581025" y="1080045"/>
+          <a:ext cx="11020425" cy="2995650"/>
+        </p:xfrm>
+        <a:graphic>
+          <a:graphicData uri="http://schemas.openxmlformats.org/drawingml/2006/table">
+            <a:tbl>
+              <a:tblPr firstRow="1" bandRow="1">
+                <a:noFill/>
+                <a:tableStyleId>{E7EEF7A6-C51F-4765-95DC-4421B0C34886}</a:tableStyleId>
+              </a:tblPr>
+              <a:tblGrid>
+                <a:gridCol w="2215515">
+                  <a:extLst>
+                    <a:ext uri="{9D8B030D-6E8A-4147-A177-3AD203B41FA5}">
+                      <a16:colId xmlns:a16="http://schemas.microsoft.com/office/drawing/2014/main" val="20000"/>
+                    </a:ext>
+                  </a:extLst>
+                </a:gridCol>
+                <a:gridCol w="1684020">
+                  <a:extLst>
+                    <a:ext uri="{9D8B030D-6E8A-4147-A177-3AD203B41FA5}">
+                      <a16:colId xmlns:a16="http://schemas.microsoft.com/office/drawing/2014/main" val="20001"/>
+                    </a:ext>
+                  </a:extLst>
+                </a:gridCol>
+                <a:gridCol w="3009900">
+                  <a:extLst>
+                    <a:ext uri="{9D8B030D-6E8A-4147-A177-3AD203B41FA5}">
+                      <a16:colId xmlns:a16="http://schemas.microsoft.com/office/drawing/2014/main" val="20002"/>
+                    </a:ext>
+                  </a:extLst>
+                </a:gridCol>
+                <a:gridCol w="4110990">
+                  <a:extLst>
+                    <a:ext uri="{9D8B030D-6E8A-4147-A177-3AD203B41FA5}">
+                      <a16:colId xmlns:a16="http://schemas.microsoft.com/office/drawing/2014/main" val="20003"/>
+                    </a:ext>
+                  </a:extLst>
+                </a:gridCol>
+              </a:tblGrid>
+              <a:tr h="427950">
+                <a:tc>
+                  <a:txBody>
+                    <a:bodyPr/>
+                    <a:lstStyle/>
+                    <a:p>
+                      <a:pPr marL="0" marR="0" lvl="0" indent="0" algn="l" rtl="0">
+                        <a:spcBef>
+                          <a:spcPts val="0"/>
+                        </a:spcBef>
+                        <a:spcAft>
+                          <a:spcPts val="0"/>
+                        </a:spcAft>
+                        <a:buNone/>
+                      </a:pPr>
+                      <a:r>
+                        <a:rPr lang="en-US" sz="1050" b="0" i="0" u="none" strike="noStrike" cap="none">
+                          <a:solidFill>
+                            <a:srgbClr val="FFFFFF"/>
+                          </a:solidFill>
+                          <a:latin typeface="Inter SemiBold"/>
+                          <a:ea typeface="Inter SemiBold"/>
+                          <a:cs typeface="Arial" panose="020B0604020202020204" pitchFamily="34" charset="0"/>
+                          <a:sym typeface="Inter SemiBold"/>
+                        </a:rPr>
+                        <a:t>Kategori Modul</a:t>
+                      </a:r>
+                      <a:endParaRPr/>
+                    </a:p>
+                  </a:txBody>
+                  <a:tcPr marL="63500" marR="63500" marT="25400" marB="25400" anchor="ctr">
+                    <a:lnL w="9525" cap="flat" cmpd="sng">
+                      <a:solidFill>
+                        <a:srgbClr val="000000">
+                          <a:alpha val="0"/>
+                        </a:srgbClr>
+                      </a:solidFill>
+                      <a:prstDash val="solid"/>
+                      <a:round/>
+                      <a:headEnd type="none" w="sm" len="sm"/>
+                      <a:tailEnd type="none" w="sm" len="sm"/>
+                    </a:lnL>
+                    <a:lnR w="9525" cap="flat" cmpd="sng">
+                      <a:solidFill>
+                        <a:srgbClr val="000000">
+                          <a:alpha val="0"/>
+                        </a:srgbClr>
+                      </a:solidFill>
+                      <a:prstDash val="solid"/>
+                      <a:round/>
+                      <a:headEnd type="none" w="sm" len="sm"/>
+                      <a:tailEnd type="none" w="sm" len="sm"/>
+                    </a:lnR>
+                    <a:lnT w="9525" cap="flat" cmpd="sng">
+                      <a:solidFill>
+                        <a:srgbClr val="000000">
+                          <a:alpha val="0"/>
+                        </a:srgbClr>
+                      </a:solidFill>
+                      <a:prstDash val="solid"/>
+                      <a:round/>
+                      <a:headEnd type="none" w="sm" len="sm"/>
+                      <a:tailEnd type="none" w="sm" len="sm"/>
+                    </a:lnT>
+                    <a:lnB w="9525" cap="flat" cmpd="sng">
+                      <a:solidFill>
+                        <a:srgbClr val="000000">
+                          <a:alpha val="0"/>
+                        </a:srgbClr>
+                      </a:solidFill>
+                      <a:prstDash val="solid"/>
+                      <a:round/>
+                      <a:headEnd type="none" w="sm" len="sm"/>
+                      <a:tailEnd type="none" w="sm" len="sm"/>
+                    </a:lnB>
+                    <a:solidFill>
+                      <a:srgbClr val="0F172A"/>
+                    </a:solidFill>
+                  </a:tcPr>
+                </a:tc>
+                <a:tc>
+                  <a:txBody>
+                    <a:bodyPr/>
+                    <a:lstStyle/>
+                    <a:p>
+                      <a:pPr marL="0" marR="0" lvl="0" indent="0" algn="l" rtl="0">
+                        <a:spcBef>
+                          <a:spcPts val="0"/>
+                        </a:spcBef>
+                        <a:spcAft>
+                          <a:spcPts val="0"/>
+                        </a:spcAft>
+                        <a:buNone/>
+                      </a:pPr>
+                      <a:r>
+                        <a:rPr lang="en-US" sz="1050" b="0" i="0" u="none" strike="noStrike" cap="none">
+                          <a:solidFill>
+                            <a:srgbClr val="FFFFFF"/>
+                          </a:solidFill>
+                          <a:latin typeface="Inter SemiBold"/>
+                          <a:ea typeface="Inter SemiBold"/>
+                          <a:cs typeface="Arial" panose="020B0604020202020204" pitchFamily="34" charset="0"/>
+                          <a:sym typeface="Inter SemiBold"/>
+                        </a:rPr>
+                        <a:t>HTTP Method</a:t>
+                      </a:r>
+                      <a:endParaRPr/>
+                    </a:p>
+                  </a:txBody>
+                  <a:tcPr marL="63500" marR="63500" marT="25400" marB="25400" anchor="ctr">
+                    <a:lnL w="9525" cap="flat" cmpd="sng">
+                      <a:solidFill>
+                        <a:srgbClr val="000000">
+                          <a:alpha val="0"/>
+                        </a:srgbClr>
+                      </a:solidFill>
+                      <a:prstDash val="solid"/>
+                      <a:round/>
+                      <a:headEnd type="none" w="sm" len="sm"/>
+                      <a:tailEnd type="none" w="sm" len="sm"/>
+                    </a:lnL>
+                    <a:lnR w="9525" cap="flat" cmpd="sng">
+                      <a:solidFill>
+                        <a:srgbClr val="000000">
+                          <a:alpha val="0"/>
+                        </a:srgbClr>
+                      </a:solidFill>
+                      <a:prstDash val="solid"/>
+                      <a:round/>
+                      <a:headEnd type="none" w="sm" len="sm"/>
+                      <a:tailEnd type="none" w="sm" len="sm"/>
+                    </a:lnR>
+                    <a:lnT w="9525" cap="flat" cmpd="sng">
+                      <a:solidFill>
+                        <a:srgbClr val="000000">
+                          <a:alpha val="0"/>
+                        </a:srgbClr>
+                      </a:solidFill>
+                      <a:prstDash val="solid"/>
+                      <a:round/>
+                      <a:headEnd type="none" w="sm" len="sm"/>
+                      <a:tailEnd type="none" w="sm" len="sm"/>
+                    </a:lnT>
+                    <a:lnB w="9525" cap="flat" cmpd="sng">
+                      <a:solidFill>
+                        <a:srgbClr val="000000">
+                          <a:alpha val="0"/>
+                        </a:srgbClr>
+                      </a:solidFill>
+                      <a:prstDash val="solid"/>
+                      <a:round/>
+                      <a:headEnd type="none" w="sm" len="sm"/>
+                      <a:tailEnd type="none" w="sm" len="sm"/>
+                    </a:lnB>
+                    <a:solidFill>
+                      <a:srgbClr val="0F172A"/>
+                    </a:solidFill>
+                  </a:tcPr>
+                </a:tc>
+                <a:tc>
+                  <a:txBody>
+                    <a:bodyPr/>
+                    <a:lstStyle/>
+                    <a:p>
+                      <a:pPr marL="0" marR="0" lvl="0" indent="0" algn="l" rtl="0">
+                        <a:spcBef>
+                          <a:spcPts val="0"/>
+                        </a:spcBef>
+                        <a:spcAft>
+                          <a:spcPts val="0"/>
+                        </a:spcAft>
+                        <a:buNone/>
+                      </a:pPr>
+                      <a:r>
+                        <a:rPr lang="en-US" sz="1050" b="0" i="0" u="none" strike="noStrike" cap="none">
+                          <a:solidFill>
+                            <a:srgbClr val="FFFFFF"/>
+                          </a:solidFill>
+                          <a:latin typeface="Inter SemiBold"/>
+                          <a:ea typeface="Inter SemiBold"/>
+                          <a:cs typeface="Arial" panose="020B0604020202020204" pitchFamily="34" charset="0"/>
+                          <a:sym typeface="Inter SemiBold"/>
+                        </a:rPr>
+                        <a:t>URI Endpoint</a:t>
+                      </a:r>
+                      <a:endParaRPr/>
+                    </a:p>
+                  </a:txBody>
+                  <a:tcPr marL="63500" marR="63500" marT="25400" marB="25400" anchor="ctr">
+                    <a:lnL w="9525" cap="flat" cmpd="sng">
+                      <a:solidFill>
+                        <a:srgbClr val="000000">
+                          <a:alpha val="0"/>
+                        </a:srgbClr>
+                      </a:solidFill>
+                      <a:prstDash val="solid"/>
+                      <a:round/>
+                      <a:headEnd type="none" w="sm" len="sm"/>
+                      <a:tailEnd type="none" w="sm" len="sm"/>
+                    </a:lnL>
+                    <a:lnR w="9525" cap="flat" cmpd="sng">
+                      <a:solidFill>
+                        <a:srgbClr val="000000">
+                          <a:alpha val="0"/>
+                        </a:srgbClr>
+                      </a:solidFill>
+                      <a:prstDash val="solid"/>
+                      <a:round/>
+                      <a:headEnd type="none" w="sm" len="sm"/>
+                      <a:tailEnd type="none" w="sm" len="sm"/>
+                    </a:lnR>
+                    <a:lnT w="9525" cap="flat" cmpd="sng">
+                      <a:solidFill>
+                        <a:srgbClr val="000000">
+                          <a:alpha val="0"/>
+                        </a:srgbClr>
+                      </a:solidFill>
+                      <a:prstDash val="solid"/>
+                      <a:round/>
+                      <a:headEnd type="none" w="sm" len="sm"/>
+                      <a:tailEnd type="none" w="sm" len="sm"/>
+                    </a:lnT>
+                    <a:lnB w="9525" cap="flat" cmpd="sng">
+                      <a:solidFill>
+                        <a:srgbClr val="000000">
+                          <a:alpha val="0"/>
+                        </a:srgbClr>
+                      </a:solidFill>
+                      <a:prstDash val="solid"/>
+                      <a:round/>
+                      <a:headEnd type="none" w="sm" len="sm"/>
+                      <a:tailEnd type="none" w="sm" len="sm"/>
+                    </a:lnB>
+                    <a:solidFill>
+                      <a:srgbClr val="0F172A"/>
+                    </a:solidFill>
+                  </a:tcPr>
+                </a:tc>
+                <a:tc>
+                  <a:txBody>
+                    <a:bodyPr/>
+                    <a:lstStyle/>
+                    <a:p>
+                      <a:pPr marL="0" marR="0" lvl="0" indent="0" algn="l" rtl="0">
+                        <a:spcBef>
+                          <a:spcPts val="0"/>
+                        </a:spcBef>
+                        <a:spcAft>
+                          <a:spcPts val="0"/>
+                        </a:spcAft>
+                        <a:buNone/>
+                      </a:pPr>
+                      <a:r>
+                        <a:rPr lang="en-US" sz="1050" b="0" i="0" u="none" strike="noStrike" cap="none">
+                          <a:solidFill>
+                            <a:srgbClr val="FFFFFF"/>
+                          </a:solidFill>
+                          <a:latin typeface="Inter SemiBold"/>
+                          <a:ea typeface="Inter SemiBold"/>
+                          <a:cs typeface="Arial" panose="020B0604020202020204" pitchFamily="34" charset="0"/>
+                          <a:sym typeface="Inter SemiBold"/>
+                        </a:rPr>
+                        <a:t>Deskripsi Output / Fungsi Keamanan</a:t>
+                      </a:r>
+                      <a:endParaRPr/>
+                    </a:p>
+                  </a:txBody>
+                  <a:tcPr marL="63500" marR="63500" marT="25400" marB="25400" anchor="ctr">
+                    <a:lnL w="9525" cap="flat" cmpd="sng">
+                      <a:solidFill>
+                        <a:srgbClr val="000000">
+                          <a:alpha val="0"/>
+                        </a:srgbClr>
+                      </a:solidFill>
+                      <a:prstDash val="solid"/>
+                      <a:round/>
+                      <a:headEnd type="none" w="sm" len="sm"/>
+                      <a:tailEnd type="none" w="sm" len="sm"/>
+                    </a:lnL>
+                    <a:lnR w="9525" cap="flat" cmpd="sng">
+                      <a:solidFill>
+                        <a:srgbClr val="000000">
+                          <a:alpha val="0"/>
+                        </a:srgbClr>
+                      </a:solidFill>
+                      <a:prstDash val="solid"/>
+                      <a:round/>
+                      <a:headEnd type="none" w="sm" len="sm"/>
+                      <a:tailEnd type="none" w="sm" len="sm"/>
+                    </a:lnR>
+                    <a:lnT w="9525" cap="flat" cmpd="sng">
+                      <a:solidFill>
+                        <a:srgbClr val="000000">
+                          <a:alpha val="0"/>
+                        </a:srgbClr>
+                      </a:solidFill>
+                      <a:prstDash val="solid"/>
+                      <a:round/>
+                      <a:headEnd type="none" w="sm" len="sm"/>
+                      <a:tailEnd type="none" w="sm" len="sm"/>
+                    </a:lnT>
+                    <a:lnB w="9525" cap="flat" cmpd="sng">
+                      <a:solidFill>
+                        <a:srgbClr val="000000">
+                          <a:alpha val="0"/>
+                        </a:srgbClr>
+                      </a:solidFill>
+                      <a:prstDash val="solid"/>
+                      <a:round/>
+                      <a:headEnd type="none" w="sm" len="sm"/>
+                      <a:tailEnd type="none" w="sm" len="sm"/>
+                    </a:lnB>
+                    <a:solidFill>
+                      <a:srgbClr val="0F172A"/>
+                    </a:solidFill>
+                  </a:tcPr>
+                </a:tc>
+                <a:extLst>
+                  <a:ext uri="{0D108BD9-81ED-4DB2-BD59-A6C34878D82A}">
+                    <a16:rowId xmlns:a16="http://schemas.microsoft.com/office/drawing/2014/main" val="10000"/>
+                  </a:ext>
+                </a:extLst>
+              </a:tr>
+              <a:tr h="427950">
+                <a:tc>
+                  <a:txBody>
+                    <a:bodyPr/>
+                    <a:lstStyle/>
+                    <a:p>
+                      <a:pPr marL="0" marR="0" lvl="0" indent="0" algn="l" rtl="0">
+                        <a:spcBef>
+                          <a:spcPts val="0"/>
+                        </a:spcBef>
+                        <a:spcAft>
+                          <a:spcPts val="0"/>
+                        </a:spcAft>
+                        <a:buNone/>
+                      </a:pPr>
+                      <a:r>
+                        <a:rPr lang="en-US" sz="1012" b="0" i="0" u="none" strike="noStrike" cap="none">
+                          <a:solidFill>
+                            <a:srgbClr val="0D9488"/>
+                          </a:solidFill>
+                          <a:latin typeface="Inter SemiBold"/>
+                          <a:ea typeface="Inter SemiBold"/>
+                          <a:cs typeface="Arial" panose="020B0604020202020204" pitchFamily="34" charset="0"/>
+                          <a:sym typeface="Inter SemiBold"/>
+                        </a:rPr>
+                        <a:t>Authentication &amp; Authorization</a:t>
+                      </a:r>
+                      <a:endParaRPr/>
+                    </a:p>
+                  </a:txBody>
+                  <a:tcPr marL="63500" marR="63500" marT="25400" marB="25400" anchor="ctr">
+                    <a:lnL w="9525" cap="flat" cmpd="sng">
+                      <a:solidFill>
+                        <a:srgbClr val="000000">
+                          <a:alpha val="0"/>
+                        </a:srgbClr>
+                      </a:solidFill>
+                      <a:prstDash val="solid"/>
+                      <a:round/>
+                      <a:headEnd type="none" w="sm" len="sm"/>
+                      <a:tailEnd type="none" w="sm" len="sm"/>
+                    </a:lnL>
+                    <a:lnR w="9525" cap="flat" cmpd="sng">
+                      <a:solidFill>
+                        <a:srgbClr val="000000">
+                          <a:alpha val="0"/>
+                        </a:srgbClr>
+                      </a:solidFill>
+                      <a:prstDash val="solid"/>
+                      <a:round/>
+                      <a:headEnd type="none" w="sm" len="sm"/>
+                      <a:tailEnd type="none" w="sm" len="sm"/>
+                    </a:lnR>
+                    <a:lnT w="9525" cap="flat" cmpd="sng">
+                      <a:solidFill>
+                        <a:srgbClr val="000000">
+                          <a:alpha val="0"/>
+                        </a:srgbClr>
+                      </a:solidFill>
+                      <a:prstDash val="solid"/>
+                      <a:round/>
+                      <a:headEnd type="none" w="sm" len="sm"/>
+                      <a:tailEnd type="none" w="sm" len="sm"/>
+                    </a:lnT>
+                    <a:lnB w="9525" cap="flat" cmpd="sng">
+                      <a:solidFill>
+                        <a:srgbClr val="000000">
+                          <a:alpha val="0"/>
+                        </a:srgbClr>
+                      </a:solidFill>
+                      <a:prstDash val="solid"/>
+                      <a:round/>
+                      <a:headEnd type="none" w="sm" len="sm"/>
+                      <a:tailEnd type="none" w="sm" len="sm"/>
+                    </a:lnB>
+                    <a:solidFill>
+                      <a:srgbClr val="F0FDF4"/>
+                    </a:solidFill>
+                  </a:tcPr>
+                </a:tc>
+                <a:tc>
+                  <a:txBody>
+                    <a:bodyPr/>
+                    <a:lstStyle/>
+                    <a:p>
+                      <a:pPr marL="0" marR="0" lvl="0" indent="0" algn="l" rtl="0">
+                        <a:spcBef>
+                          <a:spcPts val="0"/>
+                        </a:spcBef>
+                        <a:spcAft>
+                          <a:spcPts val="0"/>
+                        </a:spcAft>
+                        <a:buNone/>
+                      </a:pPr>
+                      <a:r>
+                        <a:rPr lang="en-US" sz="1012" b="1" i="0" u="none" strike="noStrike" cap="none">
+                          <a:solidFill>
+                            <a:srgbClr val="16A34A"/>
+                          </a:solidFill>
+                          <a:latin typeface="Arial"/>
+                          <a:ea typeface="Arial"/>
+                          <a:cs typeface="Arial"/>
+                          <a:sym typeface="Arial"/>
+                        </a:rPr>
+                        <a:t>POST</a:t>
+                      </a:r>
+                      <a:endParaRPr/>
+                    </a:p>
+                  </a:txBody>
+                  <a:tcPr marL="63500" marR="63500" marT="25400" marB="25400" anchor="ctr">
+                    <a:lnL w="9525" cap="flat" cmpd="sng">
+                      <a:solidFill>
+                        <a:srgbClr val="000000">
+                          <a:alpha val="0"/>
+                        </a:srgbClr>
+                      </a:solidFill>
+                      <a:prstDash val="solid"/>
+                      <a:round/>
+                      <a:headEnd type="none" w="sm" len="sm"/>
+                      <a:tailEnd type="none" w="sm" len="sm"/>
+                    </a:lnL>
+                    <a:lnR w="9525" cap="flat" cmpd="sng">
+                      <a:solidFill>
+                        <a:srgbClr val="000000">
+                          <a:alpha val="0"/>
+                        </a:srgbClr>
+                      </a:solidFill>
+                      <a:prstDash val="solid"/>
+                      <a:round/>
+                      <a:headEnd type="none" w="sm" len="sm"/>
+                      <a:tailEnd type="none" w="sm" len="sm"/>
+                    </a:lnR>
+                    <a:lnT w="9525" cap="flat" cmpd="sng">
+                      <a:solidFill>
+                        <a:srgbClr val="000000">
+                          <a:alpha val="0"/>
+                        </a:srgbClr>
+                      </a:solidFill>
+                      <a:prstDash val="solid"/>
+                      <a:round/>
+                      <a:headEnd type="none" w="sm" len="sm"/>
+                      <a:tailEnd type="none" w="sm" len="sm"/>
+                    </a:lnT>
+                    <a:lnB w="9525" cap="flat" cmpd="sng" algn="ctr">
+                      <a:solidFill>
+                        <a:srgbClr val="000000">
+                          <a:alpha val="0"/>
+                        </a:srgbClr>
+                      </a:solidFill>
+                      <a:prstDash val="solid"/>
+                      <a:round/>
+                      <a:headEnd type="none" w="sm" len="sm"/>
+                      <a:tailEnd type="none" w="sm" len="sm"/>
+                    </a:lnB>
+                  </a:tcPr>
+                </a:tc>
+                <a:tc>
+                  <a:txBody>
+                    <a:bodyPr/>
+                    <a:lstStyle/>
+                    <a:p>
+                      <a:pPr marL="0" marR="0" lvl="0" indent="0" algn="l" rtl="0">
+                        <a:spcBef>
+                          <a:spcPts val="0"/>
+                        </a:spcBef>
+                        <a:spcAft>
+                          <a:spcPts val="0"/>
+                        </a:spcAft>
+                        <a:buNone/>
+                      </a:pPr>
+                      <a:r>
+                        <a:rPr lang="en-US" sz="1012" b="0" i="0" u="none" strike="noStrike" cap="none">
+                          <a:solidFill>
+                            <a:srgbClr val="334155"/>
+                          </a:solidFill>
+                          <a:latin typeface="Arial"/>
+                          <a:ea typeface="Arial"/>
+                          <a:cs typeface="Arial"/>
+                          <a:sym typeface="Arial"/>
+                        </a:rPr>
+                        <a:t>/api/auth/register</a:t>
+                      </a:r>
+                      <a:endParaRPr/>
+                    </a:p>
+                  </a:txBody>
+                  <a:tcPr marL="63500" marR="63500" marT="25400" marB="25400" anchor="ctr">
+                    <a:lnL w="9525" cap="flat" cmpd="sng">
+                      <a:solidFill>
+                        <a:srgbClr val="000000">
+                          <a:alpha val="0"/>
+                        </a:srgbClr>
+                      </a:solidFill>
+                      <a:prstDash val="solid"/>
+                      <a:round/>
+                      <a:headEnd type="none" w="sm" len="sm"/>
+                      <a:tailEnd type="none" w="sm" len="sm"/>
+                    </a:lnL>
+                    <a:lnR w="9525" cap="flat" cmpd="sng">
+                      <a:solidFill>
+                        <a:srgbClr val="000000">
+                          <a:alpha val="0"/>
+                        </a:srgbClr>
+                      </a:solidFill>
+                      <a:prstDash val="solid"/>
+                      <a:round/>
+                      <a:headEnd type="none" w="sm" len="sm"/>
+                      <a:tailEnd type="none" w="sm" len="sm"/>
+                    </a:lnR>
+                    <a:lnT w="9525" cap="flat" cmpd="sng">
+                      <a:solidFill>
+                        <a:srgbClr val="000000">
+                          <a:alpha val="0"/>
+                        </a:srgbClr>
+                      </a:solidFill>
+                      <a:prstDash val="solid"/>
+                      <a:round/>
+                      <a:headEnd type="none" w="sm" len="sm"/>
+                      <a:tailEnd type="none" w="sm" len="sm"/>
+                    </a:lnT>
+                    <a:lnB w="9525" cap="flat" cmpd="sng" algn="ctr">
+                      <a:solidFill>
+                        <a:srgbClr val="000000">
+                          <a:alpha val="0"/>
+                        </a:srgbClr>
+                      </a:solidFill>
+                      <a:prstDash val="solid"/>
+                      <a:round/>
+                      <a:headEnd type="none" w="sm" len="sm"/>
+                      <a:tailEnd type="none" w="sm" len="sm"/>
+                    </a:lnB>
+                  </a:tcPr>
+                </a:tc>
+                <a:tc>
+                  <a:txBody>
+                    <a:bodyPr/>
+                    <a:lstStyle/>
+                    <a:p>
+                      <a:pPr marL="0" marR="0" lvl="0" indent="0" algn="l" rtl="0">
+                        <a:spcBef>
+                          <a:spcPts val="0"/>
+                        </a:spcBef>
+                        <a:spcAft>
+                          <a:spcPts val="0"/>
+                        </a:spcAft>
+                        <a:buNone/>
+                      </a:pPr>
+                      <a:r>
+                        <a:rPr lang="en-US" sz="1012" b="0" i="0" u="none" strike="noStrike" cap="none">
+                          <a:solidFill>
+                            <a:srgbClr val="334155"/>
+                          </a:solidFill>
+                          <a:latin typeface="Inter"/>
+                          <a:ea typeface="Inter"/>
+                          <a:cs typeface="Arial" panose="020B0604020202020204" pitchFamily="34" charset="0"/>
+                          <a:sym typeface="Inter"/>
+                        </a:rPr>
+                        <a:t>Melakukan pendaftaran akun kredensial pasien baru di rumah sakit.</a:t>
+                      </a:r>
+                      <a:endParaRPr/>
+                    </a:p>
+                  </a:txBody>
+                  <a:tcPr marL="63500" marR="63500" marT="25400" marB="25400" anchor="ctr">
+                    <a:lnL w="9525" cap="flat" cmpd="sng">
+                      <a:solidFill>
+                        <a:srgbClr val="000000">
+                          <a:alpha val="0"/>
+                        </a:srgbClr>
+                      </a:solidFill>
+                      <a:prstDash val="solid"/>
+                      <a:round/>
+                      <a:headEnd type="none" w="sm" len="sm"/>
+                      <a:tailEnd type="none" w="sm" len="sm"/>
+                    </a:lnL>
+                    <a:lnR w="9525" cap="flat" cmpd="sng">
+                      <a:solidFill>
+                        <a:srgbClr val="000000">
+                          <a:alpha val="0"/>
+                        </a:srgbClr>
+                      </a:solidFill>
+                      <a:prstDash val="solid"/>
+                      <a:round/>
+                      <a:headEnd type="none" w="sm" len="sm"/>
+                      <a:tailEnd type="none" w="sm" len="sm"/>
+                    </a:lnR>
+                    <a:lnT w="9525" cap="flat" cmpd="sng">
+                      <a:solidFill>
+                        <a:srgbClr val="000000">
+                          <a:alpha val="0"/>
+                        </a:srgbClr>
+                      </a:solidFill>
+                      <a:prstDash val="solid"/>
+                      <a:round/>
+                      <a:headEnd type="none" w="sm" len="sm"/>
+                      <a:tailEnd type="none" w="sm" len="sm"/>
+                    </a:lnT>
+                    <a:lnB w="9525" cap="flat" cmpd="sng" algn="ctr">
+                      <a:solidFill>
+                        <a:srgbClr val="000000">
+                          <a:alpha val="0"/>
+                        </a:srgbClr>
+                      </a:solidFill>
+                      <a:prstDash val="solid"/>
+                      <a:round/>
+                      <a:headEnd type="none" w="sm" len="sm"/>
+                      <a:tailEnd type="none" w="sm" len="sm"/>
+                    </a:lnB>
+                  </a:tcPr>
+                </a:tc>
+                <a:extLst>
+                  <a:ext uri="{0D108BD9-81ED-4DB2-BD59-A6C34878D82A}">
+                    <a16:rowId xmlns:a16="http://schemas.microsoft.com/office/drawing/2014/main" val="10001"/>
+                  </a:ext>
+                </a:extLst>
+              </a:tr>
+              <a:tr h="427950">
+                <a:tc>
+                  <a:txBody>
+                    <a:bodyPr/>
+                    <a:lstStyle/>
+                    <a:p>
+                      <a:pPr marL="0" marR="0" lvl="0" indent="0" algn="l" rtl="0">
+                        <a:spcBef>
+                          <a:spcPts val="0"/>
+                        </a:spcBef>
+                        <a:spcAft>
+                          <a:spcPts val="0"/>
+                        </a:spcAft>
+                        <a:buNone/>
+                      </a:pPr>
+                      <a:endParaRPr dirty="0"/>
+                    </a:p>
+                  </a:txBody>
+                  <a:tcPr marL="63500" marR="63500" marT="25400" marB="25400" anchor="ctr">
+                    <a:lnL w="9525" cap="flat" cmpd="sng">
+                      <a:solidFill>
+                        <a:srgbClr val="000000">
+                          <a:alpha val="0"/>
+                        </a:srgbClr>
+                      </a:solidFill>
+                      <a:prstDash val="solid"/>
+                      <a:round/>
+                      <a:headEnd type="none" w="sm" len="sm"/>
+                      <a:tailEnd type="none" w="sm" len="sm"/>
+                    </a:lnL>
+                    <a:lnR w="9525" cap="flat" cmpd="sng" algn="ctr">
+                      <a:solidFill>
+                        <a:srgbClr val="000000">
+                          <a:alpha val="0"/>
+                        </a:srgbClr>
+                      </a:solidFill>
+                      <a:prstDash val="solid"/>
+                      <a:round/>
+                      <a:headEnd type="none" w="sm" len="sm"/>
+                      <a:tailEnd type="none" w="sm" len="sm"/>
+                    </a:lnR>
+                    <a:lnT w="9525" cap="flat" cmpd="sng">
+                      <a:solidFill>
+                        <a:srgbClr val="000000">
+                          <a:alpha val="0"/>
+                        </a:srgbClr>
+                      </a:solidFill>
+                      <a:prstDash val="solid"/>
+                      <a:round/>
+                      <a:headEnd type="none" w="sm" len="sm"/>
+                      <a:tailEnd type="none" w="sm" len="sm"/>
+                    </a:lnT>
+                    <a:lnB w="9525" cap="flat" cmpd="sng">
+                      <a:solidFill>
+                        <a:srgbClr val="000000">
+                          <a:alpha val="0"/>
+                        </a:srgbClr>
+                      </a:solidFill>
+                      <a:prstDash val="solid"/>
+                      <a:round/>
+                      <a:headEnd type="none" w="sm" len="sm"/>
+                      <a:tailEnd type="none" w="sm" len="sm"/>
+                    </a:lnB>
+                    <a:solidFill>
+                      <a:srgbClr val="F8FAFC"/>
+                    </a:solidFill>
+                  </a:tcPr>
+                </a:tc>
+                <a:tc>
+                  <a:txBody>
+                    <a:bodyPr/>
+                    <a:lstStyle/>
+                    <a:p>
+                      <a:pPr marL="0" marR="0" lvl="0" indent="0" algn="l" rtl="0">
+                        <a:spcBef>
+                          <a:spcPts val="0"/>
+                        </a:spcBef>
+                        <a:spcAft>
+                          <a:spcPts val="0"/>
+                        </a:spcAft>
+                        <a:buNone/>
+                      </a:pPr>
+                      <a:r>
+                        <a:rPr lang="en-US" sz="1012" b="1" i="0" u="none" strike="noStrike" cap="none" dirty="0">
+                          <a:solidFill>
+                            <a:srgbClr val="16A34A"/>
+                          </a:solidFill>
+                          <a:latin typeface="Arial"/>
+                          <a:ea typeface="Arial"/>
+                          <a:cs typeface="Arial"/>
+                          <a:sym typeface="Arial"/>
+                        </a:rPr>
+                        <a:t>POST</a:t>
+                      </a:r>
+                      <a:endParaRPr dirty="0"/>
+                    </a:p>
+                  </a:txBody>
+                  <a:tcPr marL="63500" marR="63500" marT="25400" marB="25400" anchor="ctr">
+                    <a:lnL w="9525" cap="flat" cmpd="sng">
+                      <a:solidFill>
+                        <a:srgbClr val="000000">
+                          <a:alpha val="0"/>
+                        </a:srgbClr>
+                      </a:solidFill>
+                      <a:prstDash val="solid"/>
+                      <a:round/>
+                      <a:headEnd type="none" w="sm" len="sm"/>
+                      <a:tailEnd type="none" w="sm" len="sm"/>
+                    </a:lnL>
+                    <a:lnR w="9525" cap="flat" cmpd="sng">
+                      <a:solidFill>
+                        <a:srgbClr val="000000">
+                          <a:alpha val="0"/>
+                        </a:srgbClr>
+                      </a:solidFill>
+                      <a:prstDash val="solid"/>
+                      <a:round/>
+                      <a:headEnd type="none" w="sm" len="sm"/>
+                      <a:tailEnd type="none" w="sm" len="sm"/>
+                    </a:lnR>
+                    <a:lnT w="9525" cap="flat" cmpd="sng">
+                      <a:solidFill>
+                        <a:srgbClr val="000000">
+                          <a:alpha val="0"/>
+                        </a:srgbClr>
+                      </a:solidFill>
+                      <a:prstDash val="solid"/>
+                      <a:round/>
+                      <a:headEnd type="none" w="sm" len="sm"/>
+                      <a:tailEnd type="none" w="sm" len="sm"/>
+                    </a:lnT>
+                    <a:lnB w="9525" cap="flat" cmpd="sng">
+                      <a:solidFill>
+                        <a:srgbClr val="000000">
+                          <a:alpha val="0"/>
+                        </a:srgbClr>
+                      </a:solidFill>
+                      <a:prstDash val="solid"/>
+                      <a:round/>
+                      <a:headEnd type="none" w="sm" len="sm"/>
+                      <a:tailEnd type="none" w="sm" len="sm"/>
+                    </a:lnB>
+                    <a:solidFill>
+                      <a:srgbClr val="F8FAFC"/>
+                    </a:solidFill>
+                  </a:tcPr>
+                </a:tc>
+                <a:tc>
+                  <a:txBody>
+                    <a:bodyPr/>
+                    <a:lstStyle/>
+                    <a:p>
+                      <a:pPr marL="0" marR="0" lvl="0" indent="0" algn="l" rtl="0">
+                        <a:spcBef>
+                          <a:spcPts val="0"/>
+                        </a:spcBef>
+                        <a:spcAft>
+                          <a:spcPts val="0"/>
+                        </a:spcAft>
+                        <a:buNone/>
+                      </a:pPr>
+                      <a:r>
+                        <a:rPr lang="en-US" sz="1012" b="0" i="0" u="none" strike="noStrike" cap="none" dirty="0">
+                          <a:solidFill>
+                            <a:srgbClr val="334155"/>
+                          </a:solidFill>
+                          <a:latin typeface="Arial"/>
+                          <a:ea typeface="Arial"/>
+                          <a:cs typeface="Arial"/>
+                          <a:sym typeface="Arial"/>
+                        </a:rPr>
+                        <a:t>/</a:t>
+                      </a:r>
+                      <a:r>
+                        <a:rPr lang="en-US" sz="1012" b="0" i="0" u="none" strike="noStrike" cap="none" dirty="0" err="1">
+                          <a:solidFill>
+                            <a:srgbClr val="334155"/>
+                          </a:solidFill>
+                          <a:latin typeface="Arial"/>
+                          <a:ea typeface="Arial"/>
+                          <a:cs typeface="Arial"/>
+                          <a:sym typeface="Arial"/>
+                        </a:rPr>
+                        <a:t>api</a:t>
+                      </a:r>
+                      <a:r>
+                        <a:rPr lang="en-US" sz="1012" b="0" i="0" u="none" strike="noStrike" cap="none" dirty="0">
+                          <a:solidFill>
+                            <a:srgbClr val="334155"/>
+                          </a:solidFill>
+                          <a:latin typeface="Arial"/>
+                          <a:ea typeface="Arial"/>
+                          <a:cs typeface="Arial"/>
+                          <a:sym typeface="Arial"/>
+                        </a:rPr>
+                        <a:t>/auth/login</a:t>
+                      </a:r>
+                      <a:endParaRPr dirty="0"/>
+                    </a:p>
+                  </a:txBody>
+                  <a:tcPr marL="63500" marR="63500" marT="25400" marB="25400" anchor="ctr">
+                    <a:lnL w="9525" cap="flat" cmpd="sng">
+                      <a:solidFill>
+                        <a:srgbClr val="000000">
+                          <a:alpha val="0"/>
+                        </a:srgbClr>
+                      </a:solidFill>
+                      <a:prstDash val="solid"/>
+                      <a:round/>
+                      <a:headEnd type="none" w="sm" len="sm"/>
+                      <a:tailEnd type="none" w="sm" len="sm"/>
+                    </a:lnL>
+                    <a:lnR w="9525" cap="flat" cmpd="sng">
+                      <a:solidFill>
+                        <a:srgbClr val="000000">
+                          <a:alpha val="0"/>
+                        </a:srgbClr>
+                      </a:solidFill>
+                      <a:prstDash val="solid"/>
+                      <a:round/>
+                      <a:headEnd type="none" w="sm" len="sm"/>
+                      <a:tailEnd type="none" w="sm" len="sm"/>
+                    </a:lnR>
+                    <a:lnT w="9525" cap="flat" cmpd="sng">
+                      <a:solidFill>
+                        <a:srgbClr val="000000">
+                          <a:alpha val="0"/>
+                        </a:srgbClr>
+                      </a:solidFill>
+                      <a:prstDash val="solid"/>
+                      <a:round/>
+                      <a:headEnd type="none" w="sm" len="sm"/>
+                      <a:tailEnd type="none" w="sm" len="sm"/>
+                    </a:lnT>
+                    <a:lnB w="9525" cap="flat" cmpd="sng">
+                      <a:solidFill>
+                        <a:srgbClr val="000000">
+                          <a:alpha val="0"/>
+                        </a:srgbClr>
+                      </a:solidFill>
+                      <a:prstDash val="solid"/>
+                      <a:round/>
+                      <a:headEnd type="none" w="sm" len="sm"/>
+                      <a:tailEnd type="none" w="sm" len="sm"/>
+                    </a:lnB>
+                    <a:solidFill>
+                      <a:srgbClr val="F8FAFC"/>
+                    </a:solidFill>
+                  </a:tcPr>
+                </a:tc>
+                <a:tc>
+                  <a:txBody>
+                    <a:bodyPr/>
+                    <a:lstStyle/>
+                    <a:p>
+                      <a:pPr marL="0" marR="0" lvl="0" indent="0" algn="l" rtl="0">
+                        <a:spcBef>
+                          <a:spcPts val="0"/>
+                        </a:spcBef>
+                        <a:spcAft>
+                          <a:spcPts val="0"/>
+                        </a:spcAft>
+                        <a:buNone/>
+                      </a:pPr>
+                      <a:r>
+                        <a:rPr lang="en-US" sz="1012" b="0" i="0" u="none" strike="noStrike" cap="none" dirty="0" err="1">
+                          <a:solidFill>
+                            <a:srgbClr val="334155"/>
+                          </a:solidFill>
+                          <a:latin typeface="Inter"/>
+                          <a:ea typeface="Inter"/>
+                          <a:cs typeface="Arial" panose="020B0604020202020204" pitchFamily="34" charset="0"/>
+                          <a:sym typeface="Inter"/>
+                        </a:rPr>
+                        <a:t>Validasi</a:t>
+                      </a:r>
+                      <a:r>
+                        <a:rPr lang="en-US" sz="1012" b="0" i="0" u="none" strike="noStrike" cap="none" dirty="0">
+                          <a:solidFill>
+                            <a:srgbClr val="334155"/>
+                          </a:solidFill>
+                          <a:latin typeface="Inter"/>
+                          <a:ea typeface="Inter"/>
+                          <a:cs typeface="Arial" panose="020B0604020202020204" pitchFamily="34" charset="0"/>
+                          <a:sym typeface="Inter"/>
+                        </a:rPr>
+                        <a:t> login, me-return Stateless JWT token </a:t>
+                      </a:r>
+                      <a:r>
+                        <a:rPr lang="en-US" sz="1012" b="0" i="0" u="none" strike="noStrike" cap="none" dirty="0" err="1">
+                          <a:solidFill>
+                            <a:srgbClr val="334155"/>
+                          </a:solidFill>
+                          <a:latin typeface="Inter"/>
+                          <a:ea typeface="Inter"/>
+                          <a:cs typeface="Arial" panose="020B0604020202020204" pitchFamily="34" charset="0"/>
+                          <a:sym typeface="Inter"/>
+                        </a:rPr>
+                        <a:t>beserta</a:t>
+                      </a:r>
+                      <a:r>
+                        <a:rPr lang="en-US" sz="1012" b="0" i="0" u="none" strike="noStrike" cap="none" dirty="0">
+                          <a:solidFill>
+                            <a:srgbClr val="334155"/>
+                          </a:solidFill>
+                          <a:latin typeface="Inter"/>
+                          <a:ea typeface="Inter"/>
+                          <a:cs typeface="Arial" panose="020B0604020202020204" pitchFamily="34" charset="0"/>
+                          <a:sym typeface="Inter"/>
+                        </a:rPr>
+                        <a:t> </a:t>
+                      </a:r>
+                      <a:r>
+                        <a:rPr lang="en-US" sz="1012" b="0" i="0" u="none" strike="noStrike" cap="none" dirty="0" err="1">
+                          <a:solidFill>
+                            <a:srgbClr val="334155"/>
+                          </a:solidFill>
+                          <a:latin typeface="Inter"/>
+                          <a:ea typeface="Inter"/>
+                          <a:cs typeface="Arial" panose="020B0604020202020204" pitchFamily="34" charset="0"/>
+                          <a:sym typeface="Inter"/>
+                        </a:rPr>
+                        <a:t>otorisasi</a:t>
+                      </a:r>
+                      <a:r>
+                        <a:rPr lang="en-US" sz="1012" b="0" i="0" u="none" strike="noStrike" cap="none" dirty="0">
+                          <a:solidFill>
+                            <a:srgbClr val="334155"/>
+                          </a:solidFill>
+                          <a:latin typeface="Inter"/>
+                          <a:ea typeface="Inter"/>
+                          <a:cs typeface="Arial" panose="020B0604020202020204" pitchFamily="34" charset="0"/>
+                          <a:sym typeface="Inter"/>
+                        </a:rPr>
+                        <a:t> Role </a:t>
+                      </a:r>
+                      <a:r>
+                        <a:rPr lang="en-US" sz="1012" b="0" i="0" u="none" strike="noStrike" cap="none" dirty="0" err="1">
+                          <a:solidFill>
+                            <a:srgbClr val="334155"/>
+                          </a:solidFill>
+                          <a:latin typeface="Inter"/>
+                          <a:ea typeface="Inter"/>
+                          <a:cs typeface="Arial" panose="020B0604020202020204" pitchFamily="34" charset="0"/>
+                          <a:sym typeface="Inter"/>
+                        </a:rPr>
+                        <a:t>pengguna</a:t>
+                      </a:r>
+                      <a:r>
+                        <a:rPr lang="en-US" sz="1012" b="0" i="0" u="none" strike="noStrike" cap="none" dirty="0">
+                          <a:solidFill>
+                            <a:srgbClr val="334155"/>
+                          </a:solidFill>
+                          <a:latin typeface="Inter"/>
+                          <a:ea typeface="Inter"/>
+                          <a:cs typeface="Arial" panose="020B0604020202020204" pitchFamily="34" charset="0"/>
+                          <a:sym typeface="Inter"/>
+                        </a:rPr>
+                        <a:t>.</a:t>
+                      </a:r>
+                      <a:endParaRPr dirty="0"/>
+                    </a:p>
+                  </a:txBody>
+                  <a:tcPr marL="63500" marR="63500" marT="25400" marB="25400" anchor="ctr">
+                    <a:lnL w="9525" cap="flat" cmpd="sng">
+                      <a:solidFill>
+                        <a:srgbClr val="000000">
+                          <a:alpha val="0"/>
+                        </a:srgbClr>
+                      </a:solidFill>
+                      <a:prstDash val="solid"/>
+                      <a:round/>
+                      <a:headEnd type="none" w="sm" len="sm"/>
+                      <a:tailEnd type="none" w="sm" len="sm"/>
+                    </a:lnL>
+                    <a:lnR w="9525" cap="flat" cmpd="sng">
+                      <a:solidFill>
+                        <a:srgbClr val="000000">
+                          <a:alpha val="0"/>
+                        </a:srgbClr>
+                      </a:solidFill>
+                      <a:prstDash val="solid"/>
+                      <a:round/>
+                      <a:headEnd type="none" w="sm" len="sm"/>
+                      <a:tailEnd type="none" w="sm" len="sm"/>
+                    </a:lnR>
+                    <a:lnT w="9525" cap="flat" cmpd="sng">
+                      <a:solidFill>
+                        <a:srgbClr val="000000">
+                          <a:alpha val="0"/>
+                        </a:srgbClr>
+                      </a:solidFill>
+                      <a:prstDash val="solid"/>
+                      <a:round/>
+                      <a:headEnd type="none" w="sm" len="sm"/>
+                      <a:tailEnd type="none" w="sm" len="sm"/>
+                    </a:lnT>
+                    <a:lnB w="9525" cap="flat" cmpd="sng">
+                      <a:solidFill>
+                        <a:srgbClr val="000000">
+                          <a:alpha val="0"/>
+                        </a:srgbClr>
+                      </a:solidFill>
+                      <a:prstDash val="solid"/>
+                      <a:round/>
+                      <a:headEnd type="none" w="sm" len="sm"/>
+                      <a:tailEnd type="none" w="sm" len="sm"/>
+                    </a:lnB>
+                  </a:tcPr>
+                </a:tc>
+                <a:extLst>
+                  <a:ext uri="{0D108BD9-81ED-4DB2-BD59-A6C34878D82A}">
+                    <a16:rowId xmlns:a16="http://schemas.microsoft.com/office/drawing/2014/main" val="10002"/>
+                  </a:ext>
+                </a:extLst>
+              </a:tr>
+              <a:tr h="427950">
+                <a:tc>
+                  <a:txBody>
+                    <a:bodyPr/>
+                    <a:lstStyle/>
+                    <a:p>
+                      <a:pPr marL="0" marR="0" lvl="0" indent="0" algn="l" rtl="0">
+                        <a:spcBef>
+                          <a:spcPts val="0"/>
+                        </a:spcBef>
+                        <a:spcAft>
+                          <a:spcPts val="0"/>
+                        </a:spcAft>
+                        <a:buNone/>
+                      </a:pPr>
+                      <a:r>
+                        <a:rPr lang="en-US" sz="1012" b="0" i="0" u="none">
+                          <a:solidFill>
+                            <a:srgbClr val="0EA5E9"/>
+                          </a:solidFill>
+                          <a:latin typeface="Inter SemiBold"/>
+                          <a:ea typeface="Inter SemiBold"/>
+                          <a:cs typeface="Arial" panose="020B0604020202020204" pitchFamily="34" charset="0"/>
+                          <a:sym typeface="Inter SemiBold"/>
+                        </a:rPr>
+                        <a:t>Katalog &amp; CRUD Master</a:t>
+                      </a:r>
+                      <a:endParaRPr/>
+                    </a:p>
+                  </a:txBody>
+                  <a:tcPr marL="63500" marR="63500" marT="25400" marB="25400" anchor="ctr">
+                    <a:lnL w="9525" cap="flat" cmpd="sng">
+                      <a:solidFill>
+                        <a:srgbClr val="000000">
+                          <a:alpha val="0"/>
+                        </a:srgbClr>
+                      </a:solidFill>
+                      <a:prstDash val="solid"/>
+                      <a:round/>
+                      <a:headEnd type="none" w="sm" len="sm"/>
+                      <a:tailEnd type="none" w="sm" len="sm"/>
+                    </a:lnL>
+                    <a:lnR w="9525" cap="flat" cmpd="sng">
+                      <a:solidFill>
+                        <a:srgbClr val="000000">
+                          <a:alpha val="0"/>
+                        </a:srgbClr>
+                      </a:solidFill>
+                      <a:prstDash val="solid"/>
+                      <a:round/>
+                      <a:headEnd type="none" w="sm" len="sm"/>
+                      <a:tailEnd type="none" w="sm" len="sm"/>
+                    </a:lnR>
+                    <a:lnT w="9525" cap="flat" cmpd="sng">
+                      <a:solidFill>
+                        <a:srgbClr val="000000">
+                          <a:alpha val="0"/>
+                        </a:srgbClr>
+                      </a:solidFill>
+                      <a:prstDash val="solid"/>
+                      <a:round/>
+                      <a:headEnd type="none" w="sm" len="sm"/>
+                      <a:tailEnd type="none" w="sm" len="sm"/>
+                    </a:lnT>
+                    <a:lnB w="9525" cap="flat" cmpd="sng">
+                      <a:solidFill>
+                        <a:srgbClr val="000000">
+                          <a:alpha val="0"/>
+                        </a:srgbClr>
+                      </a:solidFill>
+                      <a:prstDash val="solid"/>
+                      <a:round/>
+                      <a:headEnd type="none" w="sm" len="sm"/>
+                      <a:tailEnd type="none" w="sm" len="sm"/>
+                    </a:lnB>
+                    <a:solidFill>
+                      <a:srgbClr val="F0F9FF"/>
+                    </a:solidFill>
+                  </a:tcPr>
+                </a:tc>
+                <a:tc>
+                  <a:txBody>
+                    <a:bodyPr/>
+                    <a:lstStyle/>
+                    <a:p>
+                      <a:pPr marL="0" marR="0" lvl="0" indent="0" algn="l" rtl="0">
+                        <a:spcBef>
+                          <a:spcPts val="0"/>
+                        </a:spcBef>
+                        <a:spcAft>
+                          <a:spcPts val="0"/>
+                        </a:spcAft>
+                        <a:buNone/>
+                      </a:pPr>
+                      <a:r>
+                        <a:rPr lang="en-US" sz="1012" b="1" i="0" u="none" dirty="0">
+                          <a:solidFill>
+                            <a:srgbClr val="2563EB"/>
+                          </a:solidFill>
+                          <a:latin typeface="Arial"/>
+                          <a:ea typeface="Arial"/>
+                          <a:cs typeface="Arial"/>
+                          <a:sym typeface="Arial"/>
+                        </a:rPr>
+                        <a:t>GET</a:t>
+                      </a:r>
+                      <a:endParaRPr dirty="0"/>
+                    </a:p>
+                  </a:txBody>
+                  <a:tcPr marL="63500" marR="63500" marT="25400" marB="25400" anchor="ctr">
+                    <a:lnL w="9525" cap="flat" cmpd="sng">
+                      <a:solidFill>
+                        <a:srgbClr val="000000">
+                          <a:alpha val="0"/>
+                        </a:srgbClr>
+                      </a:solidFill>
+                      <a:prstDash val="solid"/>
+                      <a:round/>
+                      <a:headEnd type="none" w="sm" len="sm"/>
+                      <a:tailEnd type="none" w="sm" len="sm"/>
+                    </a:lnL>
+                    <a:lnR w="9525" cap="flat" cmpd="sng">
+                      <a:solidFill>
+                        <a:srgbClr val="000000">
+                          <a:alpha val="0"/>
+                        </a:srgbClr>
+                      </a:solidFill>
+                      <a:prstDash val="solid"/>
+                      <a:round/>
+                      <a:headEnd type="none" w="sm" len="sm"/>
+                      <a:tailEnd type="none" w="sm" len="sm"/>
+                    </a:lnR>
+                    <a:lnT w="9525" cap="flat" cmpd="sng" algn="ctr">
+                      <a:solidFill>
+                        <a:srgbClr val="000000">
+                          <a:alpha val="0"/>
+                        </a:srgbClr>
+                      </a:solidFill>
+                      <a:prstDash val="solid"/>
+                      <a:round/>
+                      <a:headEnd type="none" w="sm" len="sm"/>
+                      <a:tailEnd type="none" w="sm" len="sm"/>
+                    </a:lnT>
+                    <a:lnB w="9525" cap="flat" cmpd="sng" algn="ctr">
+                      <a:solidFill>
+                        <a:srgbClr val="000000">
+                          <a:alpha val="0"/>
+                        </a:srgbClr>
+                      </a:solidFill>
+                      <a:prstDash val="solid"/>
+                      <a:round/>
+                      <a:headEnd type="none" w="sm" len="sm"/>
+                      <a:tailEnd type="none" w="sm" len="sm"/>
+                    </a:lnB>
+                  </a:tcPr>
+                </a:tc>
+                <a:tc>
+                  <a:txBody>
+                    <a:bodyPr/>
+                    <a:lstStyle/>
+                    <a:p>
+                      <a:pPr marL="0" marR="0" lvl="0" indent="0" algn="l" rtl="0">
+                        <a:spcBef>
+                          <a:spcPts val="0"/>
+                        </a:spcBef>
+                        <a:spcAft>
+                          <a:spcPts val="0"/>
+                        </a:spcAft>
+                        <a:buNone/>
+                      </a:pPr>
+                      <a:r>
+                        <a:rPr lang="en-US" sz="1012" b="0" i="0" u="none">
+                          <a:solidFill>
+                            <a:srgbClr val="334155"/>
+                          </a:solidFill>
+                          <a:latin typeface="Arial"/>
+                          <a:ea typeface="Arial"/>
+                          <a:cs typeface="Arial"/>
+                          <a:sym typeface="Arial"/>
+                        </a:rPr>
+                        <a:t>/api/doctors</a:t>
+                      </a:r>
+                      <a:endParaRPr/>
+                    </a:p>
+                  </a:txBody>
+                  <a:tcPr marL="63500" marR="63500" marT="25400" marB="25400" anchor="ctr">
+                    <a:lnL w="9525" cap="flat" cmpd="sng">
+                      <a:solidFill>
+                        <a:srgbClr val="000000">
+                          <a:alpha val="0"/>
+                        </a:srgbClr>
+                      </a:solidFill>
+                      <a:prstDash val="solid"/>
+                      <a:round/>
+                      <a:headEnd type="none" w="sm" len="sm"/>
+                      <a:tailEnd type="none" w="sm" len="sm"/>
+                    </a:lnL>
+                    <a:lnR w="9525" cap="flat" cmpd="sng">
+                      <a:solidFill>
+                        <a:srgbClr val="000000">
+                          <a:alpha val="0"/>
+                        </a:srgbClr>
+                      </a:solidFill>
+                      <a:prstDash val="solid"/>
+                      <a:round/>
+                      <a:headEnd type="none" w="sm" len="sm"/>
+                      <a:tailEnd type="none" w="sm" len="sm"/>
+                    </a:lnR>
+                    <a:lnT w="9525" cap="flat" cmpd="sng" algn="ctr">
+                      <a:solidFill>
+                        <a:srgbClr val="000000">
+                          <a:alpha val="0"/>
+                        </a:srgbClr>
+                      </a:solidFill>
+                      <a:prstDash val="solid"/>
+                      <a:round/>
+                      <a:headEnd type="none" w="sm" len="sm"/>
+                      <a:tailEnd type="none" w="sm" len="sm"/>
+                    </a:lnT>
+                    <a:lnB w="9525" cap="flat" cmpd="sng" algn="ctr">
+                      <a:solidFill>
+                        <a:srgbClr val="000000">
+                          <a:alpha val="0"/>
+                        </a:srgbClr>
+                      </a:solidFill>
+                      <a:prstDash val="solid"/>
+                      <a:round/>
+                      <a:headEnd type="none" w="sm" len="sm"/>
+                      <a:tailEnd type="none" w="sm" len="sm"/>
+                    </a:lnB>
+                  </a:tcPr>
+                </a:tc>
+                <a:tc>
+                  <a:txBody>
+                    <a:bodyPr/>
+                    <a:lstStyle/>
+                    <a:p>
+                      <a:pPr marL="0" marR="0" lvl="0" indent="0" algn="l" rtl="0">
+                        <a:spcBef>
+                          <a:spcPts val="0"/>
+                        </a:spcBef>
+                        <a:spcAft>
+                          <a:spcPts val="0"/>
+                        </a:spcAft>
+                        <a:buNone/>
+                      </a:pPr>
+                      <a:r>
+                        <a:rPr lang="en-US" sz="1012" b="0" i="0" u="none">
+                          <a:solidFill>
+                            <a:srgbClr val="334155"/>
+                          </a:solidFill>
+                          <a:latin typeface="Inter"/>
+                          <a:ea typeface="Inter"/>
+                          <a:cs typeface="Arial" panose="020B0604020202020204" pitchFamily="34" charset="0"/>
+                          <a:sym typeface="Inter"/>
+                        </a:rPr>
+                        <a:t>Mengambil data dokter aktif terpaginasi (filter spesialiasi dokter tersedia).</a:t>
+                      </a:r>
+                      <a:endParaRPr/>
+                    </a:p>
+                  </a:txBody>
+                  <a:tcPr marL="63500" marR="63500" marT="25400" marB="25400" anchor="ctr">
+                    <a:lnL w="9525" cap="flat" cmpd="sng">
+                      <a:solidFill>
+                        <a:srgbClr val="000000">
+                          <a:alpha val="0"/>
+                        </a:srgbClr>
+                      </a:solidFill>
+                      <a:prstDash val="solid"/>
+                      <a:round/>
+                      <a:headEnd type="none" w="sm" len="sm"/>
+                      <a:tailEnd type="none" w="sm" len="sm"/>
+                    </a:lnL>
+                    <a:lnR w="9525" cap="flat" cmpd="sng">
+                      <a:solidFill>
+                        <a:srgbClr val="000000">
+                          <a:alpha val="0"/>
+                        </a:srgbClr>
+                      </a:solidFill>
+                      <a:prstDash val="solid"/>
+                      <a:round/>
+                      <a:headEnd type="none" w="sm" len="sm"/>
+                      <a:tailEnd type="none" w="sm" len="sm"/>
+                    </a:lnR>
+                    <a:lnT w="9525" cap="flat" cmpd="sng" algn="ctr">
+                      <a:solidFill>
+                        <a:srgbClr val="000000">
+                          <a:alpha val="0"/>
+                        </a:srgbClr>
+                      </a:solidFill>
+                      <a:prstDash val="solid"/>
+                      <a:round/>
+                      <a:headEnd type="none" w="sm" len="sm"/>
+                      <a:tailEnd type="none" w="sm" len="sm"/>
+                    </a:lnT>
+                    <a:lnB w="9525" cap="flat" cmpd="sng" algn="ctr">
+                      <a:solidFill>
+                        <a:srgbClr val="000000">
+                          <a:alpha val="0"/>
+                        </a:srgbClr>
+                      </a:solidFill>
+                      <a:prstDash val="solid"/>
+                      <a:round/>
+                      <a:headEnd type="none" w="sm" len="sm"/>
+                      <a:tailEnd type="none" w="sm" len="sm"/>
+                    </a:lnB>
+                  </a:tcPr>
+                </a:tc>
+                <a:extLst>
+                  <a:ext uri="{0D108BD9-81ED-4DB2-BD59-A6C34878D82A}">
+                    <a16:rowId xmlns:a16="http://schemas.microsoft.com/office/drawing/2014/main" val="10003"/>
+                  </a:ext>
+                </a:extLst>
+              </a:tr>
+              <a:tr h="427950">
+                <a:tc>
+                  <a:txBody>
+                    <a:bodyPr/>
+                    <a:lstStyle/>
+                    <a:p>
+                      <a:pPr marL="0" marR="0" lvl="0" indent="0" algn="l" rtl="0">
+                        <a:spcBef>
+                          <a:spcPts val="0"/>
+                        </a:spcBef>
+                        <a:spcAft>
+                          <a:spcPts val="0"/>
+                        </a:spcAft>
+                        <a:buNone/>
+                      </a:pPr>
+                      <a:endParaRPr/>
+                    </a:p>
+                  </a:txBody>
+                  <a:tcPr marL="63500" marR="63500" marT="25400" marB="25400" anchor="ctr">
+                    <a:lnL w="9525" cap="flat" cmpd="sng">
+                      <a:solidFill>
+                        <a:srgbClr val="000000">
+                          <a:alpha val="0"/>
+                        </a:srgbClr>
+                      </a:solidFill>
+                      <a:prstDash val="solid"/>
+                      <a:round/>
+                      <a:headEnd type="none" w="sm" len="sm"/>
+                      <a:tailEnd type="none" w="sm" len="sm"/>
+                    </a:lnL>
+                    <a:lnR w="9525" cap="flat" cmpd="sng" algn="ctr">
+                      <a:solidFill>
+                        <a:srgbClr val="000000">
+                          <a:alpha val="0"/>
+                        </a:srgbClr>
+                      </a:solidFill>
+                      <a:prstDash val="solid"/>
+                      <a:round/>
+                      <a:headEnd type="none" w="sm" len="sm"/>
+                      <a:tailEnd type="none" w="sm" len="sm"/>
+                    </a:lnR>
+                    <a:lnT w="9525" cap="flat" cmpd="sng">
+                      <a:solidFill>
+                        <a:srgbClr val="000000">
+                          <a:alpha val="0"/>
+                        </a:srgbClr>
+                      </a:solidFill>
+                      <a:prstDash val="solid"/>
+                      <a:round/>
+                      <a:headEnd type="none" w="sm" len="sm"/>
+                      <a:tailEnd type="none" w="sm" len="sm"/>
+                    </a:lnT>
+                    <a:lnB w="9525" cap="flat" cmpd="sng">
+                      <a:solidFill>
+                        <a:srgbClr val="000000">
+                          <a:alpha val="0"/>
+                        </a:srgbClr>
+                      </a:solidFill>
+                      <a:prstDash val="solid"/>
+                      <a:round/>
+                      <a:headEnd type="none" w="sm" len="sm"/>
+                      <a:tailEnd type="none" w="sm" len="sm"/>
+                    </a:lnB>
+                    <a:solidFill>
+                      <a:srgbClr val="F8FAFC"/>
+                    </a:solidFill>
+                  </a:tcPr>
+                </a:tc>
+                <a:tc>
+                  <a:txBody>
+                    <a:bodyPr/>
+                    <a:lstStyle/>
+                    <a:p>
+                      <a:pPr marL="0" marR="0" lvl="0" indent="0" algn="l" rtl="0">
+                        <a:spcBef>
+                          <a:spcPts val="0"/>
+                        </a:spcBef>
+                        <a:spcAft>
+                          <a:spcPts val="0"/>
+                        </a:spcAft>
+                        <a:buNone/>
+                      </a:pPr>
+                      <a:r>
+                        <a:rPr lang="en-US" sz="1012" b="1" i="0" u="none" dirty="0">
+                          <a:solidFill>
+                            <a:srgbClr val="2563EB"/>
+                          </a:solidFill>
+                          <a:latin typeface="Arial"/>
+                          <a:ea typeface="Arial"/>
+                          <a:cs typeface="Arial"/>
+                          <a:sym typeface="Arial"/>
+                        </a:rPr>
+                        <a:t>GET</a:t>
+                      </a:r>
+                      <a:endParaRPr dirty="0"/>
+                    </a:p>
+                  </a:txBody>
+                  <a:tcPr marL="63500" marR="63500" marT="25400" marB="25400" anchor="ctr">
+                    <a:lnL w="9525" cap="flat" cmpd="sng">
+                      <a:solidFill>
+                        <a:srgbClr val="000000">
+                          <a:alpha val="0"/>
+                        </a:srgbClr>
+                      </a:solidFill>
+                      <a:prstDash val="solid"/>
+                      <a:round/>
+                      <a:headEnd type="none" w="sm" len="sm"/>
+                      <a:tailEnd type="none" w="sm" len="sm"/>
+                    </a:lnL>
+                    <a:lnR w="9525" cap="flat" cmpd="sng">
+                      <a:solidFill>
+                        <a:srgbClr val="000000">
+                          <a:alpha val="0"/>
+                        </a:srgbClr>
+                      </a:solidFill>
+                      <a:prstDash val="solid"/>
+                      <a:round/>
+                      <a:headEnd type="none" w="sm" len="sm"/>
+                      <a:tailEnd type="none" w="sm" len="sm"/>
+                    </a:lnR>
+                    <a:lnT w="9525" cap="flat" cmpd="sng">
+                      <a:solidFill>
+                        <a:srgbClr val="000000">
+                          <a:alpha val="0"/>
+                        </a:srgbClr>
+                      </a:solidFill>
+                      <a:prstDash val="solid"/>
+                      <a:round/>
+                      <a:headEnd type="none" w="sm" len="sm"/>
+                      <a:tailEnd type="none" w="sm" len="sm"/>
+                    </a:lnT>
+                    <a:lnB w="9525" cap="flat" cmpd="sng">
+                      <a:solidFill>
+                        <a:srgbClr val="000000">
+                          <a:alpha val="0"/>
+                        </a:srgbClr>
+                      </a:solidFill>
+                      <a:prstDash val="solid"/>
+                      <a:round/>
+                      <a:headEnd type="none" w="sm" len="sm"/>
+                      <a:tailEnd type="none" w="sm" len="sm"/>
+                    </a:lnB>
+                    <a:solidFill>
+                      <a:srgbClr val="F8FAFC"/>
+                    </a:solidFill>
+                  </a:tcPr>
+                </a:tc>
+                <a:tc>
+                  <a:txBody>
+                    <a:bodyPr/>
+                    <a:lstStyle/>
+                    <a:p>
+                      <a:pPr marL="0" marR="0" lvl="0" indent="0" algn="l" rtl="0">
+                        <a:spcBef>
+                          <a:spcPts val="0"/>
+                        </a:spcBef>
+                        <a:spcAft>
+                          <a:spcPts val="0"/>
+                        </a:spcAft>
+                        <a:buNone/>
+                      </a:pPr>
+                      <a:r>
+                        <a:rPr lang="en-US" sz="1012" b="0" i="0" u="none">
+                          <a:solidFill>
+                            <a:srgbClr val="334155"/>
+                          </a:solidFill>
+                          <a:latin typeface="Arial"/>
+                          <a:ea typeface="Arial"/>
+                          <a:cs typeface="Arial"/>
+                          <a:sym typeface="Arial"/>
+                        </a:rPr>
+                        <a:t>/api/services</a:t>
+                      </a:r>
+                      <a:endParaRPr/>
+                    </a:p>
+                  </a:txBody>
+                  <a:tcPr marL="63500" marR="63500" marT="25400" marB="25400" anchor="ctr">
+                    <a:lnL w="9525" cap="flat" cmpd="sng">
+                      <a:solidFill>
+                        <a:srgbClr val="000000">
+                          <a:alpha val="0"/>
+                        </a:srgbClr>
+                      </a:solidFill>
+                      <a:prstDash val="solid"/>
+                      <a:round/>
+                      <a:headEnd type="none" w="sm" len="sm"/>
+                      <a:tailEnd type="none" w="sm" len="sm"/>
+                    </a:lnL>
+                    <a:lnR w="9525" cap="flat" cmpd="sng">
+                      <a:solidFill>
+                        <a:srgbClr val="000000">
+                          <a:alpha val="0"/>
+                        </a:srgbClr>
+                      </a:solidFill>
+                      <a:prstDash val="solid"/>
+                      <a:round/>
+                      <a:headEnd type="none" w="sm" len="sm"/>
+                      <a:tailEnd type="none" w="sm" len="sm"/>
+                    </a:lnR>
+                    <a:lnT w="9525" cap="flat" cmpd="sng">
+                      <a:solidFill>
+                        <a:srgbClr val="000000">
+                          <a:alpha val="0"/>
+                        </a:srgbClr>
+                      </a:solidFill>
+                      <a:prstDash val="solid"/>
+                      <a:round/>
+                      <a:headEnd type="none" w="sm" len="sm"/>
+                      <a:tailEnd type="none" w="sm" len="sm"/>
+                    </a:lnT>
+                    <a:lnB w="9525" cap="flat" cmpd="sng">
+                      <a:solidFill>
+                        <a:srgbClr val="000000">
+                          <a:alpha val="0"/>
+                        </a:srgbClr>
+                      </a:solidFill>
+                      <a:prstDash val="solid"/>
+                      <a:round/>
+                      <a:headEnd type="none" w="sm" len="sm"/>
+                      <a:tailEnd type="none" w="sm" len="sm"/>
+                    </a:lnB>
+                    <a:solidFill>
+                      <a:srgbClr val="F8FAFC"/>
+                    </a:solidFill>
+                  </a:tcPr>
+                </a:tc>
+                <a:tc>
+                  <a:txBody>
+                    <a:bodyPr/>
+                    <a:lstStyle/>
+                    <a:p>
+                      <a:pPr marL="0" marR="0" lvl="0" indent="0" algn="l" rtl="0">
+                        <a:spcBef>
+                          <a:spcPts val="0"/>
+                        </a:spcBef>
+                        <a:spcAft>
+                          <a:spcPts val="0"/>
+                        </a:spcAft>
+                        <a:buNone/>
+                      </a:pPr>
+                      <a:r>
+                        <a:rPr lang="en-US" sz="1012" b="0" i="0" u="none" dirty="0" err="1">
+                          <a:solidFill>
+                            <a:srgbClr val="334155"/>
+                          </a:solidFill>
+                          <a:latin typeface="Inter"/>
+                          <a:ea typeface="Inter"/>
+                          <a:cs typeface="Arial" panose="020B0604020202020204" pitchFamily="34" charset="0"/>
+                          <a:sym typeface="Inter"/>
+                        </a:rPr>
+                        <a:t>Menampilkan</a:t>
+                      </a:r>
+                      <a:r>
+                        <a:rPr lang="en-US" sz="1012" b="0" i="0" u="none" dirty="0">
+                          <a:solidFill>
+                            <a:srgbClr val="334155"/>
+                          </a:solidFill>
+                          <a:latin typeface="Inter"/>
+                          <a:ea typeface="Inter"/>
+                          <a:cs typeface="Arial" panose="020B0604020202020204" pitchFamily="34" charset="0"/>
+                          <a:sym typeface="Inter"/>
+                        </a:rPr>
+                        <a:t> </a:t>
+                      </a:r>
+                      <a:r>
+                        <a:rPr lang="en-US" sz="1012" b="0" i="0" u="none" dirty="0" err="1">
+                          <a:solidFill>
+                            <a:srgbClr val="334155"/>
+                          </a:solidFill>
+                          <a:latin typeface="Inter"/>
+                          <a:ea typeface="Inter"/>
+                          <a:cs typeface="Arial" panose="020B0604020202020204" pitchFamily="34" charset="0"/>
+                          <a:sym typeface="Inter"/>
+                        </a:rPr>
+                        <a:t>katalog</a:t>
+                      </a:r>
+                      <a:r>
+                        <a:rPr lang="en-US" sz="1012" b="0" i="0" u="none" dirty="0">
+                          <a:solidFill>
+                            <a:srgbClr val="334155"/>
+                          </a:solidFill>
+                          <a:latin typeface="Inter"/>
+                          <a:ea typeface="Inter"/>
+                          <a:cs typeface="Arial" panose="020B0604020202020204" pitchFamily="34" charset="0"/>
+                          <a:sym typeface="Inter"/>
+                        </a:rPr>
+                        <a:t> </a:t>
+                      </a:r>
+                      <a:r>
+                        <a:rPr lang="en-US" sz="1012" b="0" i="0" u="none" dirty="0" err="1">
+                          <a:solidFill>
+                            <a:srgbClr val="334155"/>
+                          </a:solidFill>
+                          <a:latin typeface="Inter"/>
+                          <a:ea typeface="Inter"/>
+                          <a:cs typeface="Arial" panose="020B0604020202020204" pitchFamily="34" charset="0"/>
+                          <a:sym typeface="Inter"/>
+                        </a:rPr>
+                        <a:t>paket</a:t>
+                      </a:r>
+                      <a:r>
+                        <a:rPr lang="en-US" sz="1012" b="0" i="0" u="none" dirty="0">
+                          <a:solidFill>
+                            <a:srgbClr val="334155"/>
+                          </a:solidFill>
+                          <a:latin typeface="Inter"/>
+                          <a:ea typeface="Inter"/>
+                          <a:cs typeface="Arial" panose="020B0604020202020204" pitchFamily="34" charset="0"/>
+                          <a:sym typeface="Inter"/>
+                        </a:rPr>
+                        <a:t> </a:t>
+                      </a:r>
+                      <a:r>
+                        <a:rPr lang="en-US" sz="1012" b="0" i="0" u="none" dirty="0" err="1">
+                          <a:solidFill>
+                            <a:srgbClr val="334155"/>
+                          </a:solidFill>
+                          <a:latin typeface="Inter"/>
+                          <a:ea typeface="Inter"/>
+                          <a:cs typeface="Arial" panose="020B0604020202020204" pitchFamily="34" charset="0"/>
+                          <a:sym typeface="Inter"/>
+                        </a:rPr>
+                        <a:t>pemeriksaan</a:t>
+                      </a:r>
+                      <a:r>
+                        <a:rPr lang="en-US" sz="1012" b="0" i="0" u="none" dirty="0">
+                          <a:solidFill>
+                            <a:srgbClr val="334155"/>
+                          </a:solidFill>
+                          <a:latin typeface="Inter"/>
+                          <a:ea typeface="Inter"/>
+                          <a:cs typeface="Arial" panose="020B0604020202020204" pitchFamily="34" charset="0"/>
+                          <a:sym typeface="Inter"/>
+                        </a:rPr>
+                        <a:t> RS </a:t>
+                      </a:r>
+                      <a:r>
+                        <a:rPr lang="en-US" sz="1012" b="0" i="0" u="none" dirty="0" err="1">
+                          <a:solidFill>
+                            <a:srgbClr val="334155"/>
+                          </a:solidFill>
+                          <a:latin typeface="Inter"/>
+                          <a:ea typeface="Inter"/>
+                          <a:cs typeface="Arial" panose="020B0604020202020204" pitchFamily="34" charset="0"/>
+                          <a:sym typeface="Inter"/>
+                        </a:rPr>
+                        <a:t>langsung</a:t>
+                      </a:r>
+                      <a:r>
+                        <a:rPr lang="en-US" sz="1012" b="0" i="0" u="none" dirty="0">
+                          <a:solidFill>
+                            <a:srgbClr val="334155"/>
+                          </a:solidFill>
+                          <a:latin typeface="Inter"/>
+                          <a:ea typeface="Inter"/>
+                          <a:cs typeface="Arial" panose="020B0604020202020204" pitchFamily="34" charset="0"/>
+                          <a:sym typeface="Inter"/>
+                        </a:rPr>
+                        <a:t> </a:t>
+                      </a:r>
+                      <a:r>
+                        <a:rPr lang="en-US" sz="1012" b="0" i="0" u="none" dirty="0" err="1">
+                          <a:solidFill>
+                            <a:srgbClr val="334155"/>
+                          </a:solidFill>
+                          <a:latin typeface="Inter"/>
+                          <a:ea typeface="Inter"/>
+                          <a:cs typeface="Arial" panose="020B0604020202020204" pitchFamily="34" charset="0"/>
+                          <a:sym typeface="Inter"/>
+                        </a:rPr>
+                        <a:t>terpaginasi</a:t>
+                      </a:r>
+                      <a:r>
+                        <a:rPr lang="en-US" sz="1012" b="0" i="0" u="none" dirty="0">
+                          <a:solidFill>
+                            <a:srgbClr val="334155"/>
+                          </a:solidFill>
+                          <a:latin typeface="Inter"/>
+                          <a:ea typeface="Inter"/>
+                          <a:cs typeface="Arial" panose="020B0604020202020204" pitchFamily="34" charset="0"/>
+                          <a:sym typeface="Inter"/>
+                        </a:rPr>
+                        <a:t> (Lab, </a:t>
+                      </a:r>
+                      <a:r>
+                        <a:rPr lang="en-US" sz="1012" b="0" i="0" u="none" dirty="0" err="1">
+                          <a:solidFill>
+                            <a:srgbClr val="334155"/>
+                          </a:solidFill>
+                          <a:latin typeface="Inter"/>
+                          <a:ea typeface="Inter"/>
+                          <a:cs typeface="Arial" panose="020B0604020202020204" pitchFamily="34" charset="0"/>
+                          <a:sym typeface="Inter"/>
+                        </a:rPr>
+                        <a:t>Radiologi</a:t>
+                      </a:r>
+                      <a:r>
+                        <a:rPr lang="en-US" sz="1012" b="0" i="0" u="none" dirty="0">
+                          <a:solidFill>
+                            <a:srgbClr val="334155"/>
+                          </a:solidFill>
+                          <a:latin typeface="Inter"/>
+                          <a:ea typeface="Inter"/>
+                          <a:cs typeface="Arial" panose="020B0604020202020204" pitchFamily="34" charset="0"/>
+                          <a:sym typeface="Inter"/>
+                        </a:rPr>
+                        <a:t>).</a:t>
+                      </a:r>
+                      <a:endParaRPr dirty="0"/>
+                    </a:p>
+                  </a:txBody>
+                  <a:tcPr marL="63500" marR="63500" marT="25400" marB="25400" anchor="ctr">
+                    <a:lnL w="9525" cap="flat" cmpd="sng">
+                      <a:solidFill>
+                        <a:srgbClr val="000000">
+                          <a:alpha val="0"/>
+                        </a:srgbClr>
+                      </a:solidFill>
+                      <a:prstDash val="solid"/>
+                      <a:round/>
+                      <a:headEnd type="none" w="sm" len="sm"/>
+                      <a:tailEnd type="none" w="sm" len="sm"/>
+                    </a:lnL>
+                    <a:lnR w="9525" cap="flat" cmpd="sng">
+                      <a:solidFill>
+                        <a:srgbClr val="000000">
+                          <a:alpha val="0"/>
+                        </a:srgbClr>
+                      </a:solidFill>
+                      <a:prstDash val="solid"/>
+                      <a:round/>
+                      <a:headEnd type="none" w="sm" len="sm"/>
+                      <a:tailEnd type="none" w="sm" len="sm"/>
+                    </a:lnR>
+                    <a:lnT w="9525" cap="flat" cmpd="sng">
+                      <a:solidFill>
+                        <a:srgbClr val="000000">
+                          <a:alpha val="0"/>
+                        </a:srgbClr>
+                      </a:solidFill>
+                      <a:prstDash val="solid"/>
+                      <a:round/>
+                      <a:headEnd type="none" w="sm" len="sm"/>
+                      <a:tailEnd type="none" w="sm" len="sm"/>
+                    </a:lnT>
+                    <a:lnB w="9525" cap="flat" cmpd="sng">
+                      <a:solidFill>
+                        <a:srgbClr val="000000">
+                          <a:alpha val="0"/>
+                        </a:srgbClr>
+                      </a:solidFill>
+                      <a:prstDash val="solid"/>
+                      <a:round/>
+                      <a:headEnd type="none" w="sm" len="sm"/>
+                      <a:tailEnd type="none" w="sm" len="sm"/>
+                    </a:lnB>
+                  </a:tcPr>
+                </a:tc>
+                <a:extLst>
+                  <a:ext uri="{0D108BD9-81ED-4DB2-BD59-A6C34878D82A}">
+                    <a16:rowId xmlns:a16="http://schemas.microsoft.com/office/drawing/2014/main" val="10004"/>
+                  </a:ext>
+                </a:extLst>
+              </a:tr>
+              <a:tr h="427950">
+                <a:tc>
+                  <a:txBody>
+                    <a:bodyPr/>
+                    <a:lstStyle/>
+                    <a:p>
+                      <a:pPr marL="0" marR="0" lvl="0" indent="0" algn="l" rtl="0">
+                        <a:spcBef>
+                          <a:spcPts val="0"/>
+                        </a:spcBef>
+                        <a:spcAft>
+                          <a:spcPts val="0"/>
+                        </a:spcAft>
+                        <a:buNone/>
+                      </a:pPr>
+                      <a:r>
+                        <a:rPr lang="en-US" sz="1012" b="0" i="0" u="none">
+                          <a:solidFill>
+                            <a:srgbClr val="D97706"/>
+                          </a:solidFill>
+                          <a:latin typeface="Inter SemiBold"/>
+                          <a:ea typeface="Inter SemiBold"/>
+                          <a:cs typeface="Arial" panose="020B0604020202020204" pitchFamily="34" charset="0"/>
+                          <a:sym typeface="Inter SemiBold"/>
+                        </a:rPr>
+                        <a:t>Katalog Transaksi Booking</a:t>
+                      </a:r>
+                      <a:endParaRPr/>
+                    </a:p>
+                  </a:txBody>
+                  <a:tcPr marL="63500" marR="63500" marT="25400" marB="25400" anchor="ctr">
+                    <a:lnL w="9525" cap="flat" cmpd="sng">
+                      <a:solidFill>
+                        <a:srgbClr val="000000">
+                          <a:alpha val="0"/>
+                        </a:srgbClr>
+                      </a:solidFill>
+                      <a:prstDash val="solid"/>
+                      <a:round/>
+                      <a:headEnd type="none" w="sm" len="sm"/>
+                      <a:tailEnd type="none" w="sm" len="sm"/>
+                    </a:lnL>
+                    <a:lnR w="9525" cap="flat" cmpd="sng">
+                      <a:solidFill>
+                        <a:srgbClr val="000000">
+                          <a:alpha val="0"/>
+                        </a:srgbClr>
+                      </a:solidFill>
+                      <a:prstDash val="solid"/>
+                      <a:round/>
+                      <a:headEnd type="none" w="sm" len="sm"/>
+                      <a:tailEnd type="none" w="sm" len="sm"/>
+                    </a:lnR>
+                    <a:lnT w="9525" cap="flat" cmpd="sng">
+                      <a:solidFill>
+                        <a:srgbClr val="000000">
+                          <a:alpha val="0"/>
+                        </a:srgbClr>
+                      </a:solidFill>
+                      <a:prstDash val="solid"/>
+                      <a:round/>
+                      <a:headEnd type="none" w="sm" len="sm"/>
+                      <a:tailEnd type="none" w="sm" len="sm"/>
+                    </a:lnT>
+                    <a:lnB w="9525" cap="flat" cmpd="sng">
+                      <a:solidFill>
+                        <a:srgbClr val="000000">
+                          <a:alpha val="0"/>
+                        </a:srgbClr>
+                      </a:solidFill>
+                      <a:prstDash val="solid"/>
+                      <a:round/>
+                      <a:headEnd type="none" w="sm" len="sm"/>
+                      <a:tailEnd type="none" w="sm" len="sm"/>
+                    </a:lnB>
+                    <a:solidFill>
+                      <a:srgbClr val="FFFBEB"/>
+                    </a:solidFill>
+                  </a:tcPr>
+                </a:tc>
+                <a:tc>
+                  <a:txBody>
+                    <a:bodyPr/>
+                    <a:lstStyle/>
+                    <a:p>
+                      <a:pPr marL="0" marR="0" lvl="0" indent="0" algn="l" rtl="0">
+                        <a:spcBef>
+                          <a:spcPts val="0"/>
+                        </a:spcBef>
+                        <a:spcAft>
+                          <a:spcPts val="0"/>
+                        </a:spcAft>
+                        <a:buNone/>
+                      </a:pPr>
+                      <a:r>
+                        <a:rPr lang="en-US" sz="1012" b="1" i="0" u="none">
+                          <a:solidFill>
+                            <a:srgbClr val="16A34A"/>
+                          </a:solidFill>
+                          <a:latin typeface="Arial"/>
+                          <a:ea typeface="Arial"/>
+                          <a:cs typeface="Arial"/>
+                          <a:sym typeface="Arial"/>
+                        </a:rPr>
+                        <a:t>POST</a:t>
+                      </a:r>
+                      <a:endParaRPr/>
+                    </a:p>
+                  </a:txBody>
+                  <a:tcPr marL="63500" marR="63500" marT="25400" marB="25400" anchor="ctr">
+                    <a:lnL w="9525" cap="flat" cmpd="sng">
+                      <a:solidFill>
+                        <a:srgbClr val="000000">
+                          <a:alpha val="0"/>
+                        </a:srgbClr>
+                      </a:solidFill>
+                      <a:prstDash val="solid"/>
+                      <a:round/>
+                      <a:headEnd type="none" w="sm" len="sm"/>
+                      <a:tailEnd type="none" w="sm" len="sm"/>
+                    </a:lnL>
+                    <a:lnR w="9525" cap="flat" cmpd="sng">
+                      <a:solidFill>
+                        <a:srgbClr val="000000">
+                          <a:alpha val="0"/>
+                        </a:srgbClr>
+                      </a:solidFill>
+                      <a:prstDash val="solid"/>
+                      <a:round/>
+                      <a:headEnd type="none" w="sm" len="sm"/>
+                      <a:tailEnd type="none" w="sm" len="sm"/>
+                    </a:lnR>
+                    <a:lnT w="9525" cap="flat" cmpd="sng" algn="ctr">
+                      <a:solidFill>
+                        <a:srgbClr val="000000">
+                          <a:alpha val="0"/>
+                        </a:srgbClr>
+                      </a:solidFill>
+                      <a:prstDash val="solid"/>
+                      <a:round/>
+                      <a:headEnd type="none" w="sm" len="sm"/>
+                      <a:tailEnd type="none" w="sm" len="sm"/>
+                    </a:lnT>
+                    <a:lnB w="9525" cap="flat" cmpd="sng" algn="ctr">
+                      <a:solidFill>
+                        <a:srgbClr val="000000">
+                          <a:alpha val="0"/>
+                        </a:srgbClr>
+                      </a:solidFill>
+                      <a:prstDash val="solid"/>
+                      <a:round/>
+                      <a:headEnd type="none" w="sm" len="sm"/>
+                      <a:tailEnd type="none" w="sm" len="sm"/>
+                    </a:lnB>
+                  </a:tcPr>
+                </a:tc>
+                <a:tc>
+                  <a:txBody>
+                    <a:bodyPr/>
+                    <a:lstStyle/>
+                    <a:p>
+                      <a:pPr marL="0" marR="0" lvl="0" indent="0" algn="l" rtl="0">
+                        <a:spcBef>
+                          <a:spcPts val="0"/>
+                        </a:spcBef>
+                        <a:spcAft>
+                          <a:spcPts val="0"/>
+                        </a:spcAft>
+                        <a:buNone/>
+                      </a:pPr>
+                      <a:r>
+                        <a:rPr lang="en-US" sz="1012" b="0" i="0" u="none">
+                          <a:solidFill>
+                            <a:srgbClr val="334155"/>
+                          </a:solidFill>
+                          <a:latin typeface="Arial"/>
+                          <a:ea typeface="Arial"/>
+                          <a:cs typeface="Arial"/>
+                          <a:sym typeface="Arial"/>
+                        </a:rPr>
+                        <a:t>/api/bookings</a:t>
+                      </a:r>
+                      <a:endParaRPr/>
+                    </a:p>
+                  </a:txBody>
+                  <a:tcPr marL="63500" marR="63500" marT="25400" marB="25400" anchor="ctr">
+                    <a:lnL w="9525" cap="flat" cmpd="sng">
+                      <a:solidFill>
+                        <a:srgbClr val="000000">
+                          <a:alpha val="0"/>
+                        </a:srgbClr>
+                      </a:solidFill>
+                      <a:prstDash val="solid"/>
+                      <a:round/>
+                      <a:headEnd type="none" w="sm" len="sm"/>
+                      <a:tailEnd type="none" w="sm" len="sm"/>
+                    </a:lnL>
+                    <a:lnR w="9525" cap="flat" cmpd="sng">
+                      <a:solidFill>
+                        <a:srgbClr val="000000">
+                          <a:alpha val="0"/>
+                        </a:srgbClr>
+                      </a:solidFill>
+                      <a:prstDash val="solid"/>
+                      <a:round/>
+                      <a:headEnd type="none" w="sm" len="sm"/>
+                      <a:tailEnd type="none" w="sm" len="sm"/>
+                    </a:lnR>
+                    <a:lnT w="9525" cap="flat" cmpd="sng" algn="ctr">
+                      <a:solidFill>
+                        <a:srgbClr val="000000">
+                          <a:alpha val="0"/>
+                        </a:srgbClr>
+                      </a:solidFill>
+                      <a:prstDash val="solid"/>
+                      <a:round/>
+                      <a:headEnd type="none" w="sm" len="sm"/>
+                      <a:tailEnd type="none" w="sm" len="sm"/>
+                    </a:lnT>
+                    <a:lnB w="9525" cap="flat" cmpd="sng" algn="ctr">
+                      <a:solidFill>
+                        <a:srgbClr val="000000">
+                          <a:alpha val="0"/>
+                        </a:srgbClr>
+                      </a:solidFill>
+                      <a:prstDash val="solid"/>
+                      <a:round/>
+                      <a:headEnd type="none" w="sm" len="sm"/>
+                      <a:tailEnd type="none" w="sm" len="sm"/>
+                    </a:lnB>
+                  </a:tcPr>
+                </a:tc>
+                <a:tc>
+                  <a:txBody>
+                    <a:bodyPr/>
+                    <a:lstStyle/>
+                    <a:p>
+                      <a:pPr marL="0" marR="0" lvl="0" indent="0" algn="l" rtl="0">
+                        <a:spcBef>
+                          <a:spcPts val="0"/>
+                        </a:spcBef>
+                        <a:spcAft>
+                          <a:spcPts val="0"/>
+                        </a:spcAft>
+                        <a:buNone/>
+                      </a:pPr>
+                      <a:r>
+                        <a:rPr lang="en-US" sz="1012" b="0" i="0" u="none">
+                          <a:solidFill>
+                            <a:srgbClr val="334155"/>
+                          </a:solidFill>
+                          <a:latin typeface="Inter"/>
+                          <a:ea typeface="Inter"/>
+                          <a:cs typeface="Arial" panose="020B0604020202020204" pitchFamily="34" charset="0"/>
+                          <a:sym typeface="Inter"/>
+                        </a:rPr>
+                        <a:t>Membuat nomor pendaftaran baru, unggah berkas rujukan (Mengeset status PENDING).</a:t>
+                      </a:r>
+                      <a:endParaRPr/>
+                    </a:p>
+                  </a:txBody>
+                  <a:tcPr marL="63500" marR="63500" marT="25400" marB="25400" anchor="ctr">
+                    <a:lnL w="9525" cap="flat" cmpd="sng">
+                      <a:solidFill>
+                        <a:srgbClr val="000000">
+                          <a:alpha val="0"/>
+                        </a:srgbClr>
+                      </a:solidFill>
+                      <a:prstDash val="solid"/>
+                      <a:round/>
+                      <a:headEnd type="none" w="sm" len="sm"/>
+                      <a:tailEnd type="none" w="sm" len="sm"/>
+                    </a:lnL>
+                    <a:lnR w="9525" cap="flat" cmpd="sng">
+                      <a:solidFill>
+                        <a:srgbClr val="000000">
+                          <a:alpha val="0"/>
+                        </a:srgbClr>
+                      </a:solidFill>
+                      <a:prstDash val="solid"/>
+                      <a:round/>
+                      <a:headEnd type="none" w="sm" len="sm"/>
+                      <a:tailEnd type="none" w="sm" len="sm"/>
+                    </a:lnR>
+                    <a:lnT w="9525" cap="flat" cmpd="sng" algn="ctr">
+                      <a:solidFill>
+                        <a:srgbClr val="000000">
+                          <a:alpha val="0"/>
+                        </a:srgbClr>
+                      </a:solidFill>
+                      <a:prstDash val="solid"/>
+                      <a:round/>
+                      <a:headEnd type="none" w="sm" len="sm"/>
+                      <a:tailEnd type="none" w="sm" len="sm"/>
+                    </a:lnT>
+                    <a:lnB w="9525" cap="flat" cmpd="sng" algn="ctr">
+                      <a:solidFill>
+                        <a:srgbClr val="000000">
+                          <a:alpha val="0"/>
+                        </a:srgbClr>
+                      </a:solidFill>
+                      <a:prstDash val="solid"/>
+                      <a:round/>
+                      <a:headEnd type="none" w="sm" len="sm"/>
+                      <a:tailEnd type="none" w="sm" len="sm"/>
+                    </a:lnB>
+                  </a:tcPr>
+                </a:tc>
+                <a:extLst>
+                  <a:ext uri="{0D108BD9-81ED-4DB2-BD59-A6C34878D82A}">
+                    <a16:rowId xmlns:a16="http://schemas.microsoft.com/office/drawing/2014/main" val="10005"/>
+                  </a:ext>
+                </a:extLst>
+              </a:tr>
+              <a:tr h="427950">
+                <a:tc>
+                  <a:txBody>
+                    <a:bodyPr/>
+                    <a:lstStyle/>
+                    <a:p>
+                      <a:pPr marL="0" marR="0" lvl="0" indent="0" algn="l" rtl="0">
+                        <a:spcBef>
+                          <a:spcPts val="0"/>
+                        </a:spcBef>
+                        <a:spcAft>
+                          <a:spcPts val="0"/>
+                        </a:spcAft>
+                        <a:buNone/>
+                      </a:pPr>
+                      <a:endParaRPr/>
+                    </a:p>
+                  </a:txBody>
+                  <a:tcPr marL="63500" marR="63500" marT="25400" marB="25400" anchor="ctr">
+                    <a:lnL w="9525" cap="flat" cmpd="sng">
+                      <a:solidFill>
+                        <a:srgbClr val="000000">
+                          <a:alpha val="0"/>
+                        </a:srgbClr>
+                      </a:solidFill>
+                      <a:prstDash val="solid"/>
+                      <a:round/>
+                      <a:headEnd type="none" w="sm" len="sm"/>
+                      <a:tailEnd type="none" w="sm" len="sm"/>
+                    </a:lnL>
+                    <a:lnR w="9525" cap="flat" cmpd="sng" algn="ctr">
+                      <a:solidFill>
+                        <a:srgbClr val="000000">
+                          <a:alpha val="0"/>
+                        </a:srgbClr>
+                      </a:solidFill>
+                      <a:prstDash val="solid"/>
+                      <a:round/>
+                      <a:headEnd type="none" w="sm" len="sm"/>
+                      <a:tailEnd type="none" w="sm" len="sm"/>
+                    </a:lnR>
+                    <a:lnT w="9525" cap="flat" cmpd="sng">
+                      <a:solidFill>
+                        <a:srgbClr val="000000">
+                          <a:alpha val="0"/>
+                        </a:srgbClr>
+                      </a:solidFill>
+                      <a:prstDash val="solid"/>
+                      <a:round/>
+                      <a:headEnd type="none" w="sm" len="sm"/>
+                      <a:tailEnd type="none" w="sm" len="sm"/>
+                    </a:lnT>
+                    <a:lnB w="9525" cap="flat" cmpd="sng">
+                      <a:solidFill>
+                        <a:srgbClr val="000000">
+                          <a:alpha val="0"/>
+                        </a:srgbClr>
+                      </a:solidFill>
+                      <a:prstDash val="solid"/>
+                      <a:round/>
+                      <a:headEnd type="none" w="sm" len="sm"/>
+                      <a:tailEnd type="none" w="sm" len="sm"/>
+                    </a:lnB>
+                    <a:solidFill>
+                      <a:srgbClr val="F8FAFC"/>
+                    </a:solidFill>
+                  </a:tcPr>
+                </a:tc>
+                <a:tc>
+                  <a:txBody>
+                    <a:bodyPr/>
+                    <a:lstStyle/>
+                    <a:p>
+                      <a:pPr marL="0" marR="0" lvl="0" indent="0" algn="l" rtl="0">
+                        <a:spcBef>
+                          <a:spcPts val="0"/>
+                        </a:spcBef>
+                        <a:spcAft>
+                          <a:spcPts val="0"/>
+                        </a:spcAft>
+                        <a:buNone/>
+                      </a:pPr>
+                      <a:r>
+                        <a:rPr lang="en-US" sz="1012" b="1" i="0" u="none" dirty="0">
+                          <a:solidFill>
+                            <a:srgbClr val="16A34A"/>
+                          </a:solidFill>
+                          <a:latin typeface="Arial"/>
+                          <a:ea typeface="Arial"/>
+                          <a:cs typeface="Arial"/>
+                          <a:sym typeface="Arial"/>
+                        </a:rPr>
+                        <a:t>POST</a:t>
+                      </a:r>
+                      <a:endParaRPr dirty="0"/>
+                    </a:p>
+                  </a:txBody>
+                  <a:tcPr marL="63500" marR="63500" marT="25400" marB="25400" anchor="ctr">
+                    <a:lnL w="9525" cap="flat" cmpd="sng">
+                      <a:solidFill>
+                        <a:srgbClr val="000000">
+                          <a:alpha val="0"/>
+                        </a:srgbClr>
+                      </a:solidFill>
+                      <a:prstDash val="solid"/>
+                      <a:round/>
+                      <a:headEnd type="none" w="sm" len="sm"/>
+                      <a:tailEnd type="none" w="sm" len="sm"/>
+                    </a:lnL>
+                    <a:lnR w="9525" cap="flat" cmpd="sng">
+                      <a:solidFill>
+                        <a:srgbClr val="000000">
+                          <a:alpha val="0"/>
+                        </a:srgbClr>
+                      </a:solidFill>
+                      <a:prstDash val="solid"/>
+                      <a:round/>
+                      <a:headEnd type="none" w="sm" len="sm"/>
+                      <a:tailEnd type="none" w="sm" len="sm"/>
+                    </a:lnR>
+                    <a:lnT w="9525" cap="flat" cmpd="sng">
+                      <a:solidFill>
+                        <a:srgbClr val="000000">
+                          <a:alpha val="0"/>
+                        </a:srgbClr>
+                      </a:solidFill>
+                      <a:prstDash val="solid"/>
+                      <a:round/>
+                      <a:headEnd type="none" w="sm" len="sm"/>
+                      <a:tailEnd type="none" w="sm" len="sm"/>
+                    </a:lnT>
+                    <a:lnB w="9525" cap="flat" cmpd="sng">
+                      <a:solidFill>
+                        <a:srgbClr val="000000">
+                          <a:alpha val="0"/>
+                        </a:srgbClr>
+                      </a:solidFill>
+                      <a:prstDash val="solid"/>
+                      <a:round/>
+                      <a:headEnd type="none" w="sm" len="sm"/>
+                      <a:tailEnd type="none" w="sm" len="sm"/>
+                    </a:lnB>
+                    <a:solidFill>
+                      <a:srgbClr val="F8FAFC"/>
+                    </a:solidFill>
+                  </a:tcPr>
+                </a:tc>
+                <a:tc>
+                  <a:txBody>
+                    <a:bodyPr/>
+                    <a:lstStyle/>
+                    <a:p>
+                      <a:pPr marL="0" marR="0" lvl="0" indent="0" algn="l" rtl="0">
+                        <a:spcBef>
+                          <a:spcPts val="0"/>
+                        </a:spcBef>
+                        <a:spcAft>
+                          <a:spcPts val="0"/>
+                        </a:spcAft>
+                        <a:buNone/>
+                      </a:pPr>
+                      <a:r>
+                        <a:rPr lang="en-US" sz="1012" b="0" i="0" u="none">
+                          <a:solidFill>
+                            <a:srgbClr val="334155"/>
+                          </a:solidFill>
+                          <a:latin typeface="Arial"/>
+                          <a:ea typeface="Arial"/>
+                          <a:cs typeface="Arial"/>
+                          <a:sym typeface="Arial"/>
+                        </a:rPr>
+                        <a:t>/api/bookings/{id}/pay</a:t>
+                      </a:r>
+                      <a:endParaRPr/>
+                    </a:p>
+                  </a:txBody>
+                  <a:tcPr marL="63500" marR="63500" marT="25400" marB="25400" anchor="ctr">
+                    <a:lnL w="9525" cap="flat" cmpd="sng">
+                      <a:solidFill>
+                        <a:srgbClr val="000000">
+                          <a:alpha val="0"/>
+                        </a:srgbClr>
+                      </a:solidFill>
+                      <a:prstDash val="solid"/>
+                      <a:round/>
+                      <a:headEnd type="none" w="sm" len="sm"/>
+                      <a:tailEnd type="none" w="sm" len="sm"/>
+                    </a:lnL>
+                    <a:lnR w="9525" cap="flat" cmpd="sng">
+                      <a:solidFill>
+                        <a:srgbClr val="000000">
+                          <a:alpha val="0"/>
+                        </a:srgbClr>
+                      </a:solidFill>
+                      <a:prstDash val="solid"/>
+                      <a:round/>
+                      <a:headEnd type="none" w="sm" len="sm"/>
+                      <a:tailEnd type="none" w="sm" len="sm"/>
+                    </a:lnR>
+                    <a:lnT w="9525" cap="flat" cmpd="sng">
+                      <a:solidFill>
+                        <a:srgbClr val="000000">
+                          <a:alpha val="0"/>
+                        </a:srgbClr>
+                      </a:solidFill>
+                      <a:prstDash val="solid"/>
+                      <a:round/>
+                      <a:headEnd type="none" w="sm" len="sm"/>
+                      <a:tailEnd type="none" w="sm" len="sm"/>
+                    </a:lnT>
+                    <a:lnB w="9525" cap="flat" cmpd="sng">
+                      <a:solidFill>
+                        <a:srgbClr val="000000">
+                          <a:alpha val="0"/>
+                        </a:srgbClr>
+                      </a:solidFill>
+                      <a:prstDash val="solid"/>
+                      <a:round/>
+                      <a:headEnd type="none" w="sm" len="sm"/>
+                      <a:tailEnd type="none" w="sm" len="sm"/>
+                    </a:lnB>
+                    <a:solidFill>
+                      <a:srgbClr val="F8FAFC"/>
+                    </a:solidFill>
+                  </a:tcPr>
+                </a:tc>
+                <a:tc>
+                  <a:txBody>
+                    <a:bodyPr/>
+                    <a:lstStyle/>
+                    <a:p>
+                      <a:pPr marL="0" marR="0" lvl="0" indent="0" algn="l" rtl="0">
+                        <a:spcBef>
+                          <a:spcPts val="0"/>
+                        </a:spcBef>
+                        <a:spcAft>
+                          <a:spcPts val="0"/>
+                        </a:spcAft>
+                        <a:buNone/>
+                      </a:pPr>
+                      <a:r>
+                        <a:rPr lang="en-US" sz="1012" b="0" i="0" u="none" dirty="0" err="1">
+                          <a:solidFill>
+                            <a:srgbClr val="334155"/>
+                          </a:solidFill>
+                          <a:latin typeface="Inter"/>
+                          <a:ea typeface="Inter"/>
+                          <a:cs typeface="Arial" panose="020B0604020202020204" pitchFamily="34" charset="0"/>
+                          <a:sym typeface="Inter"/>
+                        </a:rPr>
+                        <a:t>Simulasi</a:t>
+                      </a:r>
+                      <a:r>
+                        <a:rPr lang="en-US" sz="1012" b="0" i="0" u="none" dirty="0">
+                          <a:solidFill>
+                            <a:srgbClr val="334155"/>
+                          </a:solidFill>
+                          <a:latin typeface="Inter"/>
+                          <a:ea typeface="Inter"/>
+                          <a:cs typeface="Arial" panose="020B0604020202020204" pitchFamily="34" charset="0"/>
+                          <a:sym typeface="Inter"/>
+                        </a:rPr>
+                        <a:t> sandbox </a:t>
+                      </a:r>
+                      <a:r>
+                        <a:rPr lang="en-US" sz="1012" b="0" i="0" u="none" dirty="0" err="1">
+                          <a:solidFill>
+                            <a:srgbClr val="334155"/>
+                          </a:solidFill>
+                          <a:latin typeface="Inter"/>
+                          <a:ea typeface="Inter"/>
+                          <a:cs typeface="Arial" panose="020B0604020202020204" pitchFamily="34" charset="0"/>
+                          <a:sym typeface="Inter"/>
+                        </a:rPr>
+                        <a:t>pembayaran</a:t>
+                      </a:r>
+                      <a:r>
+                        <a:rPr lang="en-US" sz="1012" b="0" i="0" u="none" dirty="0">
+                          <a:solidFill>
+                            <a:srgbClr val="334155"/>
+                          </a:solidFill>
+                          <a:latin typeface="Inter"/>
+                          <a:ea typeface="Inter"/>
+                          <a:cs typeface="Arial" panose="020B0604020202020204" pitchFamily="34" charset="0"/>
+                          <a:sym typeface="Inter"/>
+                        </a:rPr>
+                        <a:t>, </a:t>
+                      </a:r>
+                      <a:r>
+                        <a:rPr lang="en-US" sz="1012" b="0" i="0" u="none" dirty="0" err="1">
+                          <a:solidFill>
+                            <a:srgbClr val="334155"/>
+                          </a:solidFill>
+                          <a:latin typeface="Inter"/>
+                          <a:ea typeface="Inter"/>
+                          <a:cs typeface="Arial" panose="020B0604020202020204" pitchFamily="34" charset="0"/>
+                          <a:sym typeface="Inter"/>
+                        </a:rPr>
+                        <a:t>memicu</a:t>
+                      </a:r>
+                      <a:r>
+                        <a:rPr lang="en-US" sz="1012" b="0" i="0" u="none" dirty="0">
+                          <a:solidFill>
+                            <a:srgbClr val="334155"/>
+                          </a:solidFill>
+                          <a:latin typeface="Inter"/>
+                          <a:ea typeface="Inter"/>
+                          <a:cs typeface="Arial" panose="020B0604020202020204" pitchFamily="34" charset="0"/>
+                          <a:sym typeface="Inter"/>
+                        </a:rPr>
+                        <a:t> </a:t>
+                      </a:r>
+                      <a:r>
+                        <a:rPr lang="en-US" sz="1012" b="0" i="0" u="none" dirty="0" err="1">
+                          <a:solidFill>
+                            <a:srgbClr val="334155"/>
+                          </a:solidFill>
+                          <a:latin typeface="Inter"/>
+                          <a:ea typeface="Inter"/>
+                          <a:cs typeface="Arial" panose="020B0604020202020204" pitchFamily="34" charset="0"/>
+                          <a:sym typeface="Inter"/>
+                        </a:rPr>
+                        <a:t>transisi</a:t>
+                      </a:r>
+                      <a:r>
+                        <a:rPr lang="en-US" sz="1012" b="0" i="0" u="none" dirty="0">
+                          <a:solidFill>
+                            <a:srgbClr val="334155"/>
+                          </a:solidFill>
+                          <a:latin typeface="Inter"/>
+                          <a:ea typeface="Inter"/>
+                          <a:cs typeface="Arial" panose="020B0604020202020204" pitchFamily="34" charset="0"/>
+                          <a:sym typeface="Inter"/>
+                        </a:rPr>
+                        <a:t> </a:t>
+                      </a:r>
+                      <a:r>
+                        <a:rPr lang="en-US" sz="1012" b="0" i="0" u="none" dirty="0" err="1">
+                          <a:solidFill>
+                            <a:srgbClr val="334155"/>
+                          </a:solidFill>
+                          <a:latin typeface="Inter"/>
+                          <a:ea typeface="Inter"/>
+                          <a:cs typeface="Arial" panose="020B0604020202020204" pitchFamily="34" charset="0"/>
+                          <a:sym typeface="Inter"/>
+                        </a:rPr>
+                        <a:t>otomatis</a:t>
+                      </a:r>
+                      <a:r>
+                        <a:rPr lang="en-US" sz="1012" b="0" i="0" u="none" dirty="0">
+                          <a:solidFill>
+                            <a:srgbClr val="334155"/>
+                          </a:solidFill>
+                          <a:latin typeface="Inter"/>
+                          <a:ea typeface="Inter"/>
+                          <a:cs typeface="Arial" panose="020B0604020202020204" pitchFamily="34" charset="0"/>
+                          <a:sym typeface="Inter"/>
+                        </a:rPr>
+                        <a:t> status </a:t>
+                      </a:r>
+                      <a:r>
+                        <a:rPr lang="en-US" sz="1012" b="0" i="0" u="none" dirty="0" err="1">
+                          <a:solidFill>
+                            <a:srgbClr val="334155"/>
+                          </a:solidFill>
+                          <a:latin typeface="Inter"/>
+                          <a:ea typeface="Inter"/>
+                          <a:cs typeface="Arial" panose="020B0604020202020204" pitchFamily="34" charset="0"/>
+                          <a:sym typeface="Inter"/>
+                        </a:rPr>
+                        <a:t>menjadi</a:t>
+                      </a:r>
+                      <a:r>
+                        <a:rPr lang="en-US" sz="1012" b="0" i="0" u="none" dirty="0">
+                          <a:solidFill>
+                            <a:srgbClr val="334155"/>
+                          </a:solidFill>
+                          <a:latin typeface="Inter"/>
+                          <a:ea typeface="Inter"/>
+                          <a:cs typeface="Arial" panose="020B0604020202020204" pitchFamily="34" charset="0"/>
+                          <a:sym typeface="Inter"/>
+                        </a:rPr>
+                        <a:t> CONFIRMED.</a:t>
+                      </a:r>
+                      <a:endParaRPr dirty="0"/>
+                    </a:p>
+                  </a:txBody>
+                  <a:tcPr marL="63500" marR="63500" marT="25400" marB="25400" anchor="ctr">
+                    <a:lnL w="9525" cap="flat" cmpd="sng">
+                      <a:solidFill>
+                        <a:srgbClr val="000000">
+                          <a:alpha val="0"/>
+                        </a:srgbClr>
+                      </a:solidFill>
+                      <a:prstDash val="solid"/>
+                      <a:round/>
+                      <a:headEnd type="none" w="sm" len="sm"/>
+                      <a:tailEnd type="none" w="sm" len="sm"/>
+                    </a:lnL>
+                    <a:lnR w="9525" cap="flat" cmpd="sng">
+                      <a:solidFill>
+                        <a:srgbClr val="000000">
+                          <a:alpha val="0"/>
+                        </a:srgbClr>
+                      </a:solidFill>
+                      <a:prstDash val="solid"/>
+                      <a:round/>
+                      <a:headEnd type="none" w="sm" len="sm"/>
+                      <a:tailEnd type="none" w="sm" len="sm"/>
+                    </a:lnR>
+                    <a:lnT w="9525" cap="flat" cmpd="sng">
+                      <a:solidFill>
+                        <a:srgbClr val="000000">
+                          <a:alpha val="0"/>
+                        </a:srgbClr>
+                      </a:solidFill>
+                      <a:prstDash val="solid"/>
+                      <a:round/>
+                      <a:headEnd type="none" w="sm" len="sm"/>
+                      <a:tailEnd type="none" w="sm" len="sm"/>
+                    </a:lnT>
+                    <a:lnB w="9525" cap="flat" cmpd="sng">
+                      <a:solidFill>
+                        <a:srgbClr val="000000">
+                          <a:alpha val="0"/>
+                        </a:srgbClr>
+                      </a:solidFill>
+                      <a:prstDash val="solid"/>
+                      <a:round/>
+                      <a:headEnd type="none" w="sm" len="sm"/>
+                      <a:tailEnd type="none" w="sm" len="sm"/>
+                    </a:lnB>
+                  </a:tcPr>
+                </a:tc>
+                <a:extLst>
+                  <a:ext uri="{0D108BD9-81ED-4DB2-BD59-A6C34878D82A}">
+                    <a16:rowId xmlns:a16="http://schemas.microsoft.com/office/drawing/2014/main" val="10006"/>
+                  </a:ext>
+                </a:extLst>
+              </a:tr>
+            </a:tbl>
+          </a:graphicData>
+        </a:graphic>
+      </p:graphicFrame>
       <p:sp>
         <p:nvSpPr>
           <p:cNvPr id="337" name="Google Shape;337;p21"/>
@@ -17882,8 +15575,8 @@
         </p:nvSpPr>
         <p:spPr>
           <a:xfrm>
-            <a:off x="723900" y="447011"/>
-            <a:ext cx="11431428" cy="443198"/>
+            <a:off x="723900" y="485775"/>
+            <a:ext cx="11431428" cy="365670"/>
           </a:xfrm>
           <a:prstGeom prst="rect">
             <a:avLst/>
@@ -17921,7 +15614,7 @@
                 <a:cs typeface="Plus Jakarta Sans"/>
                 <a:sym typeface="Plus Jakarta Sans"/>
               </a:rPr>
-              <a:t>API ENDPOINTS </a:t>
+              <a:t>SPESIFIKASI API ENDPOINTS (CP1)</a:t>
             </a:r>
             <a:endParaRPr dirty="0"/>
           </a:p>
@@ -21428,7 +19121,7 @@
               <a:buNone/>
             </a:pPr>
             <a:r>
-              <a:rPr lang="en-US" sz="1125" b="1" i="0" u="none" strike="noStrike" cap="none" dirty="0">
+              <a:rPr lang="en-US" sz="1125" b="1" i="0" u="none" strike="noStrike" cap="none">
                 <a:solidFill>
                   <a:srgbClr val="0D9488"/>
                 </a:solidFill>
@@ -21437,21 +19130,9 @@
                 <a:cs typeface="Plus Jakarta Sans"/>
                 <a:sym typeface="Plus Jakarta Sans"/>
               </a:rPr>
-              <a:t>Target </a:t>
-            </a:r>
-            <a:r>
-              <a:rPr lang="en-US" sz="1125" b="1" i="0" u="none" strike="noStrike" cap="none" dirty="0" err="1">
-                <a:solidFill>
-                  <a:srgbClr val="0D9488"/>
-                </a:solidFill>
-                <a:latin typeface="Plus Jakarta Sans"/>
-                <a:ea typeface="Plus Jakarta Sans"/>
-                <a:cs typeface="Plus Jakarta Sans"/>
-                <a:sym typeface="Plus Jakarta Sans"/>
-              </a:rPr>
-              <a:t>Pengguna</a:t>
-            </a:r>
-            <a:endParaRPr dirty="0"/>
+              <a:t>Target Pengguna</a:t>
+            </a:r>
+            <a:endParaRPr/>
           </a:p>
         </p:txBody>
       </p:sp>
@@ -21493,7 +19174,7 @@
               <a:buNone/>
             </a:pPr>
             <a:r>
-              <a:rPr lang="en-US" sz="1125" b="1" i="0" u="none" strike="noStrike" cap="none" dirty="0" err="1">
+              <a:rPr lang="en-US" sz="1125" b="1" i="0" u="none" strike="noStrike" cap="none">
                 <a:solidFill>
                   <a:srgbClr val="E11D48"/>
                 </a:solidFill>
@@ -21502,33 +19183,9 @@
                 <a:cs typeface="Plus Jakarta Sans"/>
                 <a:sym typeface="Plus Jakarta Sans"/>
               </a:rPr>
-              <a:t>Masalah</a:t>
-            </a:r>
-            <a:r>
-              <a:rPr lang="en-US" sz="1125" b="1" i="0" u="none" strike="noStrike" cap="none" dirty="0">
-                <a:solidFill>
-                  <a:srgbClr val="E11D48"/>
-                </a:solidFill>
-                <a:latin typeface="Plus Jakarta Sans"/>
-                <a:ea typeface="Plus Jakarta Sans"/>
-                <a:cs typeface="Plus Jakarta Sans"/>
-                <a:sym typeface="Plus Jakarta Sans"/>
-              </a:rPr>
-              <a:t> Utama Yang </a:t>
-            </a:r>
-            <a:r>
-              <a:rPr lang="en-US" sz="1125" b="1" i="0" u="none" strike="noStrike" cap="none" dirty="0" err="1">
-                <a:solidFill>
-                  <a:srgbClr val="E11D48"/>
-                </a:solidFill>
-                <a:latin typeface="Plus Jakarta Sans"/>
-                <a:ea typeface="Plus Jakarta Sans"/>
-                <a:cs typeface="Plus Jakarta Sans"/>
-                <a:sym typeface="Plus Jakarta Sans"/>
-              </a:rPr>
-              <a:t>Diselesaikan</a:t>
-            </a:r>
-            <a:endParaRPr dirty="0"/>
+              <a:t>Masalah Utama Yang Diselesaikan</a:t>
+            </a:r>
+            <a:endParaRPr/>
           </a:p>
         </p:txBody>
       </p:sp>
@@ -21570,7 +19227,7 @@
               <a:buNone/>
             </a:pPr>
             <a:r>
-              <a:rPr lang="en-US" sz="975" b="0" i="0" u="none" strike="noStrike" cap="none" dirty="0" err="1">
+              <a:rPr lang="en-US" sz="975" b="0" i="0" u="none" strike="noStrike" cap="none">
                 <a:solidFill>
                   <a:srgbClr val="475569"/>
                 </a:solidFill>
@@ -21579,381 +19236,9 @@
                 <a:cs typeface="Inter"/>
                 <a:sym typeface="Inter"/>
               </a:rPr>
-              <a:t>Mengurangi</a:t>
-            </a:r>
-            <a:r>
-              <a:rPr lang="en-US" sz="975" b="0" i="0" u="none" strike="noStrike" cap="none" dirty="0">
-                <a:solidFill>
-                  <a:srgbClr val="475569"/>
-                </a:solidFill>
-                <a:latin typeface="Inter"/>
-                <a:ea typeface="Inter"/>
-                <a:cs typeface="Inter"/>
-                <a:sym typeface="Inter"/>
-              </a:rPr>
-              <a:t> </a:t>
-            </a:r>
-            <a:r>
-              <a:rPr lang="en-US" sz="975" b="0" i="0" u="none" strike="noStrike" cap="none" dirty="0" err="1">
-                <a:solidFill>
-                  <a:srgbClr val="475569"/>
-                </a:solidFill>
-                <a:latin typeface="Inter"/>
-                <a:ea typeface="Inter"/>
-                <a:cs typeface="Inter"/>
-                <a:sym typeface="Inter"/>
-              </a:rPr>
-              <a:t>antrean</a:t>
-            </a:r>
-            <a:r>
-              <a:rPr lang="en-US" sz="975" b="0" i="0" u="none" strike="noStrike" cap="none" dirty="0">
-                <a:solidFill>
-                  <a:srgbClr val="475569"/>
-                </a:solidFill>
-                <a:latin typeface="Inter"/>
-                <a:ea typeface="Inter"/>
-                <a:cs typeface="Inter"/>
-                <a:sym typeface="Inter"/>
-              </a:rPr>
-              <a:t> </a:t>
-            </a:r>
-            <a:r>
-              <a:rPr lang="en-US" sz="975" b="0" i="0" u="none" strike="noStrike" cap="none" dirty="0" err="1">
-                <a:solidFill>
-                  <a:srgbClr val="475569"/>
-                </a:solidFill>
-                <a:latin typeface="Inter"/>
-                <a:ea typeface="Inter"/>
-                <a:cs typeface="Inter"/>
-                <a:sym typeface="Inter"/>
-              </a:rPr>
-              <a:t>fisik</a:t>
-            </a:r>
-            <a:r>
-              <a:rPr lang="en-US" sz="975" b="0" i="0" u="none" strike="noStrike" cap="none" dirty="0">
-                <a:solidFill>
-                  <a:srgbClr val="475569"/>
-                </a:solidFill>
-                <a:latin typeface="Inter"/>
-                <a:ea typeface="Inter"/>
-                <a:cs typeface="Inter"/>
-                <a:sym typeface="Inter"/>
-              </a:rPr>
-              <a:t> </a:t>
-            </a:r>
-            <a:r>
-              <a:rPr lang="en-US" sz="975" b="0" i="0" u="none" strike="noStrike" cap="none" dirty="0" err="1">
-                <a:solidFill>
-                  <a:srgbClr val="475569"/>
-                </a:solidFill>
-                <a:latin typeface="Inter"/>
-                <a:ea typeface="Inter"/>
-                <a:cs typeface="Inter"/>
-                <a:sym typeface="Inter"/>
-              </a:rPr>
-              <a:t>pendaftaran</a:t>
-            </a:r>
-            <a:r>
-              <a:rPr lang="en-US" sz="975" b="0" i="0" u="none" strike="noStrike" cap="none" dirty="0">
-                <a:solidFill>
-                  <a:srgbClr val="475569"/>
-                </a:solidFill>
-                <a:latin typeface="Inter"/>
-                <a:ea typeface="Inter"/>
-                <a:cs typeface="Inter"/>
-                <a:sym typeface="Inter"/>
-              </a:rPr>
-              <a:t> </a:t>
-            </a:r>
-            <a:r>
-              <a:rPr lang="en-US" sz="975" b="0" i="0" u="none" strike="noStrike" cap="none" dirty="0" err="1">
-                <a:solidFill>
-                  <a:srgbClr val="475569"/>
-                </a:solidFill>
-                <a:latin typeface="Inter"/>
-                <a:ea typeface="Inter"/>
-                <a:cs typeface="Inter"/>
-                <a:sym typeface="Inter"/>
-              </a:rPr>
-              <a:t>rumah</a:t>
-            </a:r>
-            <a:r>
-              <a:rPr lang="en-US" sz="975" b="0" i="0" u="none" strike="noStrike" cap="none" dirty="0">
-                <a:solidFill>
-                  <a:srgbClr val="475569"/>
-                </a:solidFill>
-                <a:latin typeface="Inter"/>
-                <a:ea typeface="Inter"/>
-                <a:cs typeface="Inter"/>
-                <a:sym typeface="Inter"/>
-              </a:rPr>
-              <a:t> </a:t>
-            </a:r>
-            <a:r>
-              <a:rPr lang="en-US" sz="975" b="0" i="0" u="none" strike="noStrike" cap="none" dirty="0" err="1">
-                <a:solidFill>
-                  <a:srgbClr val="475569"/>
-                </a:solidFill>
-                <a:latin typeface="Inter"/>
-                <a:ea typeface="Inter"/>
-                <a:cs typeface="Inter"/>
-                <a:sym typeface="Inter"/>
-              </a:rPr>
-              <a:t>sakit</a:t>
-            </a:r>
-            <a:r>
-              <a:rPr lang="en-US" sz="975" b="0" i="0" u="none" strike="noStrike" cap="none" dirty="0">
-                <a:solidFill>
-                  <a:srgbClr val="475569"/>
-                </a:solidFill>
-                <a:latin typeface="Inter"/>
-                <a:ea typeface="Inter"/>
-                <a:cs typeface="Inter"/>
-                <a:sym typeface="Inter"/>
-              </a:rPr>
-              <a:t>, </a:t>
-            </a:r>
-            <a:r>
-              <a:rPr lang="en-US" sz="975" b="0" i="0" u="none" strike="noStrike" cap="none" dirty="0" err="1">
-                <a:solidFill>
-                  <a:srgbClr val="475569"/>
-                </a:solidFill>
-                <a:latin typeface="Inter"/>
-                <a:ea typeface="Inter"/>
-                <a:cs typeface="Inter"/>
-                <a:sym typeface="Inter"/>
-              </a:rPr>
-              <a:t>mencegah</a:t>
-            </a:r>
-            <a:r>
-              <a:rPr lang="en-US" sz="975" b="0" i="0" u="none" strike="noStrike" cap="none" dirty="0">
-                <a:solidFill>
-                  <a:srgbClr val="475569"/>
-                </a:solidFill>
-                <a:latin typeface="Inter"/>
-                <a:ea typeface="Inter"/>
-                <a:cs typeface="Inter"/>
-                <a:sym typeface="Inter"/>
-              </a:rPr>
-              <a:t> overbooking </a:t>
-            </a:r>
-            <a:r>
-              <a:rPr lang="en-US" sz="975" b="0" i="0" u="none" strike="noStrike" cap="none" dirty="0" err="1">
-                <a:solidFill>
-                  <a:srgbClr val="475569"/>
-                </a:solidFill>
-                <a:latin typeface="Inter"/>
-                <a:ea typeface="Inter"/>
-                <a:cs typeface="Inter"/>
-                <a:sym typeface="Inter"/>
-              </a:rPr>
-              <a:t>kuota</a:t>
-            </a:r>
-            <a:r>
-              <a:rPr lang="en-US" sz="975" b="0" i="0" u="none" strike="noStrike" cap="none" dirty="0">
-                <a:solidFill>
-                  <a:srgbClr val="475569"/>
-                </a:solidFill>
-                <a:latin typeface="Inter"/>
-                <a:ea typeface="Inter"/>
-                <a:cs typeface="Inter"/>
-                <a:sym typeface="Inter"/>
-              </a:rPr>
-              <a:t> </a:t>
-            </a:r>
-            <a:r>
-              <a:rPr lang="en-US" sz="975" b="0" i="0" u="none" strike="noStrike" cap="none" dirty="0" err="1">
-                <a:solidFill>
-                  <a:srgbClr val="475569"/>
-                </a:solidFill>
-                <a:latin typeface="Inter"/>
-                <a:ea typeface="Inter"/>
-                <a:cs typeface="Inter"/>
-                <a:sym typeface="Inter"/>
-              </a:rPr>
-              <a:t>dokter</a:t>
-            </a:r>
-            <a:r>
-              <a:rPr lang="en-US" sz="975" b="0" i="0" u="none" strike="noStrike" cap="none" dirty="0">
-                <a:solidFill>
-                  <a:srgbClr val="475569"/>
-                </a:solidFill>
-                <a:latin typeface="Inter"/>
-                <a:ea typeface="Inter"/>
-                <a:cs typeface="Inter"/>
-                <a:sym typeface="Inter"/>
-              </a:rPr>
-              <a:t>, dan </a:t>
-            </a:r>
-            <a:r>
-              <a:rPr lang="en-US" sz="975" b="0" i="0" u="none" strike="noStrike" cap="none" dirty="0" err="1">
-                <a:solidFill>
-                  <a:srgbClr val="475569"/>
-                </a:solidFill>
-                <a:latin typeface="Inter"/>
-                <a:ea typeface="Inter"/>
-                <a:cs typeface="Inter"/>
-                <a:sym typeface="Inter"/>
-              </a:rPr>
-              <a:t>memitigasi</a:t>
-            </a:r>
-            <a:r>
-              <a:rPr lang="en-US" sz="975" b="0" i="0" u="none" strike="noStrike" cap="none" dirty="0">
-                <a:solidFill>
-                  <a:srgbClr val="475569"/>
-                </a:solidFill>
-                <a:latin typeface="Inter"/>
-                <a:ea typeface="Inter"/>
-                <a:cs typeface="Inter"/>
-                <a:sym typeface="Inter"/>
-              </a:rPr>
-              <a:t> </a:t>
-            </a:r>
-            <a:r>
-              <a:rPr lang="en-US" sz="975" b="0" i="0" u="none" strike="noStrike" cap="none" dirty="0" err="1">
-                <a:solidFill>
-                  <a:srgbClr val="475569"/>
-                </a:solidFill>
-                <a:latin typeface="Inter"/>
-                <a:ea typeface="Inter"/>
-                <a:cs typeface="Inter"/>
-                <a:sym typeface="Inter"/>
-              </a:rPr>
-              <a:t>manipulasi</a:t>
-            </a:r>
-            <a:r>
-              <a:rPr lang="en-US" sz="975" b="0" i="0" u="none" strike="noStrike" cap="none" dirty="0">
-                <a:solidFill>
-                  <a:srgbClr val="475569"/>
-                </a:solidFill>
-                <a:latin typeface="Inter"/>
-                <a:ea typeface="Inter"/>
-                <a:cs typeface="Inter"/>
-                <a:sym typeface="Inter"/>
-              </a:rPr>
-              <a:t>/</a:t>
-            </a:r>
-            <a:r>
-              <a:rPr lang="en-US" sz="975" b="0" i="0" u="none" strike="noStrike" cap="none" dirty="0" err="1">
-                <a:solidFill>
-                  <a:srgbClr val="475569"/>
-                </a:solidFill>
-                <a:latin typeface="Inter"/>
-                <a:ea typeface="Inter"/>
-                <a:cs typeface="Inter"/>
-                <a:sym typeface="Inter"/>
-              </a:rPr>
-              <a:t>kebocoran</a:t>
-            </a:r>
-            <a:r>
-              <a:rPr lang="en-US" sz="975" b="0" i="0" u="none" strike="noStrike" cap="none" dirty="0">
-                <a:solidFill>
-                  <a:srgbClr val="475569"/>
-                </a:solidFill>
-                <a:latin typeface="Inter"/>
-                <a:ea typeface="Inter"/>
-                <a:cs typeface="Inter"/>
-                <a:sym typeface="Inter"/>
-              </a:rPr>
-              <a:t> </a:t>
-            </a:r>
-            <a:r>
-              <a:rPr lang="en-US" sz="975" b="0" i="0" u="none" strike="noStrike" cap="none" dirty="0" err="1">
-                <a:solidFill>
-                  <a:srgbClr val="475569"/>
-                </a:solidFill>
-                <a:latin typeface="Inter"/>
-                <a:ea typeface="Inter"/>
-                <a:cs typeface="Inter"/>
-                <a:sym typeface="Inter"/>
-              </a:rPr>
-              <a:t>berkas</a:t>
-            </a:r>
-            <a:r>
-              <a:rPr lang="en-US" sz="975" b="0" i="0" u="none" strike="noStrike" cap="none" dirty="0">
-                <a:solidFill>
-                  <a:srgbClr val="475569"/>
-                </a:solidFill>
-                <a:latin typeface="Inter"/>
-                <a:ea typeface="Inter"/>
-                <a:cs typeface="Inter"/>
-                <a:sym typeface="Inter"/>
-              </a:rPr>
-              <a:t> </a:t>
-            </a:r>
-            <a:r>
-              <a:rPr lang="en-US" sz="975" b="0" i="0" u="none" strike="noStrike" cap="none" dirty="0" err="1">
-                <a:solidFill>
-                  <a:srgbClr val="475569"/>
-                </a:solidFill>
-                <a:latin typeface="Inter"/>
-                <a:ea typeface="Inter"/>
-                <a:cs typeface="Inter"/>
-                <a:sym typeface="Inter"/>
-              </a:rPr>
-              <a:t>resep</a:t>
-            </a:r>
-            <a:r>
-              <a:rPr lang="en-US" sz="975" b="0" i="0" u="none" strike="noStrike" cap="none" dirty="0">
-                <a:solidFill>
-                  <a:srgbClr val="475569"/>
-                </a:solidFill>
-                <a:latin typeface="Inter"/>
-                <a:ea typeface="Inter"/>
-                <a:cs typeface="Inter"/>
-                <a:sym typeface="Inter"/>
-              </a:rPr>
-              <a:t> </a:t>
-            </a:r>
-            <a:r>
-              <a:rPr lang="en-US" sz="975" b="0" i="0" u="none" strike="noStrike" cap="none" dirty="0" err="1">
-                <a:solidFill>
-                  <a:srgbClr val="475569"/>
-                </a:solidFill>
-                <a:latin typeface="Inter"/>
-                <a:ea typeface="Inter"/>
-                <a:cs typeface="Inter"/>
-                <a:sym typeface="Inter"/>
-              </a:rPr>
-              <a:t>kertas</a:t>
-            </a:r>
-            <a:r>
-              <a:rPr lang="en-US" sz="975" b="0" i="0" u="none" strike="noStrike" cap="none" dirty="0">
-                <a:solidFill>
-                  <a:srgbClr val="475569"/>
-                </a:solidFill>
-                <a:latin typeface="Inter"/>
-                <a:ea typeface="Inter"/>
-                <a:cs typeface="Inter"/>
-                <a:sym typeface="Inter"/>
-              </a:rPr>
-              <a:t> </a:t>
-            </a:r>
-            <a:r>
-              <a:rPr lang="en-US" sz="975" b="0" i="0" u="none" strike="noStrike" cap="none" dirty="0" err="1">
-                <a:solidFill>
-                  <a:srgbClr val="475569"/>
-                </a:solidFill>
-                <a:latin typeface="Inter"/>
-                <a:ea typeface="Inter"/>
-                <a:cs typeface="Inter"/>
-                <a:sym typeface="Inter"/>
-              </a:rPr>
-              <a:t>fisik</a:t>
-            </a:r>
-            <a:r>
-              <a:rPr lang="en-US" sz="975" b="0" i="0" u="none" strike="noStrike" cap="none" dirty="0">
-                <a:solidFill>
-                  <a:srgbClr val="475569"/>
-                </a:solidFill>
-                <a:latin typeface="Inter"/>
-                <a:ea typeface="Inter"/>
-                <a:cs typeface="Inter"/>
-                <a:sym typeface="Inter"/>
-              </a:rPr>
-              <a:t>.</a:t>
-            </a:r>
-            <a:endParaRPr dirty="0"/>
+              <a:t>Mengurangi antrean fisik pendaftaran rumah sakit, mencegah overbooking kuota dokter, dan memitigasi manipulasi/kebocoran berkas resep kertas fisik.</a:t>
+            </a:r>
+            <a:endParaRPr/>
           </a:p>
         </p:txBody>
       </p:sp>
